--- a/docs/Учёба_и_работа_презентация.pptx
+++ b/docs/Учёба_и_работа_презентация.pptx
@@ -1,20 +1,18 @@
 
 <file path=ppt/presentation.xml><?xml version="1.0" encoding="utf-8"?>
-<p:presentation xmlns:a="http://schemas.openxmlformats.org/drawingml/2006/main" xmlns:r="http://schemas.openxmlformats.org/officeDocument/2006/relationships" xmlns:p="http://schemas.openxmlformats.org/presentationml/2006/main" autoCompressPictures="0">
+<p:presentation xmlns:a="http://schemas.openxmlformats.org/drawingml/2006/main" xmlns:r="http://schemas.openxmlformats.org/officeDocument/2006/relationships" xmlns:p="http://schemas.openxmlformats.org/presentationml/2006/main" saveSubsetFonts="1" autoCompressPictures="0">
   <p:sldMasterIdLst>
     <p:sldMasterId id="2147483648" r:id="rId1"/>
   </p:sldMasterIdLst>
-  <p:notesMasterIdLst>
-    <p:notesMasterId r:id="rId4"/>
-  </p:notesMasterIdLst>
   <p:sldIdLst>
-    <p:sldId id="256" r:id="rId3"/>
-    <p:sldId id="257" r:id="rId5"/>
-    <p:sldId id="258" r:id="rId6"/>
-    <p:sldId id="259" r:id="rId7"/>
-    <p:sldId id="260" r:id="rId8"/>
+    <p:sldId id="256" r:id="rId7"/>
+    <p:sldId id="257" r:id="rId9"/>
+    <p:sldId id="258" r:id="rId10"/>
+    <p:sldId id="259" r:id="rId11"/>
+    <p:sldId id="260" r:id="rId12"/>
+    <p:sldId id="261" r:id="rId13"/>
   </p:sldIdLst>
-  <p:sldSz cx="12191365" cy="6858000" type="screen4x3"/>
+  <p:sldSz cx="12191695" cy="6858000" type="screen4x3"/>
   <p:notesSz cx="6858000" cy="9144000"/>
   <p:defaultTextStyle>
     <a:defPPr>
@@ -111,46 +109,18 @@
       </a:defRPr>
     </a:lvl9pPr>
   </p:defaultTextStyle>
-  <p:extLst>
-    <p:ext uri="{EFAFB233-063F-42B5-8137-9DF3F51BA10A}">
-      <p15:sldGuideLst xmlns:p15="http://schemas.microsoft.com/office/powerpoint/2012/main">
-        <p15:guide id="1" orient="horz" pos="2160" userDrawn="1">
-          <p15:clr>
-            <a:srgbClr val="A4A3A4"/>
-          </p15:clr>
-        </p15:guide>
-        <p15:guide id="2" pos="2880" userDrawn="1">
-          <p15:clr>
-            <a:srgbClr val="A4A3A4"/>
-          </p15:clr>
-        </p15:guide>
-      </p15:sldGuideLst>
-    </p:ext>
-  </p:extLst>
 </p:presentation>
 </file>
 
 <file path=ppt/charts/chart1.xml><?xml version="1.0" encoding="utf-8"?>
 <c:chartSpace xmlns:c="http://schemas.openxmlformats.org/drawingml/2006/chart" xmlns:a="http://schemas.openxmlformats.org/drawingml/2006/main" xmlns:r="http://schemas.openxmlformats.org/officeDocument/2006/relationships">
   <c:date1904 val="0"/>
-  <c:lang val="zh-CN"/>
-  <c:roundedCorners val="0"/>
-  <mc:AlternateContent xmlns:mc="http://schemas.openxmlformats.org/markup-compatibility/2006">
-    <mc:Choice xmlns:c14="http://schemas.microsoft.com/office/drawing/2007/8/2/chart" Requires="c14">
-      <c14:style val="102"/>
-    </mc:Choice>
-    <mc:Fallback>
-      <c:style val="2"/>
-    </mc:Fallback>
-  </mc:AlternateContent>
   <c:chart>
-    <c:autoTitleDeleted val="1"/>
+    <c:autoTitleDeleted val="0"/>
     <c:plotArea>
-      <c:layout/>
       <c:barChart>
         <c:barDir val="col"/>
         <c:grouping val="clustered"/>
-        <c:varyColors val="0"/>
         <c:ser>
           <c:idx val="0"/>
           <c:order val="0"/>
@@ -160,7 +130,7 @@
               <c:strCache>
                 <c:ptCount val="1"/>
                 <c:pt idx="0">
-                  <c:v>Брошены до вопросов о работе (599)</c:v>
+                  <c:v>Брошены на середине</c:v>
                 </c:pt>
               </c:strCache>
             </c:strRef>
@@ -175,82 +145,33 @@
               </a:solidFill>
             </a:ln>
           </c:spPr>
-          <c:invertIfNegative val="0"/>
-          <c:dLbls>
-            <c:numFmt formatCode="0" sourceLinked="0"/>
-            <c:spPr>
-              <a:noFill/>
-              <a:ln>
-                <a:noFill/>
-              </a:ln>
-              <a:effectLst/>
-            </c:spPr>
-            <c:txPr>
-              <a:bodyPr rot="0" spcFirstLastPara="0" vertOverflow="ellipsis" vert="horz" wrap="square" lIns="38100" tIns="19050" rIns="38100" bIns="19050" anchor="ctr" anchorCtr="1"/>
-              <a:lstStyle/>
-              <a:p>
-                <a:pPr>
-                  <a:defRPr lang="ru-RU" sz="1100" b="0" i="0" u="none" strike="noStrike" kern="1200" baseline="0">
-                    <a:solidFill>
-                      <a:schemeClr val="tx1"/>
-                    </a:solidFill>
-                    <a:latin typeface="Tahoma" panose="020B0604030504040204"/>
-                    <a:ea typeface="+mn-ea"/>
-                    <a:cs typeface="+mn-cs"/>
-                  </a:defRPr>
-                </a:pPr>
-              </a:p>
-            </c:txPr>
-            <c:dLblPos val="outEnd"/>
-            <c:showLegendKey val="0"/>
-            <c:showVal val="1"/>
-            <c:showCatName val="0"/>
-            <c:showSerName val="0"/>
-            <c:showPercent val="0"/>
-            <c:showBubbleSize val="0"/>
-            <c:showLeaderLines val="0"/>
-            <c:extLst>
-              <c:ext xmlns:c15="http://schemas.microsoft.com/office/drawing/2012/chart" uri="{CE6537A1-D6FC-4f65-9D91-7224C49458BB}">
-                <c15:layout/>
-                <c15:showLeaderLines val="1"/>
-                <c15:leaderLines/>
-              </c:ext>
-            </c:extLst>
-          </c:dLbls>
           <c:cat>
             <c:strRef>
-              <c:f>Sheet1!$A$2:$A$4</c:f>
+              <c:f>Sheet1!$A$2:$A$3</c:f>
               <c:strCache>
-                <c:ptCount val="3"/>
-                <c:pt idx="0" c:formatCode="&quot;О&quot;&quot;с&quot;&quot;н&quot;&quot;о&quot;&quot;в&quot;&quot;н&quot;&quot;о&quot;&quot;й&quot;">
-                  <c:v>Поступил бы в другой
-вуз на другую спец.</c:v>
+                <c:ptCount val="2"/>
+                <c:pt idx="0">
+                  <c:v>Другой вуз
+и специальность</c:v>
                 </c:pt>
-                <c:pt idx="1" c:formatCode="&quot;О&quot;&quot;с&quot;&quot;н&quot;&quot;о&quot;&quot;в&quot;&quot;н&quot;&quot;о&quot;&quot;й&quot;">
-                  <c:v>Только отличные
-оценки</c:v>
-                </c:pt>
-                <c:pt idx="2" c:formatCode="&quot;О&quot;&quot;с&quot;&quot;н&quot;&quot;о&quot;&quot;в&quot;&quot;н&quot;&quot;о&quot;&quot;й&quot;">
-                  <c:v>Затрудняюсь оценить
-удовлетворённость</c:v>
+                <c:pt idx="1">
+                  <c:v>Только
+пятёрки</c:v>
                 </c:pt>
               </c:strCache>
             </c:strRef>
           </c:cat>
           <c:val>
             <c:numRef>
-              <c:f>Sheet1!$B$2:$B$4</c:f>
+              <c:f>Sheet1!$B$2:$B$3</c:f>
               <c:numCache>
-                <c:formatCode>"О""с""н""о""в""н""о""й"</c:formatCode>
-                <c:ptCount val="3"/>
+                <c:formatCode>General</c:formatCode>
+                <c:ptCount val="2"/>
                 <c:pt idx="0">
                   <c:v>96.8</c:v>
                 </c:pt>
                 <c:pt idx="1">
-                  <c:v>93</c:v>
-                </c:pt>
-                <c:pt idx="2">
-                  <c:v>55.5</c:v>
+                  <c:v>93.0</c:v>
                 </c:pt>
               </c:numCache>
             </c:numRef>
@@ -265,7 +186,7 @@
               <c:strCache>
                 <c:ptCount val="1"/>
                 <c:pt idx="0">
-                  <c:v>Завершённые анкеты (914)</c:v>
+                  <c:v>Завершённые</c:v>
                 </c:pt>
               </c:strCache>
             </c:strRef>
@@ -280,94 +201,56 @@
               </a:solidFill>
             </a:ln>
           </c:spPr>
-          <c:invertIfNegative val="0"/>
-          <c:dLbls>
-            <c:numFmt formatCode="0" sourceLinked="0"/>
-            <c:spPr>
-              <a:noFill/>
-              <a:ln>
-                <a:noFill/>
-              </a:ln>
-              <a:effectLst/>
-            </c:spPr>
-            <c:txPr>
-              <a:bodyPr rot="0" spcFirstLastPara="0" vertOverflow="ellipsis" vert="horz" wrap="square" lIns="38100" tIns="19050" rIns="38100" bIns="19050" anchor="ctr" anchorCtr="1"/>
-              <a:lstStyle/>
-              <a:p>
-                <a:pPr>
-                  <a:defRPr lang="ru-RU" sz="1100" b="0" i="0" u="none" strike="noStrike" kern="1200" baseline="0">
-                    <a:solidFill>
-                      <a:schemeClr val="tx1"/>
-                    </a:solidFill>
-                    <a:latin typeface="Tahoma" panose="020B0604030504040204"/>
-                    <a:ea typeface="+mn-ea"/>
-                    <a:cs typeface="+mn-cs"/>
-                  </a:defRPr>
-                </a:pPr>
-              </a:p>
-            </c:txPr>
-            <c:dLblPos val="outEnd"/>
-            <c:showLegendKey val="0"/>
-            <c:showVal val="1"/>
-            <c:showCatName val="0"/>
-            <c:showSerName val="0"/>
-            <c:showPercent val="0"/>
-            <c:showBubbleSize val="0"/>
-            <c:showLeaderLines val="0"/>
-            <c:extLst>
-              <c:ext xmlns:c15="http://schemas.microsoft.com/office/drawing/2012/chart" uri="{CE6537A1-D6FC-4f65-9D91-7224C49458BB}">
-                <c15:layout/>
-                <c15:showLeaderLines val="1"/>
-                <c15:leaderLines/>
-              </c:ext>
-            </c:extLst>
-          </c:dLbls>
           <c:cat>
             <c:strRef>
-              <c:f>Sheet1!$A$2:$A$4</c:f>
+              <c:f>Sheet1!$A$2:$A$3</c:f>
               <c:strCache>
-                <c:ptCount val="3"/>
-                <c:pt idx="0" c:formatCode="&quot;О&quot;&quot;с&quot;&quot;н&quot;&quot;о&quot;&quot;в&quot;&quot;н&quot;&quot;о&quot;&quot;й&quot;">
-                  <c:v>Поступил бы в другой
-вуз на другую спец.</c:v>
+                <c:ptCount val="2"/>
+                <c:pt idx="0">
+                  <c:v>Другой вуз
+и специальность</c:v>
                 </c:pt>
-                <c:pt idx="1" c:formatCode="&quot;О&quot;&quot;с&quot;&quot;н&quot;&quot;о&quot;&quot;в&quot;&quot;н&quot;&quot;о&quot;&quot;й&quot;">
-                  <c:v>Только отличные
-оценки</c:v>
-                </c:pt>
-                <c:pt idx="2" c:formatCode="&quot;О&quot;&quot;с&quot;&quot;н&quot;&quot;о&quot;&quot;в&quot;&quot;н&quot;&quot;о&quot;&quot;й&quot;">
-                  <c:v>Затрудняюсь оценить
-удовлетворённость</c:v>
+                <c:pt idx="1">
+                  <c:v>Только
+пятёрки</c:v>
                 </c:pt>
               </c:strCache>
             </c:strRef>
           </c:cat>
           <c:val>
             <c:numRef>
-              <c:f>Sheet1!$C$2:$C$4</c:f>
+              <c:f>Sheet1!$C$2:$C$3</c:f>
               <c:numCache>
-                <c:formatCode>"О""с""н""о""в""н""о""й"</c:formatCode>
-                <c:ptCount val="3"/>
+                <c:formatCode>General</c:formatCode>
+                <c:ptCount val="2"/>
                 <c:pt idx="0">
                   <c:v>19.7</c:v>
                 </c:pt>
                 <c:pt idx="1">
-                  <c:v>22</c:v>
-                </c:pt>
-                <c:pt idx="2">
-                  <c:v>9.1</c:v>
+                  <c:v>22.0</c:v>
                 </c:pt>
               </c:numCache>
             </c:numRef>
           </c:val>
         </c:ser>
         <c:dLbls>
+          <c:numFmt formatCode="0&quot;%&quot;" sourceLinked="0"/>
+          <c:txPr>
+            <a:bodyPr/>
+            <a:lstStyle/>
+            <a:p>
+              <a:pPr>
+                <a:defRPr sz="1100"/>
+              </a:pPr>
+            </a:p>
+          </c:txPr>
           <c:showLegendKey val="0"/>
           <c:showVal val="1"/>
           <c:showCatName val="0"/>
           <c:showSerName val="0"/>
           <c:showPercent val="0"/>
           <c:showBubbleSize val="0"/>
+          <c:showLeaderLines val="1"/>
         </c:dLbls>
         <c:gapWidth val="60"/>
         <c:axId val="-2068027336"/>
@@ -384,27 +267,18 @@
         <c:minorTickMark val="none"/>
         <c:tickLblPos val="nextTo"/>
         <c:spPr>
-          <a:ln w="9525" cap="flat" cmpd="sng" algn="ctr">
+          <a:ln>
             <a:solidFill>
               <a:srgbClr val="D8D8D8"/>
             </a:solidFill>
-            <a:prstDash val="solid"/>
-            <a:round/>
           </a:ln>
         </c:spPr>
         <c:txPr>
-          <a:bodyPr rot="-60000000" spcFirstLastPara="0" vertOverflow="ellipsis" vert="horz" wrap="square" anchor="ctr" anchorCtr="1"/>
+          <a:bodyPr/>
           <a:lstStyle/>
           <a:p>
             <a:pPr>
-              <a:defRPr lang="ru-RU" sz="1100" b="0" i="0" u="none" strike="noStrike" kern="1200" baseline="0">
-                <a:solidFill>
-                  <a:schemeClr val="tx1"/>
-                </a:solidFill>
-                <a:latin typeface="Tahoma" panose="020B0604030504040204"/>
-                <a:ea typeface="+mn-ea"/>
-                <a:cs typeface="+mn-cs"/>
-              </a:defRPr>
+              <a:defRPr sz="1100"/>
             </a:pPr>
           </a:p>
         </c:txPr>
@@ -418,9 +292,8 @@
       <c:valAx>
         <c:axId val="-2113994440"/>
         <c:scaling>
-          <c:orientation val="minMax"/>
-          <c:max val="110"/>
-          <c:min val="0"/>
+          <c:max val="115.0"/>
+          <c:min val="0.0"/>
         </c:scaling>
         <c:delete val="0"/>
         <c:axPos val="l"/>
@@ -429,72 +302,717 @@
         <c:minorTickMark val="none"/>
         <c:tickLblPos val="none"/>
         <c:spPr>
-          <a:ln w="9525" cap="flat" cmpd="sng" algn="ctr">
+          <a:ln>
             <a:noFill/>
-            <a:prstDash val="solid"/>
-            <a:round/>
           </a:ln>
         </c:spPr>
-        <c:txPr>
-          <a:bodyPr rot="-60000000" spcFirstLastPara="0" vertOverflow="ellipsis" vert="horz" wrap="square" anchor="ctr" anchorCtr="1"/>
-          <a:lstStyle/>
-          <a:p>
-            <a:pPr>
-              <a:defRPr lang="ru-RU" sz="1100" b="0" i="0" u="none" strike="noStrike" kern="1200" baseline="0">
-                <a:solidFill>
-                  <a:schemeClr val="tx1"/>
-                </a:solidFill>
-                <a:latin typeface="Tahoma" panose="020B0604030504040204"/>
-                <a:ea typeface="+mn-ea"/>
-                <a:cs typeface="+mn-cs"/>
-              </a:defRPr>
-            </a:pPr>
-          </a:p>
-        </c:txPr>
         <c:crossAx val="-2068027336"/>
         <c:crosses val="autoZero"/>
-        <c:crossBetween val="between"/>
       </c:valAx>
     </c:plotArea>
     <c:legend>
       <c:legendPos val="t"/>
-      <c:layout/>
       <c:overlay val="0"/>
       <c:txPr>
-        <a:bodyPr rot="0" spcFirstLastPara="0" vertOverflow="ellipsis" vert="horz" wrap="square" anchor="ctr" anchorCtr="1"/>
+        <a:bodyPr/>
         <a:lstStyle/>
         <a:p>
           <a:pPr>
-            <a:defRPr lang="ru-RU" sz="1100" b="0" i="0" u="none" strike="noStrike" kern="1200" baseline="0">
-              <a:solidFill>
-                <a:schemeClr val="tx1"/>
-              </a:solidFill>
-              <a:latin typeface="Tahoma" panose="020B0604030504040204"/>
-              <a:ea typeface="+mn-ea"/>
-              <a:cs typeface="+mn-cs"/>
-            </a:defRPr>
+            <a:defRPr sz="1100"/>
           </a:pPr>
         </a:p>
       </c:txPr>
     </c:legend>
-    <c:plotVisOnly val="1"/>
     <c:dispBlanksAs val="gap"/>
-    <c:showDLblsOverMax val="0"/>
-    <c:extLst>
-      <c:ext uri="{0b15fc19-7d7d-44ad-8c2d-2c3a37ce22c3}">
-        <chartProps xmlns="https://web.wps.cn/et/2018/main" chartId="{13e5dfce-82e9-4ccf-8409-79652b702116}"/>
-      </c:ext>
-    </c:extLst>
   </c:chart>
   <c:txPr>
     <a:bodyPr/>
     <a:lstStyle/>
     <a:p>
       <a:pPr>
-        <a:defRPr lang="ru-RU" sz="1100">
-          <a:latin typeface="Tahoma" panose="020B0604030504040204"/>
+        <a:defRPr sz="1100">
+          <a:latin typeface="Tahoma"/>
         </a:defRPr>
       </a:pPr>
+      <a:endParaRPr lang="en-US"/>
+    </a:p>
+  </c:txPr>
+  <c:externalData r:id="rId1">
+    <c:autoUpdate val="0"/>
+  </c:externalData>
+</c:chartSpace>
+</file>
+
+<file path=ppt/charts/chart2.xml><?xml version="1.0" encoding="utf-8"?>
+<c:chartSpace xmlns:c="http://schemas.openxmlformats.org/drawingml/2006/chart" xmlns:a="http://schemas.openxmlformats.org/drawingml/2006/main" xmlns:r="http://schemas.openxmlformats.org/officeDocument/2006/relationships">
+  <c:date1904 val="0"/>
+  <c:chart>
+    <c:autoTitleDeleted val="0"/>
+    <c:plotArea>
+      <c:barChart>
+        <c:barDir val="col"/>
+        <c:grouping val="clustered"/>
+        <c:ser>
+          <c:idx val="0"/>
+          <c:order val="0"/>
+          <c:tx>
+            <c:strRef>
+              <c:f>Sheet1!$B$1</c:f>
+              <c:strCache>
+                <c:ptCount val="1"/>
+                <c:pt idx="0">
+                  <c:v>3 курс</c:v>
+                </c:pt>
+              </c:strCache>
+            </c:strRef>
+          </c:tx>
+          <c:spPr>
+            <a:solidFill>
+              <a:srgbClr val="FFD966"/>
+            </a:solidFill>
+            <a:ln>
+              <a:solidFill>
+                <a:srgbClr val="FFD966"/>
+              </a:solidFill>
+            </a:ln>
+          </c:spPr>
+          <c:cat>
+            <c:strRef>
+              <c:f>Sheet1!$A$2:$A$5</c:f>
+              <c:strCache>
+                <c:ptCount val="4"/>
+                <c:pt idx="0">
+                  <c:v>Полный день</c:v>
+                </c:pt>
+                <c:pt idx="1">
+                  <c:v>Неполный день</c:v>
+                </c:pt>
+                <c:pt idx="2">
+                  <c:v>Приработки</c:v>
+                </c:pt>
+                <c:pt idx="3">
+                  <c:v>Не работает</c:v>
+                </c:pt>
+              </c:strCache>
+            </c:strRef>
+          </c:cat>
+          <c:val>
+            <c:numRef>
+              <c:f>Sheet1!$B$2:$B$5</c:f>
+              <c:numCache>
+                <c:formatCode>General</c:formatCode>
+                <c:ptCount val="4"/>
+                <c:pt idx="0">
+                  <c:v>4.0</c:v>
+                </c:pt>
+                <c:pt idx="1">
+                  <c:v>21.0</c:v>
+                </c:pt>
+                <c:pt idx="2">
+                  <c:v>19.0</c:v>
+                </c:pt>
+                <c:pt idx="3">
+                  <c:v>56.0</c:v>
+                </c:pt>
+              </c:numCache>
+            </c:numRef>
+          </c:val>
+        </c:ser>
+        <c:ser>
+          <c:idx val="1"/>
+          <c:order val="1"/>
+          <c:tx>
+            <c:strRef>
+              <c:f>Sheet1!$C$1</c:f>
+              <c:strCache>
+                <c:ptCount val="1"/>
+                <c:pt idx="0">
+                  <c:v>4 курс</c:v>
+                </c:pt>
+              </c:strCache>
+            </c:strRef>
+          </c:tx>
+          <c:spPr>
+            <a:solidFill>
+              <a:srgbClr val="C55A11"/>
+            </a:solidFill>
+            <a:ln>
+              <a:solidFill>
+                <a:srgbClr val="C55A11"/>
+              </a:solidFill>
+            </a:ln>
+          </c:spPr>
+          <c:cat>
+            <c:strRef>
+              <c:f>Sheet1!$A$2:$A$5</c:f>
+              <c:strCache>
+                <c:ptCount val="4"/>
+                <c:pt idx="0">
+                  <c:v>Полный день</c:v>
+                </c:pt>
+                <c:pt idx="1">
+                  <c:v>Неполный день</c:v>
+                </c:pt>
+                <c:pt idx="2">
+                  <c:v>Приработки</c:v>
+                </c:pt>
+                <c:pt idx="3">
+                  <c:v>Не работает</c:v>
+                </c:pt>
+              </c:strCache>
+            </c:strRef>
+          </c:cat>
+          <c:val>
+            <c:numRef>
+              <c:f>Sheet1!$C$2:$C$5</c:f>
+              <c:numCache>
+                <c:formatCode>General</c:formatCode>
+                <c:ptCount val="4"/>
+                <c:pt idx="0">
+                  <c:v>9.2</c:v>
+                </c:pt>
+                <c:pt idx="1">
+                  <c:v>20.4</c:v>
+                </c:pt>
+                <c:pt idx="2">
+                  <c:v>18.7</c:v>
+                </c:pt>
+                <c:pt idx="3">
+                  <c:v>51.8</c:v>
+                </c:pt>
+              </c:numCache>
+            </c:numRef>
+          </c:val>
+        </c:ser>
+        <c:dLbls>
+          <c:numFmt formatCode="0&quot;%&quot;" sourceLinked="0"/>
+          <c:txPr>
+            <a:bodyPr/>
+            <a:lstStyle/>
+            <a:p>
+              <a:pPr>
+                <a:defRPr sz="1100"/>
+              </a:pPr>
+            </a:p>
+          </c:txPr>
+          <c:showLegendKey val="0"/>
+          <c:showVal val="1"/>
+          <c:showCatName val="0"/>
+          <c:showSerName val="0"/>
+          <c:showPercent val="0"/>
+          <c:showBubbleSize val="0"/>
+          <c:showLeaderLines val="1"/>
+        </c:dLbls>
+        <c:gapWidth val="60"/>
+        <c:axId val="-2068027336"/>
+        <c:axId val="-2113994440"/>
+      </c:barChart>
+      <c:catAx>
+        <c:axId val="-2068027336"/>
+        <c:scaling>
+          <c:orientation val="minMax"/>
+        </c:scaling>
+        <c:delete val="0"/>
+        <c:axPos val="b"/>
+        <c:majorTickMark val="out"/>
+        <c:minorTickMark val="none"/>
+        <c:tickLblPos val="nextTo"/>
+        <c:spPr>
+          <a:ln>
+            <a:solidFill>
+              <a:srgbClr val="D8D8D8"/>
+            </a:solidFill>
+          </a:ln>
+        </c:spPr>
+        <c:txPr>
+          <a:bodyPr/>
+          <a:lstStyle/>
+          <a:p>
+            <a:pPr>
+              <a:defRPr sz="1100"/>
+            </a:pPr>
+          </a:p>
+        </c:txPr>
+        <c:crossAx val="-2113994440"/>
+        <c:crosses val="autoZero"/>
+        <c:auto val="1"/>
+        <c:lblAlgn val="ctr"/>
+        <c:lblOffset val="100"/>
+        <c:noMultiLvlLbl val="0"/>
+      </c:catAx>
+      <c:valAx>
+        <c:axId val="-2113994440"/>
+        <c:scaling>
+          <c:max val="65.0"/>
+          <c:min val="0.0"/>
+        </c:scaling>
+        <c:delete val="0"/>
+        <c:axPos val="l"/>
+        <c:numFmt formatCode="0" sourceLinked="0"/>
+        <c:majorTickMark val="none"/>
+        <c:minorTickMark val="none"/>
+        <c:tickLblPos val="none"/>
+        <c:spPr>
+          <a:ln>
+            <a:noFill/>
+          </a:ln>
+        </c:spPr>
+        <c:crossAx val="-2068027336"/>
+        <c:crosses val="autoZero"/>
+      </c:valAx>
+    </c:plotArea>
+    <c:legend>
+      <c:legendPos val="t"/>
+      <c:overlay val="0"/>
+      <c:txPr>
+        <a:bodyPr/>
+        <a:lstStyle/>
+        <a:p>
+          <a:pPr>
+            <a:defRPr sz="1100"/>
+          </a:pPr>
+        </a:p>
+      </c:txPr>
+    </c:legend>
+    <c:dispBlanksAs val="gap"/>
+  </c:chart>
+  <c:txPr>
+    <a:bodyPr/>
+    <a:lstStyle/>
+    <a:p>
+      <a:pPr>
+        <a:defRPr sz="1100">
+          <a:latin typeface="Tahoma"/>
+        </a:defRPr>
+      </a:pPr>
+      <a:endParaRPr lang="en-US"/>
+    </a:p>
+  </c:txPr>
+  <c:externalData r:id="rId1">
+    <c:autoUpdate val="0"/>
+  </c:externalData>
+</c:chartSpace>
+</file>
+
+<file path=ppt/charts/chart3.xml><?xml version="1.0" encoding="utf-8"?>
+<c:chartSpace xmlns:c="http://schemas.openxmlformats.org/drawingml/2006/chart" xmlns:a="http://schemas.openxmlformats.org/drawingml/2006/main" xmlns:r="http://schemas.openxmlformats.org/officeDocument/2006/relationships">
+  <c:date1904 val="0"/>
+  <c:chart>
+    <c:autoTitleDeleted val="0"/>
+    <c:plotArea>
+      <c:barChart>
+        <c:barDir val="col"/>
+        <c:grouping val="clustered"/>
+        <c:ser>
+          <c:idx val="0"/>
+          <c:order val="0"/>
+          <c:tx>
+            <c:strRef>
+              <c:f>Sheet1!$B$1</c:f>
+              <c:strCache>
+                <c:ptCount val="1"/>
+                <c:pt idx="0">
+                  <c:v>3 курс</c:v>
+                </c:pt>
+              </c:strCache>
+            </c:strRef>
+          </c:tx>
+          <c:spPr>
+            <a:solidFill>
+              <a:srgbClr val="FFD966"/>
+            </a:solidFill>
+            <a:ln>
+              <a:solidFill>
+                <a:srgbClr val="FFD966"/>
+              </a:solidFill>
+            </a:ln>
+          </c:spPr>
+          <c:cat>
+            <c:strRef>
+              <c:f>Sheet1!$A$2:$A$5</c:f>
+              <c:strCache>
+                <c:ptCount val="4"/>
+                <c:pt idx="0">
+                  <c:v>Полный
+день</c:v>
+                </c:pt>
+                <c:pt idx="1">
+                  <c:v>Неполный
+день</c:v>
+                </c:pt>
+                <c:pt idx="2">
+                  <c:v>Приработки</c:v>
+                </c:pt>
+                <c:pt idx="3">
+                  <c:v>Не
+работает</c:v>
+                </c:pt>
+              </c:strCache>
+            </c:strRef>
+          </c:cat>
+          <c:val>
+            <c:numRef>
+              <c:f>Sheet1!$B$2:$B$5</c:f>
+              <c:numCache>
+                <c:formatCode>General</c:formatCode>
+                <c:ptCount val="4"/>
+                <c:pt idx="0">
+                  <c:v>45.8</c:v>
+                </c:pt>
+                <c:pt idx="1">
+                  <c:v>61.1</c:v>
+                </c:pt>
+                <c:pt idx="2">
+                  <c:v>53.8</c:v>
+                </c:pt>
+                <c:pt idx="3">
+                  <c:v>54.0</c:v>
+                </c:pt>
+              </c:numCache>
+            </c:numRef>
+          </c:val>
+        </c:ser>
+        <c:ser>
+          <c:idx val="1"/>
+          <c:order val="1"/>
+          <c:tx>
+            <c:strRef>
+              <c:f>Sheet1!$C$1</c:f>
+              <c:strCache>
+                <c:ptCount val="1"/>
+                <c:pt idx="0">
+                  <c:v>4 курс</c:v>
+                </c:pt>
+              </c:strCache>
+            </c:strRef>
+          </c:tx>
+          <c:spPr>
+            <a:solidFill>
+              <a:srgbClr val="C55A11"/>
+            </a:solidFill>
+            <a:ln>
+              <a:solidFill>
+                <a:srgbClr val="C55A11"/>
+              </a:solidFill>
+            </a:ln>
+          </c:spPr>
+          <c:cat>
+            <c:strRef>
+              <c:f>Sheet1!$A$2:$A$5</c:f>
+              <c:strCache>
+                <c:ptCount val="4"/>
+                <c:pt idx="0">
+                  <c:v>Полный
+день</c:v>
+                </c:pt>
+                <c:pt idx="1">
+                  <c:v>Неполный
+день</c:v>
+                </c:pt>
+                <c:pt idx="2">
+                  <c:v>Приработки</c:v>
+                </c:pt>
+                <c:pt idx="3">
+                  <c:v>Не
+работает</c:v>
+                </c:pt>
+              </c:strCache>
+            </c:strRef>
+          </c:cat>
+          <c:val>
+            <c:numRef>
+              <c:f>Sheet1!$C$2:$C$5</c:f>
+              <c:numCache>
+                <c:formatCode>General</c:formatCode>
+                <c:ptCount val="4"/>
+                <c:pt idx="0">
+                  <c:v>54.9</c:v>
+                </c:pt>
+                <c:pt idx="1">
+                  <c:v>61.5</c:v>
+                </c:pt>
+                <c:pt idx="2">
+                  <c:v>54.9</c:v>
+                </c:pt>
+                <c:pt idx="3">
+                  <c:v>63.3</c:v>
+                </c:pt>
+              </c:numCache>
+            </c:numRef>
+          </c:val>
+        </c:ser>
+        <c:dLbls>
+          <c:numFmt formatCode="0&quot;%&quot;" sourceLinked="0"/>
+          <c:txPr>
+            <a:bodyPr/>
+            <a:lstStyle/>
+            <a:p>
+              <a:pPr>
+                <a:defRPr sz="1100"/>
+              </a:pPr>
+            </a:p>
+          </c:txPr>
+          <c:showLegendKey val="0"/>
+          <c:showVal val="1"/>
+          <c:showCatName val="0"/>
+          <c:showSerName val="0"/>
+          <c:showPercent val="0"/>
+          <c:showBubbleSize val="0"/>
+          <c:showLeaderLines val="1"/>
+        </c:dLbls>
+        <c:gapWidth val="60"/>
+        <c:axId val="-2068027336"/>
+        <c:axId val="-2113994440"/>
+      </c:barChart>
+      <c:catAx>
+        <c:axId val="-2068027336"/>
+        <c:scaling>
+          <c:orientation val="minMax"/>
+        </c:scaling>
+        <c:delete val="0"/>
+        <c:axPos val="b"/>
+        <c:majorTickMark val="out"/>
+        <c:minorTickMark val="none"/>
+        <c:tickLblPos val="nextTo"/>
+        <c:spPr>
+          <a:ln>
+            <a:solidFill>
+              <a:srgbClr val="D8D8D8"/>
+            </a:solidFill>
+          </a:ln>
+        </c:spPr>
+        <c:txPr>
+          <a:bodyPr/>
+          <a:lstStyle/>
+          <a:p>
+            <a:pPr>
+              <a:defRPr sz="1100"/>
+            </a:pPr>
+          </a:p>
+        </c:txPr>
+        <c:crossAx val="-2113994440"/>
+        <c:crosses val="autoZero"/>
+        <c:auto val="1"/>
+        <c:lblAlgn val="ctr"/>
+        <c:lblOffset val="100"/>
+        <c:noMultiLvlLbl val="0"/>
+      </c:catAx>
+      <c:valAx>
+        <c:axId val="-2113994440"/>
+        <c:scaling>
+          <c:max val="80.0"/>
+          <c:min val="0.0"/>
+        </c:scaling>
+        <c:delete val="0"/>
+        <c:axPos val="l"/>
+        <c:numFmt formatCode="0" sourceLinked="0"/>
+        <c:majorTickMark val="none"/>
+        <c:minorTickMark val="none"/>
+        <c:tickLblPos val="none"/>
+        <c:spPr>
+          <a:ln>
+            <a:noFill/>
+          </a:ln>
+        </c:spPr>
+        <c:crossAx val="-2068027336"/>
+        <c:crosses val="autoZero"/>
+      </c:valAx>
+    </c:plotArea>
+    <c:legend>
+      <c:legendPos val="t"/>
+      <c:overlay val="0"/>
+      <c:txPr>
+        <a:bodyPr/>
+        <a:lstStyle/>
+        <a:p>
+          <a:pPr>
+            <a:defRPr sz="1100"/>
+          </a:pPr>
+        </a:p>
+      </c:txPr>
+    </c:legend>
+    <c:dispBlanksAs val="gap"/>
+  </c:chart>
+  <c:txPr>
+    <a:bodyPr/>
+    <a:lstStyle/>
+    <a:p>
+      <a:pPr>
+        <a:defRPr sz="1100">
+          <a:latin typeface="Tahoma"/>
+        </a:defRPr>
+      </a:pPr>
+      <a:endParaRPr lang="en-US"/>
+    </a:p>
+  </c:txPr>
+  <c:externalData r:id="rId1">
+    <c:autoUpdate val="0"/>
+  </c:externalData>
+</c:chartSpace>
+</file>
+
+<file path=ppt/charts/chart4.xml><?xml version="1.0" encoding="utf-8"?>
+<c:chartSpace xmlns:c="http://schemas.openxmlformats.org/drawingml/2006/chart" xmlns:a="http://schemas.openxmlformats.org/drawingml/2006/main" xmlns:r="http://schemas.openxmlformats.org/officeDocument/2006/relationships">
+  <c:date1904 val="0"/>
+  <c:chart>
+    <c:autoTitleDeleted val="0"/>
+    <c:plotArea>
+      <c:barChart>
+        <c:barDir val="bar"/>
+        <c:grouping val="clustered"/>
+        <c:ser>
+          <c:idx val="0"/>
+          <c:order val="0"/>
+          <c:tx>
+            <c:strRef>
+              <c:f>Sheet1!$B$1</c:f>
+              <c:strCache>
+                <c:ptCount val="1"/>
+                <c:pt idx="0">
+                  <c:v>Изменение, п.п.</c:v>
+                </c:pt>
+              </c:strCache>
+            </c:strRef>
+          </c:tx>
+          <c:spPr>
+            <a:solidFill>
+              <a:srgbClr val="FFD966"/>
+            </a:solidFill>
+            <a:ln>
+              <a:solidFill>
+                <a:srgbClr val="FFD966"/>
+              </a:solidFill>
+            </a:ln>
+          </c:spPr>
+          <c:invertIfNegative val="0"/>
+          <c:cat>
+            <c:strRef>
+              <c:f>Sheet1!$A$2:$A$5</c:f>
+              <c:strCache>
+                <c:ptCount val="4"/>
+                <c:pt idx="0">
+                  <c:v>Не работал → не работает</c:v>
+                </c:pt>
+                <c:pt idx="1">
+                  <c:v>Начал работать</c:v>
+                </c:pt>
+                <c:pt idx="2">
+                  <c:v>Перестал работать</c:v>
+                </c:pt>
+                <c:pt idx="3">
+                  <c:v>Работал → работает</c:v>
+                </c:pt>
+              </c:strCache>
+            </c:strRef>
+          </c:cat>
+          <c:val>
+            <c:numRef>
+              <c:f>Sheet1!$B$2:$B$5</c:f>
+              <c:numCache>
+                <c:formatCode>General</c:formatCode>
+                <c:ptCount val="4"/>
+                <c:pt idx="0">
+                  <c:v>7.9</c:v>
+                </c:pt>
+                <c:pt idx="1">
+                  <c:v>7.1</c:v>
+                </c:pt>
+                <c:pt idx="2">
+                  <c:v>3.1</c:v>
+                </c:pt>
+                <c:pt idx="3">
+                  <c:v>-1.7</c:v>
+                </c:pt>
+              </c:numCache>
+            </c:numRef>
+          </c:val>
+        </c:ser>
+        <c:dLbls>
+          <c:numFmt formatCode="+0.0;−0.0" sourceLinked="0"/>
+          <c:txPr>
+            <a:bodyPr/>
+            <a:lstStyle/>
+            <a:p>
+              <a:pPr>
+                <a:defRPr sz="1100"/>
+              </a:pPr>
+            </a:p>
+          </c:txPr>
+          <c:showLegendKey val="0"/>
+          <c:showVal val="1"/>
+          <c:showCatName val="0"/>
+          <c:showSerName val="0"/>
+          <c:showPercent val="0"/>
+          <c:showBubbleSize val="0"/>
+          <c:showLeaderLines val="1"/>
+        </c:dLbls>
+        <c:gapWidth val="60"/>
+        <c:axId val="-2068027336"/>
+        <c:axId val="-2113994440"/>
+      </c:barChart>
+      <c:catAx>
+        <c:axId val="-2068027336"/>
+        <c:scaling>
+          <c:orientation val="maxMin"/>
+        </c:scaling>
+        <c:delete val="0"/>
+        <c:axPos val="l"/>
+        <c:majorTickMark val="out"/>
+        <c:minorTickMark val="none"/>
+        <c:tickLblPos val="low"/>
+        <c:spPr>
+          <a:ln>
+            <a:solidFill>
+              <a:srgbClr val="D8D8D8"/>
+            </a:solidFill>
+          </a:ln>
+        </c:spPr>
+        <c:txPr>
+          <a:bodyPr/>
+          <a:lstStyle/>
+          <a:p>
+            <a:pPr>
+              <a:defRPr sz="1100"/>
+            </a:pPr>
+          </a:p>
+        </c:txPr>
+        <c:crossAx val="-2113994440"/>
+        <c:crosses val="autoZero"/>
+        <c:auto val="1"/>
+        <c:lblAlgn val="ctr"/>
+        <c:lblOffset val="100"/>
+        <c:noMultiLvlLbl val="0"/>
+      </c:catAx>
+      <c:valAx>
+        <c:axId val="-2113994440"/>
+        <c:scaling/>
+        <c:delete val="0"/>
+        <c:axPos val="b"/>
+        <c:numFmt formatCode="0" sourceLinked="0"/>
+        <c:majorTickMark val="none"/>
+        <c:minorTickMark val="none"/>
+        <c:tickLblPos val="none"/>
+        <c:spPr>
+          <a:ln>
+            <a:noFill/>
+          </a:ln>
+        </c:spPr>
+        <c:crossAx val="-2068027336"/>
+        <c:crosses val="autoZero"/>
+      </c:valAx>
+    </c:plotArea>
+    <c:dispBlanksAs val="gap"/>
+  </c:chart>
+  <c:txPr>
+    <a:bodyPr/>
+    <a:lstStyle/>
+    <a:p>
+      <a:pPr>
+        <a:defRPr sz="1100">
+          <a:latin typeface="Tahoma"/>
+        </a:defRPr>
+      </a:pPr>
+      <a:endParaRPr lang="en-US"/>
     </a:p>
   </c:txPr>
   <c:externalData r:id="rId1">
@@ -504,7 +1022,7 @@
 </file>
 
 <file path=ppt/notesMasters/notesMaster1.xml><?xml version="1.0" encoding="utf-8"?>
-<p:notesMaster xmlns:a="http://schemas.openxmlformats.org/drawingml/2006/main" xmlns:r="http://schemas.openxmlformats.org/officeDocument/2006/relationships" xmlns:p="http://schemas.openxmlformats.org/presentationml/2006/main">
+<p:notesMaster xmlns:a="http://schemas.openxmlformats.org/drawingml/2006/main" xmlns:p="http://schemas.openxmlformats.org/presentationml/2006/main" xmlns:r="http://schemas.openxmlformats.org/officeDocument/2006/relationships">
   <p:cSld>
     <p:bg>
       <p:bgRef idx="1001">
@@ -585,6 +1103,7 @@
           <a:p>
             <a:fld id="{0F89C1C7-3DCD-1040-A9CF-14679D8B5DDD}" type="datetimeFigureOut">
               <a:rPr lang="en-US" smtClean="0"/>
+              <a:t>10/17/16</a:t>
             </a:fld>
             <a:endParaRPr lang="en-US"/>
           </a:p>
@@ -651,7 +1170,6 @@
               <a:rPr lang="en-US" smtClean="0"/>
               <a:t>Click to edit Master text styles</a:t>
             </a:r>
-            <a:endParaRPr lang="en-US" smtClean="0"/>
           </a:p>
           <a:p>
             <a:pPr lvl="1"/>
@@ -659,7 +1177,6 @@
               <a:rPr lang="en-US" smtClean="0"/>
               <a:t>Second level</a:t>
             </a:r>
-            <a:endParaRPr lang="en-US" smtClean="0"/>
           </a:p>
           <a:p>
             <a:pPr lvl="2"/>
@@ -667,7 +1184,6 @@
               <a:rPr lang="en-US" smtClean="0"/>
               <a:t>Third level</a:t>
             </a:r>
-            <a:endParaRPr lang="en-US" smtClean="0"/>
           </a:p>
           <a:p>
             <a:pPr lvl="3"/>
@@ -675,7 +1191,6 @@
               <a:rPr lang="en-US" smtClean="0"/>
               <a:t>Fourth level</a:t>
             </a:r>
-            <a:endParaRPr lang="en-US" smtClean="0"/>
           </a:p>
           <a:p>
             <a:pPr lvl="4"/>
@@ -747,12 +1262,18 @@
           <a:p>
             <a:fld id="{BB5E49A5-4136-284D-997B-48E1D791AD67}" type="slidenum">
               <a:rPr lang="en-US" smtClean="0"/>
+              <a:t>‹#›</a:t>
             </a:fld>
             <a:endParaRPr lang="en-US"/>
           </a:p>
         </p:txBody>
       </p:sp>
     </p:spTree>
+    <p:extLst>
+      <p:ext uri="{BB962C8B-B14F-4D97-AF65-F5344CB8AC3E}">
+        <p14:creationId xmlns:p14="http://schemas.microsoft.com/office/powerpoint/2010/main" val="2623252185"/>
+      </p:ext>
+    </p:extLst>
   </p:cSld>
   <p:clrMap bg1="lt1" tx1="dk1" bg2="lt2" tx2="dk2" accent1="accent1" accent2="accent2" accent3="accent3" accent4="accent4" accent5="accent5" accent6="accent6" hlink="hlink" folHlink="folHlink"/>
   <p:notesStyle>
@@ -851,7 +1372,7 @@
 </file>
 
 <file path=ppt/notesSlides/notesSlide1.xml><?xml version="1.0" encoding="utf-8"?>
-<p:notes xmlns:a="http://schemas.openxmlformats.org/drawingml/2006/main" xmlns:r="http://schemas.openxmlformats.org/officeDocument/2006/relationships" xmlns:p="http://schemas.openxmlformats.org/presentationml/2006/main">
+<p:notes xmlns:a="http://schemas.openxmlformats.org/drawingml/2006/main" xmlns:p="http://schemas.openxmlformats.org/presentationml/2006/main" xmlns:r="http://schemas.openxmlformats.org/officeDocument/2006/relationships">
   <p:cSld>
     <p:spTree>
       <p:nvGrpSpPr>
@@ -886,7 +1407,7 @@
             <a:spLocks noGrp="1"/>
           </p:cNvSpPr>
           <p:nvPr>
-            <p:ph type="body" sz="quarter" idx="3"/>
+            <p:ph type="body" idx="3" sz="quarter"/>
           </p:nvPr>
         </p:nvSpPr>
         <p:spPr/>
@@ -895,7 +1416,7 @@
           <a:lstStyle/>
           <a:p>
             <a:r>
-              <a:t>Здравствуйте! Мой проект — про студентов, которые совмещают учёбу и работу. Я выяснял по данным лонгитюда ВШЭ, когда работа помогает, а когда мешает учёбе и здоровью.</a:t>
+              <a:t>Мой проект — про студентов, которые совмещают учёбу и работу. По данным лонгитюда ВШЭ я выяснял, когда работа помогает учиться, а когда мешает.</a:t>
             </a:r>
           </a:p>
         </p:txBody>
@@ -907,7 +1428,7 @@
             <a:spLocks noGrp="1"/>
           </p:cNvSpPr>
           <p:nvPr>
-            <p:ph type="sldNum" sz="quarter" idx="5"/>
+            <p:ph type="sldNum" idx="5" sz="quarter"/>
           </p:nvPr>
         </p:nvSpPr>
         <p:spPr/>
@@ -921,7 +1442,7 @@
 </file>
 
 <file path=ppt/notesSlides/notesSlide2.xml><?xml version="1.0" encoding="utf-8"?>
-<p:notes xmlns:a="http://schemas.openxmlformats.org/drawingml/2006/main" xmlns:r="http://schemas.openxmlformats.org/officeDocument/2006/relationships" xmlns:p="http://schemas.openxmlformats.org/presentationml/2006/main">
+<p:notes xmlns:a="http://schemas.openxmlformats.org/drawingml/2006/main" xmlns:p="http://schemas.openxmlformats.org/presentationml/2006/main" xmlns:r="http://schemas.openxmlformats.org/officeDocument/2006/relationships">
   <p:cSld>
     <p:spTree>
       <p:nvGrpSpPr>
@@ -956,7 +1477,7 @@
             <a:spLocks noGrp="1"/>
           </p:cNvSpPr>
           <p:nvPr>
-            <p:ph type="body" sz="quarter" idx="3"/>
+            <p:ph type="body" idx="3" sz="quarter"/>
           </p:nvPr>
         </p:nvSpPr>
         <p:spPr/>
@@ -965,7 +1486,7 @@
           <a:lstStyle/>
           <a:p>
             <a:r>
-              <a:t>Половина студентов работает. Вопрос не в том, хорошо это или плохо, а в том, при каких условиях работа помогает, а при каких мешает.</a:t>
+              <a:t>Почти половина студентов работает, и для четверти–трети задумывавшихся об отчислении это одна из причин. Поэтому важно понять не «хорошо или плохо работать», а при каких условиях работа помогает, а при каких мешает.</a:t>
             </a:r>
           </a:p>
         </p:txBody>
@@ -977,7 +1498,7 @@
             <a:spLocks noGrp="1"/>
           </p:cNvSpPr>
           <p:nvPr>
-            <p:ph type="sldNum" sz="quarter" idx="5"/>
+            <p:ph type="sldNum" idx="5" sz="quarter"/>
           </p:nvPr>
         </p:nvSpPr>
         <p:spPr/>
@@ -991,7 +1512,7 @@
 </file>
 
 <file path=ppt/notesSlides/notesSlide3.xml><?xml version="1.0" encoding="utf-8"?>
-<p:notes xmlns:a="http://schemas.openxmlformats.org/drawingml/2006/main" xmlns:r="http://schemas.openxmlformats.org/officeDocument/2006/relationships" xmlns:p="http://schemas.openxmlformats.org/presentationml/2006/main">
+<p:notes xmlns:a="http://schemas.openxmlformats.org/drawingml/2006/main" xmlns:p="http://schemas.openxmlformats.org/presentationml/2006/main" xmlns:r="http://schemas.openxmlformats.org/officeDocument/2006/relationships">
   <p:cSld>
     <p:spTree>
       <p:nvGrpSpPr>
@@ -1026,7 +1547,7 @@
             <a:spLocks noGrp="1"/>
           </p:cNvSpPr>
           <p:nvPr>
-            <p:ph type="body" sz="quarter" idx="3"/>
+            <p:ph type="body" idx="3" sz="quarter"/>
           </p:nvPr>
         </p:nvSpPr>
         <p:spPr/>
@@ -1035,7 +1556,7 @@
           <a:lstStyle/>
           <a:p>
             <a:r>
-              <a:t>Лонгитюд ВШЭ: одни и те же студенты опрошены на 3 и на 4 курсе. Это позволяет сравнить студента с самим собой.</a:t>
+              <a:t>Данные — лонгитюд ВШЭ: одни и те же студенты на 3 и 4 курсе. При проверке я нашёл 599 анкет 4-й волны, заполненных шаблонно и брошенных на середине, и очистил их — иначе выводы были бы ложными.</a:t>
             </a:r>
           </a:p>
         </p:txBody>
@@ -1047,7 +1568,7 @@
             <a:spLocks noGrp="1"/>
           </p:cNvSpPr>
           <p:nvPr>
-            <p:ph type="sldNum" sz="quarter" idx="5"/>
+            <p:ph type="sldNum" idx="5" sz="quarter"/>
           </p:nvPr>
         </p:nvSpPr>
         <p:spPr/>
@@ -1061,7 +1582,7 @@
 </file>
 
 <file path=ppt/notesSlides/notesSlide4.xml><?xml version="1.0" encoding="utf-8"?>
-<p:notes xmlns:a="http://schemas.openxmlformats.org/drawingml/2006/main" xmlns:r="http://schemas.openxmlformats.org/officeDocument/2006/relationships" xmlns:p="http://schemas.openxmlformats.org/presentationml/2006/main">
+<p:notes xmlns:a="http://schemas.openxmlformats.org/drawingml/2006/main" xmlns:p="http://schemas.openxmlformats.org/presentationml/2006/main" xmlns:r="http://schemas.openxmlformats.org/officeDocument/2006/relationships">
   <p:cSld>
     <p:spTree>
       <p:nvGrpSpPr>
@@ -1096,7 +1617,7 @@
             <a:spLocks noGrp="1"/>
           </p:cNvSpPr>
           <p:nvPr>
-            <p:ph type="body" sz="quarter" idx="3"/>
+            <p:ph type="body" idx="3" sz="quarter"/>
           </p:nvPr>
         </p:nvSpPr>
         <p:spPr/>
@@ -1105,7 +1626,7 @@
           <a:lstStyle/>
           <a:p>
             <a:r>
-              <a:t>Главное: я почти ничего не удалял. Удалены только пустые строки, а ошибочные значения заменены на пропуски — студенты остались в анализе.</a:t>
+              <a:t>Данные в основном порядковые и не нормальные, поэтому я использую непараметрические тесты. Результаты «да/нет» оцениваю логистической регрессией с контролем характеристик студента.</a:t>
             </a:r>
           </a:p>
         </p:txBody>
@@ -1117,7 +1638,7 @@
             <a:spLocks noGrp="1"/>
           </p:cNvSpPr>
           <p:nvPr>
-            <p:ph type="sldNum" sz="quarter" idx="5"/>
+            <p:ph type="sldNum" idx="5" sz="quarter"/>
           </p:nvPr>
         </p:nvSpPr>
         <p:spPr/>
@@ -1131,7 +1652,7 @@
 </file>
 
 <file path=ppt/notesSlides/notesSlide5.xml><?xml version="1.0" encoding="utf-8"?>
-<p:notes xmlns:a="http://schemas.openxmlformats.org/drawingml/2006/main" xmlns:r="http://schemas.openxmlformats.org/officeDocument/2006/relationships" xmlns:p="http://schemas.openxmlformats.org/presentationml/2006/main">
+<p:notes xmlns:a="http://schemas.openxmlformats.org/drawingml/2006/main" xmlns:p="http://schemas.openxmlformats.org/presentationml/2006/main" xmlns:r="http://schemas.openxmlformats.org/officeDocument/2006/relationships">
   <p:cSld>
     <p:spTree>
       <p:nvGrpSpPr>
@@ -1166,7 +1687,7 @@
             <a:spLocks noGrp="1"/>
           </p:cNvSpPr>
           <p:nvPr>
-            <p:ph type="body" sz="quarter" idx="3"/>
+            <p:ph type="body" idx="3" sz="quarter"/>
           </p:nvPr>
         </p:nvSpPr>
         <p:spPr/>
@@ -1175,7 +1696,7 @@
           <a:lstStyle/>
           <a:p>
             <a:r>
-              <a:t>Без этой проверки вывод был бы такой: к 4 курсу половина студентов разочаровалась в вузе, а отличников стало вдвое больше. Это артефакт данных, а не реальность.</a:t>
+              <a:t>Работают 44% на 3 курсе и 48% на 4-м. Чаще неполный день и приработки, полный день к 4 курсу встречается вдвое чаще. Около 70% работают ради денег, и только у половины работа связана со специальностью.</a:t>
             </a:r>
           </a:p>
         </p:txBody>
@@ -1187,7 +1708,77 @@
             <a:spLocks noGrp="1"/>
           </p:cNvSpPr>
           <p:nvPr>
-            <p:ph type="sldNum" sz="quarter" idx="5"/>
+            <p:ph type="sldNum" idx="5" sz="quarter"/>
+          </p:nvPr>
+        </p:nvSpPr>
+        <p:spPr/>
+      </p:sp>
+    </p:spTree>
+  </p:cSld>
+  <p:clrMapOvr>
+    <a:masterClrMapping/>
+  </p:clrMapOvr>
+</p:notes>
+</file>
+
+<file path=ppt/notesSlides/notesSlide6.xml><?xml version="1.0" encoding="utf-8"?>
+<p:notes xmlns:a="http://schemas.openxmlformats.org/drawingml/2006/main" xmlns:p="http://schemas.openxmlformats.org/presentationml/2006/main" xmlns:r="http://schemas.openxmlformats.org/officeDocument/2006/relationships">
+  <p:cSld>
+    <p:spTree>
+      <p:nvGrpSpPr>
+        <p:cNvPr id="1" name=""/>
+        <p:cNvGrpSpPr/>
+        <p:nvPr/>
+      </p:nvGrpSpPr>
+      <p:grpSpPr>
+        <a:xfrm>
+          <a:off x="0" y="0"/>
+          <a:ext cx="0" cy="0"/>
+          <a:chOff x="0" y="0"/>
+          <a:chExt cx="0" cy="0"/>
+        </a:xfrm>
+      </p:grpSpPr>
+      <p:sp>
+        <p:nvSpPr>
+          <p:cNvPr id="2" name="Slide Image Placeholder 1"/>
+          <p:cNvSpPr>
+            <a:spLocks noGrp="1"/>
+          </p:cNvSpPr>
+          <p:nvPr>
+            <p:ph type="sldImg" idx="2"/>
+          </p:nvPr>
+        </p:nvSpPr>
+        <p:spPr/>
+      </p:sp>
+      <p:sp>
+        <p:nvSpPr>
+          <p:cNvPr id="3" name="Notes Placeholder 2"/>
+          <p:cNvSpPr>
+            <a:spLocks noGrp="1"/>
+          </p:cNvSpPr>
+          <p:nvPr>
+            <p:ph type="body" idx="3" sz="quarter"/>
+          </p:nvPr>
+        </p:nvSpPr>
+        <p:spPr/>
+        <p:txBody>
+          <a:bodyPr/>
+          <a:lstStyle/>
+          <a:p>
+            <a:r>
+              <a:t>Оценки работающих и неработающих не различаются (Манн–Уитни: p = 0.57 и 0.15). В лонгитюде у тех, кто начал работать, оценки выросли так же, как у неработающих (p = 0.80).</a:t>
+            </a:r>
+          </a:p>
+        </p:txBody>
+      </p:sp>
+      <p:sp>
+        <p:nvSpPr>
+          <p:cNvPr id="4" name="Slide Number Placeholder 3"/>
+          <p:cNvSpPr>
+            <a:spLocks noGrp="1"/>
+          </p:cNvSpPr>
+          <p:nvPr>
+            <p:ph type="sldNum" idx="5" sz="quarter"/>
           </p:nvPr>
         </p:nvSpPr>
         <p:spPr/>
@@ -1381,6 +1972,7 @@
           <a:p>
             <a:fld id="{5BCAD085-E8A6-8845-BD4E-CB4CCA059FC4}" type="datetimeFigureOut">
               <a:rPr lang="en-US" smtClean="0"/>
+              <a:t>1/27/13</a:t>
             </a:fld>
             <a:endParaRPr lang="en-US"/>
           </a:p>
@@ -1422,12 +2014,18 @@
           <a:p>
             <a:fld id="{C1FF6DA9-008F-8B48-92A6-B652298478BF}" type="slidenum">
               <a:rPr lang="en-US" smtClean="0"/>
+              <a:t>‹#›</a:t>
             </a:fld>
             <a:endParaRPr lang="en-US"/>
           </a:p>
         </p:txBody>
       </p:sp>
     </p:spTree>
+    <p:extLst>
+      <p:ext uri="{BB962C8B-B14F-4D97-AF65-F5344CB8AC3E}">
+        <p14:creationId xmlns:p14="http://schemas.microsoft.com/office/powerpoint/2010/main" val="3168075583"/>
+      </p:ext>
+    </p:extLst>
   </p:cSld>
   <p:clrMapOvr>
     <a:masterClrMapping/>
@@ -1495,7 +2093,6 @@
               <a:rPr lang="en-US" smtClean="0"/>
               <a:t>Click to edit Master text styles</a:t>
             </a:r>
-            <a:endParaRPr lang="en-US" smtClean="0"/>
           </a:p>
           <a:p>
             <a:pPr lvl="1"/>
@@ -1503,7 +2100,6 @@
               <a:rPr lang="en-US" smtClean="0"/>
               <a:t>Second level</a:t>
             </a:r>
-            <a:endParaRPr lang="en-US" smtClean="0"/>
           </a:p>
           <a:p>
             <a:pPr lvl="2"/>
@@ -1511,7 +2107,6 @@
               <a:rPr lang="en-US" smtClean="0"/>
               <a:t>Third level</a:t>
             </a:r>
-            <a:endParaRPr lang="en-US" smtClean="0"/>
           </a:p>
           <a:p>
             <a:pPr lvl="3"/>
@@ -1519,7 +2114,6 @@
               <a:rPr lang="en-US" smtClean="0"/>
               <a:t>Fourth level</a:t>
             </a:r>
-            <a:endParaRPr lang="en-US" smtClean="0"/>
           </a:p>
           <a:p>
             <a:pPr lvl="4"/>
@@ -1548,6 +2142,7 @@
           <a:p>
             <a:fld id="{5BCAD085-E8A6-8845-BD4E-CB4CCA059FC4}" type="datetimeFigureOut">
               <a:rPr lang="en-US" smtClean="0"/>
+              <a:t>1/27/13</a:t>
             </a:fld>
             <a:endParaRPr lang="en-US"/>
           </a:p>
@@ -1589,12 +2184,18 @@
           <a:p>
             <a:fld id="{C1FF6DA9-008F-8B48-92A6-B652298478BF}" type="slidenum">
               <a:rPr lang="en-US" smtClean="0"/>
+              <a:t>‹#›</a:t>
             </a:fld>
             <a:endParaRPr lang="en-US"/>
           </a:p>
         </p:txBody>
       </p:sp>
     </p:spTree>
+    <p:extLst>
+      <p:ext uri="{BB962C8B-B14F-4D97-AF65-F5344CB8AC3E}">
+        <p14:creationId xmlns:p14="http://schemas.microsoft.com/office/powerpoint/2010/main" val="2910927964"/>
+      </p:ext>
+    </p:extLst>
   </p:cSld>
   <p:clrMapOvr>
     <a:masterClrMapping/>
@@ -1672,7 +2273,6 @@
               <a:rPr lang="en-US" smtClean="0"/>
               <a:t>Click to edit Master text styles</a:t>
             </a:r>
-            <a:endParaRPr lang="en-US" smtClean="0"/>
           </a:p>
           <a:p>
             <a:pPr lvl="1"/>
@@ -1680,7 +2280,6 @@
               <a:rPr lang="en-US" smtClean="0"/>
               <a:t>Second level</a:t>
             </a:r>
-            <a:endParaRPr lang="en-US" smtClean="0"/>
           </a:p>
           <a:p>
             <a:pPr lvl="2"/>
@@ -1688,7 +2287,6 @@
               <a:rPr lang="en-US" smtClean="0"/>
               <a:t>Third level</a:t>
             </a:r>
-            <a:endParaRPr lang="en-US" smtClean="0"/>
           </a:p>
           <a:p>
             <a:pPr lvl="3"/>
@@ -1696,7 +2294,6 @@
               <a:rPr lang="en-US" smtClean="0"/>
               <a:t>Fourth level</a:t>
             </a:r>
-            <a:endParaRPr lang="en-US" smtClean="0"/>
           </a:p>
           <a:p>
             <a:pPr lvl="4"/>
@@ -1725,6 +2322,7 @@
           <a:p>
             <a:fld id="{5BCAD085-E8A6-8845-BD4E-CB4CCA059FC4}" type="datetimeFigureOut">
               <a:rPr lang="en-US" smtClean="0"/>
+              <a:t>1/27/13</a:t>
             </a:fld>
             <a:endParaRPr lang="en-US"/>
           </a:p>
@@ -1766,12 +2364,18 @@
           <a:p>
             <a:fld id="{C1FF6DA9-008F-8B48-92A6-B652298478BF}" type="slidenum">
               <a:rPr lang="en-US" smtClean="0"/>
+              <a:t>‹#›</a:t>
             </a:fld>
             <a:endParaRPr lang="en-US"/>
           </a:p>
         </p:txBody>
       </p:sp>
     </p:spTree>
+    <p:extLst>
+      <p:ext uri="{BB962C8B-B14F-4D97-AF65-F5344CB8AC3E}">
+        <p14:creationId xmlns:p14="http://schemas.microsoft.com/office/powerpoint/2010/main" val="3612223792"/>
+      </p:ext>
+    </p:extLst>
   </p:cSld>
   <p:clrMapOvr>
     <a:masterClrMapping/>
@@ -1839,7 +2443,6 @@
               <a:rPr lang="en-US" smtClean="0"/>
               <a:t>Click to edit Master text styles</a:t>
             </a:r>
-            <a:endParaRPr lang="en-US" smtClean="0"/>
           </a:p>
           <a:p>
             <a:pPr lvl="1"/>
@@ -1847,7 +2450,6 @@
               <a:rPr lang="en-US" smtClean="0"/>
               <a:t>Second level</a:t>
             </a:r>
-            <a:endParaRPr lang="en-US" smtClean="0"/>
           </a:p>
           <a:p>
             <a:pPr lvl="2"/>
@@ -1855,7 +2457,6 @@
               <a:rPr lang="en-US" smtClean="0"/>
               <a:t>Third level</a:t>
             </a:r>
-            <a:endParaRPr lang="en-US" smtClean="0"/>
           </a:p>
           <a:p>
             <a:pPr lvl="3"/>
@@ -1863,7 +2464,6 @@
               <a:rPr lang="en-US" smtClean="0"/>
               <a:t>Fourth level</a:t>
             </a:r>
-            <a:endParaRPr lang="en-US" smtClean="0"/>
           </a:p>
           <a:p>
             <a:pPr lvl="4"/>
@@ -1892,6 +2492,7 @@
           <a:p>
             <a:fld id="{5BCAD085-E8A6-8845-BD4E-CB4CCA059FC4}" type="datetimeFigureOut">
               <a:rPr lang="en-US" smtClean="0"/>
+              <a:t>1/27/13</a:t>
             </a:fld>
             <a:endParaRPr lang="en-US"/>
           </a:p>
@@ -1933,12 +2534,18 @@
           <a:p>
             <a:fld id="{C1FF6DA9-008F-8B48-92A6-B652298478BF}" type="slidenum">
               <a:rPr lang="en-US" smtClean="0"/>
+              <a:t>‹#›</a:t>
             </a:fld>
             <a:endParaRPr lang="en-US"/>
           </a:p>
         </p:txBody>
       </p:sp>
     </p:spTree>
+    <p:extLst>
+      <p:ext uri="{BB962C8B-B14F-4D97-AF65-F5344CB8AC3E}">
+        <p14:creationId xmlns:p14="http://schemas.microsoft.com/office/powerpoint/2010/main" val="2614314258"/>
+      </p:ext>
+    </p:extLst>
   </p:cSld>
   <p:clrMapOvr>
     <a:masterClrMapping/>
@@ -2111,7 +2718,6 @@
               <a:rPr lang="en-US" smtClean="0"/>
               <a:t>Click to edit Master text styles</a:t>
             </a:r>
-            <a:endParaRPr lang="en-US" smtClean="0"/>
           </a:p>
         </p:txBody>
       </p:sp>
@@ -2132,6 +2738,7 @@
           <a:p>
             <a:fld id="{5BCAD085-E8A6-8845-BD4E-CB4CCA059FC4}" type="datetimeFigureOut">
               <a:rPr lang="en-US" smtClean="0"/>
+              <a:t>1/27/13</a:t>
             </a:fld>
             <a:endParaRPr lang="en-US"/>
           </a:p>
@@ -2173,12 +2780,18 @@
           <a:p>
             <a:fld id="{C1FF6DA9-008F-8B48-92A6-B652298478BF}" type="slidenum">
               <a:rPr lang="en-US" smtClean="0"/>
+              <a:t>‹#›</a:t>
             </a:fld>
             <a:endParaRPr lang="en-US"/>
           </a:p>
         </p:txBody>
       </p:sp>
     </p:spTree>
+    <p:extLst>
+      <p:ext uri="{BB962C8B-B14F-4D97-AF65-F5344CB8AC3E}">
+        <p14:creationId xmlns:p14="http://schemas.microsoft.com/office/powerpoint/2010/main" val="960648375"/>
+      </p:ext>
+    </p:extLst>
   </p:cSld>
   <p:clrMapOvr>
     <a:masterClrMapping/>
@@ -2279,7 +2892,6 @@
               <a:rPr lang="en-US" smtClean="0"/>
               <a:t>Click to edit Master text styles</a:t>
             </a:r>
-            <a:endParaRPr lang="en-US" smtClean="0"/>
           </a:p>
           <a:p>
             <a:pPr lvl="1"/>
@@ -2287,7 +2899,6 @@
               <a:rPr lang="en-US" smtClean="0"/>
               <a:t>Second level</a:t>
             </a:r>
-            <a:endParaRPr lang="en-US" smtClean="0"/>
           </a:p>
           <a:p>
             <a:pPr lvl="2"/>
@@ -2295,7 +2906,6 @@
               <a:rPr lang="en-US" smtClean="0"/>
               <a:t>Third level</a:t>
             </a:r>
-            <a:endParaRPr lang="en-US" smtClean="0"/>
           </a:p>
           <a:p>
             <a:pPr lvl="3"/>
@@ -2303,7 +2913,6 @@
               <a:rPr lang="en-US" smtClean="0"/>
               <a:t>Fourth level</a:t>
             </a:r>
-            <a:endParaRPr lang="en-US" smtClean="0"/>
           </a:p>
           <a:p>
             <a:pPr lvl="4"/>
@@ -2368,7 +2977,6 @@
               <a:rPr lang="en-US" smtClean="0"/>
               <a:t>Click to edit Master text styles</a:t>
             </a:r>
-            <a:endParaRPr lang="en-US" smtClean="0"/>
           </a:p>
           <a:p>
             <a:pPr lvl="1"/>
@@ -2376,7 +2984,6 @@
               <a:rPr lang="en-US" smtClean="0"/>
               <a:t>Second level</a:t>
             </a:r>
-            <a:endParaRPr lang="en-US" smtClean="0"/>
           </a:p>
           <a:p>
             <a:pPr lvl="2"/>
@@ -2384,7 +2991,6 @@
               <a:rPr lang="en-US" smtClean="0"/>
               <a:t>Third level</a:t>
             </a:r>
-            <a:endParaRPr lang="en-US" smtClean="0"/>
           </a:p>
           <a:p>
             <a:pPr lvl="3"/>
@@ -2392,7 +2998,6 @@
               <a:rPr lang="en-US" smtClean="0"/>
               <a:t>Fourth level</a:t>
             </a:r>
-            <a:endParaRPr lang="en-US" smtClean="0"/>
           </a:p>
           <a:p>
             <a:pPr lvl="4"/>
@@ -2421,6 +3026,7 @@
           <a:p>
             <a:fld id="{5BCAD085-E8A6-8845-BD4E-CB4CCA059FC4}" type="datetimeFigureOut">
               <a:rPr lang="en-US" smtClean="0"/>
+              <a:t>1/27/13</a:t>
             </a:fld>
             <a:endParaRPr lang="en-US"/>
           </a:p>
@@ -2462,12 +3068,18 @@
           <a:p>
             <a:fld id="{C1FF6DA9-008F-8B48-92A6-B652298478BF}" type="slidenum">
               <a:rPr lang="en-US" smtClean="0"/>
+              <a:t>‹#›</a:t>
             </a:fld>
             <a:endParaRPr lang="en-US"/>
           </a:p>
         </p:txBody>
       </p:sp>
     </p:spTree>
+    <p:extLst>
+      <p:ext uri="{BB962C8B-B14F-4D97-AF65-F5344CB8AC3E}">
+        <p14:creationId xmlns:p14="http://schemas.microsoft.com/office/powerpoint/2010/main" val="2782244947"/>
+      </p:ext>
+    </p:extLst>
   </p:cSld>
   <p:clrMapOvr>
     <a:masterClrMapping/>
@@ -2581,7 +3193,6 @@
               <a:rPr lang="en-US" smtClean="0"/>
               <a:t>Click to edit Master text styles</a:t>
             </a:r>
-            <a:endParaRPr lang="en-US" smtClean="0"/>
           </a:p>
         </p:txBody>
       </p:sp>
@@ -2638,7 +3249,6 @@
               <a:rPr lang="en-US" smtClean="0"/>
               <a:t>Click to edit Master text styles</a:t>
             </a:r>
-            <a:endParaRPr lang="en-US" smtClean="0"/>
           </a:p>
           <a:p>
             <a:pPr lvl="1"/>
@@ -2646,7 +3256,6 @@
               <a:rPr lang="en-US" smtClean="0"/>
               <a:t>Second level</a:t>
             </a:r>
-            <a:endParaRPr lang="en-US" smtClean="0"/>
           </a:p>
           <a:p>
             <a:pPr lvl="2"/>
@@ -2654,7 +3263,6 @@
               <a:rPr lang="en-US" smtClean="0"/>
               <a:t>Third level</a:t>
             </a:r>
-            <a:endParaRPr lang="en-US" smtClean="0"/>
           </a:p>
           <a:p>
             <a:pPr lvl="3"/>
@@ -2662,7 +3270,6 @@
               <a:rPr lang="en-US" smtClean="0"/>
               <a:t>Fourth level</a:t>
             </a:r>
-            <a:endParaRPr lang="en-US" smtClean="0"/>
           </a:p>
           <a:p>
             <a:pPr lvl="4"/>
@@ -2736,7 +3343,6 @@
               <a:rPr lang="en-US" smtClean="0"/>
               <a:t>Click to edit Master text styles</a:t>
             </a:r>
-            <a:endParaRPr lang="en-US" smtClean="0"/>
           </a:p>
         </p:txBody>
       </p:sp>
@@ -2793,7 +3399,6 @@
               <a:rPr lang="en-US" smtClean="0"/>
               <a:t>Click to edit Master text styles</a:t>
             </a:r>
-            <a:endParaRPr lang="en-US" smtClean="0"/>
           </a:p>
           <a:p>
             <a:pPr lvl="1"/>
@@ -2801,7 +3406,6 @@
               <a:rPr lang="en-US" smtClean="0"/>
               <a:t>Second level</a:t>
             </a:r>
-            <a:endParaRPr lang="en-US" smtClean="0"/>
           </a:p>
           <a:p>
             <a:pPr lvl="2"/>
@@ -2809,7 +3413,6 @@
               <a:rPr lang="en-US" smtClean="0"/>
               <a:t>Third level</a:t>
             </a:r>
-            <a:endParaRPr lang="en-US" smtClean="0"/>
           </a:p>
           <a:p>
             <a:pPr lvl="3"/>
@@ -2817,7 +3420,6 @@
               <a:rPr lang="en-US" smtClean="0"/>
               <a:t>Fourth level</a:t>
             </a:r>
-            <a:endParaRPr lang="en-US" smtClean="0"/>
           </a:p>
           <a:p>
             <a:pPr lvl="4"/>
@@ -2846,6 +3448,7 @@
           <a:p>
             <a:fld id="{5BCAD085-E8A6-8845-BD4E-CB4CCA059FC4}" type="datetimeFigureOut">
               <a:rPr lang="en-US" smtClean="0"/>
+              <a:t>1/27/13</a:t>
             </a:fld>
             <a:endParaRPr lang="en-US"/>
           </a:p>
@@ -2887,12 +3490,18 @@
           <a:p>
             <a:fld id="{C1FF6DA9-008F-8B48-92A6-B652298478BF}" type="slidenum">
               <a:rPr lang="en-US" smtClean="0"/>
+              <a:t>‹#›</a:t>
             </a:fld>
             <a:endParaRPr lang="en-US"/>
           </a:p>
         </p:txBody>
       </p:sp>
     </p:spTree>
+    <p:extLst>
+      <p:ext uri="{BB962C8B-B14F-4D97-AF65-F5344CB8AC3E}">
+        <p14:creationId xmlns:p14="http://schemas.microsoft.com/office/powerpoint/2010/main" val="990158736"/>
+      </p:ext>
+    </p:extLst>
   </p:cSld>
   <p:clrMapOvr>
     <a:masterClrMapping/>
@@ -2957,6 +3566,7 @@
           <a:p>
             <a:fld id="{5BCAD085-E8A6-8845-BD4E-CB4CCA059FC4}" type="datetimeFigureOut">
               <a:rPr lang="en-US" smtClean="0"/>
+              <a:t>1/27/13</a:t>
             </a:fld>
             <a:endParaRPr lang="en-US"/>
           </a:p>
@@ -2998,12 +3608,18 @@
           <a:p>
             <a:fld id="{C1FF6DA9-008F-8B48-92A6-B652298478BF}" type="slidenum">
               <a:rPr lang="en-US" smtClean="0"/>
+              <a:t>‹#›</a:t>
             </a:fld>
             <a:endParaRPr lang="en-US"/>
           </a:p>
         </p:txBody>
       </p:sp>
     </p:spTree>
+    <p:extLst>
+      <p:ext uri="{BB962C8B-B14F-4D97-AF65-F5344CB8AC3E}">
+        <p14:creationId xmlns:p14="http://schemas.microsoft.com/office/powerpoint/2010/main" val="727027711"/>
+      </p:ext>
+    </p:extLst>
   </p:cSld>
   <p:clrMapOvr>
     <a:masterClrMapping/>
@@ -3045,6 +3661,7 @@
           <a:p>
             <a:fld id="{5BCAD085-E8A6-8845-BD4E-CB4CCA059FC4}" type="datetimeFigureOut">
               <a:rPr lang="en-US" smtClean="0"/>
+              <a:t>1/27/13</a:t>
             </a:fld>
             <a:endParaRPr lang="en-US"/>
           </a:p>
@@ -3086,12 +3703,18 @@
           <a:p>
             <a:fld id="{C1FF6DA9-008F-8B48-92A6-B652298478BF}" type="slidenum">
               <a:rPr lang="en-US" smtClean="0"/>
+              <a:t>‹#›</a:t>
             </a:fld>
             <a:endParaRPr lang="en-US"/>
           </a:p>
         </p:txBody>
       </p:sp>
     </p:spTree>
+    <p:extLst>
+      <p:ext uri="{BB962C8B-B14F-4D97-AF65-F5344CB8AC3E}">
+        <p14:creationId xmlns:p14="http://schemas.microsoft.com/office/powerpoint/2010/main" val="1212999818"/>
+      </p:ext>
+    </p:extLst>
   </p:cSld>
   <p:clrMapOvr>
     <a:masterClrMapping/>
@@ -3201,7 +3824,6 @@
               <a:rPr lang="en-US" smtClean="0"/>
               <a:t>Click to edit Master text styles</a:t>
             </a:r>
-            <a:endParaRPr lang="en-US" smtClean="0"/>
           </a:p>
           <a:p>
             <a:pPr lvl="1"/>
@@ -3209,7 +3831,6 @@
               <a:rPr lang="en-US" smtClean="0"/>
               <a:t>Second level</a:t>
             </a:r>
-            <a:endParaRPr lang="en-US" smtClean="0"/>
           </a:p>
           <a:p>
             <a:pPr lvl="2"/>
@@ -3217,7 +3838,6 @@
               <a:rPr lang="en-US" smtClean="0"/>
               <a:t>Third level</a:t>
             </a:r>
-            <a:endParaRPr lang="en-US" smtClean="0"/>
           </a:p>
           <a:p>
             <a:pPr lvl="3"/>
@@ -3225,7 +3845,6 @@
               <a:rPr lang="en-US" smtClean="0"/>
               <a:t>Fourth level</a:t>
             </a:r>
-            <a:endParaRPr lang="en-US" smtClean="0"/>
           </a:p>
           <a:p>
             <a:pPr lvl="4"/>
@@ -3299,7 +3918,6 @@
               <a:rPr lang="en-US" smtClean="0"/>
               <a:t>Click to edit Master text styles</a:t>
             </a:r>
-            <a:endParaRPr lang="en-US" smtClean="0"/>
           </a:p>
         </p:txBody>
       </p:sp>
@@ -3320,6 +3938,7 @@
           <a:p>
             <a:fld id="{5BCAD085-E8A6-8845-BD4E-CB4CCA059FC4}" type="datetimeFigureOut">
               <a:rPr lang="en-US" smtClean="0"/>
+              <a:t>1/27/13</a:t>
             </a:fld>
             <a:endParaRPr lang="en-US"/>
           </a:p>
@@ -3361,12 +3980,18 @@
           <a:p>
             <a:fld id="{C1FF6DA9-008F-8B48-92A6-B652298478BF}" type="slidenum">
               <a:rPr lang="en-US" smtClean="0"/>
+              <a:t>‹#›</a:t>
             </a:fld>
             <a:endParaRPr lang="en-US"/>
           </a:p>
         </p:txBody>
       </p:sp>
     </p:spTree>
+    <p:extLst>
+      <p:ext uri="{BB962C8B-B14F-4D97-AF65-F5344CB8AC3E}">
+        <p14:creationId xmlns:p14="http://schemas.microsoft.com/office/powerpoint/2010/main" val="1840726560"/>
+      </p:ext>
+    </p:extLst>
   </p:cSld>
   <p:clrMapOvr>
     <a:masterClrMapping/>
@@ -3546,7 +4171,6 @@
               <a:rPr lang="en-US" smtClean="0"/>
               <a:t>Click to edit Master text styles</a:t>
             </a:r>
-            <a:endParaRPr lang="en-US" smtClean="0"/>
           </a:p>
         </p:txBody>
       </p:sp>
@@ -3567,6 +4191,7 @@
           <a:p>
             <a:fld id="{5BCAD085-E8A6-8845-BD4E-CB4CCA059FC4}" type="datetimeFigureOut">
               <a:rPr lang="en-US" smtClean="0"/>
+              <a:t>1/27/13</a:t>
             </a:fld>
             <a:endParaRPr lang="en-US"/>
           </a:p>
@@ -3608,12 +4233,18 @@
           <a:p>
             <a:fld id="{C1FF6DA9-008F-8B48-92A6-B652298478BF}" type="slidenum">
               <a:rPr lang="en-US" smtClean="0"/>
+              <a:t>‹#›</a:t>
             </a:fld>
             <a:endParaRPr lang="en-US"/>
           </a:p>
         </p:txBody>
       </p:sp>
     </p:spTree>
+    <p:extLst>
+      <p:ext uri="{BB962C8B-B14F-4D97-AF65-F5344CB8AC3E}">
+        <p14:creationId xmlns:p14="http://schemas.microsoft.com/office/powerpoint/2010/main" val="3889236939"/>
+      </p:ext>
+    </p:extLst>
   </p:cSld>
   <p:clrMapOvr>
     <a:masterClrMapping/>
@@ -3706,7 +4337,6 @@
               <a:rPr lang="en-US" smtClean="0"/>
               <a:t>Click to edit Master text styles</a:t>
             </a:r>
-            <a:endParaRPr lang="en-US" smtClean="0"/>
           </a:p>
           <a:p>
             <a:pPr lvl="1"/>
@@ -3714,7 +4344,6 @@
               <a:rPr lang="en-US" smtClean="0"/>
               <a:t>Second level</a:t>
             </a:r>
-            <a:endParaRPr lang="en-US" smtClean="0"/>
           </a:p>
           <a:p>
             <a:pPr lvl="2"/>
@@ -3722,7 +4351,6 @@
               <a:rPr lang="en-US" smtClean="0"/>
               <a:t>Third level</a:t>
             </a:r>
-            <a:endParaRPr lang="en-US" smtClean="0"/>
           </a:p>
           <a:p>
             <a:pPr lvl="3"/>
@@ -3730,7 +4358,6 @@
               <a:rPr lang="en-US" smtClean="0"/>
               <a:t>Fourth level</a:t>
             </a:r>
-            <a:endParaRPr lang="en-US" smtClean="0"/>
           </a:p>
           <a:p>
             <a:pPr lvl="4"/>
@@ -3777,6 +4404,7 @@
           <a:p>
             <a:fld id="{5BCAD085-E8A6-8845-BD4E-CB4CCA059FC4}" type="datetimeFigureOut">
               <a:rPr lang="en-US" smtClean="0"/>
+              <a:t>1/27/13</a:t>
             </a:fld>
             <a:endParaRPr lang="en-US"/>
           </a:p>
@@ -3854,12 +4482,18 @@
           <a:p>
             <a:fld id="{C1FF6DA9-008F-8B48-92A6-B652298478BF}" type="slidenum">
               <a:rPr lang="en-US" smtClean="0"/>
+              <a:t>‹#›</a:t>
             </a:fld>
             <a:endParaRPr lang="en-US"/>
           </a:p>
         </p:txBody>
       </p:sp>
     </p:spTree>
+    <p:extLst>
+      <p:ext uri="{BB962C8B-B14F-4D97-AF65-F5344CB8AC3E}">
+        <p14:creationId xmlns:p14="http://schemas.microsoft.com/office/powerpoint/2010/main" val="2209977519"/>
+      </p:ext>
+    </p:extLst>
   </p:cSld>
   <p:clrMap bg1="lt1" tx1="dk1" bg2="lt2" tx2="dk2" accent1="accent1" accent2="accent2" accent3="accent3" accent4="accent4" accent5="accent5" accent6="accent6" hlink="hlink" folHlink="folHlink"/>
   <p:sldLayoutIdLst>
@@ -3897,7 +4531,7 @@
         <a:spcBef>
           <a:spcPct val="20000"/>
         </a:spcBef>
-        <a:buFont typeface="Arial" panose="020B0604020202020204"/>
+        <a:buFont typeface="Arial"/>
         <a:buChar char="•"/>
         <a:defRPr sz="3200" kern="1200">
           <a:solidFill>
@@ -3912,7 +4546,7 @@
         <a:spcBef>
           <a:spcPct val="20000"/>
         </a:spcBef>
-        <a:buFont typeface="Arial" panose="020B0604020202020204"/>
+        <a:buFont typeface="Arial"/>
         <a:buChar char="–"/>
         <a:defRPr sz="2800" kern="1200">
           <a:solidFill>
@@ -3927,7 +4561,7 @@
         <a:spcBef>
           <a:spcPct val="20000"/>
         </a:spcBef>
-        <a:buFont typeface="Arial" panose="020B0604020202020204"/>
+        <a:buFont typeface="Arial"/>
         <a:buChar char="•"/>
         <a:defRPr sz="2400" kern="1200">
           <a:solidFill>
@@ -3942,7 +4576,7 @@
         <a:spcBef>
           <a:spcPct val="20000"/>
         </a:spcBef>
-        <a:buFont typeface="Arial" panose="020B0604020202020204"/>
+        <a:buFont typeface="Arial"/>
         <a:buChar char="–"/>
         <a:defRPr sz="2000" kern="1200">
           <a:solidFill>
@@ -3957,7 +4591,7 @@
         <a:spcBef>
           <a:spcPct val="20000"/>
         </a:spcBef>
-        <a:buFont typeface="Arial" panose="020B0604020202020204"/>
+        <a:buFont typeface="Arial"/>
         <a:buChar char="»"/>
         <a:defRPr sz="2000" kern="1200">
           <a:solidFill>
@@ -3972,7 +4606,7 @@
         <a:spcBef>
           <a:spcPct val="20000"/>
         </a:spcBef>
-        <a:buFont typeface="Arial" panose="020B0604020202020204"/>
+        <a:buFont typeface="Arial"/>
         <a:buChar char="•"/>
         <a:defRPr sz="2000" kern="1200">
           <a:solidFill>
@@ -3987,7 +4621,7 @@
         <a:spcBef>
           <a:spcPct val="20000"/>
         </a:spcBef>
-        <a:buFont typeface="Arial" panose="020B0604020202020204"/>
+        <a:buFont typeface="Arial"/>
         <a:buChar char="•"/>
         <a:defRPr sz="2000" kern="1200">
           <a:solidFill>
@@ -4002,7 +4636,7 @@
         <a:spcBef>
           <a:spcPct val="20000"/>
         </a:spcBef>
-        <a:buFont typeface="Arial" panose="020B0604020202020204"/>
+        <a:buFont typeface="Arial"/>
         <a:buChar char="•"/>
         <a:defRPr sz="2000" kern="1200">
           <a:solidFill>
@@ -4017,7 +4651,7 @@
         <a:spcBef>
           <a:spcPct val="20000"/>
         </a:spcBef>
-        <a:buFont typeface="Arial" panose="020B0604020202020204"/>
+        <a:buFont typeface="Arial"/>
         <a:buChar char="•"/>
         <a:defRPr sz="2000" kern="1200">
           <a:solidFill>
@@ -4129,7 +4763,7 @@
 </file>
 
 <file path=ppt/slides/slide1.xml><?xml version="1.0" encoding="utf-8"?>
-<p:sld xmlns:a="http://schemas.openxmlformats.org/drawingml/2006/main" xmlns:r="http://schemas.openxmlformats.org/officeDocument/2006/relationships" xmlns:p="http://schemas.openxmlformats.org/presentationml/2006/main">
+<p:sld xmlns:a="http://schemas.openxmlformats.org/drawingml/2006/main" xmlns:p="http://schemas.openxmlformats.org/presentationml/2006/main" xmlns:r="http://schemas.openxmlformats.org/officeDocument/2006/relationships">
   <p:cSld>
     <p:spTree>
       <p:nvGrpSpPr>
@@ -4199,7 +4833,7 @@
           <a:noFill/>
         </p:spPr>
         <p:txBody>
-          <a:bodyPr wrap="square" lIns="45720" tIns="27432" rIns="45720" bIns="27432" anchor="t">
+          <a:bodyPr wrap="square" anchor="t" lIns="45720" rIns="45720" tIns="27432" bIns="27432">
             <a:spAutoFit/>
           </a:bodyPr>
           <a:lstStyle/>
@@ -4214,16 +4848,10 @@
                 <a:solidFill>
                   <a:srgbClr val="111010"/>
                 </a:solidFill>
-                <a:latin typeface="Cascadia Code SemiBold" panose="020B0609020000020004"/>
+                <a:latin typeface="Cascadia Code SemiBold"/>
               </a:rPr>
               <a:t>ИВО</a:t>
             </a:r>
-            <a:endParaRPr sz="1600" b="1" i="0">
-              <a:solidFill>
-                <a:srgbClr val="111010"/>
-              </a:solidFill>
-              <a:latin typeface="Cascadia Code SemiBold" panose="020B0609020000020004"/>
-            </a:endParaRPr>
           </a:p>
           <a:p>
             <a:pPr algn="ctr">
@@ -4236,203 +4864,16 @@
                 <a:solidFill>
                   <a:srgbClr val="111010"/>
                 </a:solidFill>
-                <a:latin typeface="Cascadia Code SemiBold" panose="020B0609020000020004"/>
+                <a:latin typeface="Cascadia Code SemiBold"/>
               </a:rPr>
               <a:t>2026</a:t>
             </a:r>
-            <a:endParaRPr sz="1600" b="1" i="0">
-              <a:solidFill>
-                <a:srgbClr val="111010"/>
-              </a:solidFill>
-              <a:latin typeface="Cascadia Code SemiBold" panose="020B0609020000020004"/>
-            </a:endParaRPr>
           </a:p>
         </p:txBody>
       </p:sp>
       <p:pic>
         <p:nvPicPr>
           <p:cNvPr id="4" name="Picture 3" descr="stripes.png"/>
-          <p:cNvPicPr>
-            <a:picLocks noChangeAspect="1"/>
-          </p:cNvPicPr>
-          <p:nvPr/>
-        </p:nvPicPr>
-        <p:blipFill>
-          <a:blip r:embed="rId1"/>
-          <a:stretch>
-            <a:fillRect/>
-          </a:stretch>
-        </p:blipFill>
-        <p:spPr>
-          <a:xfrm>
-            <a:off x="9692640" y="-822960"/>
-            <a:ext cx="2926080" cy="2926080"/>
-          </a:xfrm>
-          <a:prstGeom prst="rect">
-            <a:avLst/>
-          </a:prstGeom>
-        </p:spPr>
-      </p:pic>
-      <p:sp>
-        <p:nvSpPr>
-          <p:cNvPr id="5" name="TextBox 4"/>
-          <p:cNvSpPr txBox="1"/>
-          <p:nvPr/>
-        </p:nvSpPr>
-        <p:spPr>
-          <a:xfrm>
-            <a:off x="548640" y="1828800"/>
-            <a:ext cx="7863840" cy="2194560"/>
-          </a:xfrm>
-          <a:prstGeom prst="rect">
-            <a:avLst/>
-          </a:prstGeom>
-          <a:noFill/>
-        </p:spPr>
-        <p:txBody>
-          <a:bodyPr wrap="square" lIns="45720" tIns="27432" rIns="45720" bIns="27432" anchor="t">
-            <a:spAutoFit/>
-          </a:bodyPr>
-          <a:lstStyle/>
-          <a:p>
-            <a:pPr algn="l">
-              <a:spcAft>
-                <a:spcPts val="600"/>
-              </a:spcAft>
-            </a:pPr>
-            <a:r>
-              <a:rPr sz="4600" b="1" i="0">
-                <a:solidFill>
-                  <a:srgbClr val="111010"/>
-                </a:solidFill>
-                <a:latin typeface="Cascadia Code SemiBold" panose="020B0609020000020004"/>
-              </a:rPr>
-              <a:t>Учёба + работа:</a:t>
-            </a:r>
-            <a:endParaRPr sz="4600" b="1" i="0">
-              <a:solidFill>
-                <a:srgbClr val="111010"/>
-              </a:solidFill>
-              <a:latin typeface="Cascadia Code SemiBold" panose="020B0609020000020004"/>
-            </a:endParaRPr>
-          </a:p>
-          <a:p>
-            <a:pPr algn="l">
-              <a:spcAft>
-                <a:spcPts val="600"/>
-              </a:spcAft>
-            </a:pPr>
-            <a:r>
-              <a:rPr sz="4600" b="1" i="0">
-                <a:solidFill>
-                  <a:srgbClr val="111010"/>
-                </a:solidFill>
-                <a:latin typeface="Cascadia Code SemiBold" panose="020B0609020000020004"/>
-              </a:rPr>
-              <a:t>польза или помеха?</a:t>
-            </a:r>
-            <a:endParaRPr sz="4600" b="1" i="0">
-              <a:solidFill>
-                <a:srgbClr val="111010"/>
-              </a:solidFill>
-              <a:latin typeface="Cascadia Code SemiBold" panose="020B0609020000020004"/>
-            </a:endParaRPr>
-          </a:p>
-        </p:txBody>
-      </p:sp>
-      <p:sp>
-        <p:nvSpPr>
-          <p:cNvPr id="6" name="TextBox 5"/>
-          <p:cNvSpPr txBox="1"/>
-          <p:nvPr/>
-        </p:nvSpPr>
-        <p:spPr>
-          <a:xfrm>
-            <a:off x="594360" y="3977639"/>
-            <a:ext cx="7498079" cy="914400"/>
-          </a:xfrm>
-          <a:prstGeom prst="rect">
-            <a:avLst/>
-          </a:prstGeom>
-          <a:noFill/>
-        </p:spPr>
-        <p:txBody>
-          <a:bodyPr wrap="square" lIns="45720" tIns="27432" rIns="45720" bIns="27432" anchor="t">
-            <a:spAutoFit/>
-          </a:bodyPr>
-          <a:lstStyle/>
-          <a:p>
-            <a:pPr algn="l">
-              <a:spcAft>
-                <a:spcPts val="600"/>
-              </a:spcAft>
-            </a:pPr>
-            <a:r>
-              <a:rPr sz="1800" b="0" i="0">
-                <a:solidFill>
-                  <a:srgbClr val="111010"/>
-                </a:solidFill>
-                <a:latin typeface="Tahoma" panose="020B0604030504040204"/>
-              </a:rPr>
-              <a:t>Совмещение учёбы и работы: что говорят данные лонгитюда студентов 9 селективных вузов</a:t>
-            </a:r>
-            <a:endParaRPr sz="1800" b="0" i="0">
-              <a:solidFill>
-                <a:srgbClr val="111010"/>
-              </a:solidFill>
-              <a:latin typeface="Tahoma" panose="020B0604030504040204"/>
-            </a:endParaRPr>
-          </a:p>
-        </p:txBody>
-      </p:sp>
-      <p:sp>
-        <p:nvSpPr>
-          <p:cNvPr id="7" name="TextBox 6"/>
-          <p:cNvSpPr txBox="1"/>
-          <p:nvPr/>
-        </p:nvSpPr>
-        <p:spPr>
-          <a:xfrm>
-            <a:off x="594360" y="4937760"/>
-            <a:ext cx="5486400" cy="361950"/>
-          </a:xfrm>
-          <a:prstGeom prst="rect">
-            <a:avLst/>
-          </a:prstGeom>
-          <a:noFill/>
-        </p:spPr>
-        <p:txBody>
-          <a:bodyPr wrap="square" lIns="45720" tIns="27432" rIns="45720" bIns="27432" anchor="t">
-            <a:spAutoFit/>
-          </a:bodyPr>
-          <a:lstStyle/>
-          <a:p>
-            <a:pPr algn="l">
-              <a:spcAft>
-                <a:spcPts val="600"/>
-              </a:spcAft>
-            </a:pPr>
-            <a:r>
-              <a:rPr lang="ru-RU" sz="2000" b="1" i="0">
-                <a:solidFill>
-                  <a:srgbClr val="111010"/>
-                </a:solidFill>
-                <a:latin typeface="Cascadia Code SemiBold" panose="020B0609020000020004"/>
-              </a:rPr>
-              <a:t>Пётр Тортев </a:t>
-            </a:r>
-            <a:endParaRPr lang="ru-RU" sz="2000" b="1" i="0">
-              <a:solidFill>
-                <a:srgbClr val="111010"/>
-              </a:solidFill>
-              <a:latin typeface="Cascadia Code SemiBold" panose="020B0609020000020004"/>
-            </a:endParaRPr>
-          </a:p>
-        </p:txBody>
-      </p:sp>
-      <p:pic>
-        <p:nvPicPr>
-          <p:cNvPr id="8" name="Мем" descr="s1_16.jpg"/>
           <p:cNvPicPr>
             <a:picLocks noChangeAspect="1"/>
           </p:cNvPicPr>
@@ -4446,6 +4887,202 @@
         </p:blipFill>
         <p:spPr>
           <a:xfrm>
+            <a:off x="9692640" y="-822960"/>
+            <a:ext cx="2926080" cy="2926080"/>
+          </a:xfrm>
+          <a:prstGeom prst="rect">
+            <a:avLst/>
+          </a:prstGeom>
+        </p:spPr>
+      </p:pic>
+      <p:sp>
+        <p:nvSpPr>
+          <p:cNvPr id="5" name="TextBox 4"/>
+          <p:cNvSpPr txBox="1"/>
+          <p:nvPr/>
+        </p:nvSpPr>
+        <p:spPr>
+          <a:xfrm>
+            <a:off x="548640" y="1737360"/>
+            <a:ext cx="7863840" cy="2194560"/>
+          </a:xfrm>
+          <a:prstGeom prst="rect">
+            <a:avLst/>
+          </a:prstGeom>
+          <a:noFill/>
+        </p:spPr>
+        <p:txBody>
+          <a:bodyPr wrap="square" anchor="t" lIns="45720" rIns="45720" tIns="27432" bIns="27432">
+            <a:spAutoFit/>
+          </a:bodyPr>
+          <a:lstStyle/>
+          <a:p>
+            <a:pPr algn="l">
+              <a:spcAft>
+                <a:spcPts val="600"/>
+              </a:spcAft>
+            </a:pPr>
+            <a:r>
+              <a:rPr sz="4600" b="1" i="0">
+                <a:solidFill>
+                  <a:srgbClr val="111010"/>
+                </a:solidFill>
+                <a:latin typeface="Cascadia Code SemiBold"/>
+              </a:rPr>
+              <a:t>Учёба + работа:</a:t>
+            </a:r>
+          </a:p>
+          <a:p>
+            <a:pPr algn="l">
+              <a:spcAft>
+                <a:spcPts val="600"/>
+              </a:spcAft>
+            </a:pPr>
+            <a:r>
+              <a:rPr sz="4600" b="1" i="0">
+                <a:solidFill>
+                  <a:srgbClr val="111010"/>
+                </a:solidFill>
+                <a:latin typeface="Cascadia Code SemiBold"/>
+              </a:rPr>
+              <a:t>польза или помеха?</a:t>
+            </a:r>
+          </a:p>
+        </p:txBody>
+      </p:sp>
+      <p:sp>
+        <p:nvSpPr>
+          <p:cNvPr id="6" name="TextBox 5"/>
+          <p:cNvSpPr txBox="1"/>
+          <p:nvPr/>
+        </p:nvSpPr>
+        <p:spPr>
+          <a:xfrm>
+            <a:off x="594360" y="3886200"/>
+            <a:ext cx="7498079" cy="914400"/>
+          </a:xfrm>
+          <a:prstGeom prst="rect">
+            <a:avLst/>
+          </a:prstGeom>
+          <a:noFill/>
+        </p:spPr>
+        <p:txBody>
+          <a:bodyPr wrap="square" anchor="t" lIns="45720" rIns="45720" tIns="27432" bIns="27432">
+            <a:spAutoFit/>
+          </a:bodyPr>
+          <a:lstStyle/>
+          <a:p>
+            <a:pPr algn="l">
+              <a:spcAft>
+                <a:spcPts val="600"/>
+              </a:spcAft>
+            </a:pPr>
+            <a:r>
+              <a:rPr sz="1800" b="0" i="0">
+                <a:solidFill>
+                  <a:srgbClr val="111010"/>
+                </a:solidFill>
+                <a:latin typeface="Tahoma"/>
+              </a:rPr>
+              <a:t>Как совмещение учёбы и работы связано с успеваемостью, образовательным опытом и здоровьем студентов</a:t>
+            </a:r>
+          </a:p>
+        </p:txBody>
+      </p:sp>
+      <p:sp>
+        <p:nvSpPr>
+          <p:cNvPr id="7" name="TextBox 6"/>
+          <p:cNvSpPr txBox="1"/>
+          <p:nvPr/>
+        </p:nvSpPr>
+        <p:spPr>
+          <a:xfrm>
+            <a:off x="594360" y="4892040"/>
+            <a:ext cx="5486400" cy="457200"/>
+          </a:xfrm>
+          <a:prstGeom prst="rect">
+            <a:avLst/>
+          </a:prstGeom>
+          <a:noFill/>
+        </p:spPr>
+        <p:txBody>
+          <a:bodyPr wrap="square" anchor="t" lIns="45720" rIns="45720" tIns="27432" bIns="27432">
+            <a:spAutoFit/>
+          </a:bodyPr>
+          <a:lstStyle/>
+          <a:p>
+            <a:pPr algn="l">
+              <a:spcAft>
+                <a:spcPts val="600"/>
+              </a:spcAft>
+            </a:pPr>
+            <a:r>
+              <a:rPr sz="2000" b="1" i="0">
+                <a:solidFill>
+                  <a:srgbClr val="111010"/>
+                </a:solidFill>
+                <a:latin typeface="Cascadia Code SemiBold"/>
+              </a:rPr>
+              <a:t>Пётр Тортев</a:t>
+            </a:r>
+          </a:p>
+        </p:txBody>
+      </p:sp>
+      <p:sp>
+        <p:nvSpPr>
+          <p:cNvPr id="8" name="TextBox 7"/>
+          <p:cNvSpPr txBox="1"/>
+          <p:nvPr/>
+        </p:nvSpPr>
+        <p:spPr>
+          <a:xfrm>
+            <a:off x="594360" y="5349240"/>
+            <a:ext cx="5486400" cy="365760"/>
+          </a:xfrm>
+          <a:prstGeom prst="rect">
+            <a:avLst/>
+          </a:prstGeom>
+          <a:noFill/>
+        </p:spPr>
+        <p:txBody>
+          <a:bodyPr wrap="square" anchor="t" lIns="45720" rIns="45720" tIns="27432" bIns="27432">
+            <a:spAutoFit/>
+          </a:bodyPr>
+          <a:lstStyle/>
+          <a:p>
+            <a:pPr algn="l">
+              <a:spcAft>
+                <a:spcPts val="600"/>
+              </a:spcAft>
+            </a:pPr>
+            <a:r>
+              <a:rPr sz="1400" b="0" i="0">
+                <a:solidFill>
+                  <a:srgbClr val="848484"/>
+                </a:solidFill>
+                <a:latin typeface="Tahoma"/>
+              </a:rPr>
+              <a:t>Номинация «Анализ данных»</a:t>
+            </a:r>
+          </a:p>
+        </p:txBody>
+      </p:sp>
+      <p:pic>
+        <p:nvPicPr>
+          <p:cNvPr id="9" name="Мем" descr="s1_16.jpg"/>
+          <p:cNvPicPr>
+            <a:picLocks noChangeAspect="1"/>
+          </p:cNvPicPr>
+          <p:nvPr/>
+        </p:nvPicPr>
+        <p:blipFill>
+          <a:blip r:embed="rId3"/>
+          <a:stretch>
+            <a:fillRect/>
+          </a:stretch>
+        </p:blipFill>
+        <p:spPr>
+          <a:xfrm>
             <a:off x="8595360" y="2743200"/>
             <a:ext cx="3017520" cy="3017520"/>
           </a:xfrm>
@@ -4456,7 +5093,7 @@
       </p:pic>
       <p:sp>
         <p:nvSpPr>
-          <p:cNvPr id="9" name="Rectangle 8"/>
+          <p:cNvPr id="10" name="Rectangle 9"/>
           <p:cNvSpPr/>
           <p:nvPr/>
         </p:nvSpPr>
@@ -4500,7 +5137,7 @@
       </p:sp>
       <p:sp>
         <p:nvSpPr>
-          <p:cNvPr id="10" name="TextBox 9"/>
+          <p:cNvPr id="11" name="TextBox 10"/>
           <p:cNvSpPr txBox="1"/>
           <p:nvPr/>
         </p:nvSpPr>
@@ -4515,7 +5152,7 @@
           <a:noFill/>
         </p:spPr>
         <p:txBody>
-          <a:bodyPr wrap="square" lIns="45720" tIns="27432" rIns="45720" bIns="27432" anchor="ctr">
+          <a:bodyPr wrap="square" anchor="ctr" lIns="45720" rIns="45720" tIns="27432" bIns="27432">
             <a:spAutoFit/>
           </a:bodyPr>
           <a:lstStyle/>
@@ -4530,16 +5167,10 @@
                 <a:solidFill>
                   <a:srgbClr val="111010"/>
                 </a:solidFill>
-                <a:latin typeface="Tahoma" panose="020B0604030504040204"/>
+                <a:latin typeface="Tahoma"/>
               </a:rPr>
               <a:t>ХАКАТОН ИССЛЕДОВАТЕЛЕЙ ВЫСШЕГО ОБРАЗОВАНИЯ – 2026 · НИУ ВШЭ</a:t>
             </a:r>
-            <a:endParaRPr sz="1400" b="0" i="0">
-              <a:solidFill>
-                <a:srgbClr val="111010"/>
-              </a:solidFill>
-              <a:latin typeface="Tahoma" panose="020B0604030504040204"/>
-            </a:endParaRPr>
           </a:p>
         </p:txBody>
       </p:sp>
@@ -4552,7 +5183,7 @@
 </file>
 
 <file path=ppt/slides/slide2.xml><?xml version="1.0" encoding="utf-8"?>
-<p:sld xmlns:a="http://schemas.openxmlformats.org/drawingml/2006/main" xmlns:r="http://schemas.openxmlformats.org/officeDocument/2006/relationships" xmlns:p="http://schemas.openxmlformats.org/presentationml/2006/main">
+<p:sld xmlns:a="http://schemas.openxmlformats.org/drawingml/2006/main" xmlns:p="http://schemas.openxmlformats.org/presentationml/2006/main" xmlns:r="http://schemas.openxmlformats.org/officeDocument/2006/relationships">
   <p:cSld>
     <p:spTree>
       <p:nvGrpSpPr>
@@ -4598,7 +5229,7 @@
           </a:fontRef>
         </p:style>
         <p:txBody>
-          <a:bodyPr lIns="45720" rIns="45720" rtlCol="0" anchor="ctr"/>
+          <a:bodyPr rtlCol="0" anchor="ctr" lIns="45720" rIns="45720"/>
           <a:lstStyle/>
           <a:p>
             <a:pPr algn="ctr"/>
@@ -4607,16 +5238,10 @@
                 <a:solidFill>
                   <a:srgbClr val="111010"/>
                 </a:solidFill>
-                <a:latin typeface="Cascadia Code SemiBold" panose="020B0609020000020004"/>
+                <a:latin typeface="Cascadia Code SemiBold"/>
               </a:rPr>
-              <a:t>ДАННЫЕ</a:t>
-            </a:r>
-            <a:endParaRPr sz="1200" b="1">
-              <a:solidFill>
-                <a:srgbClr val="111010"/>
-              </a:solidFill>
-              <a:latin typeface="Cascadia Code SemiBold" panose="020B0609020000020004"/>
-            </a:endParaRPr>
+              <a:t>ВОПРОС</a:t>
+            </a:r>
           </a:p>
         </p:txBody>
       </p:sp>
@@ -4657,7 +5282,7 @@
           </a:fontRef>
         </p:style>
         <p:txBody>
-          <a:bodyPr lIns="45720" rIns="45720" rtlCol="0" anchor="ctr"/>
+          <a:bodyPr rtlCol="0" anchor="ctr" lIns="45720" rIns="45720"/>
           <a:lstStyle/>
           <a:p>
             <a:pPr algn="ctr"/>
@@ -4666,16 +5291,10 @@
                 <a:solidFill>
                   <a:srgbClr val="111010"/>
                 </a:solidFill>
-                <a:latin typeface="Cascadia Code SemiBold" panose="020B0609020000020004"/>
+                <a:latin typeface="Cascadia Code SemiBold"/>
               </a:rPr>
-              <a:t>МЕТОДЫ</a:t>
-            </a:r>
-            <a:endParaRPr sz="1200" b="0">
-              <a:solidFill>
-                <a:srgbClr val="111010"/>
-              </a:solidFill>
-              <a:latin typeface="Cascadia Code SemiBold" panose="020B0609020000020004"/>
-            </a:endParaRPr>
+              <a:t>ДАННЫЕ</a:t>
+            </a:r>
           </a:p>
         </p:txBody>
       </p:sp>
@@ -4716,7 +5335,7 @@
           </a:fontRef>
         </p:style>
         <p:txBody>
-          <a:bodyPr lIns="45720" rIns="45720" rtlCol="0" anchor="ctr"/>
+          <a:bodyPr rtlCol="0" anchor="ctr" lIns="45720" rIns="45720"/>
           <a:lstStyle/>
           <a:p>
             <a:pPr algn="ctr"/>
@@ -4725,16 +5344,10 @@
                 <a:solidFill>
                   <a:srgbClr val="111010"/>
                 </a:solidFill>
-                <a:latin typeface="Cascadia Code SemiBold" panose="020B0609020000020004"/>
+                <a:latin typeface="Cascadia Code SemiBold"/>
               </a:rPr>
-              <a:t>РЕЗУЛЬТАТЫ</a:t>
-            </a:r>
-            <a:endParaRPr sz="1200" b="0">
-              <a:solidFill>
-                <a:srgbClr val="111010"/>
-              </a:solidFill>
-              <a:latin typeface="Cascadia Code SemiBold" panose="020B0609020000020004"/>
-            </a:endParaRPr>
+              <a:t>МЕТОДЫ</a:t>
+            </a:r>
           </a:p>
         </p:txBody>
       </p:sp>
@@ -4775,7 +5388,7 @@
           </a:fontRef>
         </p:style>
         <p:txBody>
-          <a:bodyPr lIns="45720" rIns="45720" rtlCol="0" anchor="ctr"/>
+          <a:bodyPr rtlCol="0" anchor="ctr" lIns="45720" rIns="45720"/>
           <a:lstStyle/>
           <a:p>
             <a:pPr algn="ctr"/>
@@ -4784,16 +5397,10 @@
                 <a:solidFill>
                   <a:srgbClr val="111010"/>
                 </a:solidFill>
-                <a:latin typeface="Cascadia Code SemiBold" panose="020B0609020000020004"/>
+                <a:latin typeface="Cascadia Code SemiBold"/>
               </a:rPr>
-              <a:t>ОБСУЖДЕНИЕ</a:t>
-            </a:r>
-            <a:endParaRPr sz="1200" b="0">
-              <a:solidFill>
-                <a:srgbClr val="111010"/>
-              </a:solidFill>
-              <a:latin typeface="Cascadia Code SemiBold" panose="020B0609020000020004"/>
-            </a:endParaRPr>
+              <a:t>РЕЗУЛЬТАТЫ</a:t>
+            </a:r>
           </a:p>
         </p:txBody>
       </p:sp>
@@ -4834,7 +5441,7 @@
           </a:fontRef>
         </p:style>
         <p:txBody>
-          <a:bodyPr lIns="45720" rIns="45720" rtlCol="0" anchor="ctr"/>
+          <a:bodyPr rtlCol="0" anchor="ctr" lIns="45720" rIns="45720"/>
           <a:lstStyle/>
           <a:p>
             <a:pPr algn="ctr"/>
@@ -4843,16 +5450,10 @@
                 <a:solidFill>
                   <a:srgbClr val="111010"/>
                 </a:solidFill>
-                <a:latin typeface="Cascadia Code SemiBold" panose="020B0609020000020004"/>
+                <a:latin typeface="Cascadia Code SemiBold"/>
               </a:rPr>
-              <a:t>ПОДВАЛ</a:t>
-            </a:r>
-            <a:endParaRPr sz="1200" b="0">
-              <a:solidFill>
-                <a:srgbClr val="111010"/>
-              </a:solidFill>
-              <a:latin typeface="Cascadia Code SemiBold" panose="020B0609020000020004"/>
-            </a:endParaRPr>
+              <a:t>ВЫВОДЫ</a:t>
+            </a:r>
           </a:p>
         </p:txBody>
       </p:sp>
@@ -4961,7 +5562,7 @@
           <a:noFill/>
         </p:spPr>
         <p:txBody>
-          <a:bodyPr wrap="square" lIns="45720" tIns="27432" rIns="45720" bIns="27432" anchor="t">
+          <a:bodyPr wrap="square" anchor="t" lIns="45720" rIns="45720" tIns="27432" bIns="27432">
             <a:spAutoFit/>
           </a:bodyPr>
           <a:lstStyle/>
@@ -4976,16 +5577,10 @@
                 <a:solidFill>
                   <a:srgbClr val="848484"/>
                 </a:solidFill>
-                <a:latin typeface="Tahoma" panose="020B0604030504040204"/>
+                <a:latin typeface="Tahoma"/>
               </a:rPr>
               <a:t>2</a:t>
             </a:r>
-            <a:endParaRPr sz="1200" b="0" i="0">
-              <a:solidFill>
-                <a:srgbClr val="848484"/>
-              </a:solidFill>
-              <a:latin typeface="Tahoma" panose="020B0604030504040204"/>
-            </a:endParaRPr>
           </a:p>
         </p:txBody>
       </p:sp>
@@ -5006,7 +5601,7 @@
           <a:noFill/>
         </p:spPr>
         <p:txBody>
-          <a:bodyPr wrap="square" lIns="45720" tIns="27432" rIns="45720" bIns="27432" anchor="t">
+          <a:bodyPr wrap="square" anchor="t" lIns="45720" rIns="45720" tIns="27432" bIns="27432">
             <a:spAutoFit/>
           </a:bodyPr>
           <a:lstStyle/>
@@ -5021,16 +5616,10 @@
                 <a:solidFill>
                   <a:srgbClr val="111010"/>
                 </a:solidFill>
-                <a:latin typeface="Arial Black" panose="020B0A04020102020204"/>
+                <a:latin typeface="Arial Black"/>
               </a:rPr>
               <a:t>Исследовательский вопрос</a:t>
             </a:r>
-            <a:endParaRPr sz="2800" b="0" i="0">
-              <a:solidFill>
-                <a:srgbClr val="111010"/>
-              </a:solidFill>
-              <a:latin typeface="Arial Black" panose="020B0A04020102020204"/>
-            </a:endParaRPr>
           </a:p>
         </p:txBody>
       </p:sp>
@@ -5042,8 +5631,8 @@
         </p:nvSpPr>
         <p:spPr>
           <a:xfrm>
-            <a:off x="1097280" y="1691640"/>
-            <a:ext cx="9966960" cy="1554480"/>
+            <a:off x="548640" y="1600200"/>
+            <a:ext cx="11064240" cy="1325880"/>
           </a:xfrm>
           <a:prstGeom prst="roundRect">
             <a:avLst>
@@ -5090,8 +5679,8 @@
         </p:nvSpPr>
         <p:spPr>
           <a:xfrm>
-            <a:off x="1463040" y="1828800"/>
-            <a:ext cx="9235440" cy="1325880"/>
+            <a:off x="914400" y="1691640"/>
+            <a:ext cx="10332720" cy="1143000"/>
           </a:xfrm>
           <a:prstGeom prst="rect">
             <a:avLst/>
@@ -5099,7 +5688,7 @@
           <a:noFill/>
         </p:spPr>
         <p:txBody>
-          <a:bodyPr wrap="square" lIns="45720" tIns="27432" rIns="45720" bIns="27432" anchor="ctr">
+          <a:bodyPr wrap="square" anchor="ctr" lIns="45720" rIns="45720" tIns="27432" bIns="27432">
             <a:spAutoFit/>
           </a:bodyPr>
           <a:lstStyle/>
@@ -5110,33 +5699,893 @@
               </a:spcAft>
             </a:pPr>
             <a:r>
-              <a:rPr sz="2200" b="0" i="0">
+              <a:rPr sz="2100" b="0" i="0">
                 <a:solidFill>
                   <a:srgbClr val="111010"/>
                 </a:solidFill>
-                <a:latin typeface="Cascadia Code SemiBold" panose="020B0609020000020004"/>
+                <a:latin typeface="Cascadia Code SemiBold"/>
               </a:rPr>
               <a:t>В каких аспектах совмещение учёбы и работы приносит студентам пользу, а в каких — создаёт дополнительные трудности?</a:t>
             </a:r>
-            <a:endParaRPr sz="2200" b="0" i="0">
-              <a:solidFill>
-                <a:srgbClr val="111010"/>
-              </a:solidFill>
-              <a:latin typeface="Cascadia Code SemiBold" panose="020B0609020000020004"/>
-            </a:endParaRPr>
-          </a:p>
-        </p:txBody>
-      </p:sp>
-      <p:sp>
-        <p:nvSpPr>
-          <p:cNvPr id="13" name="Rounded Rectangle 12"/>
+          </a:p>
+        </p:txBody>
+      </p:sp>
+      <p:sp>
+        <p:nvSpPr>
+          <p:cNvPr id="13" name="TextBox 12"/>
+          <p:cNvSpPr txBox="1"/>
+          <p:nvPr/>
+        </p:nvSpPr>
+        <p:spPr>
+          <a:xfrm>
+            <a:off x="548640" y="3108960"/>
+            <a:ext cx="5486400" cy="411480"/>
+          </a:xfrm>
+          <a:prstGeom prst="rect">
+            <a:avLst/>
+          </a:prstGeom>
+          <a:noFill/>
+        </p:spPr>
+        <p:txBody>
+          <a:bodyPr wrap="square" anchor="t" lIns="45720" rIns="45720" tIns="27432" bIns="27432">
+            <a:spAutoFit/>
+          </a:bodyPr>
+          <a:lstStyle/>
+          <a:p>
+            <a:pPr algn="l">
+              <a:spcAft>
+                <a:spcPts val="600"/>
+              </a:spcAft>
+            </a:pPr>
+            <a:r>
+              <a:rPr sz="1800" b="1" i="0">
+                <a:solidFill>
+                  <a:srgbClr val="111010"/>
+                </a:solidFill>
+                <a:latin typeface="Cascadia Code SemiBold"/>
+              </a:rPr>
+              <a:t>Почему это важно</a:t>
+            </a:r>
+          </a:p>
+        </p:txBody>
+      </p:sp>
+      <p:sp>
+        <p:nvSpPr>
+          <p:cNvPr id="14" name="Rounded Rectangle 13"/>
           <p:cNvSpPr/>
           <p:nvPr/>
         </p:nvSpPr>
         <p:spPr>
           <a:xfrm>
-            <a:off x="1097280" y="3657600"/>
-            <a:ext cx="3108960" cy="2377440"/>
+            <a:off x="548640" y="3611880"/>
+            <a:ext cx="3520440" cy="2514600"/>
+          </a:xfrm>
+          <a:prstGeom prst="roundRect">
+            <a:avLst>
+              <a:gd name="adj" fmla="val 10000"/>
+            </a:avLst>
+          </a:prstGeom>
+          <a:solidFill>
+            <a:srgbClr val="FFF4D7"/>
+          </a:solidFill>
+          <a:ln w="15875">
+            <a:solidFill>
+              <a:srgbClr val="FFD966"/>
+            </a:solidFill>
+          </a:ln>
+          <a:effectLst/>
+        </p:spPr>
+        <p:style>
+          <a:lnRef idx="1">
+            <a:schemeClr val="accent1"/>
+          </a:lnRef>
+          <a:fillRef idx="3">
+            <a:schemeClr val="accent1"/>
+          </a:fillRef>
+          <a:effectRef idx="2">
+            <a:schemeClr val="accent1"/>
+          </a:effectRef>
+          <a:fontRef idx="minor">
+            <a:schemeClr val="lt1"/>
+          </a:fontRef>
+        </p:style>
+        <p:txBody>
+          <a:bodyPr rtlCol="0" anchor="ctr"/>
+          <a:lstStyle/>
+          <a:p>
+            <a:pPr algn="ctr"/>
+          </a:p>
+        </p:txBody>
+      </p:sp>
+      <p:sp>
+        <p:nvSpPr>
+          <p:cNvPr id="15" name="TextBox 14"/>
+          <p:cNvSpPr txBox="1"/>
+          <p:nvPr/>
+        </p:nvSpPr>
+        <p:spPr>
+          <a:xfrm>
+            <a:off x="777240" y="3749039"/>
+            <a:ext cx="3108960" cy="822960"/>
+          </a:xfrm>
+          <a:prstGeom prst="rect">
+            <a:avLst/>
+          </a:prstGeom>
+          <a:noFill/>
+        </p:spPr>
+        <p:txBody>
+          <a:bodyPr wrap="square" anchor="t" lIns="45720" rIns="45720" tIns="27432" bIns="27432">
+            <a:spAutoFit/>
+          </a:bodyPr>
+          <a:lstStyle/>
+          <a:p>
+            <a:pPr algn="l">
+              <a:spcAft>
+                <a:spcPts val="600"/>
+              </a:spcAft>
+            </a:pPr>
+            <a:r>
+              <a:rPr sz="3600" b="1" i="0">
+                <a:solidFill>
+                  <a:srgbClr val="C55A11"/>
+                </a:solidFill>
+                <a:latin typeface="Cascadia Code SemiBold"/>
+              </a:rPr>
+              <a:t>44–48%</a:t>
+            </a:r>
+          </a:p>
+        </p:txBody>
+      </p:sp>
+      <p:sp>
+        <p:nvSpPr>
+          <p:cNvPr id="16" name="TextBox 15"/>
+          <p:cNvSpPr txBox="1"/>
+          <p:nvPr/>
+        </p:nvSpPr>
+        <p:spPr>
+          <a:xfrm>
+            <a:off x="777240" y="4617720"/>
+            <a:ext cx="3108960" cy="1463040"/>
+          </a:xfrm>
+          <a:prstGeom prst="rect">
+            <a:avLst/>
+          </a:prstGeom>
+          <a:noFill/>
+        </p:spPr>
+        <p:txBody>
+          <a:bodyPr wrap="square" anchor="t" lIns="45720" rIns="45720" tIns="27432" bIns="27432">
+            <a:spAutoFit/>
+          </a:bodyPr>
+          <a:lstStyle/>
+          <a:p>
+            <a:pPr algn="l">
+              <a:spcAft>
+                <a:spcPts val="600"/>
+              </a:spcAft>
+            </a:pPr>
+            <a:r>
+              <a:rPr sz="1400" b="0" i="0">
+                <a:solidFill>
+                  <a:srgbClr val="111010"/>
+                </a:solidFill>
+                <a:latin typeface="Tahoma"/>
+              </a:rPr>
+              <a:t>студентов работают во время учёбы — это массовое явление</a:t>
+            </a:r>
+          </a:p>
+        </p:txBody>
+      </p:sp>
+      <p:sp>
+        <p:nvSpPr>
+          <p:cNvPr id="17" name="Rounded Rectangle 16"/>
+          <p:cNvSpPr/>
+          <p:nvPr/>
+        </p:nvSpPr>
+        <p:spPr>
+          <a:xfrm>
+            <a:off x="4297679" y="3611880"/>
+            <a:ext cx="3520440" cy="2514600"/>
+          </a:xfrm>
+          <a:prstGeom prst="roundRect">
+            <a:avLst>
+              <a:gd name="adj" fmla="val 10000"/>
+            </a:avLst>
+          </a:prstGeom>
+          <a:solidFill>
+            <a:srgbClr val="FFF4D7"/>
+          </a:solidFill>
+          <a:ln w="15875">
+            <a:solidFill>
+              <a:srgbClr val="FFD966"/>
+            </a:solidFill>
+          </a:ln>
+          <a:effectLst/>
+        </p:spPr>
+        <p:style>
+          <a:lnRef idx="1">
+            <a:schemeClr val="accent1"/>
+          </a:lnRef>
+          <a:fillRef idx="3">
+            <a:schemeClr val="accent1"/>
+          </a:fillRef>
+          <a:effectRef idx="2">
+            <a:schemeClr val="accent1"/>
+          </a:effectRef>
+          <a:fontRef idx="minor">
+            <a:schemeClr val="lt1"/>
+          </a:fontRef>
+        </p:style>
+        <p:txBody>
+          <a:bodyPr rtlCol="0" anchor="ctr"/>
+          <a:lstStyle/>
+          <a:p>
+            <a:pPr algn="ctr"/>
+          </a:p>
+        </p:txBody>
+      </p:sp>
+      <p:sp>
+        <p:nvSpPr>
+          <p:cNvPr id="18" name="TextBox 17"/>
+          <p:cNvSpPr txBox="1"/>
+          <p:nvPr/>
+        </p:nvSpPr>
+        <p:spPr>
+          <a:xfrm>
+            <a:off x="4526279" y="3749039"/>
+            <a:ext cx="3108960" cy="822960"/>
+          </a:xfrm>
+          <a:prstGeom prst="rect">
+            <a:avLst/>
+          </a:prstGeom>
+          <a:noFill/>
+        </p:spPr>
+        <p:txBody>
+          <a:bodyPr wrap="square" anchor="t" lIns="45720" rIns="45720" tIns="27432" bIns="27432">
+            <a:spAutoFit/>
+          </a:bodyPr>
+          <a:lstStyle/>
+          <a:p>
+            <a:pPr algn="l">
+              <a:spcAft>
+                <a:spcPts val="600"/>
+              </a:spcAft>
+            </a:pPr>
+            <a:r>
+              <a:rPr sz="3600" b="1" i="0">
+                <a:solidFill>
+                  <a:srgbClr val="C55A11"/>
+                </a:solidFill>
+                <a:latin typeface="Cascadia Code SemiBold"/>
+              </a:rPr>
+              <a:t>25–30%</a:t>
+            </a:r>
+          </a:p>
+        </p:txBody>
+      </p:sp>
+      <p:sp>
+        <p:nvSpPr>
+          <p:cNvPr id="19" name="TextBox 18"/>
+          <p:cNvSpPr txBox="1"/>
+          <p:nvPr/>
+        </p:nvSpPr>
+        <p:spPr>
+          <a:xfrm>
+            <a:off x="4526279" y="4617720"/>
+            <a:ext cx="3108960" cy="1463040"/>
+          </a:xfrm>
+          <a:prstGeom prst="rect">
+            <a:avLst/>
+          </a:prstGeom>
+          <a:noFill/>
+        </p:spPr>
+        <p:txBody>
+          <a:bodyPr wrap="square" anchor="t" lIns="45720" rIns="45720" tIns="27432" bIns="27432">
+            <a:spAutoFit/>
+          </a:bodyPr>
+          <a:lstStyle/>
+          <a:p>
+            <a:pPr algn="l">
+              <a:spcAft>
+                <a:spcPts val="600"/>
+              </a:spcAft>
+            </a:pPr>
+            <a:r>
+              <a:rPr sz="1400" b="0" i="0">
+                <a:solidFill>
+                  <a:srgbClr val="111010"/>
+                </a:solidFill>
+                <a:latin typeface="Tahoma"/>
+              </a:rPr>
+              <a:t>задумывавшихся об отчислении называют причиной трудности совмещения учёбы и работы</a:t>
+            </a:r>
+          </a:p>
+        </p:txBody>
+      </p:sp>
+      <p:sp>
+        <p:nvSpPr>
+          <p:cNvPr id="20" name="Rounded Rectangle 19"/>
+          <p:cNvSpPr/>
+          <p:nvPr/>
+        </p:nvSpPr>
+        <p:spPr>
+          <a:xfrm>
+            <a:off x="8046719" y="3611880"/>
+            <a:ext cx="3520440" cy="2514600"/>
+          </a:xfrm>
+          <a:prstGeom prst="roundRect">
+            <a:avLst>
+              <a:gd name="adj" fmla="val 10000"/>
+            </a:avLst>
+          </a:prstGeom>
+          <a:solidFill>
+            <a:srgbClr val="FFF4D7"/>
+          </a:solidFill>
+          <a:ln w="15875">
+            <a:solidFill>
+              <a:srgbClr val="FFD966"/>
+            </a:solidFill>
+          </a:ln>
+          <a:effectLst/>
+        </p:spPr>
+        <p:style>
+          <a:lnRef idx="1">
+            <a:schemeClr val="accent1"/>
+          </a:lnRef>
+          <a:fillRef idx="3">
+            <a:schemeClr val="accent1"/>
+          </a:fillRef>
+          <a:effectRef idx="2">
+            <a:schemeClr val="accent1"/>
+          </a:effectRef>
+          <a:fontRef idx="minor">
+            <a:schemeClr val="lt1"/>
+          </a:fontRef>
+        </p:style>
+        <p:txBody>
+          <a:bodyPr rtlCol="0" anchor="ctr"/>
+          <a:lstStyle/>
+          <a:p>
+            <a:pPr algn="ctr"/>
+          </a:p>
+        </p:txBody>
+      </p:sp>
+      <p:sp>
+        <p:nvSpPr>
+          <p:cNvPr id="21" name="TextBox 20"/>
+          <p:cNvSpPr txBox="1"/>
+          <p:nvPr/>
+        </p:nvSpPr>
+        <p:spPr>
+          <a:xfrm>
+            <a:off x="8275319" y="3749039"/>
+            <a:ext cx="3108960" cy="822960"/>
+          </a:xfrm>
+          <a:prstGeom prst="rect">
+            <a:avLst/>
+          </a:prstGeom>
+          <a:noFill/>
+        </p:spPr>
+        <p:txBody>
+          <a:bodyPr wrap="square" anchor="t" lIns="45720" rIns="45720" tIns="27432" bIns="27432">
+            <a:spAutoFit/>
+          </a:bodyPr>
+          <a:lstStyle/>
+          <a:p>
+            <a:pPr algn="l">
+              <a:spcAft>
+                <a:spcPts val="600"/>
+              </a:spcAft>
+            </a:pPr>
+            <a:r>
+              <a:rPr sz="3600" b="1" i="0">
+                <a:solidFill>
+                  <a:srgbClr val="111010"/>
+                </a:solidFill>
+                <a:latin typeface="Cascadia Code SemiBold"/>
+              </a:rPr>
+              <a:t>?</a:t>
+            </a:r>
+          </a:p>
+        </p:txBody>
+      </p:sp>
+      <p:sp>
+        <p:nvSpPr>
+          <p:cNvPr id="22" name="TextBox 21"/>
+          <p:cNvSpPr txBox="1"/>
+          <p:nvPr/>
+        </p:nvSpPr>
+        <p:spPr>
+          <a:xfrm>
+            <a:off x="8275319" y="4617720"/>
+            <a:ext cx="3108960" cy="1463040"/>
+          </a:xfrm>
+          <a:prstGeom prst="rect">
+            <a:avLst/>
+          </a:prstGeom>
+          <a:noFill/>
+        </p:spPr>
+        <p:txBody>
+          <a:bodyPr wrap="square" anchor="t" lIns="45720" rIns="45720" tIns="27432" bIns="27432">
+            <a:spAutoFit/>
+          </a:bodyPr>
+          <a:lstStyle/>
+          <a:p>
+            <a:pPr algn="l">
+              <a:spcAft>
+                <a:spcPts val="600"/>
+              </a:spcAft>
+            </a:pPr>
+            <a:r>
+              <a:rPr sz="1400" b="0" i="0">
+                <a:solidFill>
+                  <a:srgbClr val="111010"/>
+                </a:solidFill>
+                <a:latin typeface="Tahoma"/>
+              </a:rPr>
+              <a:t>работа даёт опыт и деньги, но отнимает время у учёбы и сна — итоговый эффект неочевиден</a:t>
+            </a:r>
+          </a:p>
+        </p:txBody>
+      </p:sp>
+    </p:spTree>
+  </p:cSld>
+  <p:clrMapOvr>
+    <a:masterClrMapping/>
+  </p:clrMapOvr>
+</p:sld>
+</file>
+
+<file path=ppt/slides/slide3.xml><?xml version="1.0" encoding="utf-8"?>
+<p:sld xmlns:a="http://schemas.openxmlformats.org/drawingml/2006/main" xmlns:p="http://schemas.openxmlformats.org/presentationml/2006/main" xmlns:r="http://schemas.openxmlformats.org/officeDocument/2006/relationships">
+  <p:cSld>
+    <p:spTree>
+      <p:nvGrpSpPr>
+        <p:cNvPr id="1" name=""/>
+        <p:cNvGrpSpPr/>
+        <p:nvPr/>
+      </p:nvGrpSpPr>
+      <p:grpSpPr/>
+      <p:sp>
+        <p:nvSpPr>
+          <p:cNvPr id="2" name="Pentagon 1"/>
+          <p:cNvSpPr/>
+          <p:nvPr/>
+        </p:nvSpPr>
+        <p:spPr>
+          <a:xfrm>
+            <a:off x="137160" y="164592"/>
+            <a:ext cx="2514600" cy="384048"/>
+          </a:xfrm>
+          <a:prstGeom prst="homePlate">
+            <a:avLst/>
+          </a:prstGeom>
+          <a:solidFill>
+            <a:srgbClr val="FFF4D7"/>
+          </a:solidFill>
+          <a:ln>
+            <a:noFill/>
+          </a:ln>
+          <a:effectLst/>
+        </p:spPr>
+        <p:style>
+          <a:lnRef idx="1">
+            <a:schemeClr val="accent1"/>
+          </a:lnRef>
+          <a:fillRef idx="3">
+            <a:schemeClr val="accent1"/>
+          </a:fillRef>
+          <a:effectRef idx="2">
+            <a:schemeClr val="accent1"/>
+          </a:effectRef>
+          <a:fontRef idx="minor">
+            <a:schemeClr val="lt1"/>
+          </a:fontRef>
+        </p:style>
+        <p:txBody>
+          <a:bodyPr rtlCol="0" anchor="ctr" lIns="45720" rIns="45720"/>
+          <a:lstStyle/>
+          <a:p>
+            <a:pPr algn="ctr"/>
+            <a:r>
+              <a:rPr sz="1200" b="0">
+                <a:solidFill>
+                  <a:srgbClr val="111010"/>
+                </a:solidFill>
+                <a:latin typeface="Cascadia Code SemiBold"/>
+              </a:rPr>
+              <a:t>ВОПРОС</a:t>
+            </a:r>
+          </a:p>
+        </p:txBody>
+      </p:sp>
+      <p:sp>
+        <p:nvSpPr>
+          <p:cNvPr id="3" name="Chevron 2"/>
+          <p:cNvSpPr/>
+          <p:nvPr/>
+        </p:nvSpPr>
+        <p:spPr>
+          <a:xfrm>
+            <a:off x="2468879" y="164592"/>
+            <a:ext cx="2514600" cy="384048"/>
+          </a:xfrm>
+          <a:prstGeom prst="chevron">
+            <a:avLst/>
+          </a:prstGeom>
+          <a:solidFill>
+            <a:srgbClr val="FFD966"/>
+          </a:solidFill>
+          <a:ln>
+            <a:noFill/>
+          </a:ln>
+          <a:effectLst/>
+        </p:spPr>
+        <p:style>
+          <a:lnRef idx="1">
+            <a:schemeClr val="accent1"/>
+          </a:lnRef>
+          <a:fillRef idx="3">
+            <a:schemeClr val="accent1"/>
+          </a:fillRef>
+          <a:effectRef idx="2">
+            <a:schemeClr val="accent1"/>
+          </a:effectRef>
+          <a:fontRef idx="minor">
+            <a:schemeClr val="lt1"/>
+          </a:fontRef>
+        </p:style>
+        <p:txBody>
+          <a:bodyPr rtlCol="0" anchor="ctr" lIns="45720" rIns="45720"/>
+          <a:lstStyle/>
+          <a:p>
+            <a:pPr algn="ctr"/>
+            <a:r>
+              <a:rPr sz="1200" b="1">
+                <a:solidFill>
+                  <a:srgbClr val="111010"/>
+                </a:solidFill>
+                <a:latin typeface="Cascadia Code SemiBold"/>
+              </a:rPr>
+              <a:t>ДАННЫЕ</a:t>
+            </a:r>
+          </a:p>
+        </p:txBody>
+      </p:sp>
+      <p:sp>
+        <p:nvSpPr>
+          <p:cNvPr id="4" name="Chevron 3"/>
+          <p:cNvSpPr/>
+          <p:nvPr/>
+        </p:nvSpPr>
+        <p:spPr>
+          <a:xfrm>
+            <a:off x="4800600" y="164592"/>
+            <a:ext cx="2514600" cy="384048"/>
+          </a:xfrm>
+          <a:prstGeom prst="chevron">
+            <a:avLst/>
+          </a:prstGeom>
+          <a:solidFill>
+            <a:srgbClr val="FFF4D7"/>
+          </a:solidFill>
+          <a:ln>
+            <a:noFill/>
+          </a:ln>
+          <a:effectLst/>
+        </p:spPr>
+        <p:style>
+          <a:lnRef idx="1">
+            <a:schemeClr val="accent1"/>
+          </a:lnRef>
+          <a:fillRef idx="3">
+            <a:schemeClr val="accent1"/>
+          </a:fillRef>
+          <a:effectRef idx="2">
+            <a:schemeClr val="accent1"/>
+          </a:effectRef>
+          <a:fontRef idx="minor">
+            <a:schemeClr val="lt1"/>
+          </a:fontRef>
+        </p:style>
+        <p:txBody>
+          <a:bodyPr rtlCol="0" anchor="ctr" lIns="45720" rIns="45720"/>
+          <a:lstStyle/>
+          <a:p>
+            <a:pPr algn="ctr"/>
+            <a:r>
+              <a:rPr sz="1200" b="0">
+                <a:solidFill>
+                  <a:srgbClr val="111010"/>
+                </a:solidFill>
+                <a:latin typeface="Cascadia Code SemiBold"/>
+              </a:rPr>
+              <a:t>МЕТОДЫ</a:t>
+            </a:r>
+          </a:p>
+        </p:txBody>
+      </p:sp>
+      <p:sp>
+        <p:nvSpPr>
+          <p:cNvPr id="5" name="Chevron 4"/>
+          <p:cNvSpPr/>
+          <p:nvPr/>
+        </p:nvSpPr>
+        <p:spPr>
+          <a:xfrm>
+            <a:off x="7132320" y="164592"/>
+            <a:ext cx="2514600" cy="384048"/>
+          </a:xfrm>
+          <a:prstGeom prst="chevron">
+            <a:avLst/>
+          </a:prstGeom>
+          <a:solidFill>
+            <a:srgbClr val="FFF4D7"/>
+          </a:solidFill>
+          <a:ln>
+            <a:noFill/>
+          </a:ln>
+          <a:effectLst/>
+        </p:spPr>
+        <p:style>
+          <a:lnRef idx="1">
+            <a:schemeClr val="accent1"/>
+          </a:lnRef>
+          <a:fillRef idx="3">
+            <a:schemeClr val="accent1"/>
+          </a:fillRef>
+          <a:effectRef idx="2">
+            <a:schemeClr val="accent1"/>
+          </a:effectRef>
+          <a:fontRef idx="minor">
+            <a:schemeClr val="lt1"/>
+          </a:fontRef>
+        </p:style>
+        <p:txBody>
+          <a:bodyPr rtlCol="0" anchor="ctr" lIns="45720" rIns="45720"/>
+          <a:lstStyle/>
+          <a:p>
+            <a:pPr algn="ctr"/>
+            <a:r>
+              <a:rPr sz="1200" b="0">
+                <a:solidFill>
+                  <a:srgbClr val="111010"/>
+                </a:solidFill>
+                <a:latin typeface="Cascadia Code SemiBold"/>
+              </a:rPr>
+              <a:t>РЕЗУЛЬТАТЫ</a:t>
+            </a:r>
+          </a:p>
+        </p:txBody>
+      </p:sp>
+      <p:sp>
+        <p:nvSpPr>
+          <p:cNvPr id="6" name="Chevron 5"/>
+          <p:cNvSpPr/>
+          <p:nvPr/>
+        </p:nvSpPr>
+        <p:spPr>
+          <a:xfrm>
+            <a:off x="9464040" y="164592"/>
+            <a:ext cx="2514600" cy="384048"/>
+          </a:xfrm>
+          <a:prstGeom prst="chevron">
+            <a:avLst/>
+          </a:prstGeom>
+          <a:solidFill>
+            <a:srgbClr val="FFF4D7"/>
+          </a:solidFill>
+          <a:ln>
+            <a:noFill/>
+          </a:ln>
+          <a:effectLst/>
+        </p:spPr>
+        <p:style>
+          <a:lnRef idx="1">
+            <a:schemeClr val="accent1"/>
+          </a:lnRef>
+          <a:fillRef idx="3">
+            <a:schemeClr val="accent1"/>
+          </a:fillRef>
+          <a:effectRef idx="2">
+            <a:schemeClr val="accent1"/>
+          </a:effectRef>
+          <a:fontRef idx="minor">
+            <a:schemeClr val="lt1"/>
+          </a:fontRef>
+        </p:style>
+        <p:txBody>
+          <a:bodyPr rtlCol="0" anchor="ctr" lIns="45720" rIns="45720"/>
+          <a:lstStyle/>
+          <a:p>
+            <a:pPr algn="ctr"/>
+            <a:r>
+              <a:rPr sz="1200" b="0">
+                <a:solidFill>
+                  <a:srgbClr val="111010"/>
+                </a:solidFill>
+                <a:latin typeface="Cascadia Code SemiBold"/>
+              </a:rPr>
+              <a:t>ВЫВОДЫ</a:t>
+            </a:r>
+          </a:p>
+        </p:txBody>
+      </p:sp>
+      <p:sp>
+        <p:nvSpPr>
+          <p:cNvPr id="7" name="Rectangle 6"/>
+          <p:cNvSpPr/>
+          <p:nvPr/>
+        </p:nvSpPr>
+        <p:spPr>
+          <a:xfrm>
+            <a:off x="0" y="6565392"/>
+            <a:ext cx="1783080" cy="91440"/>
+          </a:xfrm>
+          <a:prstGeom prst="rect">
+            <a:avLst/>
+          </a:prstGeom>
+          <a:solidFill>
+            <a:srgbClr val="111010"/>
+          </a:solidFill>
+          <a:ln>
+            <a:noFill/>
+          </a:ln>
+          <a:effectLst/>
+        </p:spPr>
+        <p:style>
+          <a:lnRef idx="1">
+            <a:schemeClr val="accent1"/>
+          </a:lnRef>
+          <a:fillRef idx="3">
+            <a:schemeClr val="accent1"/>
+          </a:fillRef>
+          <a:effectRef idx="2">
+            <a:schemeClr val="accent1"/>
+          </a:effectRef>
+          <a:fontRef idx="minor">
+            <a:schemeClr val="lt1"/>
+          </a:fontRef>
+        </p:style>
+        <p:txBody>
+          <a:bodyPr rtlCol="0" anchor="ctr"/>
+          <a:lstStyle/>
+          <a:p>
+            <a:pPr algn="ctr"/>
+          </a:p>
+        </p:txBody>
+      </p:sp>
+      <p:sp>
+        <p:nvSpPr>
+          <p:cNvPr id="8" name="Rectangle 7"/>
+          <p:cNvSpPr/>
+          <p:nvPr/>
+        </p:nvSpPr>
+        <p:spPr>
+          <a:xfrm>
+            <a:off x="0" y="6656832"/>
+            <a:ext cx="2743200" cy="128016"/>
+          </a:xfrm>
+          <a:prstGeom prst="rect">
+            <a:avLst/>
+          </a:prstGeom>
+          <a:solidFill>
+            <a:srgbClr val="FFD966"/>
+          </a:solidFill>
+          <a:ln>
+            <a:noFill/>
+          </a:ln>
+          <a:effectLst/>
+        </p:spPr>
+        <p:style>
+          <a:lnRef idx="1">
+            <a:schemeClr val="accent1"/>
+          </a:lnRef>
+          <a:fillRef idx="3">
+            <a:schemeClr val="accent1"/>
+          </a:fillRef>
+          <a:effectRef idx="2">
+            <a:schemeClr val="accent1"/>
+          </a:effectRef>
+          <a:fontRef idx="minor">
+            <a:schemeClr val="lt1"/>
+          </a:fontRef>
+        </p:style>
+        <p:txBody>
+          <a:bodyPr rtlCol="0" anchor="ctr"/>
+          <a:lstStyle/>
+          <a:p>
+            <a:pPr algn="ctr"/>
+          </a:p>
+        </p:txBody>
+      </p:sp>
+      <p:sp>
+        <p:nvSpPr>
+          <p:cNvPr id="9" name="TextBox 8"/>
+          <p:cNvSpPr txBox="1"/>
+          <p:nvPr/>
+        </p:nvSpPr>
+        <p:spPr>
+          <a:xfrm>
+            <a:off x="11247120" y="6355080"/>
+            <a:ext cx="731520" cy="365760"/>
+          </a:xfrm>
+          <a:prstGeom prst="rect">
+            <a:avLst/>
+          </a:prstGeom>
+          <a:noFill/>
+        </p:spPr>
+        <p:txBody>
+          <a:bodyPr wrap="square" anchor="t" lIns="45720" rIns="45720" tIns="27432" bIns="27432">
+            <a:spAutoFit/>
+          </a:bodyPr>
+          <a:lstStyle/>
+          <a:p>
+            <a:pPr algn="r">
+              <a:spcAft>
+                <a:spcPts val="600"/>
+              </a:spcAft>
+            </a:pPr>
+            <a:r>
+              <a:rPr sz="1200" b="0" i="0">
+                <a:solidFill>
+                  <a:srgbClr val="848484"/>
+                </a:solidFill>
+                <a:latin typeface="Tahoma"/>
+              </a:rPr>
+              <a:t>3</a:t>
+            </a:r>
+          </a:p>
+        </p:txBody>
+      </p:sp>
+      <p:sp>
+        <p:nvSpPr>
+          <p:cNvPr id="10" name="TextBox 9"/>
+          <p:cNvSpPr txBox="1"/>
+          <p:nvPr/>
+        </p:nvSpPr>
+        <p:spPr>
+          <a:xfrm>
+            <a:off x="457200" y="731520"/>
+            <a:ext cx="11247120" cy="731520"/>
+          </a:xfrm>
+          <a:prstGeom prst="rect">
+            <a:avLst/>
+          </a:prstGeom>
+          <a:noFill/>
+        </p:spPr>
+        <p:txBody>
+          <a:bodyPr wrap="square" anchor="t" lIns="45720" rIns="45720" tIns="27432" bIns="27432">
+            <a:spAutoFit/>
+          </a:bodyPr>
+          <a:lstStyle/>
+          <a:p>
+            <a:pPr algn="l">
+              <a:spcAft>
+                <a:spcPts val="600"/>
+              </a:spcAft>
+            </a:pPr>
+            <a:r>
+              <a:rPr sz="2800" b="0" i="0">
+                <a:solidFill>
+                  <a:srgbClr val="111010"/>
+                </a:solidFill>
+                <a:latin typeface="Arial Black"/>
+              </a:rPr>
+              <a:t>Источник данных</a:t>
+            </a:r>
+          </a:p>
+        </p:txBody>
+      </p:sp>
+      <p:sp>
+        <p:nvSpPr>
+          <p:cNvPr id="11" name="Rounded Rectangle 10"/>
+          <p:cNvSpPr/>
+          <p:nvPr/>
+        </p:nvSpPr>
+        <p:spPr>
+          <a:xfrm>
+            <a:off x="548640" y="1600200"/>
+            <a:ext cx="5486400" cy="2148840"/>
           </a:xfrm>
           <a:prstGeom prst="roundRect">
             <a:avLst>
@@ -5177,14 +6626,14 @@
       </p:sp>
       <p:sp>
         <p:nvSpPr>
-          <p:cNvPr id="14" name="TextBox 13"/>
+          <p:cNvPr id="12" name="TextBox 11"/>
           <p:cNvSpPr txBox="1"/>
           <p:nvPr/>
         </p:nvSpPr>
         <p:spPr>
           <a:xfrm>
-            <a:off x="1280160" y="3794760"/>
-            <a:ext cx="2743200" cy="457200"/>
+            <a:off x="731520" y="1737360"/>
+            <a:ext cx="5120640" cy="457200"/>
           </a:xfrm>
           <a:prstGeom prst="rect">
             <a:avLst/>
@@ -5192,7 +6641,7 @@
           <a:noFill/>
         </p:spPr>
         <p:txBody>
-          <a:bodyPr wrap="square" lIns="45720" tIns="27432" rIns="45720" bIns="27432" anchor="t">
+          <a:bodyPr wrap="square" anchor="t" lIns="45720" rIns="45720" tIns="27432" bIns="27432">
             <a:spAutoFit/>
           </a:bodyPr>
           <a:lstStyle/>
@@ -5203,33 +6652,27 @@
               </a:spcAft>
             </a:pPr>
             <a:r>
-              <a:rPr sz="1800" b="1" i="0">
+              <a:rPr sz="1600" b="1" i="0">
                 <a:solidFill>
                   <a:srgbClr val="111010"/>
                 </a:solidFill>
-                <a:latin typeface="Cascadia Code SemiBold" panose="020B0609020000020004"/>
+                <a:latin typeface="Cascadia Code SemiBold"/>
               </a:rPr>
-              <a:t>Работа</a:t>
-            </a:r>
-            <a:endParaRPr sz="1800" b="1" i="0">
-              <a:solidFill>
-                <a:srgbClr val="111010"/>
-              </a:solidFill>
-              <a:latin typeface="Cascadia Code SemiBold" panose="020B0609020000020004"/>
-            </a:endParaRPr>
-          </a:p>
-        </p:txBody>
-      </p:sp>
-      <p:sp>
-        <p:nvSpPr>
-          <p:cNvPr id="15" name="TextBox 14"/>
+              <a:t>Лонгитюд ИО НИУ ВШЭ</a:t>
+            </a:r>
+          </a:p>
+        </p:txBody>
+      </p:sp>
+      <p:sp>
+        <p:nvSpPr>
+          <p:cNvPr id="13" name="TextBox 12"/>
           <p:cNvSpPr txBox="1"/>
           <p:nvPr/>
         </p:nvSpPr>
         <p:spPr>
           <a:xfrm>
-            <a:off x="1280160" y="4251960"/>
-            <a:ext cx="2743200" cy="1691640"/>
+            <a:off x="731520" y="2194560"/>
+            <a:ext cx="5120640" cy="1463040"/>
           </a:xfrm>
           <a:prstGeom prst="rect">
             <a:avLst/>
@@ -5237,7 +6680,7 @@
           <a:noFill/>
         </p:spPr>
         <p:txBody>
-          <a:bodyPr wrap="square" lIns="45720" tIns="27432" rIns="45720" bIns="27432" anchor="t">
+          <a:bodyPr wrap="square" anchor="t" lIns="45720" rIns="45720" tIns="27432" bIns="27432">
             <a:spAutoFit/>
           </a:bodyPr>
           <a:lstStyle/>
@@ -5248,20 +6691,14 @@
               </a:spcAft>
             </a:pPr>
             <a:r>
-              <a:rPr sz="1400" b="0" i="0">
+              <a:rPr sz="1300" b="0" i="0">
                 <a:solidFill>
                   <a:srgbClr val="111010"/>
                 </a:solidFill>
-                <a:latin typeface="Tahoma" panose="020B0604030504040204"/>
+                <a:latin typeface="Tahoma"/>
               </a:rPr>
-              <a:t>Факт работы</a:t>
-            </a:r>
-            <a:endParaRPr sz="1400" b="0" i="0">
-              <a:solidFill>
-                <a:srgbClr val="111010"/>
-              </a:solidFill>
-              <a:latin typeface="Tahoma" panose="020B0604030504040204"/>
-            </a:endParaRPr>
+              <a:t>«Модели образовательного поведения студентов в их связи с показателями успешности»</a:t>
+            </a:r>
           </a:p>
           <a:p>
             <a:pPr algn="l">
@@ -5270,21 +6707,38 @@
               </a:spcAft>
             </a:pPr>
             <a:r>
-              <a:rPr sz="1400" b="0" i="0">
+              <a:rPr sz="1300" b="0" i="0">
                 <a:solidFill>
                   <a:srgbClr val="111010"/>
                 </a:solidFill>
-                <a:latin typeface="Tahoma" panose="020B0604030504040204"/>
+                <a:latin typeface="Tahoma"/>
               </a:rPr>
-              <a:t>Интенсивность: тип занятости и часы</a:t>
-            </a:r>
-            <a:endParaRPr sz="1400" b="0" i="0">
-              <a:solidFill>
-                <a:srgbClr val="111010"/>
-              </a:solidFill>
-              <a:latin typeface="Tahoma" panose="020B0604030504040204"/>
-            </a:endParaRPr>
-          </a:p>
+              <a:t>9 селективных вузов · многоступенчатая выборка: направления → группы → сплошной опрос</a:t>
+            </a:r>
+          </a:p>
+        </p:txBody>
+      </p:sp>
+      <p:sp>
+        <p:nvSpPr>
+          <p:cNvPr id="14" name="TextBox 13"/>
+          <p:cNvSpPr txBox="1"/>
+          <p:nvPr/>
+        </p:nvSpPr>
+        <p:spPr>
+          <a:xfrm>
+            <a:off x="548640" y="3931920"/>
+            <a:ext cx="1828800" cy="914400"/>
+          </a:xfrm>
+          <a:prstGeom prst="rect">
+            <a:avLst/>
+          </a:prstGeom>
+          <a:noFill/>
+        </p:spPr>
+        <p:txBody>
+          <a:bodyPr wrap="square" anchor="t" lIns="45720" rIns="45720" tIns="27432" bIns="27432">
+            <a:spAutoFit/>
+          </a:bodyPr>
+          <a:lstStyle/>
           <a:p>
             <a:pPr algn="l">
               <a:spcAft>
@@ -5292,81 +6746,27 @@
               </a:spcAft>
             </a:pPr>
             <a:r>
-              <a:rPr sz="1400" b="0" i="0">
+              <a:rPr sz="3400" b="1" i="0">
                 <a:solidFill>
                   <a:srgbClr val="111010"/>
                 </a:solidFill>
-                <a:latin typeface="Tahoma" panose="020B0604030504040204"/>
+                <a:latin typeface="Cascadia Code SemiBold"/>
               </a:rPr>
-              <a:t>Тип: по специальности, мотив</a:t>
-            </a:r>
-            <a:endParaRPr sz="1400" b="0" i="0">
-              <a:solidFill>
-                <a:srgbClr val="111010"/>
-              </a:solidFill>
-              <a:latin typeface="Tahoma" panose="020B0604030504040204"/>
-            </a:endParaRPr>
-          </a:p>
-        </p:txBody>
-      </p:sp>
-      <p:sp>
-        <p:nvSpPr>
-          <p:cNvPr id="16" name="Rounded Rectangle 15"/>
-          <p:cNvSpPr/>
-          <p:nvPr/>
-        </p:nvSpPr>
-        <p:spPr>
-          <a:xfrm>
-            <a:off x="4526280" y="3657600"/>
-            <a:ext cx="3108960" cy="2377440"/>
-          </a:xfrm>
-          <a:prstGeom prst="roundRect">
-            <a:avLst>
-              <a:gd name="adj" fmla="val 12000"/>
-            </a:avLst>
-          </a:prstGeom>
-          <a:solidFill>
-            <a:srgbClr val="FFF4D7"/>
-          </a:solidFill>
-          <a:ln w="19050">
-            <a:solidFill>
-              <a:srgbClr val="FFD966"/>
-            </a:solidFill>
-          </a:ln>
-          <a:effectLst/>
-        </p:spPr>
-        <p:style>
-          <a:lnRef idx="1">
-            <a:schemeClr val="accent1"/>
-          </a:lnRef>
-          <a:fillRef idx="3">
-            <a:schemeClr val="accent1"/>
-          </a:fillRef>
-          <a:effectRef idx="2">
-            <a:schemeClr val="accent1"/>
-          </a:effectRef>
-          <a:fontRef idx="minor">
-            <a:schemeClr val="lt1"/>
-          </a:fontRef>
-        </p:style>
-        <p:txBody>
-          <a:bodyPr rtlCol="0" anchor="ctr"/>
-          <a:lstStyle/>
-          <a:p>
-            <a:pPr algn="ctr"/>
-          </a:p>
-        </p:txBody>
-      </p:sp>
-      <p:sp>
-        <p:nvSpPr>
-          <p:cNvPr id="17" name="TextBox 16"/>
+              <a:t>1 236</a:t>
+            </a:r>
+          </a:p>
+        </p:txBody>
+      </p:sp>
+      <p:sp>
+        <p:nvSpPr>
+          <p:cNvPr id="15" name="TextBox 14"/>
           <p:cNvSpPr txBox="1"/>
           <p:nvPr/>
         </p:nvSpPr>
         <p:spPr>
           <a:xfrm>
-            <a:off x="4709160" y="3794760"/>
-            <a:ext cx="2743200" cy="457200"/>
+            <a:off x="548640" y="4846320"/>
+            <a:ext cx="1828800" cy="731520"/>
           </a:xfrm>
           <a:prstGeom prst="rect">
             <a:avLst/>
@@ -5374,7 +6774,7 @@
           <a:noFill/>
         </p:spPr>
         <p:txBody>
-          <a:bodyPr wrap="square" lIns="45720" tIns="27432" rIns="45720" bIns="27432" anchor="t">
+          <a:bodyPr wrap="square" anchor="t" lIns="45720" rIns="45720" tIns="27432" bIns="27432">
             <a:spAutoFit/>
           </a:bodyPr>
           <a:lstStyle/>
@@ -5385,33 +6785,28 @@
               </a:spcAft>
             </a:pPr>
             <a:r>
-              <a:rPr sz="1800" b="1" i="0">
+              <a:rPr sz="1400" b="0" i="0">
                 <a:solidFill>
                   <a:srgbClr val="111010"/>
                 </a:solidFill>
-                <a:latin typeface="Cascadia Code SemiBold" panose="020B0609020000020004"/>
+                <a:latin typeface="Tahoma"/>
               </a:rPr>
-              <a:t>Учёба</a:t>
-            </a:r>
-            <a:endParaRPr sz="1800" b="1" i="0">
-              <a:solidFill>
-                <a:srgbClr val="111010"/>
-              </a:solidFill>
-              <a:latin typeface="Cascadia Code SemiBold" panose="020B0609020000020004"/>
-            </a:endParaRPr>
-          </a:p>
-        </p:txBody>
-      </p:sp>
-      <p:sp>
-        <p:nvSpPr>
-          <p:cNvPr id="18" name="TextBox 17"/>
+              <a:t>студентов
+3 курс (2024/25)</a:t>
+            </a:r>
+          </a:p>
+        </p:txBody>
+      </p:sp>
+      <p:sp>
+        <p:nvSpPr>
+          <p:cNvPr id="16" name="TextBox 15"/>
           <p:cNvSpPr txBox="1"/>
           <p:nvPr/>
         </p:nvSpPr>
         <p:spPr>
           <a:xfrm>
-            <a:off x="4709160" y="4251960"/>
-            <a:ext cx="2743200" cy="1691640"/>
+            <a:off x="2377440" y="3931920"/>
+            <a:ext cx="1828800" cy="914400"/>
           </a:xfrm>
           <a:prstGeom prst="rect">
             <a:avLst/>
@@ -5419,7 +6814,7 @@
           <a:noFill/>
         </p:spPr>
         <p:txBody>
-          <a:bodyPr wrap="square" lIns="45720" tIns="27432" rIns="45720" bIns="27432" anchor="t">
+          <a:bodyPr wrap="square" anchor="t" lIns="45720" rIns="45720" tIns="27432" bIns="27432">
             <a:spAutoFit/>
           </a:bodyPr>
           <a:lstStyle/>
@@ -5430,21 +6825,38 @@
               </a:spcAft>
             </a:pPr>
             <a:r>
-              <a:rPr sz="1400" b="0" i="0">
+              <a:rPr sz="3400" b="1" i="0">
                 <a:solidFill>
                   <a:srgbClr val="111010"/>
                 </a:solidFill>
-                <a:latin typeface="Tahoma" panose="020B0604030504040204"/>
+                <a:latin typeface="Cascadia Code SemiBold"/>
               </a:rPr>
-              <a:t>Оценки за сессию</a:t>
-            </a:r>
-            <a:endParaRPr sz="1400" b="0" i="0">
-              <a:solidFill>
-                <a:srgbClr val="111010"/>
-              </a:solidFill>
-              <a:latin typeface="Tahoma" panose="020B0604030504040204"/>
-            </a:endParaRPr>
-          </a:p>
+              <a:t>914</a:t>
+            </a:r>
+          </a:p>
+        </p:txBody>
+      </p:sp>
+      <p:sp>
+        <p:nvSpPr>
+          <p:cNvPr id="17" name="TextBox 16"/>
+          <p:cNvSpPr txBox="1"/>
+          <p:nvPr/>
+        </p:nvSpPr>
+        <p:spPr>
+          <a:xfrm>
+            <a:off x="2377440" y="4846320"/>
+            <a:ext cx="1828800" cy="731520"/>
+          </a:xfrm>
+          <a:prstGeom prst="rect">
+            <a:avLst/>
+          </a:prstGeom>
+          <a:noFill/>
+        </p:spPr>
+        <p:txBody>
+          <a:bodyPr wrap="square" anchor="t" lIns="45720" rIns="45720" tIns="27432" bIns="27432">
+            <a:spAutoFit/>
+          </a:bodyPr>
+          <a:lstStyle/>
           <a:p>
             <a:pPr algn="l">
               <a:spcAft>
@@ -5456,17 +6868,35 @@
                 <a:solidFill>
                   <a:srgbClr val="111010"/>
                 </a:solidFill>
-                <a:latin typeface="Tahoma" panose="020B0604030504040204"/>
+                <a:latin typeface="Tahoma"/>
               </a:rPr>
-              <a:t>Удовлетворённость обучением</a:t>
-            </a:r>
-            <a:endParaRPr sz="1400" b="0" i="0">
-              <a:solidFill>
-                <a:srgbClr val="111010"/>
-              </a:solidFill>
-              <a:latin typeface="Tahoma" panose="020B0604030504040204"/>
-            </a:endParaRPr>
-          </a:p>
+              <a:t>полных анкет
+4 курс (2025/26)</a:t>
+            </a:r>
+          </a:p>
+        </p:txBody>
+      </p:sp>
+      <p:sp>
+        <p:nvSpPr>
+          <p:cNvPr id="18" name="TextBox 17"/>
+          <p:cNvSpPr txBox="1"/>
+          <p:nvPr/>
+        </p:nvSpPr>
+        <p:spPr>
+          <a:xfrm>
+            <a:off x="4206240" y="3931920"/>
+            <a:ext cx="2011680" cy="914400"/>
+          </a:xfrm>
+          <a:prstGeom prst="rect">
+            <a:avLst/>
+          </a:prstGeom>
+          <a:noFill/>
+        </p:spPr>
+        <p:txBody>
+          <a:bodyPr wrap="square" anchor="t" lIns="45720" rIns="45720" tIns="27432" bIns="27432">
+            <a:spAutoFit/>
+          </a:bodyPr>
+          <a:lstStyle/>
           <a:p>
             <a:pPr algn="l">
               <a:spcAft>
@@ -5474,81 +6904,27 @@
               </a:spcAft>
             </a:pPr>
             <a:r>
-              <a:rPr sz="1400" b="0" i="0">
+              <a:rPr sz="3400" b="1" i="0">
                 <a:solidFill>
                   <a:srgbClr val="111010"/>
                 </a:solidFill>
-                <a:latin typeface="Tahoma" panose="020B0604030504040204"/>
+                <a:latin typeface="Cascadia Code SemiBold"/>
               </a:rPr>
-              <a:t>Мысли об отчислении</a:t>
-            </a:r>
-            <a:endParaRPr sz="1400" b="0" i="0">
-              <a:solidFill>
-                <a:srgbClr val="111010"/>
-              </a:solidFill>
-              <a:latin typeface="Tahoma" panose="020B0604030504040204"/>
-            </a:endParaRPr>
-          </a:p>
-        </p:txBody>
-      </p:sp>
-      <p:sp>
-        <p:nvSpPr>
-          <p:cNvPr id="19" name="Rounded Rectangle 18"/>
-          <p:cNvSpPr/>
-          <p:nvPr/>
-        </p:nvSpPr>
-        <p:spPr>
-          <a:xfrm>
-            <a:off x="7955279" y="3657600"/>
-            <a:ext cx="3108960" cy="2377440"/>
-          </a:xfrm>
-          <a:prstGeom prst="roundRect">
-            <a:avLst>
-              <a:gd name="adj" fmla="val 12000"/>
-            </a:avLst>
-          </a:prstGeom>
-          <a:solidFill>
-            <a:srgbClr val="FFF4D7"/>
-          </a:solidFill>
-          <a:ln w="19050">
-            <a:solidFill>
-              <a:srgbClr val="FFD966"/>
-            </a:solidFill>
-          </a:ln>
-          <a:effectLst/>
-        </p:spPr>
-        <p:style>
-          <a:lnRef idx="1">
-            <a:schemeClr val="accent1"/>
-          </a:lnRef>
-          <a:fillRef idx="3">
-            <a:schemeClr val="accent1"/>
-          </a:fillRef>
-          <a:effectRef idx="2">
-            <a:schemeClr val="accent1"/>
-          </a:effectRef>
-          <a:fontRef idx="minor">
-            <a:schemeClr val="lt1"/>
-          </a:fontRef>
-        </p:style>
-        <p:txBody>
-          <a:bodyPr rtlCol="0" anchor="ctr"/>
-          <a:lstStyle/>
-          <a:p>
-            <a:pPr algn="ctr"/>
-          </a:p>
-        </p:txBody>
-      </p:sp>
-      <p:sp>
-        <p:nvSpPr>
-          <p:cNvPr id="20" name="TextBox 19"/>
+              <a:t>724</a:t>
+            </a:r>
+          </a:p>
+        </p:txBody>
+      </p:sp>
+      <p:sp>
+        <p:nvSpPr>
+          <p:cNvPr id="19" name="TextBox 18"/>
           <p:cNvSpPr txBox="1"/>
           <p:nvPr/>
         </p:nvSpPr>
         <p:spPr>
           <a:xfrm>
-            <a:off x="8138159" y="3794760"/>
-            <a:ext cx="2743200" cy="457200"/>
+            <a:off x="4206240" y="4846320"/>
+            <a:ext cx="2011680" cy="731520"/>
           </a:xfrm>
           <a:prstGeom prst="rect">
             <a:avLst/>
@@ -5556,7 +6932,7 @@
           <a:noFill/>
         </p:spPr>
         <p:txBody>
-          <a:bodyPr wrap="square" lIns="45720" tIns="27432" rIns="45720" bIns="27432" anchor="t">
+          <a:bodyPr wrap="square" anchor="t" lIns="45720" rIns="45720" tIns="27432" bIns="27432">
             <a:spAutoFit/>
           </a:bodyPr>
           <a:lstStyle/>
@@ -5567,33 +6943,28 @@
               </a:spcAft>
             </a:pPr>
             <a:r>
-              <a:rPr sz="1800" b="1" i="0">
+              <a:rPr sz="1400" b="0" i="0">
                 <a:solidFill>
                   <a:srgbClr val="111010"/>
                 </a:solidFill>
-                <a:latin typeface="Cascadia Code SemiBold" panose="020B0609020000020004"/>
+                <a:latin typeface="Tahoma"/>
               </a:rPr>
-              <a:t>Здоровье</a:t>
-            </a:r>
-            <a:endParaRPr sz="1800" b="1" i="0">
-              <a:solidFill>
-                <a:srgbClr val="111010"/>
-              </a:solidFill>
-              <a:latin typeface="Cascadia Code SemiBold" panose="020B0609020000020004"/>
-            </a:endParaRPr>
-          </a:p>
-        </p:txBody>
-      </p:sp>
-      <p:sp>
-        <p:nvSpPr>
-          <p:cNvPr id="21" name="TextBox 20"/>
+              <a:t>в обеих волнах
+(сравнение с собой)</a:t>
+            </a:r>
+          </a:p>
+        </p:txBody>
+      </p:sp>
+      <p:sp>
+        <p:nvSpPr>
+          <p:cNvPr id="20" name="TextBox 19"/>
           <p:cNvSpPr txBox="1"/>
           <p:nvPr/>
         </p:nvSpPr>
         <p:spPr>
           <a:xfrm>
-            <a:off x="8138159" y="4251960"/>
-            <a:ext cx="2743200" cy="1691640"/>
+            <a:off x="548640" y="5623560"/>
+            <a:ext cx="5577840" cy="640080"/>
           </a:xfrm>
           <a:prstGeom prst="rect">
             <a:avLst/>
@@ -5601,7 +6972,7 @@
           <a:noFill/>
         </p:spPr>
         <p:txBody>
-          <a:bodyPr wrap="square" lIns="45720" tIns="27432" rIns="45720" bIns="27432" anchor="t">
+          <a:bodyPr wrap="square" anchor="t" lIns="45720" rIns="45720" tIns="27432" bIns="27432">
             <a:spAutoFit/>
           </a:bodyPr>
           <a:lstStyle/>
@@ -5612,21 +6983,38 @@
               </a:spcAft>
             </a:pPr>
             <a:r>
-              <a:rPr sz="1400" b="0" i="0">
-                <a:solidFill>
-                  <a:srgbClr val="111010"/>
-                </a:solidFill>
-                <a:latin typeface="Tahoma" panose="020B0604030504040204"/>
+              <a:rPr sz="1200" b="0" i="0">
+                <a:solidFill>
+                  <a:srgbClr val="848484"/>
+                </a:solidFill>
+                <a:latin typeface="Tahoma"/>
               </a:rPr>
-              <a:t>Продолжительность сна</a:t>
-            </a:r>
-            <a:endParaRPr sz="1400" b="0" i="0">
-              <a:solidFill>
-                <a:srgbClr val="111010"/>
-              </a:solidFill>
-              <a:latin typeface="Tahoma" panose="020B0604030504040204"/>
-            </a:endParaRPr>
-          </a:p>
+              <a:t>Переменные: занятость (тип, часы, сфера, мотив), учёба (оценки, удовлетворённость, мысли об отчислении), здоровье (сон, спорт, курение, алкоголь)</a:t>
+            </a:r>
+          </a:p>
+        </p:txBody>
+      </p:sp>
+      <p:sp>
+        <p:nvSpPr>
+          <p:cNvPr id="21" name="TextBox 20"/>
+          <p:cNvSpPr txBox="1"/>
+          <p:nvPr/>
+        </p:nvSpPr>
+        <p:spPr>
+          <a:xfrm>
+            <a:off x="6492240" y="1554480"/>
+            <a:ext cx="5303520" cy="411480"/>
+          </a:xfrm>
+          <a:prstGeom prst="rect">
+            <a:avLst/>
+          </a:prstGeom>
+          <a:noFill/>
+        </p:spPr>
+        <p:txBody>
+          <a:bodyPr wrap="square" anchor="t" lIns="45720" rIns="45720" tIns="27432" bIns="27432">
+            <a:spAutoFit/>
+          </a:bodyPr>
+          <a:lstStyle/>
           <a:p>
             <a:pPr algn="l">
               <a:spcAft>
@@ -5634,21 +7022,56 @@
               </a:spcAft>
             </a:pPr>
             <a:r>
-              <a:rPr sz="1400" b="0" i="0">
+              <a:rPr sz="1600" b="1" i="0">
                 <a:solidFill>
                   <a:srgbClr val="111010"/>
                 </a:solidFill>
-                <a:latin typeface="Tahoma" panose="020B0604030504040204"/>
+                <a:latin typeface="Cascadia Code SemiBold"/>
               </a:rPr>
-              <a:t>Спорт</a:t>
-            </a:r>
-            <a:endParaRPr sz="1400" b="0" i="0">
-              <a:solidFill>
-                <a:srgbClr val="111010"/>
-              </a:solidFill>
-              <a:latin typeface="Tahoma" panose="020B0604030504040204"/>
-            </a:endParaRPr>
-          </a:p>
+              <a:t>Качество: 599 «прокликанных» анкет</a:t>
+            </a:r>
+          </a:p>
+        </p:txBody>
+      </p:sp>
+      <p:graphicFrame>
+        <p:nvGraphicFramePr>
+          <p:cNvPr id="22" name="Chart 21"/>
+          <p:cNvGraphicFramePr>
+            <a:graphicFrameLocks noGrp="1"/>
+          </p:cNvGraphicFramePr>
+          <p:nvPr/>
+        </p:nvGraphicFramePr>
+        <p:xfrm>
+          <a:off x="6400800" y="1965960"/>
+          <a:ext cx="5394960" cy="3566160"/>
+        </p:xfrm>
+        <a:graphic>
+          <a:graphicData uri="http://schemas.openxmlformats.org/drawingml/2006/chart">
+            <c:chart xmlns:c="http://schemas.openxmlformats.org/drawingml/2006/chart" r:id="rId3"/>
+          </a:graphicData>
+        </a:graphic>
+      </p:graphicFrame>
+      <p:sp>
+        <p:nvSpPr>
+          <p:cNvPr id="23" name="TextBox 22"/>
+          <p:cNvSpPr txBox="1"/>
+          <p:nvPr/>
+        </p:nvSpPr>
+        <p:spPr>
+          <a:xfrm>
+            <a:off x="6492240" y="5577840"/>
+            <a:ext cx="5303520" cy="685800"/>
+          </a:xfrm>
+          <a:prstGeom prst="rect">
+            <a:avLst/>
+          </a:prstGeom>
+          <a:noFill/>
+        </p:spPr>
+        <p:txBody>
+          <a:bodyPr wrap="square" anchor="t" lIns="45720" rIns="45720" tIns="27432" bIns="27432">
+            <a:spAutoFit/>
+          </a:bodyPr>
+          <a:lstStyle/>
           <a:p>
             <a:pPr algn="l">
               <a:spcAft>
@@ -5656,1387 +7079,14 @@
               </a:spcAft>
             </a:pPr>
             <a:r>
-              <a:rPr sz="1400" b="0" i="0">
-                <a:solidFill>
-                  <a:srgbClr val="111010"/>
-                </a:solidFill>
-                <a:latin typeface="Tahoma" panose="020B0604030504040204"/>
+              <a:rPr sz="1200" b="0" i="0">
+                <a:solidFill>
+                  <a:srgbClr val="848484"/>
+                </a:solidFill>
+                <a:latin typeface="Tahoma"/>
               </a:rPr>
-              <a:t>Курение и алкоголь</a:t>
-            </a:r>
-            <a:endParaRPr sz="1400" b="0" i="0">
-              <a:solidFill>
-                <a:srgbClr val="111010"/>
-              </a:solidFill>
-              <a:latin typeface="Tahoma" panose="020B0604030504040204"/>
-            </a:endParaRPr>
-          </a:p>
-        </p:txBody>
-      </p:sp>
-    </p:spTree>
-  </p:cSld>
-  <p:clrMapOvr>
-    <a:masterClrMapping/>
-  </p:clrMapOvr>
-</p:sld>
-</file>
-
-<file path=ppt/slides/slide3.xml><?xml version="1.0" encoding="utf-8"?>
-<p:sld xmlns:a="http://schemas.openxmlformats.org/drawingml/2006/main" xmlns:r="http://schemas.openxmlformats.org/officeDocument/2006/relationships" xmlns:p="http://schemas.openxmlformats.org/presentationml/2006/main">
-  <p:cSld>
-    <p:spTree>
-      <p:nvGrpSpPr>
-        <p:cNvPr id="1" name=""/>
-        <p:cNvGrpSpPr/>
-        <p:nvPr/>
-      </p:nvGrpSpPr>
-      <p:grpSpPr/>
-      <p:sp>
-        <p:nvSpPr>
-          <p:cNvPr id="2" name="Pentagon 1"/>
-          <p:cNvSpPr/>
-          <p:nvPr/>
-        </p:nvSpPr>
-        <p:spPr>
-          <a:xfrm>
-            <a:off x="137160" y="164592"/>
-            <a:ext cx="2514600" cy="384048"/>
-          </a:xfrm>
-          <a:prstGeom prst="homePlate">
-            <a:avLst/>
-          </a:prstGeom>
-          <a:solidFill>
-            <a:srgbClr val="FFD966"/>
-          </a:solidFill>
-          <a:ln>
-            <a:noFill/>
-          </a:ln>
-          <a:effectLst/>
-        </p:spPr>
-        <p:style>
-          <a:lnRef idx="1">
-            <a:schemeClr val="accent1"/>
-          </a:lnRef>
-          <a:fillRef idx="3">
-            <a:schemeClr val="accent1"/>
-          </a:fillRef>
-          <a:effectRef idx="2">
-            <a:schemeClr val="accent1"/>
-          </a:effectRef>
-          <a:fontRef idx="minor">
-            <a:schemeClr val="lt1"/>
-          </a:fontRef>
-        </p:style>
-        <p:txBody>
-          <a:bodyPr lIns="45720" rIns="45720" rtlCol="0" anchor="ctr"/>
-          <a:lstStyle/>
-          <a:p>
-            <a:pPr algn="ctr"/>
-            <a:r>
-              <a:rPr sz="1200" b="1">
-                <a:solidFill>
-                  <a:srgbClr val="111010"/>
-                </a:solidFill>
-                <a:latin typeface="Cascadia Code SemiBold" panose="020B0609020000020004"/>
-              </a:rPr>
-              <a:t>ДАННЫЕ</a:t>
-            </a:r>
-            <a:endParaRPr sz="1200" b="1">
-              <a:solidFill>
-                <a:srgbClr val="111010"/>
-              </a:solidFill>
-              <a:latin typeface="Cascadia Code SemiBold" panose="020B0609020000020004"/>
-            </a:endParaRPr>
-          </a:p>
-        </p:txBody>
-      </p:sp>
-      <p:sp>
-        <p:nvSpPr>
-          <p:cNvPr id="3" name="Chevron 2"/>
-          <p:cNvSpPr/>
-          <p:nvPr/>
-        </p:nvSpPr>
-        <p:spPr>
-          <a:xfrm>
-            <a:off x="2468879" y="164592"/>
-            <a:ext cx="2514600" cy="384048"/>
-          </a:xfrm>
-          <a:prstGeom prst="chevron">
-            <a:avLst/>
-          </a:prstGeom>
-          <a:solidFill>
-            <a:srgbClr val="FFF4D7"/>
-          </a:solidFill>
-          <a:ln>
-            <a:noFill/>
-          </a:ln>
-          <a:effectLst/>
-        </p:spPr>
-        <p:style>
-          <a:lnRef idx="1">
-            <a:schemeClr val="accent1"/>
-          </a:lnRef>
-          <a:fillRef idx="3">
-            <a:schemeClr val="accent1"/>
-          </a:fillRef>
-          <a:effectRef idx="2">
-            <a:schemeClr val="accent1"/>
-          </a:effectRef>
-          <a:fontRef idx="minor">
-            <a:schemeClr val="lt1"/>
-          </a:fontRef>
-        </p:style>
-        <p:txBody>
-          <a:bodyPr lIns="45720" rIns="45720" rtlCol="0" anchor="ctr"/>
-          <a:lstStyle/>
-          <a:p>
-            <a:pPr algn="ctr"/>
-            <a:r>
-              <a:rPr sz="1200" b="0">
-                <a:solidFill>
-                  <a:srgbClr val="111010"/>
-                </a:solidFill>
-                <a:latin typeface="Cascadia Code SemiBold" panose="020B0609020000020004"/>
-              </a:rPr>
-              <a:t>МЕТОДЫ</a:t>
-            </a:r>
-            <a:endParaRPr sz="1200" b="0">
-              <a:solidFill>
-                <a:srgbClr val="111010"/>
-              </a:solidFill>
-              <a:latin typeface="Cascadia Code SemiBold" panose="020B0609020000020004"/>
-            </a:endParaRPr>
-          </a:p>
-        </p:txBody>
-      </p:sp>
-      <p:sp>
-        <p:nvSpPr>
-          <p:cNvPr id="4" name="Chevron 3"/>
-          <p:cNvSpPr/>
-          <p:nvPr/>
-        </p:nvSpPr>
-        <p:spPr>
-          <a:xfrm>
-            <a:off x="4800600" y="164592"/>
-            <a:ext cx="2514600" cy="384048"/>
-          </a:xfrm>
-          <a:prstGeom prst="chevron">
-            <a:avLst/>
-          </a:prstGeom>
-          <a:solidFill>
-            <a:srgbClr val="FFF4D7"/>
-          </a:solidFill>
-          <a:ln>
-            <a:noFill/>
-          </a:ln>
-          <a:effectLst/>
-        </p:spPr>
-        <p:style>
-          <a:lnRef idx="1">
-            <a:schemeClr val="accent1"/>
-          </a:lnRef>
-          <a:fillRef idx="3">
-            <a:schemeClr val="accent1"/>
-          </a:fillRef>
-          <a:effectRef idx="2">
-            <a:schemeClr val="accent1"/>
-          </a:effectRef>
-          <a:fontRef idx="minor">
-            <a:schemeClr val="lt1"/>
-          </a:fontRef>
-        </p:style>
-        <p:txBody>
-          <a:bodyPr lIns="45720" rIns="45720" rtlCol="0" anchor="ctr"/>
-          <a:lstStyle/>
-          <a:p>
-            <a:pPr algn="ctr"/>
-            <a:r>
-              <a:rPr sz="1200" b="0">
-                <a:solidFill>
-                  <a:srgbClr val="111010"/>
-                </a:solidFill>
-                <a:latin typeface="Cascadia Code SemiBold" panose="020B0609020000020004"/>
-              </a:rPr>
-              <a:t>РЕЗУЛЬТАТЫ</a:t>
-            </a:r>
-            <a:endParaRPr sz="1200" b="0">
-              <a:solidFill>
-                <a:srgbClr val="111010"/>
-              </a:solidFill>
-              <a:latin typeface="Cascadia Code SemiBold" panose="020B0609020000020004"/>
-            </a:endParaRPr>
-          </a:p>
-        </p:txBody>
-      </p:sp>
-      <p:sp>
-        <p:nvSpPr>
-          <p:cNvPr id="5" name="Chevron 4"/>
-          <p:cNvSpPr/>
-          <p:nvPr/>
-        </p:nvSpPr>
-        <p:spPr>
-          <a:xfrm>
-            <a:off x="7132320" y="164592"/>
-            <a:ext cx="2514600" cy="384048"/>
-          </a:xfrm>
-          <a:prstGeom prst="chevron">
-            <a:avLst/>
-          </a:prstGeom>
-          <a:solidFill>
-            <a:srgbClr val="FFF4D7"/>
-          </a:solidFill>
-          <a:ln>
-            <a:noFill/>
-          </a:ln>
-          <a:effectLst/>
-        </p:spPr>
-        <p:style>
-          <a:lnRef idx="1">
-            <a:schemeClr val="accent1"/>
-          </a:lnRef>
-          <a:fillRef idx="3">
-            <a:schemeClr val="accent1"/>
-          </a:fillRef>
-          <a:effectRef idx="2">
-            <a:schemeClr val="accent1"/>
-          </a:effectRef>
-          <a:fontRef idx="minor">
-            <a:schemeClr val="lt1"/>
-          </a:fontRef>
-        </p:style>
-        <p:txBody>
-          <a:bodyPr lIns="45720" rIns="45720" rtlCol="0" anchor="ctr"/>
-          <a:lstStyle/>
-          <a:p>
-            <a:pPr algn="ctr"/>
-            <a:r>
-              <a:rPr sz="1200" b="0">
-                <a:solidFill>
-                  <a:srgbClr val="111010"/>
-                </a:solidFill>
-                <a:latin typeface="Cascadia Code SemiBold" panose="020B0609020000020004"/>
-              </a:rPr>
-              <a:t>ОБСУЖДЕНИЕ</a:t>
-            </a:r>
-            <a:endParaRPr sz="1200" b="0">
-              <a:solidFill>
-                <a:srgbClr val="111010"/>
-              </a:solidFill>
-              <a:latin typeface="Cascadia Code SemiBold" panose="020B0609020000020004"/>
-            </a:endParaRPr>
-          </a:p>
-        </p:txBody>
-      </p:sp>
-      <p:sp>
-        <p:nvSpPr>
-          <p:cNvPr id="6" name="Chevron 5"/>
-          <p:cNvSpPr/>
-          <p:nvPr/>
-        </p:nvSpPr>
-        <p:spPr>
-          <a:xfrm>
-            <a:off x="9464040" y="164592"/>
-            <a:ext cx="2514600" cy="384048"/>
-          </a:xfrm>
-          <a:prstGeom prst="chevron">
-            <a:avLst/>
-          </a:prstGeom>
-          <a:solidFill>
-            <a:srgbClr val="FFF4D7"/>
-          </a:solidFill>
-          <a:ln>
-            <a:noFill/>
-          </a:ln>
-          <a:effectLst/>
-        </p:spPr>
-        <p:style>
-          <a:lnRef idx="1">
-            <a:schemeClr val="accent1"/>
-          </a:lnRef>
-          <a:fillRef idx="3">
-            <a:schemeClr val="accent1"/>
-          </a:fillRef>
-          <a:effectRef idx="2">
-            <a:schemeClr val="accent1"/>
-          </a:effectRef>
-          <a:fontRef idx="minor">
-            <a:schemeClr val="lt1"/>
-          </a:fontRef>
-        </p:style>
-        <p:txBody>
-          <a:bodyPr lIns="45720" rIns="45720" rtlCol="0" anchor="ctr"/>
-          <a:lstStyle/>
-          <a:p>
-            <a:pPr algn="ctr"/>
-            <a:r>
-              <a:rPr sz="1200" b="0">
-                <a:solidFill>
-                  <a:srgbClr val="111010"/>
-                </a:solidFill>
-                <a:latin typeface="Cascadia Code SemiBold" panose="020B0609020000020004"/>
-              </a:rPr>
-              <a:t>ПОДВАЛ</a:t>
-            </a:r>
-            <a:endParaRPr sz="1200" b="0">
-              <a:solidFill>
-                <a:srgbClr val="111010"/>
-              </a:solidFill>
-              <a:latin typeface="Cascadia Code SemiBold" panose="020B0609020000020004"/>
-            </a:endParaRPr>
-          </a:p>
-        </p:txBody>
-      </p:sp>
-      <p:sp>
-        <p:nvSpPr>
-          <p:cNvPr id="7" name="Rectangle 6"/>
-          <p:cNvSpPr/>
-          <p:nvPr/>
-        </p:nvSpPr>
-        <p:spPr>
-          <a:xfrm>
-            <a:off x="0" y="6565392"/>
-            <a:ext cx="1783080" cy="91440"/>
-          </a:xfrm>
-          <a:prstGeom prst="rect">
-            <a:avLst/>
-          </a:prstGeom>
-          <a:solidFill>
-            <a:srgbClr val="111010"/>
-          </a:solidFill>
-          <a:ln>
-            <a:noFill/>
-          </a:ln>
-          <a:effectLst/>
-        </p:spPr>
-        <p:style>
-          <a:lnRef idx="1">
-            <a:schemeClr val="accent1"/>
-          </a:lnRef>
-          <a:fillRef idx="3">
-            <a:schemeClr val="accent1"/>
-          </a:fillRef>
-          <a:effectRef idx="2">
-            <a:schemeClr val="accent1"/>
-          </a:effectRef>
-          <a:fontRef idx="minor">
-            <a:schemeClr val="lt1"/>
-          </a:fontRef>
-        </p:style>
-        <p:txBody>
-          <a:bodyPr rtlCol="0" anchor="ctr"/>
-          <a:lstStyle/>
-          <a:p>
-            <a:pPr algn="ctr"/>
-          </a:p>
-        </p:txBody>
-      </p:sp>
-      <p:sp>
-        <p:nvSpPr>
-          <p:cNvPr id="8" name="Rectangle 7"/>
-          <p:cNvSpPr/>
-          <p:nvPr/>
-        </p:nvSpPr>
-        <p:spPr>
-          <a:xfrm>
-            <a:off x="0" y="6656832"/>
-            <a:ext cx="2743200" cy="128016"/>
-          </a:xfrm>
-          <a:prstGeom prst="rect">
-            <a:avLst/>
-          </a:prstGeom>
-          <a:solidFill>
-            <a:srgbClr val="FFD966"/>
-          </a:solidFill>
-          <a:ln>
-            <a:noFill/>
-          </a:ln>
-          <a:effectLst/>
-        </p:spPr>
-        <p:style>
-          <a:lnRef idx="1">
-            <a:schemeClr val="accent1"/>
-          </a:lnRef>
-          <a:fillRef idx="3">
-            <a:schemeClr val="accent1"/>
-          </a:fillRef>
-          <a:effectRef idx="2">
-            <a:schemeClr val="accent1"/>
-          </a:effectRef>
-          <a:fontRef idx="minor">
-            <a:schemeClr val="lt1"/>
-          </a:fontRef>
-        </p:style>
-        <p:txBody>
-          <a:bodyPr rtlCol="0" anchor="ctr"/>
-          <a:lstStyle/>
-          <a:p>
-            <a:pPr algn="ctr"/>
-          </a:p>
-        </p:txBody>
-      </p:sp>
-      <p:sp>
-        <p:nvSpPr>
-          <p:cNvPr id="9" name="TextBox 8"/>
-          <p:cNvSpPr txBox="1"/>
-          <p:nvPr/>
-        </p:nvSpPr>
-        <p:spPr>
-          <a:xfrm>
-            <a:off x="11247120" y="6355080"/>
-            <a:ext cx="731520" cy="365760"/>
-          </a:xfrm>
-          <a:prstGeom prst="rect">
-            <a:avLst/>
-          </a:prstGeom>
-          <a:noFill/>
-        </p:spPr>
-        <p:txBody>
-          <a:bodyPr wrap="square" lIns="45720" tIns="27432" rIns="45720" bIns="27432" anchor="t">
-            <a:spAutoFit/>
-          </a:bodyPr>
-          <a:lstStyle/>
-          <a:p>
-            <a:pPr algn="r">
-              <a:spcAft>
-                <a:spcPts val="600"/>
-              </a:spcAft>
-            </a:pPr>
-            <a:r>
-              <a:rPr sz="1200" b="0" i="0">
-                <a:solidFill>
-                  <a:srgbClr val="848484"/>
-                </a:solidFill>
-                <a:latin typeface="Tahoma" panose="020B0604030504040204"/>
-              </a:rPr>
-              <a:t>3</a:t>
-            </a:r>
-            <a:endParaRPr sz="1200" b="0" i="0">
-              <a:solidFill>
-                <a:srgbClr val="848484"/>
-              </a:solidFill>
-              <a:latin typeface="Tahoma" panose="020B0604030504040204"/>
-            </a:endParaRPr>
-          </a:p>
-        </p:txBody>
-      </p:sp>
-      <p:sp>
-        <p:nvSpPr>
-          <p:cNvPr id="10" name="TextBox 9"/>
-          <p:cNvSpPr txBox="1"/>
-          <p:nvPr/>
-        </p:nvSpPr>
-        <p:spPr>
-          <a:xfrm>
-            <a:off x="457200" y="731520"/>
-            <a:ext cx="11247120" cy="731520"/>
-          </a:xfrm>
-          <a:prstGeom prst="rect">
-            <a:avLst/>
-          </a:prstGeom>
-          <a:noFill/>
-        </p:spPr>
-        <p:txBody>
-          <a:bodyPr wrap="square" lIns="45720" tIns="27432" rIns="45720" bIns="27432" anchor="t">
-            <a:spAutoFit/>
-          </a:bodyPr>
-          <a:lstStyle/>
-          <a:p>
-            <a:pPr algn="l">
-              <a:spcAft>
-                <a:spcPts val="600"/>
-              </a:spcAft>
-            </a:pPr>
-            <a:r>
-              <a:rPr sz="2800" b="0" i="0">
-                <a:solidFill>
-                  <a:srgbClr val="111010"/>
-                </a:solidFill>
-                <a:latin typeface="Arial Black" panose="020B0A04020102020204"/>
-              </a:rPr>
-              <a:t>Структура данных</a:t>
-            </a:r>
-            <a:endParaRPr sz="2800" b="0" i="0">
-              <a:solidFill>
-                <a:srgbClr val="111010"/>
-              </a:solidFill>
-              <a:latin typeface="Arial Black" panose="020B0A04020102020204"/>
-            </a:endParaRPr>
-          </a:p>
-        </p:txBody>
-      </p:sp>
-      <p:sp>
-        <p:nvSpPr>
-          <p:cNvPr id="11" name="TextBox 10"/>
-          <p:cNvSpPr txBox="1"/>
-          <p:nvPr/>
-        </p:nvSpPr>
-        <p:spPr>
-          <a:xfrm>
-            <a:off x="640080" y="1737360"/>
-            <a:ext cx="2743200" cy="914400"/>
-          </a:xfrm>
-          <a:prstGeom prst="rect">
-            <a:avLst/>
-          </a:prstGeom>
-          <a:noFill/>
-        </p:spPr>
-        <p:txBody>
-          <a:bodyPr wrap="square" lIns="45720" tIns="27432" rIns="45720" bIns="27432" anchor="t">
-            <a:spAutoFit/>
-          </a:bodyPr>
-          <a:lstStyle/>
-          <a:p>
-            <a:pPr algn="l">
-              <a:spcAft>
-                <a:spcPts val="600"/>
-              </a:spcAft>
-            </a:pPr>
-            <a:r>
-              <a:rPr sz="5400" b="1" i="0">
-                <a:solidFill>
-                  <a:srgbClr val="111010"/>
-                </a:solidFill>
-                <a:latin typeface="Cascadia Code SemiBold" panose="020B0609020000020004"/>
-              </a:rPr>
-              <a:t>5 831</a:t>
-            </a:r>
-            <a:endParaRPr sz="5400" b="1" i="0">
-              <a:solidFill>
-                <a:srgbClr val="111010"/>
-              </a:solidFill>
-              <a:latin typeface="Cascadia Code SemiBold" panose="020B0609020000020004"/>
-            </a:endParaRPr>
-          </a:p>
-        </p:txBody>
-      </p:sp>
-      <p:sp>
-        <p:nvSpPr>
-          <p:cNvPr id="12" name="TextBox 11"/>
-          <p:cNvSpPr txBox="1"/>
-          <p:nvPr/>
-        </p:nvSpPr>
-        <p:spPr>
-          <a:xfrm>
-            <a:off x="640080" y="2651760"/>
-            <a:ext cx="2743200" cy="731520"/>
-          </a:xfrm>
-          <a:prstGeom prst="rect">
-            <a:avLst/>
-          </a:prstGeom>
-          <a:noFill/>
-        </p:spPr>
-        <p:txBody>
-          <a:bodyPr wrap="square" lIns="45720" tIns="27432" rIns="45720" bIns="27432" anchor="t">
-            <a:spAutoFit/>
-          </a:bodyPr>
-          <a:lstStyle/>
-          <a:p>
-            <a:pPr algn="l">
-              <a:spcAft>
-                <a:spcPts val="600"/>
-              </a:spcAft>
-            </a:pPr>
-            <a:r>
-              <a:rPr sz="1400" b="0" i="0">
-                <a:solidFill>
-                  <a:srgbClr val="111010"/>
-                </a:solidFill>
-                <a:latin typeface="Tahoma" panose="020B0604030504040204"/>
-              </a:rPr>
-              <a:t>строка в массиве
-(одна строка — один студент)</a:t>
-            </a:r>
-            <a:endParaRPr sz="1400" b="0" i="0">
-              <a:solidFill>
-                <a:srgbClr val="111010"/>
-              </a:solidFill>
-              <a:latin typeface="Tahoma" panose="020B0604030504040204"/>
-            </a:endParaRPr>
-          </a:p>
-        </p:txBody>
-      </p:sp>
-      <p:sp>
-        <p:nvSpPr>
-          <p:cNvPr id="13" name="TextBox 12"/>
-          <p:cNvSpPr txBox="1"/>
-          <p:nvPr/>
-        </p:nvSpPr>
-        <p:spPr>
-          <a:xfrm>
-            <a:off x="3566160" y="1737360"/>
-            <a:ext cx="2743200" cy="914400"/>
-          </a:xfrm>
-          <a:prstGeom prst="rect">
-            <a:avLst/>
-          </a:prstGeom>
-          <a:noFill/>
-        </p:spPr>
-        <p:txBody>
-          <a:bodyPr wrap="square" lIns="45720" tIns="27432" rIns="45720" bIns="27432" anchor="t">
-            <a:spAutoFit/>
-          </a:bodyPr>
-          <a:lstStyle/>
-          <a:p>
-            <a:pPr algn="l">
-              <a:spcAft>
-                <a:spcPts val="600"/>
-              </a:spcAft>
-            </a:pPr>
-            <a:r>
-              <a:rPr sz="5400" b="1" i="0">
-                <a:solidFill>
-                  <a:srgbClr val="111010"/>
-                </a:solidFill>
-                <a:latin typeface="Cascadia Code SemiBold" panose="020B0609020000020004"/>
-              </a:rPr>
-              <a:t>82</a:t>
-            </a:r>
-            <a:endParaRPr sz="5400" b="1" i="0">
-              <a:solidFill>
-                <a:srgbClr val="111010"/>
-              </a:solidFill>
-              <a:latin typeface="Cascadia Code SemiBold" panose="020B0609020000020004"/>
-            </a:endParaRPr>
-          </a:p>
-        </p:txBody>
-      </p:sp>
-      <p:sp>
-        <p:nvSpPr>
-          <p:cNvPr id="14" name="TextBox 13"/>
-          <p:cNvSpPr txBox="1"/>
-          <p:nvPr/>
-        </p:nvSpPr>
-        <p:spPr>
-          <a:xfrm>
-            <a:off x="3566160" y="2651760"/>
-            <a:ext cx="2743200" cy="731520"/>
-          </a:xfrm>
-          <a:prstGeom prst="rect">
-            <a:avLst/>
-          </a:prstGeom>
-          <a:noFill/>
-        </p:spPr>
-        <p:txBody>
-          <a:bodyPr wrap="square" lIns="45720" tIns="27432" rIns="45720" bIns="27432" anchor="t">
-            <a:spAutoFit/>
-          </a:bodyPr>
-          <a:lstStyle/>
-          <a:p>
-            <a:pPr algn="l">
-              <a:spcAft>
-                <a:spcPts val="600"/>
-              </a:spcAft>
-            </a:pPr>
-            <a:r>
-              <a:rPr sz="1400" b="0" i="0">
-                <a:solidFill>
-                  <a:srgbClr val="111010"/>
-                </a:solidFill>
-                <a:latin typeface="Tahoma" panose="020B0604030504040204"/>
-              </a:rPr>
-              <a:t>переменные: занятость,
-опыт обучения, здоровье</a:t>
-            </a:r>
-            <a:endParaRPr sz="1400" b="0" i="0">
-              <a:solidFill>
-                <a:srgbClr val="111010"/>
-              </a:solidFill>
-              <a:latin typeface="Tahoma" panose="020B0604030504040204"/>
-            </a:endParaRPr>
-          </a:p>
-        </p:txBody>
-      </p:sp>
-      <p:sp>
-        <p:nvSpPr>
-          <p:cNvPr id="15" name="TextBox 14"/>
-          <p:cNvSpPr txBox="1"/>
-          <p:nvPr/>
-        </p:nvSpPr>
-        <p:spPr>
-          <a:xfrm>
-            <a:off x="6309360" y="1737360"/>
-            <a:ext cx="2743200" cy="914400"/>
-          </a:xfrm>
-          <a:prstGeom prst="rect">
-            <a:avLst/>
-          </a:prstGeom>
-          <a:noFill/>
-        </p:spPr>
-        <p:txBody>
-          <a:bodyPr wrap="square" lIns="45720" tIns="27432" rIns="45720" bIns="27432" anchor="t">
-            <a:spAutoFit/>
-          </a:bodyPr>
-          <a:lstStyle/>
-          <a:p>
-            <a:pPr algn="l">
-              <a:spcAft>
-                <a:spcPts val="600"/>
-              </a:spcAft>
-            </a:pPr>
-            <a:r>
-              <a:rPr sz="5400" b="1" i="0">
-                <a:solidFill>
-                  <a:srgbClr val="111010"/>
-                </a:solidFill>
-                <a:latin typeface="Cascadia Code SemiBold" panose="020B0609020000020004"/>
-              </a:rPr>
-              <a:t>9</a:t>
-            </a:r>
-            <a:endParaRPr sz="5400" b="1" i="0">
-              <a:solidFill>
-                <a:srgbClr val="111010"/>
-              </a:solidFill>
-              <a:latin typeface="Cascadia Code SemiBold" panose="020B0609020000020004"/>
-            </a:endParaRPr>
-          </a:p>
-        </p:txBody>
-      </p:sp>
-      <p:sp>
-        <p:nvSpPr>
-          <p:cNvPr id="16" name="TextBox 15"/>
-          <p:cNvSpPr txBox="1"/>
-          <p:nvPr/>
-        </p:nvSpPr>
-        <p:spPr>
-          <a:xfrm>
-            <a:off x="6309360" y="2651760"/>
-            <a:ext cx="2743200" cy="731520"/>
-          </a:xfrm>
-          <a:prstGeom prst="rect">
-            <a:avLst/>
-          </a:prstGeom>
-          <a:noFill/>
-        </p:spPr>
-        <p:txBody>
-          <a:bodyPr wrap="square" lIns="45720" tIns="27432" rIns="45720" bIns="27432" anchor="t">
-            <a:spAutoFit/>
-          </a:bodyPr>
-          <a:lstStyle/>
-          <a:p>
-            <a:pPr algn="l">
-              <a:spcAft>
-                <a:spcPts val="600"/>
-              </a:spcAft>
-            </a:pPr>
-            <a:r>
-              <a:rPr sz="1400" b="0" i="0">
-                <a:solidFill>
-                  <a:srgbClr val="111010"/>
-                </a:solidFill>
-                <a:latin typeface="Tahoma" panose="020B0604030504040204"/>
-              </a:rPr>
-              <a:t>селективных
-российских вузов</a:t>
-            </a:r>
-            <a:endParaRPr sz="1400" b="0" i="0">
-              <a:solidFill>
-                <a:srgbClr val="111010"/>
-              </a:solidFill>
-              <a:latin typeface="Tahoma" panose="020B0604030504040204"/>
-            </a:endParaRPr>
-          </a:p>
-        </p:txBody>
-      </p:sp>
-      <p:sp>
-        <p:nvSpPr>
-          <p:cNvPr id="17" name="TextBox 16"/>
-          <p:cNvSpPr txBox="1"/>
-          <p:nvPr/>
-        </p:nvSpPr>
-        <p:spPr>
-          <a:xfrm>
-            <a:off x="8869680" y="1737360"/>
-            <a:ext cx="2926080" cy="914400"/>
-          </a:xfrm>
-          <a:prstGeom prst="rect">
-            <a:avLst/>
-          </a:prstGeom>
-          <a:noFill/>
-        </p:spPr>
-        <p:txBody>
-          <a:bodyPr wrap="square" lIns="45720" tIns="27432" rIns="45720" bIns="27432" anchor="t">
-            <a:spAutoFit/>
-          </a:bodyPr>
-          <a:lstStyle/>
-          <a:p>
-            <a:pPr algn="l">
-              <a:spcAft>
-                <a:spcPts val="600"/>
-              </a:spcAft>
-            </a:pPr>
-            <a:r>
-              <a:rPr sz="4000" b="1" i="0">
-                <a:solidFill>
-                  <a:srgbClr val="111010"/>
-                </a:solidFill>
-                <a:latin typeface="Cascadia Code SemiBold" panose="020B0609020000020004"/>
-              </a:rPr>
-              <a:t>2 волны</a:t>
-            </a:r>
-            <a:endParaRPr sz="4000" b="1" i="0">
-              <a:solidFill>
-                <a:srgbClr val="111010"/>
-              </a:solidFill>
-              <a:latin typeface="Cascadia Code SemiBold" panose="020B0609020000020004"/>
-            </a:endParaRPr>
-          </a:p>
-        </p:txBody>
-      </p:sp>
-      <p:sp>
-        <p:nvSpPr>
-          <p:cNvPr id="18" name="TextBox 17"/>
-          <p:cNvSpPr txBox="1"/>
-          <p:nvPr/>
-        </p:nvSpPr>
-        <p:spPr>
-          <a:xfrm>
-            <a:off x="8869680" y="2651760"/>
-            <a:ext cx="2926080" cy="731520"/>
-          </a:xfrm>
-          <a:prstGeom prst="rect">
-            <a:avLst/>
-          </a:prstGeom>
-          <a:noFill/>
-        </p:spPr>
-        <p:txBody>
-          <a:bodyPr wrap="square" lIns="45720" tIns="27432" rIns="45720" bIns="27432" anchor="t">
-            <a:spAutoFit/>
-          </a:bodyPr>
-          <a:lstStyle/>
-          <a:p>
-            <a:pPr algn="l">
-              <a:spcAft>
-                <a:spcPts val="600"/>
-              </a:spcAft>
-            </a:pPr>
-            <a:r>
-              <a:rPr sz="1400" b="0" i="0">
-                <a:solidFill>
-                  <a:srgbClr val="111010"/>
-                </a:solidFill>
-                <a:latin typeface="Tahoma" panose="020B0604030504040204"/>
-              </a:rPr>
-              <a:t>2024/25 — 3 курс
-2025/26 — 4 курс</a:t>
-            </a:r>
-            <a:endParaRPr sz="1400" b="0" i="0">
-              <a:solidFill>
-                <a:srgbClr val="111010"/>
-              </a:solidFill>
-              <a:latin typeface="Tahoma" panose="020B0604030504040204"/>
-            </a:endParaRPr>
-          </a:p>
-        </p:txBody>
-      </p:sp>
-      <p:graphicFrame>
-        <p:nvGraphicFramePr>
-          <p:cNvPr id="19" name="Table 18"/>
-          <p:cNvGraphicFramePr>
-            <a:graphicFrameLocks noGrp="1"/>
-          </p:cNvGraphicFramePr>
-          <p:nvPr/>
-        </p:nvGraphicFramePr>
-        <p:xfrm>
-          <a:off x="640080" y="3977639"/>
-          <a:ext cx="6949440" cy="1536192"/>
-        </p:xfrm>
-        <a:graphic>
-          <a:graphicData uri="http://schemas.openxmlformats.org/drawingml/2006/table">
-            <a:tbl>
-              <a:tblPr firstRow="1" bandRow="1">
-                <a:tableStyleId>{5C22544A-7EE6-4342-B048-85BDC9FD1C3A}</a:tableStyleId>
-              </a:tblPr>
-              <a:tblGrid>
-                <a:gridCol w="2377440"/>
-                <a:gridCol w="1828800"/>
-                <a:gridCol w="2743200"/>
-              </a:tblGrid>
-              <a:tr h="384048">
-                <a:tc>
-                  <a:txBody>
-                    <a:bodyPr/>
-                    <a:lstStyle/>
-                    <a:p>
-                      <a:pPr algn="l"/>
-                      <a:endParaRPr sz="1400" b="1">
-                        <a:solidFill>
-                          <a:srgbClr val="111010"/>
-                        </a:solidFill>
-                        <a:latin typeface="Tahoma" panose="020B0604030504040204"/>
-                      </a:endParaRPr>
-                    </a:p>
-                  </a:txBody>
-                  <a:tcPr marL="73152" marR="73152" anchor="ctr">
-                    <a:solidFill>
-                      <a:srgbClr val="FFD966"/>
-                    </a:solidFill>
-                  </a:tcPr>
-                </a:tc>
-                <a:tc>
-                  <a:txBody>
-                    <a:bodyPr/>
-                    <a:lstStyle/>
-                    <a:p>
-                      <a:pPr algn="ctr"/>
-                      <a:r>
-                        <a:rPr sz="1400" b="1">
-                          <a:solidFill>
-                            <a:srgbClr val="111010"/>
-                          </a:solidFill>
-                          <a:latin typeface="Tahoma" panose="020B0604030504040204"/>
-                        </a:rPr>
-                        <a:t>Участников</a:t>
-                      </a:r>
-                      <a:endParaRPr sz="1400" b="1">
-                        <a:solidFill>
-                          <a:srgbClr val="111010"/>
-                        </a:solidFill>
-                        <a:latin typeface="Tahoma" panose="020B0604030504040204"/>
-                      </a:endParaRPr>
-                    </a:p>
-                  </a:txBody>
-                  <a:tcPr marL="73152" marR="73152" anchor="ctr">
-                    <a:solidFill>
-                      <a:srgbClr val="FFD966"/>
-                    </a:solidFill>
-                  </a:tcPr>
-                </a:tc>
-                <a:tc>
-                  <a:txBody>
-                    <a:bodyPr/>
-                    <a:lstStyle/>
-                    <a:p>
-                      <a:pPr algn="ctr"/>
-                      <a:r>
-                        <a:rPr sz="1400" b="1">
-                          <a:solidFill>
-                            <a:srgbClr val="111010"/>
-                          </a:solidFill>
-                          <a:latin typeface="Tahoma" panose="020B0604030504040204"/>
-                        </a:rPr>
-                        <a:t>Полных анкет</a:t>
-                      </a:r>
-                      <a:endParaRPr sz="1400" b="1">
-                        <a:solidFill>
-                          <a:srgbClr val="111010"/>
-                        </a:solidFill>
-                        <a:latin typeface="Tahoma" panose="020B0604030504040204"/>
-                      </a:endParaRPr>
-                    </a:p>
-                  </a:txBody>
-                  <a:tcPr marL="73152" marR="73152" anchor="ctr">
-                    <a:solidFill>
-                      <a:srgbClr val="FFD966"/>
-                    </a:solidFill>
-                  </a:tcPr>
-                </a:tc>
-              </a:tr>
-              <a:tr h="384048">
-                <a:tc>
-                  <a:txBody>
-                    <a:bodyPr/>
-                    <a:lstStyle/>
-                    <a:p>
-                      <a:pPr algn="l"/>
-                      <a:r>
-                        <a:rPr sz="1400" b="0">
-                          <a:solidFill>
-                            <a:srgbClr val="111010"/>
-                          </a:solidFill>
-                          <a:latin typeface="Tahoma" panose="020B0604030504040204"/>
-                        </a:rPr>
-                        <a:t>3 волна (3 курс)</a:t>
-                      </a:r>
-                      <a:endParaRPr sz="1400" b="0">
-                        <a:solidFill>
-                          <a:srgbClr val="111010"/>
-                        </a:solidFill>
-                        <a:latin typeface="Tahoma" panose="020B0604030504040204"/>
-                      </a:endParaRPr>
-                    </a:p>
-                  </a:txBody>
-                  <a:tcPr marL="73152" marR="73152" anchor="ctr">
-                    <a:solidFill>
-                      <a:srgbClr val="FFF4D7"/>
-                    </a:solidFill>
-                  </a:tcPr>
-                </a:tc>
-                <a:tc>
-                  <a:txBody>
-                    <a:bodyPr/>
-                    <a:lstStyle/>
-                    <a:p>
-                      <a:pPr algn="ctr"/>
-                      <a:r>
-                        <a:rPr sz="1400" b="0">
-                          <a:solidFill>
-                            <a:srgbClr val="111010"/>
-                          </a:solidFill>
-                          <a:latin typeface="Tahoma" panose="020B0604030504040204"/>
-                        </a:rPr>
-                        <a:t>1 236</a:t>
-                      </a:r>
-                      <a:endParaRPr sz="1400" b="0">
-                        <a:solidFill>
-                          <a:srgbClr val="111010"/>
-                        </a:solidFill>
-                        <a:latin typeface="Tahoma" panose="020B0604030504040204"/>
-                      </a:endParaRPr>
-                    </a:p>
-                  </a:txBody>
-                  <a:tcPr marL="73152" marR="73152" anchor="ctr">
-                    <a:solidFill>
-                      <a:srgbClr val="FFF4D7"/>
-                    </a:solidFill>
-                  </a:tcPr>
-                </a:tc>
-                <a:tc>
-                  <a:txBody>
-                    <a:bodyPr/>
-                    <a:lstStyle/>
-                    <a:p>
-                      <a:pPr algn="ctr"/>
-                      <a:r>
-                        <a:rPr sz="1400" b="0">
-                          <a:solidFill>
-                            <a:srgbClr val="111010"/>
-                          </a:solidFill>
-                          <a:latin typeface="Tahoma" panose="020B0604030504040204"/>
-                        </a:rPr>
-                        <a:t>1 211</a:t>
-                      </a:r>
-                      <a:endParaRPr sz="1400" b="0">
-                        <a:solidFill>
-                          <a:srgbClr val="111010"/>
-                        </a:solidFill>
-                        <a:latin typeface="Tahoma" panose="020B0604030504040204"/>
-                      </a:endParaRPr>
-                    </a:p>
-                  </a:txBody>
-                  <a:tcPr marL="73152" marR="73152" anchor="ctr">
-                    <a:solidFill>
-                      <a:srgbClr val="FFF4D7"/>
-                    </a:solidFill>
-                  </a:tcPr>
-                </a:tc>
-              </a:tr>
-              <a:tr h="384048">
-                <a:tc>
-                  <a:txBody>
-                    <a:bodyPr/>
-                    <a:lstStyle/>
-                    <a:p>
-                      <a:pPr algn="l"/>
-                      <a:r>
-                        <a:rPr sz="1400" b="0">
-                          <a:solidFill>
-                            <a:srgbClr val="111010"/>
-                          </a:solidFill>
-                          <a:latin typeface="Tahoma" panose="020B0604030504040204"/>
-                        </a:rPr>
-                        <a:t>4 волна (4 курс)</a:t>
-                      </a:r>
-                      <a:endParaRPr sz="1400" b="0">
-                        <a:solidFill>
-                          <a:srgbClr val="111010"/>
-                        </a:solidFill>
-                        <a:latin typeface="Tahoma" panose="020B0604030504040204"/>
-                      </a:endParaRPr>
-                    </a:p>
-                  </a:txBody>
-                  <a:tcPr marL="73152" marR="73152" anchor="ctr">
-                    <a:solidFill>
-                      <a:srgbClr val="FFFFFF"/>
-                    </a:solidFill>
-                  </a:tcPr>
-                </a:tc>
-                <a:tc>
-                  <a:txBody>
-                    <a:bodyPr/>
-                    <a:lstStyle/>
-                    <a:p>
-                      <a:pPr algn="ctr"/>
-                      <a:r>
-                        <a:rPr sz="1400" b="0">
-                          <a:solidFill>
-                            <a:srgbClr val="111010"/>
-                          </a:solidFill>
-                          <a:latin typeface="Tahoma" panose="020B0604030504040204"/>
-                        </a:rPr>
-                        <a:t>1 513</a:t>
-                      </a:r>
-                      <a:endParaRPr sz="1400" b="0">
-                        <a:solidFill>
-                          <a:srgbClr val="111010"/>
-                        </a:solidFill>
-                        <a:latin typeface="Tahoma" panose="020B0604030504040204"/>
-                      </a:endParaRPr>
-                    </a:p>
-                  </a:txBody>
-                  <a:tcPr marL="73152" marR="73152" anchor="ctr">
-                    <a:solidFill>
-                      <a:srgbClr val="FFFFFF"/>
-                    </a:solidFill>
-                  </a:tcPr>
-                </a:tc>
-                <a:tc>
-                  <a:txBody>
-                    <a:bodyPr/>
-                    <a:lstStyle/>
-                    <a:p>
-                      <a:pPr algn="ctr"/>
-                      <a:r>
-                        <a:rPr sz="1400" b="0">
-                          <a:solidFill>
-                            <a:srgbClr val="111010"/>
-                          </a:solidFill>
-                          <a:latin typeface="Tahoma" panose="020B0604030504040204"/>
-                        </a:rPr>
-                        <a:t>914</a:t>
-                      </a:r>
-                      <a:endParaRPr sz="1400" b="0">
-                        <a:solidFill>
-                          <a:srgbClr val="111010"/>
-                        </a:solidFill>
-                        <a:latin typeface="Tahoma" panose="020B0604030504040204"/>
-                      </a:endParaRPr>
-                    </a:p>
-                  </a:txBody>
-                  <a:tcPr marL="73152" marR="73152" anchor="ctr">
-                    <a:solidFill>
-                      <a:srgbClr val="FFFFFF"/>
-                    </a:solidFill>
-                  </a:tcPr>
-                </a:tc>
-              </a:tr>
-              <a:tr h="384048">
-                <a:tc>
-                  <a:txBody>
-                    <a:bodyPr/>
-                    <a:lstStyle/>
-                    <a:p>
-                      <a:pPr algn="l"/>
-                      <a:r>
-                        <a:rPr sz="1400" b="0">
-                          <a:solidFill>
-                            <a:srgbClr val="111010"/>
-                          </a:solidFill>
-                          <a:latin typeface="Tahoma" panose="020B0604030504040204"/>
-                        </a:rPr>
-                        <a:t>В обеих волнах</a:t>
-                      </a:r>
-                      <a:endParaRPr sz="1400" b="0">
-                        <a:solidFill>
-                          <a:srgbClr val="111010"/>
-                        </a:solidFill>
-                        <a:latin typeface="Tahoma" panose="020B0604030504040204"/>
-                      </a:endParaRPr>
-                    </a:p>
-                  </a:txBody>
-                  <a:tcPr marL="73152" marR="73152" anchor="ctr">
-                    <a:solidFill>
-                      <a:srgbClr val="FFF4D7"/>
-                    </a:solidFill>
-                  </a:tcPr>
-                </a:tc>
-                <a:tc>
-                  <a:txBody>
-                    <a:bodyPr/>
-                    <a:lstStyle/>
-                    <a:p>
-                      <a:pPr algn="ctr"/>
-                      <a:r>
-                        <a:rPr sz="1400" b="0">
-                          <a:solidFill>
-                            <a:srgbClr val="111010"/>
-                          </a:solidFill>
-                          <a:latin typeface="Tahoma" panose="020B0604030504040204"/>
-                        </a:rPr>
-                        <a:t>724</a:t>
-                      </a:r>
-                      <a:endParaRPr sz="1400" b="0">
-                        <a:solidFill>
-                          <a:srgbClr val="111010"/>
-                        </a:solidFill>
-                        <a:latin typeface="Tahoma" panose="020B0604030504040204"/>
-                      </a:endParaRPr>
-                    </a:p>
-                  </a:txBody>
-                  <a:tcPr marL="73152" marR="73152" anchor="ctr">
-                    <a:solidFill>
-                      <a:srgbClr val="FFF4D7"/>
-                    </a:solidFill>
-                  </a:tcPr>
-                </a:tc>
-                <a:tc>
-                  <a:txBody>
-                    <a:bodyPr/>
-                    <a:lstStyle/>
-                    <a:p>
-                      <a:pPr algn="ctr"/>
-                      <a:r>
-                        <a:rPr sz="1400" b="0">
-                          <a:solidFill>
-                            <a:srgbClr val="111010"/>
-                          </a:solidFill>
-                          <a:latin typeface="Tahoma" panose="020B0604030504040204"/>
-                        </a:rPr>
-                        <a:t>566 (с ответом о работе)</a:t>
-                      </a:r>
-                      <a:endParaRPr sz="1400" b="0">
-                        <a:solidFill>
-                          <a:srgbClr val="111010"/>
-                        </a:solidFill>
-                        <a:latin typeface="Tahoma" panose="020B0604030504040204"/>
-                      </a:endParaRPr>
-                    </a:p>
-                  </a:txBody>
-                  <a:tcPr marL="73152" marR="73152" anchor="ctr">
-                    <a:solidFill>
-                      <a:srgbClr val="FFF4D7"/>
-                    </a:solidFill>
-                  </a:tcPr>
-                </a:tc>
-              </a:tr>
-            </a:tbl>
-          </a:graphicData>
-        </a:graphic>
-      </p:graphicFrame>
-      <p:sp>
-        <p:nvSpPr>
-          <p:cNvPr id="20" name="Rounded Rectangle 19"/>
-          <p:cNvSpPr/>
-          <p:nvPr/>
-        </p:nvSpPr>
-        <p:spPr>
-          <a:xfrm>
-            <a:off x="8046720" y="3977639"/>
-            <a:ext cx="3566160" cy="1600200"/>
-          </a:xfrm>
-          <a:prstGeom prst="roundRect">
-            <a:avLst>
-              <a:gd name="adj" fmla="val 12000"/>
-            </a:avLst>
-          </a:prstGeom>
-          <a:solidFill>
-            <a:srgbClr val="FFF4D7"/>
-          </a:solidFill>
-          <a:ln w="19050">
-            <a:solidFill>
-              <a:srgbClr val="FFD966"/>
-            </a:solidFill>
-          </a:ln>
-          <a:effectLst/>
-        </p:spPr>
-        <p:style>
-          <a:lnRef idx="1">
-            <a:schemeClr val="accent1"/>
-          </a:lnRef>
-          <a:fillRef idx="3">
-            <a:schemeClr val="accent1"/>
-          </a:fillRef>
-          <a:effectRef idx="2">
-            <a:schemeClr val="accent1"/>
-          </a:effectRef>
-          <a:fontRef idx="minor">
-            <a:schemeClr val="lt1"/>
-          </a:fontRef>
-        </p:style>
-        <p:txBody>
-          <a:bodyPr rtlCol="0" anchor="ctr"/>
-          <a:lstStyle/>
-          <a:p>
-            <a:pPr algn="ctr"/>
-          </a:p>
-        </p:txBody>
-      </p:sp>
-      <p:sp>
-        <p:nvSpPr>
-          <p:cNvPr id="21" name="TextBox 20"/>
-          <p:cNvSpPr txBox="1"/>
-          <p:nvPr/>
-        </p:nvSpPr>
-        <p:spPr>
-          <a:xfrm>
-            <a:off x="8229600" y="4114800"/>
-            <a:ext cx="3200400" cy="457200"/>
-          </a:xfrm>
-          <a:prstGeom prst="rect">
-            <a:avLst/>
-          </a:prstGeom>
-          <a:noFill/>
-        </p:spPr>
-        <p:txBody>
-          <a:bodyPr wrap="square" lIns="45720" tIns="27432" rIns="45720" bIns="27432" anchor="t">
-            <a:spAutoFit/>
-          </a:bodyPr>
-          <a:lstStyle/>
-          <a:p>
-            <a:pPr algn="l">
-              <a:spcAft>
-                <a:spcPts val="600"/>
-              </a:spcAft>
-            </a:pPr>
-            <a:r>
-              <a:rPr sz="1600" b="1" i="0">
-                <a:solidFill>
-                  <a:srgbClr val="111010"/>
-                </a:solidFill>
-                <a:latin typeface="Cascadia Code SemiBold" panose="020B0609020000020004"/>
-              </a:rPr>
-              <a:t>Особенность</a:t>
-            </a:r>
-            <a:endParaRPr sz="1600" b="1" i="0">
-              <a:solidFill>
-                <a:srgbClr val="111010"/>
-              </a:solidFill>
-              <a:latin typeface="Cascadia Code SemiBold" panose="020B0609020000020004"/>
-            </a:endParaRPr>
-          </a:p>
-        </p:txBody>
-      </p:sp>
-      <p:sp>
-        <p:nvSpPr>
-          <p:cNvPr id="22" name="TextBox 21"/>
-          <p:cNvSpPr txBox="1"/>
-          <p:nvPr/>
-        </p:nvSpPr>
-        <p:spPr>
-          <a:xfrm>
-            <a:off x="8229600" y="4572000"/>
-            <a:ext cx="3200400" cy="914400"/>
-          </a:xfrm>
-          <a:prstGeom prst="rect">
-            <a:avLst/>
-          </a:prstGeom>
-          <a:noFill/>
-        </p:spPr>
-        <p:txBody>
-          <a:bodyPr wrap="square" lIns="45720" tIns="27432" rIns="45720" bIns="27432" anchor="t">
-            <a:spAutoFit/>
-          </a:bodyPr>
-          <a:lstStyle/>
-          <a:p>
-            <a:pPr algn="l">
-              <a:spcAft>
-                <a:spcPts val="600"/>
-              </a:spcAft>
-            </a:pPr>
-            <a:r>
-              <a:rPr sz="1300" b="0" i="0">
-                <a:solidFill>
-                  <a:srgbClr val="111010"/>
-                </a:solidFill>
-                <a:latin typeface="Tahoma" panose="020B0604030504040204"/>
-              </a:rPr>
-              <a:t>Формат «одна строка — студент»: ответы волн в разных колонках (_3w, _4w)</a:t>
-            </a:r>
-            <a:endParaRPr sz="1300" b="0" i="0">
-              <a:solidFill>
-                <a:srgbClr val="111010"/>
-              </a:solidFill>
-              <a:latin typeface="Tahoma" panose="020B0604030504040204"/>
-            </a:endParaRPr>
+              <a:t>Ответы этих анкет заменены на пропуски, строки сохранены. Пустые строки удалены, выбросы в часах работы исправлены</a:t>
+            </a:r>
           </a:p>
         </p:txBody>
       </p:sp>
@@ -7049,7 +7099,7 @@
 </file>
 
 <file path=ppt/slides/slide4.xml><?xml version="1.0" encoding="utf-8"?>
-<p:sld xmlns:a="http://schemas.openxmlformats.org/drawingml/2006/main" xmlns:r="http://schemas.openxmlformats.org/officeDocument/2006/relationships" xmlns:p="http://schemas.openxmlformats.org/presentationml/2006/main">
+<p:sld xmlns:a="http://schemas.openxmlformats.org/drawingml/2006/main" xmlns:p="http://schemas.openxmlformats.org/presentationml/2006/main" xmlns:r="http://schemas.openxmlformats.org/officeDocument/2006/relationships">
   <p:cSld>
     <p:spTree>
       <p:nvGrpSpPr>
@@ -7073,7 +7123,7 @@
             <a:avLst/>
           </a:prstGeom>
           <a:solidFill>
-            <a:srgbClr val="FFD966"/>
+            <a:srgbClr val="FFF4D7"/>
           </a:solidFill>
           <a:ln>
             <a:noFill/>
@@ -7095,25 +7145,19 @@
           </a:fontRef>
         </p:style>
         <p:txBody>
-          <a:bodyPr lIns="45720" rIns="45720" rtlCol="0" anchor="ctr"/>
+          <a:bodyPr rtlCol="0" anchor="ctr" lIns="45720" rIns="45720"/>
           <a:lstStyle/>
           <a:p>
             <a:pPr algn="ctr"/>
             <a:r>
-              <a:rPr sz="1200" b="1">
+              <a:rPr sz="1200" b="0">
                 <a:solidFill>
                   <a:srgbClr val="111010"/>
                 </a:solidFill>
-                <a:latin typeface="Cascadia Code SemiBold" panose="020B0609020000020004"/>
+                <a:latin typeface="Cascadia Code SemiBold"/>
               </a:rPr>
-              <a:t>ДАННЫЕ</a:t>
-            </a:r>
-            <a:endParaRPr sz="1200" b="1">
-              <a:solidFill>
-                <a:srgbClr val="111010"/>
-              </a:solidFill>
-              <a:latin typeface="Cascadia Code SemiBold" panose="020B0609020000020004"/>
-            </a:endParaRPr>
+              <a:t>ВОПРОС</a:t>
+            </a:r>
           </a:p>
         </p:txBody>
       </p:sp>
@@ -7154,7 +7198,7 @@
           </a:fontRef>
         </p:style>
         <p:txBody>
-          <a:bodyPr lIns="45720" rIns="45720" rtlCol="0" anchor="ctr"/>
+          <a:bodyPr rtlCol="0" anchor="ctr" lIns="45720" rIns="45720"/>
           <a:lstStyle/>
           <a:p>
             <a:pPr algn="ctr"/>
@@ -7163,28 +7207,75 @@
                 <a:solidFill>
                   <a:srgbClr val="111010"/>
                 </a:solidFill>
-                <a:latin typeface="Cascadia Code SemiBold" panose="020B0609020000020004"/>
+                <a:latin typeface="Cascadia Code SemiBold"/>
+              </a:rPr>
+              <a:t>ДАННЫЕ</a:t>
+            </a:r>
+          </a:p>
+        </p:txBody>
+      </p:sp>
+      <p:sp>
+        <p:nvSpPr>
+          <p:cNvPr id="4" name="Chevron 3"/>
+          <p:cNvSpPr/>
+          <p:nvPr/>
+        </p:nvSpPr>
+        <p:spPr>
+          <a:xfrm>
+            <a:off x="4800600" y="164592"/>
+            <a:ext cx="2514600" cy="384048"/>
+          </a:xfrm>
+          <a:prstGeom prst="chevron">
+            <a:avLst/>
+          </a:prstGeom>
+          <a:solidFill>
+            <a:srgbClr val="FFD966"/>
+          </a:solidFill>
+          <a:ln>
+            <a:noFill/>
+          </a:ln>
+          <a:effectLst/>
+        </p:spPr>
+        <p:style>
+          <a:lnRef idx="1">
+            <a:schemeClr val="accent1"/>
+          </a:lnRef>
+          <a:fillRef idx="3">
+            <a:schemeClr val="accent1"/>
+          </a:fillRef>
+          <a:effectRef idx="2">
+            <a:schemeClr val="accent1"/>
+          </a:effectRef>
+          <a:fontRef idx="minor">
+            <a:schemeClr val="lt1"/>
+          </a:fontRef>
+        </p:style>
+        <p:txBody>
+          <a:bodyPr rtlCol="0" anchor="ctr" lIns="45720" rIns="45720"/>
+          <a:lstStyle/>
+          <a:p>
+            <a:pPr algn="ctr"/>
+            <a:r>
+              <a:rPr sz="1200" b="1">
+                <a:solidFill>
+                  <a:srgbClr val="111010"/>
+                </a:solidFill>
+                <a:latin typeface="Cascadia Code SemiBold"/>
               </a:rPr>
               <a:t>МЕТОДЫ</a:t>
             </a:r>
-            <a:endParaRPr sz="1200" b="0">
-              <a:solidFill>
-                <a:srgbClr val="111010"/>
-              </a:solidFill>
-              <a:latin typeface="Cascadia Code SemiBold" panose="020B0609020000020004"/>
-            </a:endParaRPr>
-          </a:p>
-        </p:txBody>
-      </p:sp>
-      <p:sp>
-        <p:nvSpPr>
-          <p:cNvPr id="4" name="Chevron 3"/>
+          </a:p>
+        </p:txBody>
+      </p:sp>
+      <p:sp>
+        <p:nvSpPr>
+          <p:cNvPr id="5" name="Chevron 4"/>
           <p:cNvSpPr/>
           <p:nvPr/>
         </p:nvSpPr>
         <p:spPr>
           <a:xfrm>
-            <a:off x="4800600" y="164592"/>
+            <a:off x="7132320" y="164592"/>
             <a:ext cx="2514600" cy="384048"/>
           </a:xfrm>
           <a:prstGeom prst="chevron">
@@ -7213,7 +7304,7 @@
           </a:fontRef>
         </p:style>
         <p:txBody>
-          <a:bodyPr lIns="45720" rIns="45720" rtlCol="0" anchor="ctr"/>
+          <a:bodyPr rtlCol="0" anchor="ctr" lIns="45720" rIns="45720"/>
           <a:lstStyle/>
           <a:p>
             <a:pPr algn="ctr"/>
@@ -7222,28 +7313,22 @@
                 <a:solidFill>
                   <a:srgbClr val="111010"/>
                 </a:solidFill>
-                <a:latin typeface="Cascadia Code SemiBold" panose="020B0609020000020004"/>
+                <a:latin typeface="Cascadia Code SemiBold"/>
               </a:rPr>
               <a:t>РЕЗУЛЬТАТЫ</a:t>
             </a:r>
-            <a:endParaRPr sz="1200" b="0">
-              <a:solidFill>
-                <a:srgbClr val="111010"/>
-              </a:solidFill>
-              <a:latin typeface="Cascadia Code SemiBold" panose="020B0609020000020004"/>
-            </a:endParaRPr>
-          </a:p>
-        </p:txBody>
-      </p:sp>
-      <p:sp>
-        <p:nvSpPr>
-          <p:cNvPr id="5" name="Chevron 4"/>
+          </a:p>
+        </p:txBody>
+      </p:sp>
+      <p:sp>
+        <p:nvSpPr>
+          <p:cNvPr id="6" name="Chevron 5"/>
           <p:cNvSpPr/>
           <p:nvPr/>
         </p:nvSpPr>
         <p:spPr>
           <a:xfrm>
-            <a:off x="7132320" y="164592"/>
+            <a:off x="9464040" y="164592"/>
             <a:ext cx="2514600" cy="384048"/>
           </a:xfrm>
           <a:prstGeom prst="chevron">
@@ -7272,7 +7357,7 @@
           </a:fontRef>
         </p:style>
         <p:txBody>
-          <a:bodyPr lIns="45720" rIns="45720" rtlCol="0" anchor="ctr"/>
+          <a:bodyPr rtlCol="0" anchor="ctr" lIns="45720" rIns="45720"/>
           <a:lstStyle/>
           <a:p>
             <a:pPr algn="ctr"/>
@@ -7281,75 +7366,10 @@
                 <a:solidFill>
                   <a:srgbClr val="111010"/>
                 </a:solidFill>
-                <a:latin typeface="Cascadia Code SemiBold" panose="020B0609020000020004"/>
+                <a:latin typeface="Cascadia Code SemiBold"/>
               </a:rPr>
-              <a:t>ОБСУЖДЕНИЕ</a:t>
-            </a:r>
-            <a:endParaRPr sz="1200" b="0">
-              <a:solidFill>
-                <a:srgbClr val="111010"/>
-              </a:solidFill>
-              <a:latin typeface="Cascadia Code SemiBold" panose="020B0609020000020004"/>
-            </a:endParaRPr>
-          </a:p>
-        </p:txBody>
-      </p:sp>
-      <p:sp>
-        <p:nvSpPr>
-          <p:cNvPr id="6" name="Chevron 5"/>
-          <p:cNvSpPr/>
-          <p:nvPr/>
-        </p:nvSpPr>
-        <p:spPr>
-          <a:xfrm>
-            <a:off x="9464040" y="164592"/>
-            <a:ext cx="2514600" cy="384048"/>
-          </a:xfrm>
-          <a:prstGeom prst="chevron">
-            <a:avLst/>
-          </a:prstGeom>
-          <a:solidFill>
-            <a:srgbClr val="FFF4D7"/>
-          </a:solidFill>
-          <a:ln>
-            <a:noFill/>
-          </a:ln>
-          <a:effectLst/>
-        </p:spPr>
-        <p:style>
-          <a:lnRef idx="1">
-            <a:schemeClr val="accent1"/>
-          </a:lnRef>
-          <a:fillRef idx="3">
-            <a:schemeClr val="accent1"/>
-          </a:fillRef>
-          <a:effectRef idx="2">
-            <a:schemeClr val="accent1"/>
-          </a:effectRef>
-          <a:fontRef idx="minor">
-            <a:schemeClr val="lt1"/>
-          </a:fontRef>
-        </p:style>
-        <p:txBody>
-          <a:bodyPr lIns="45720" rIns="45720" rtlCol="0" anchor="ctr"/>
-          <a:lstStyle/>
-          <a:p>
-            <a:pPr algn="ctr"/>
-            <a:r>
-              <a:rPr sz="1200" b="0">
-                <a:solidFill>
-                  <a:srgbClr val="111010"/>
-                </a:solidFill>
-                <a:latin typeface="Cascadia Code SemiBold" panose="020B0609020000020004"/>
-              </a:rPr>
-              <a:t>ПОДВАЛ</a:t>
-            </a:r>
-            <a:endParaRPr sz="1200" b="0">
-              <a:solidFill>
-                <a:srgbClr val="111010"/>
-              </a:solidFill>
-              <a:latin typeface="Cascadia Code SemiBold" panose="020B0609020000020004"/>
-            </a:endParaRPr>
+              <a:t>ВЫВОДЫ</a:t>
+            </a:r>
           </a:p>
         </p:txBody>
       </p:sp>
@@ -7458,7 +7478,7 @@
           <a:noFill/>
         </p:spPr>
         <p:txBody>
-          <a:bodyPr wrap="square" lIns="45720" tIns="27432" rIns="45720" bIns="27432" anchor="t">
+          <a:bodyPr wrap="square" anchor="t" lIns="45720" rIns="45720" tIns="27432" bIns="27432">
             <a:spAutoFit/>
           </a:bodyPr>
           <a:lstStyle/>
@@ -7473,16 +7493,10 @@
                 <a:solidFill>
                   <a:srgbClr val="848484"/>
                 </a:solidFill>
-                <a:latin typeface="Tahoma" panose="020B0604030504040204"/>
+                <a:latin typeface="Tahoma"/>
               </a:rPr>
               <a:t>4</a:t>
             </a:r>
-            <a:endParaRPr sz="1200" b="0" i="0">
-              <a:solidFill>
-                <a:srgbClr val="848484"/>
-              </a:solidFill>
-              <a:latin typeface="Tahoma" panose="020B0604030504040204"/>
-            </a:endParaRPr>
           </a:p>
         </p:txBody>
       </p:sp>
@@ -7503,7 +7517,7 @@
           <a:noFill/>
         </p:spPr>
         <p:txBody>
-          <a:bodyPr wrap="square" lIns="45720" tIns="27432" rIns="45720" bIns="27432" anchor="t">
+          <a:bodyPr wrap="square" anchor="t" lIns="45720" rIns="45720" tIns="27432" bIns="27432">
             <a:spAutoFit/>
           </a:bodyPr>
           <a:lstStyle/>
@@ -7518,29 +7532,71 @@
                 <a:solidFill>
                   <a:srgbClr val="111010"/>
                 </a:solidFill>
-                <a:latin typeface="Arial Black" panose="020B0A04020102020204"/>
+                <a:latin typeface="Arial Black"/>
               </a:rPr>
-              <a:t>Предобработка</a:t>
-            </a:r>
-            <a:endParaRPr sz="2800" b="0" i="0">
-              <a:solidFill>
-                <a:srgbClr val="111010"/>
-              </a:solidFill>
-              <a:latin typeface="Arial Black" panose="020B0A04020102020204"/>
-            </a:endParaRPr>
-          </a:p>
-        </p:txBody>
-      </p:sp>
-      <p:sp>
-        <p:nvSpPr>
-          <p:cNvPr id="11" name="Oval 10"/>
+              <a:t>Методы анализа</a:t>
+            </a:r>
+          </a:p>
+        </p:txBody>
+      </p:sp>
+      <p:sp>
+        <p:nvSpPr>
+          <p:cNvPr id="11" name="Rounded Rectangle 10"/>
           <p:cNvSpPr/>
           <p:nvPr/>
         </p:nvSpPr>
         <p:spPr>
           <a:xfrm>
-            <a:off x="640080" y="1645920"/>
-            <a:ext cx="438912" cy="438912"/>
+            <a:off x="548640" y="1691640"/>
+            <a:ext cx="2011680" cy="2514600"/>
+          </a:xfrm>
+          <a:prstGeom prst="roundRect">
+            <a:avLst>
+              <a:gd name="adj" fmla="val 10000"/>
+            </a:avLst>
+          </a:prstGeom>
+          <a:solidFill>
+            <a:srgbClr val="FFF4D7"/>
+          </a:solidFill>
+          <a:ln w="15875">
+            <a:solidFill>
+              <a:srgbClr val="FFD966"/>
+            </a:solidFill>
+          </a:ln>
+          <a:effectLst/>
+        </p:spPr>
+        <p:style>
+          <a:lnRef idx="1">
+            <a:schemeClr val="accent1"/>
+          </a:lnRef>
+          <a:fillRef idx="3">
+            <a:schemeClr val="accent1"/>
+          </a:fillRef>
+          <a:effectRef idx="2">
+            <a:schemeClr val="accent1"/>
+          </a:effectRef>
+          <a:fontRef idx="minor">
+            <a:schemeClr val="lt1"/>
+          </a:fontRef>
+        </p:style>
+        <p:txBody>
+          <a:bodyPr rtlCol="0" anchor="ctr"/>
+          <a:lstStyle/>
+          <a:p>
+            <a:pPr algn="ctr"/>
+          </a:p>
+        </p:txBody>
+      </p:sp>
+      <p:sp>
+        <p:nvSpPr>
+          <p:cNvPr id="12" name="Oval 11"/>
+          <p:cNvSpPr/>
+          <p:nvPr/>
+        </p:nvSpPr>
+        <p:spPr>
+          <a:xfrm>
+            <a:off x="1280160" y="1463040"/>
+            <a:ext cx="548640" cy="548640"/>
           </a:xfrm>
           <a:prstGeom prst="ellipse">
             <a:avLst/>
@@ -7577,14 +7633,14 @@
       </p:sp>
       <p:sp>
         <p:nvSpPr>
-          <p:cNvPr id="12" name="TextBox 11"/>
+          <p:cNvPr id="13" name="TextBox 12"/>
           <p:cNvSpPr txBox="1"/>
           <p:nvPr/>
         </p:nvSpPr>
         <p:spPr>
           <a:xfrm>
-            <a:off x="640080" y="1645920"/>
-            <a:ext cx="438912" cy="438912"/>
+            <a:off x="1280160" y="1463040"/>
+            <a:ext cx="548640" cy="548640"/>
           </a:xfrm>
           <a:prstGeom prst="rect">
             <a:avLst/>
@@ -7592,7 +7648,7 @@
           <a:noFill/>
         </p:spPr>
         <p:txBody>
-          <a:bodyPr wrap="square" lIns="45720" tIns="27432" rIns="45720" bIns="27432" anchor="ctr">
+          <a:bodyPr wrap="square" anchor="ctr" lIns="45720" rIns="45720" tIns="27432" bIns="27432">
             <a:spAutoFit/>
           </a:bodyPr>
           <a:lstStyle/>
@@ -7603,33 +7659,27 @@
               </a:spcAft>
             </a:pPr>
             <a:r>
-              <a:rPr sz="1400" b="1" i="0">
+              <a:rPr sz="1600" b="1" i="0">
                 <a:solidFill>
                   <a:srgbClr val="111010"/>
                 </a:solidFill>
-                <a:latin typeface="Cascadia Code SemiBold" panose="020B0609020000020004"/>
+                <a:latin typeface="Cascadia Code SemiBold"/>
               </a:rPr>
               <a:t>1</a:t>
             </a:r>
-            <a:endParaRPr sz="1400" b="1" i="0">
-              <a:solidFill>
-                <a:srgbClr val="111010"/>
-              </a:solidFill>
-              <a:latin typeface="Cascadia Code SemiBold" panose="020B0609020000020004"/>
-            </a:endParaRPr>
-          </a:p>
-        </p:txBody>
-      </p:sp>
-      <p:sp>
-        <p:nvSpPr>
-          <p:cNvPr id="13" name="TextBox 12"/>
+          </a:p>
+        </p:txBody>
+      </p:sp>
+      <p:sp>
+        <p:nvSpPr>
+          <p:cNvPr id="14" name="TextBox 13"/>
           <p:cNvSpPr txBox="1"/>
           <p:nvPr/>
         </p:nvSpPr>
         <p:spPr>
           <a:xfrm>
-            <a:off x="1234440" y="1664208"/>
-            <a:ext cx="6583680" cy="457200"/>
+            <a:off x="640080" y="2103120"/>
+            <a:ext cx="1828800" cy="731520"/>
           </a:xfrm>
           <a:prstGeom prst="rect">
             <a:avLst/>
@@ -7637,53 +7687,201 @@
           <a:noFill/>
         </p:spPr>
         <p:txBody>
-          <a:bodyPr wrap="square" lIns="45720" tIns="27432" rIns="45720" bIns="27432" anchor="t">
+          <a:bodyPr wrap="square" anchor="t" lIns="45720" rIns="45720" tIns="27432" bIns="27432">
             <a:spAutoFit/>
           </a:bodyPr>
           <a:lstStyle/>
           <a:p>
-            <a:pPr algn="l">
+            <a:pPr algn="ctr">
               <a:spcAft>
                 <a:spcPts val="600"/>
               </a:spcAft>
             </a:pPr>
             <a:r>
-              <a:rPr sz="1500" b="1" i="0">
+              <a:rPr sz="1400" b="1" i="0">
                 <a:solidFill>
                   <a:srgbClr val="111010"/>
                 </a:solidFill>
-                <a:latin typeface="Tahoma" panose="020B0604030504040204"/>
+                <a:latin typeface="Cascadia Code SemiBold"/>
               </a:rPr>
-              <a:t>Названия по PEP8: </a:t>
-            </a:r>
-            <a:r>
-              <a:rPr sz="1500" b="0" i="0">
+              <a:t>Предобработка</a:t>
+            </a:r>
+          </a:p>
+        </p:txBody>
+      </p:sp>
+      <p:sp>
+        <p:nvSpPr>
+          <p:cNvPr id="15" name="TextBox 14"/>
+          <p:cNvSpPr txBox="1"/>
+          <p:nvPr/>
+        </p:nvSpPr>
+        <p:spPr>
+          <a:xfrm>
+            <a:off x="640080" y="2880360"/>
+            <a:ext cx="1828800" cy="1280160"/>
+          </a:xfrm>
+          <a:prstGeom prst="rect">
+            <a:avLst/>
+          </a:prstGeom>
+          <a:noFill/>
+        </p:spPr>
+        <p:txBody>
+          <a:bodyPr wrap="square" anchor="t" lIns="45720" rIns="45720" tIns="27432" bIns="27432">
+            <a:spAutoFit/>
+          </a:bodyPr>
+          <a:lstStyle/>
+          <a:p>
+            <a:pPr algn="ctr">
+              <a:spcAft>
+                <a:spcPts val="600"/>
+              </a:spcAft>
+            </a:pPr>
+            <a:r>
+              <a:rPr sz="1200" b="0" i="0">
                 <a:solidFill>
                   <a:srgbClr val="111010"/>
                 </a:solidFill>
-                <a:latin typeface="Tahoma" panose="020B0604030504040204"/>
+                <a:latin typeface="Tahoma"/>
               </a:rPr>
-              <a:t>единая схема &lt;вопрос&gt;_&lt;волна&gt;</a:t>
-            </a:r>
-            <a:endParaRPr sz="1500" b="0" i="0">
-              <a:solidFill>
-                <a:srgbClr val="111010"/>
-              </a:solidFill>
-              <a:latin typeface="Tahoma" panose="020B0604030504040204"/>
-            </a:endParaRPr>
-          </a:p>
-        </p:txBody>
-      </p:sp>
-      <p:sp>
-        <p:nvSpPr>
-          <p:cNvPr id="14" name="Oval 13"/>
+              <a:t>типы, выбросы</a:t>
+            </a:r>
+          </a:p>
+          <a:p>
+            <a:pPr algn="ctr">
+              <a:spcAft>
+                <a:spcPts val="600"/>
+              </a:spcAft>
+            </a:pPr>
+            <a:r>
+              <a:rPr sz="1200" b="0" i="0">
+                <a:solidFill>
+                  <a:srgbClr val="111010"/>
+                </a:solidFill>
+                <a:latin typeface="Tahoma"/>
+              </a:rPr>
+              <a:t>(3·IQR), служебные</a:t>
+            </a:r>
+          </a:p>
+          <a:p>
+            <a:pPr algn="ctr">
+              <a:spcAft>
+                <a:spcPts val="600"/>
+              </a:spcAft>
+            </a:pPr>
+            <a:r>
+              <a:rPr sz="1200" b="0" i="0">
+                <a:solidFill>
+                  <a:srgbClr val="111010"/>
+                </a:solidFill>
+                <a:latin typeface="Tahoma"/>
+              </a:rPr>
+              <a:t>коды, очистка анкет</a:t>
+            </a:r>
+          </a:p>
+        </p:txBody>
+      </p:sp>
+      <p:sp>
+        <p:nvSpPr>
+          <p:cNvPr id="16" name="Right Arrow 15"/>
           <p:cNvSpPr/>
           <p:nvPr/>
         </p:nvSpPr>
         <p:spPr>
           <a:xfrm>
-            <a:off x="640080" y="2267712"/>
-            <a:ext cx="438912" cy="438912"/>
+            <a:off x="2578608" y="2788920"/>
+            <a:ext cx="237744" cy="320040"/>
+          </a:xfrm>
+          <a:prstGeom prst="rightArrow">
+            <a:avLst/>
+          </a:prstGeom>
+          <a:solidFill>
+            <a:srgbClr val="C55A11"/>
+          </a:solidFill>
+          <a:ln>
+            <a:noFill/>
+          </a:ln>
+          <a:effectLst/>
+        </p:spPr>
+        <p:style>
+          <a:lnRef idx="1">
+            <a:schemeClr val="accent1"/>
+          </a:lnRef>
+          <a:fillRef idx="3">
+            <a:schemeClr val="accent1"/>
+          </a:fillRef>
+          <a:effectRef idx="2">
+            <a:schemeClr val="accent1"/>
+          </a:effectRef>
+          <a:fontRef idx="minor">
+            <a:schemeClr val="lt1"/>
+          </a:fontRef>
+        </p:style>
+        <p:txBody>
+          <a:bodyPr rtlCol="0" anchor="ctr"/>
+          <a:lstStyle/>
+          <a:p>
+            <a:pPr algn="ctr"/>
+          </a:p>
+        </p:txBody>
+      </p:sp>
+      <p:sp>
+        <p:nvSpPr>
+          <p:cNvPr id="17" name="Rounded Rectangle 16"/>
+          <p:cNvSpPr/>
+          <p:nvPr/>
+        </p:nvSpPr>
+        <p:spPr>
+          <a:xfrm>
+            <a:off x="2834640" y="1691640"/>
+            <a:ext cx="2011680" cy="2514600"/>
+          </a:xfrm>
+          <a:prstGeom prst="roundRect">
+            <a:avLst>
+              <a:gd name="adj" fmla="val 10000"/>
+            </a:avLst>
+          </a:prstGeom>
+          <a:solidFill>
+            <a:srgbClr val="FFE699"/>
+          </a:solidFill>
+          <a:ln w="15875">
+            <a:solidFill>
+              <a:srgbClr val="FFD966"/>
+            </a:solidFill>
+          </a:ln>
+          <a:effectLst/>
+        </p:spPr>
+        <p:style>
+          <a:lnRef idx="1">
+            <a:schemeClr val="accent1"/>
+          </a:lnRef>
+          <a:fillRef idx="3">
+            <a:schemeClr val="accent1"/>
+          </a:fillRef>
+          <a:effectRef idx="2">
+            <a:schemeClr val="accent1"/>
+          </a:effectRef>
+          <a:fontRef idx="minor">
+            <a:schemeClr val="lt1"/>
+          </a:fontRef>
+        </p:style>
+        <p:txBody>
+          <a:bodyPr rtlCol="0" anchor="ctr"/>
+          <a:lstStyle/>
+          <a:p>
+            <a:pPr algn="ctr"/>
+          </a:p>
+        </p:txBody>
+      </p:sp>
+      <p:sp>
+        <p:nvSpPr>
+          <p:cNvPr id="18" name="Oval 17"/>
+          <p:cNvSpPr/>
+          <p:nvPr/>
+        </p:nvSpPr>
+        <p:spPr>
+          <a:xfrm>
+            <a:off x="3566160" y="1463040"/>
+            <a:ext cx="548640" cy="548640"/>
           </a:xfrm>
           <a:prstGeom prst="ellipse">
             <a:avLst/>
@@ -7720,14 +7918,14 @@
       </p:sp>
       <p:sp>
         <p:nvSpPr>
-          <p:cNvPr id="15" name="TextBox 14"/>
+          <p:cNvPr id="19" name="TextBox 18"/>
           <p:cNvSpPr txBox="1"/>
           <p:nvPr/>
         </p:nvSpPr>
         <p:spPr>
           <a:xfrm>
-            <a:off x="640080" y="2267712"/>
-            <a:ext cx="438912" cy="438912"/>
+            <a:off x="3566160" y="1463040"/>
+            <a:ext cx="548640" cy="548640"/>
           </a:xfrm>
           <a:prstGeom prst="rect">
             <a:avLst/>
@@ -7735,7 +7933,7 @@
           <a:noFill/>
         </p:spPr>
         <p:txBody>
-          <a:bodyPr wrap="square" lIns="45720" tIns="27432" rIns="45720" bIns="27432" anchor="ctr">
+          <a:bodyPr wrap="square" anchor="ctr" lIns="45720" rIns="45720" tIns="27432" bIns="27432">
             <a:spAutoFit/>
           </a:bodyPr>
           <a:lstStyle/>
@@ -7746,33 +7944,27 @@
               </a:spcAft>
             </a:pPr>
             <a:r>
-              <a:rPr sz="1400" b="1" i="0">
+              <a:rPr sz="1600" b="1" i="0">
                 <a:solidFill>
                   <a:srgbClr val="111010"/>
                 </a:solidFill>
-                <a:latin typeface="Cascadia Code SemiBold" panose="020B0609020000020004"/>
+                <a:latin typeface="Cascadia Code SemiBold"/>
               </a:rPr>
               <a:t>2</a:t>
             </a:r>
-            <a:endParaRPr sz="1400" b="1" i="0">
-              <a:solidFill>
-                <a:srgbClr val="111010"/>
-              </a:solidFill>
-              <a:latin typeface="Cascadia Code SemiBold" panose="020B0609020000020004"/>
-            </a:endParaRPr>
-          </a:p>
-        </p:txBody>
-      </p:sp>
-      <p:sp>
-        <p:nvSpPr>
-          <p:cNvPr id="16" name="TextBox 15"/>
+          </a:p>
+        </p:txBody>
+      </p:sp>
+      <p:sp>
+        <p:nvSpPr>
+          <p:cNvPr id="20" name="TextBox 19"/>
           <p:cNvSpPr txBox="1"/>
           <p:nvPr/>
         </p:nvSpPr>
         <p:spPr>
           <a:xfrm>
-            <a:off x="1234440" y="2286000"/>
-            <a:ext cx="6583680" cy="457200"/>
+            <a:off x="2926080" y="2103120"/>
+            <a:ext cx="1828800" cy="731520"/>
           </a:xfrm>
           <a:prstGeom prst="rect">
             <a:avLst/>
@@ -7780,53 +7972,217 @@
           <a:noFill/>
         </p:spPr>
         <p:txBody>
-          <a:bodyPr wrap="square" lIns="45720" tIns="27432" rIns="45720" bIns="27432" anchor="t">
+          <a:bodyPr wrap="square" anchor="t" lIns="45720" rIns="45720" tIns="27432" bIns="27432">
             <a:spAutoFit/>
           </a:bodyPr>
           <a:lstStyle/>
           <a:p>
-            <a:pPr algn="l">
+            <a:pPr algn="ctr">
               <a:spcAft>
                 <a:spcPts val="600"/>
               </a:spcAft>
             </a:pPr>
             <a:r>
-              <a:rPr sz="1500" b="1" i="0">
+              <a:rPr sz="1400" b="1" i="0">
                 <a:solidFill>
                   <a:srgbClr val="111010"/>
                 </a:solidFill>
-                <a:latin typeface="Tahoma" panose="020B0604030504040204"/>
+                <a:latin typeface="Cascadia Code SemiBold"/>
               </a:rPr>
-              <a:t>Типы данных: </a:t>
-            </a:r>
-            <a:r>
-              <a:rPr sz="1500" b="0" i="0">
+              <a:t>Описательный</a:t>
+            </a:r>
+          </a:p>
+          <a:p>
+            <a:pPr algn="ctr">
+              <a:spcAft>
+                <a:spcPts val="600"/>
+              </a:spcAft>
+            </a:pPr>
+            <a:r>
+              <a:rPr sz="1400" b="1" i="0">
                 <a:solidFill>
                   <a:srgbClr val="111010"/>
                 </a:solidFill>
-                <a:latin typeface="Tahoma" panose="020B0604030504040204"/>
+                <a:latin typeface="Cascadia Code SemiBold"/>
               </a:rPr>
-              <a:t>коды → Int64, флаги 0/1</a:t>
-            </a:r>
-            <a:endParaRPr sz="1500" b="0" i="0">
-              <a:solidFill>
-                <a:srgbClr val="111010"/>
-              </a:solidFill>
-              <a:latin typeface="Tahoma" panose="020B0604030504040204"/>
-            </a:endParaRPr>
-          </a:p>
-        </p:txBody>
-      </p:sp>
-      <p:sp>
-        <p:nvSpPr>
-          <p:cNvPr id="17" name="Oval 16"/>
+              <a:t>анализ</a:t>
+            </a:r>
+          </a:p>
+        </p:txBody>
+      </p:sp>
+      <p:sp>
+        <p:nvSpPr>
+          <p:cNvPr id="21" name="TextBox 20"/>
+          <p:cNvSpPr txBox="1"/>
+          <p:nvPr/>
+        </p:nvSpPr>
+        <p:spPr>
+          <a:xfrm>
+            <a:off x="2926080" y="2880360"/>
+            <a:ext cx="1828800" cy="1280160"/>
+          </a:xfrm>
+          <a:prstGeom prst="rect">
+            <a:avLst/>
+          </a:prstGeom>
+          <a:noFill/>
+        </p:spPr>
+        <p:txBody>
+          <a:bodyPr wrap="square" anchor="t" lIns="45720" rIns="45720" tIns="27432" bIns="27432">
+            <a:spAutoFit/>
+          </a:bodyPr>
+          <a:lstStyle/>
+          <a:p>
+            <a:pPr algn="ctr">
+              <a:spcAft>
+                <a:spcPts val="600"/>
+              </a:spcAft>
+            </a:pPr>
+            <a:r>
+              <a:rPr sz="1200" b="0" i="0">
+                <a:solidFill>
+                  <a:srgbClr val="111010"/>
+                </a:solidFill>
+                <a:latin typeface="Tahoma"/>
+              </a:rPr>
+              <a:t>доли по волнам</a:t>
+            </a:r>
+          </a:p>
+          <a:p>
+            <a:pPr algn="ctr">
+              <a:spcAft>
+                <a:spcPts val="600"/>
+              </a:spcAft>
+            </a:pPr>
+            <a:r>
+              <a:rPr sz="1200" b="0" i="0">
+                <a:solidFill>
+                  <a:srgbClr val="111010"/>
+                </a:solidFill>
+                <a:latin typeface="Tahoma"/>
+              </a:rPr>
+              <a:t>и группам</a:t>
+            </a:r>
+          </a:p>
+          <a:p>
+            <a:pPr algn="ctr">
+              <a:spcAft>
+                <a:spcPts val="600"/>
+              </a:spcAft>
+            </a:pPr>
+            <a:r>
+              <a:rPr sz="1200" b="0" i="0">
+                <a:solidFill>
+                  <a:srgbClr val="111010"/>
+                </a:solidFill>
+                <a:latin typeface="Tahoma"/>
+              </a:rPr>
+              <a:t>занятости</a:t>
+            </a:r>
+          </a:p>
+        </p:txBody>
+      </p:sp>
+      <p:sp>
+        <p:nvSpPr>
+          <p:cNvPr id="22" name="Right Arrow 21"/>
           <p:cNvSpPr/>
           <p:nvPr/>
         </p:nvSpPr>
         <p:spPr>
           <a:xfrm>
-            <a:off x="640080" y="2889504"/>
-            <a:ext cx="438912" cy="438912"/>
+            <a:off x="4864608" y="2788920"/>
+            <a:ext cx="237744" cy="320040"/>
+          </a:xfrm>
+          <a:prstGeom prst="rightArrow">
+            <a:avLst/>
+          </a:prstGeom>
+          <a:solidFill>
+            <a:srgbClr val="C55A11"/>
+          </a:solidFill>
+          <a:ln>
+            <a:noFill/>
+          </a:ln>
+          <a:effectLst/>
+        </p:spPr>
+        <p:style>
+          <a:lnRef idx="1">
+            <a:schemeClr val="accent1"/>
+          </a:lnRef>
+          <a:fillRef idx="3">
+            <a:schemeClr val="accent1"/>
+          </a:fillRef>
+          <a:effectRef idx="2">
+            <a:schemeClr val="accent1"/>
+          </a:effectRef>
+          <a:fontRef idx="minor">
+            <a:schemeClr val="lt1"/>
+          </a:fontRef>
+        </p:style>
+        <p:txBody>
+          <a:bodyPr rtlCol="0" anchor="ctr"/>
+          <a:lstStyle/>
+          <a:p>
+            <a:pPr algn="ctr"/>
+          </a:p>
+        </p:txBody>
+      </p:sp>
+      <p:sp>
+        <p:nvSpPr>
+          <p:cNvPr id="23" name="Rounded Rectangle 22"/>
+          <p:cNvSpPr/>
+          <p:nvPr/>
+        </p:nvSpPr>
+        <p:spPr>
+          <a:xfrm>
+            <a:off x="5120640" y="1691640"/>
+            <a:ext cx="2011680" cy="2514600"/>
+          </a:xfrm>
+          <a:prstGeom prst="roundRect">
+            <a:avLst>
+              <a:gd name="adj" fmla="val 10000"/>
+            </a:avLst>
+          </a:prstGeom>
+          <a:solidFill>
+            <a:srgbClr val="FFF4D7"/>
+          </a:solidFill>
+          <a:ln w="15875">
+            <a:solidFill>
+              <a:srgbClr val="FFD966"/>
+            </a:solidFill>
+          </a:ln>
+          <a:effectLst/>
+        </p:spPr>
+        <p:style>
+          <a:lnRef idx="1">
+            <a:schemeClr val="accent1"/>
+          </a:lnRef>
+          <a:fillRef idx="3">
+            <a:schemeClr val="accent1"/>
+          </a:fillRef>
+          <a:effectRef idx="2">
+            <a:schemeClr val="accent1"/>
+          </a:effectRef>
+          <a:fontRef idx="minor">
+            <a:schemeClr val="lt1"/>
+          </a:fontRef>
+        </p:style>
+        <p:txBody>
+          <a:bodyPr rtlCol="0" anchor="ctr"/>
+          <a:lstStyle/>
+          <a:p>
+            <a:pPr algn="ctr"/>
+          </a:p>
+        </p:txBody>
+      </p:sp>
+      <p:sp>
+        <p:nvSpPr>
+          <p:cNvPr id="24" name="Oval 23"/>
+          <p:cNvSpPr/>
+          <p:nvPr/>
+        </p:nvSpPr>
+        <p:spPr>
+          <a:xfrm>
+            <a:off x="5852159" y="1463040"/>
+            <a:ext cx="548640" cy="548640"/>
           </a:xfrm>
           <a:prstGeom prst="ellipse">
             <a:avLst/>
@@ -7863,14 +8219,14 @@
       </p:sp>
       <p:sp>
         <p:nvSpPr>
-          <p:cNvPr id="18" name="TextBox 17"/>
+          <p:cNvPr id="25" name="TextBox 24"/>
           <p:cNvSpPr txBox="1"/>
           <p:nvPr/>
         </p:nvSpPr>
         <p:spPr>
           <a:xfrm>
-            <a:off x="640080" y="2889504"/>
-            <a:ext cx="438912" cy="438912"/>
+            <a:off x="5852159" y="1463040"/>
+            <a:ext cx="548640" cy="548640"/>
           </a:xfrm>
           <a:prstGeom prst="rect">
             <a:avLst/>
@@ -7878,7 +8234,7 @@
           <a:noFill/>
         </p:spPr>
         <p:txBody>
-          <a:bodyPr wrap="square" lIns="45720" tIns="27432" rIns="45720" bIns="27432" anchor="ctr">
+          <a:bodyPr wrap="square" anchor="ctr" lIns="45720" rIns="45720" tIns="27432" bIns="27432">
             <a:spAutoFit/>
           </a:bodyPr>
           <a:lstStyle/>
@@ -7889,33 +8245,27 @@
               </a:spcAft>
             </a:pPr>
             <a:r>
-              <a:rPr sz="1400" b="1" i="0">
+              <a:rPr sz="1600" b="1" i="0">
                 <a:solidFill>
                   <a:srgbClr val="111010"/>
                 </a:solidFill>
-                <a:latin typeface="Cascadia Code SemiBold" panose="020B0609020000020004"/>
+                <a:latin typeface="Cascadia Code SemiBold"/>
               </a:rPr>
               <a:t>3</a:t>
             </a:r>
-            <a:endParaRPr sz="1400" b="1" i="0">
-              <a:solidFill>
-                <a:srgbClr val="111010"/>
-              </a:solidFill>
-              <a:latin typeface="Cascadia Code SemiBold" panose="020B0609020000020004"/>
-            </a:endParaRPr>
-          </a:p>
-        </p:txBody>
-      </p:sp>
-      <p:sp>
-        <p:nvSpPr>
-          <p:cNvPr id="19" name="TextBox 18"/>
+          </a:p>
+        </p:txBody>
+      </p:sp>
+      <p:sp>
+        <p:nvSpPr>
+          <p:cNvPr id="26" name="TextBox 25"/>
           <p:cNvSpPr txBox="1"/>
           <p:nvPr/>
         </p:nvSpPr>
         <p:spPr>
           <a:xfrm>
-            <a:off x="1234440" y="2907792"/>
-            <a:ext cx="6583680" cy="457200"/>
+            <a:off x="5212079" y="2103120"/>
+            <a:ext cx="1828800" cy="731520"/>
           </a:xfrm>
           <a:prstGeom prst="rect">
             <a:avLst/>
@@ -7923,53 +8273,201 @@
           <a:noFill/>
         </p:spPr>
         <p:txBody>
-          <a:bodyPr wrap="square" lIns="45720" tIns="27432" rIns="45720" bIns="27432" anchor="t">
+          <a:bodyPr wrap="square" anchor="t" lIns="45720" rIns="45720" tIns="27432" bIns="27432">
             <a:spAutoFit/>
           </a:bodyPr>
           <a:lstStyle/>
           <a:p>
-            <a:pPr algn="l">
+            <a:pPr algn="ctr">
               <a:spcAft>
                 <a:spcPts val="600"/>
               </a:spcAft>
             </a:pPr>
             <a:r>
-              <a:rPr sz="1500" b="1" i="0">
+              <a:rPr sz="1400" b="1" i="0">
                 <a:solidFill>
                   <a:srgbClr val="111010"/>
                 </a:solidFill>
-                <a:latin typeface="Tahoma" panose="020B0604030504040204"/>
+                <a:latin typeface="Cascadia Code SemiBold"/>
               </a:rPr>
-              <a:t>Пустые строки: </a:t>
-            </a:r>
-            <a:r>
-              <a:rPr sz="1500" b="0" i="0">
+              <a:t>Корреляции</a:t>
+            </a:r>
+          </a:p>
+        </p:txBody>
+      </p:sp>
+      <p:sp>
+        <p:nvSpPr>
+          <p:cNvPr id="27" name="TextBox 26"/>
+          <p:cNvSpPr txBox="1"/>
+          <p:nvPr/>
+        </p:nvSpPr>
+        <p:spPr>
+          <a:xfrm>
+            <a:off x="5212079" y="2880360"/>
+            <a:ext cx="1828800" cy="1280160"/>
+          </a:xfrm>
+          <a:prstGeom prst="rect">
+            <a:avLst/>
+          </a:prstGeom>
+          <a:noFill/>
+        </p:spPr>
+        <p:txBody>
+          <a:bodyPr wrap="square" anchor="t" lIns="45720" rIns="45720" tIns="27432" bIns="27432">
+            <a:spAutoFit/>
+          </a:bodyPr>
+          <a:lstStyle/>
+          <a:p>
+            <a:pPr algn="ctr">
+              <a:spcAft>
+                <a:spcPts val="600"/>
+              </a:spcAft>
+            </a:pPr>
+            <a:r>
+              <a:rPr sz="1200" b="0" i="0">
                 <a:solidFill>
                   <a:srgbClr val="111010"/>
                 </a:solidFill>
-                <a:latin typeface="Tahoma" panose="020B0604030504040204"/>
+                <a:latin typeface="Tahoma"/>
               </a:rPr>
-              <a:t>удалено 265 (4.5%) — в них не было ни одного ответа</a:t>
-            </a:r>
-            <a:endParaRPr sz="1500" b="0" i="0">
-              <a:solidFill>
-                <a:srgbClr val="111010"/>
-              </a:solidFill>
-              <a:latin typeface="Tahoma" panose="020B0604030504040204"/>
-            </a:endParaRPr>
-          </a:p>
-        </p:txBody>
-      </p:sp>
-      <p:sp>
-        <p:nvSpPr>
-          <p:cNvPr id="20" name="Oval 19"/>
+              <a:t>Спирмен; нормальность</a:t>
+            </a:r>
+          </a:p>
+          <a:p>
+            <a:pPr algn="ctr">
+              <a:spcAft>
+                <a:spcPts val="600"/>
+              </a:spcAft>
+            </a:pPr>
+            <a:r>
+              <a:rPr sz="1200" b="0" i="0">
+                <a:solidFill>
+                  <a:srgbClr val="111010"/>
+                </a:solidFill>
+                <a:latin typeface="Tahoma"/>
+              </a:rPr>
+              <a:t>по Шапиро–Уилку</a:t>
+            </a:r>
+          </a:p>
+          <a:p>
+            <a:pPr algn="ctr">
+              <a:spcAft>
+                <a:spcPts val="600"/>
+              </a:spcAft>
+            </a:pPr>
+            <a:r>
+              <a:rPr sz="1200" b="0" i="0">
+                <a:solidFill>
+                  <a:srgbClr val="111010"/>
+                </a:solidFill>
+                <a:latin typeface="Tahoma"/>
+              </a:rPr>
+              <a:t>отвергнута</a:t>
+            </a:r>
+          </a:p>
+        </p:txBody>
+      </p:sp>
+      <p:sp>
+        <p:nvSpPr>
+          <p:cNvPr id="28" name="Right Arrow 27"/>
           <p:cNvSpPr/>
           <p:nvPr/>
         </p:nvSpPr>
         <p:spPr>
           <a:xfrm>
-            <a:off x="640080" y="3511296"/>
-            <a:ext cx="438912" cy="438912"/>
+            <a:off x="7150608" y="2788920"/>
+            <a:ext cx="237744" cy="320040"/>
+          </a:xfrm>
+          <a:prstGeom prst="rightArrow">
+            <a:avLst/>
+          </a:prstGeom>
+          <a:solidFill>
+            <a:srgbClr val="C55A11"/>
+          </a:solidFill>
+          <a:ln>
+            <a:noFill/>
+          </a:ln>
+          <a:effectLst/>
+        </p:spPr>
+        <p:style>
+          <a:lnRef idx="1">
+            <a:schemeClr val="accent1"/>
+          </a:lnRef>
+          <a:fillRef idx="3">
+            <a:schemeClr val="accent1"/>
+          </a:fillRef>
+          <a:effectRef idx="2">
+            <a:schemeClr val="accent1"/>
+          </a:effectRef>
+          <a:fontRef idx="minor">
+            <a:schemeClr val="lt1"/>
+          </a:fontRef>
+        </p:style>
+        <p:txBody>
+          <a:bodyPr rtlCol="0" anchor="ctr"/>
+          <a:lstStyle/>
+          <a:p>
+            <a:pPr algn="ctr"/>
+          </a:p>
+        </p:txBody>
+      </p:sp>
+      <p:sp>
+        <p:nvSpPr>
+          <p:cNvPr id="29" name="Rounded Rectangle 28"/>
+          <p:cNvSpPr/>
+          <p:nvPr/>
+        </p:nvSpPr>
+        <p:spPr>
+          <a:xfrm>
+            <a:off x="7406640" y="1691640"/>
+            <a:ext cx="2011680" cy="2514600"/>
+          </a:xfrm>
+          <a:prstGeom prst="roundRect">
+            <a:avLst>
+              <a:gd name="adj" fmla="val 10000"/>
+            </a:avLst>
+          </a:prstGeom>
+          <a:solidFill>
+            <a:srgbClr val="FFE699"/>
+          </a:solidFill>
+          <a:ln w="15875">
+            <a:solidFill>
+              <a:srgbClr val="FFD966"/>
+            </a:solidFill>
+          </a:ln>
+          <a:effectLst/>
+        </p:spPr>
+        <p:style>
+          <a:lnRef idx="1">
+            <a:schemeClr val="accent1"/>
+          </a:lnRef>
+          <a:fillRef idx="3">
+            <a:schemeClr val="accent1"/>
+          </a:fillRef>
+          <a:effectRef idx="2">
+            <a:schemeClr val="accent1"/>
+          </a:effectRef>
+          <a:fontRef idx="minor">
+            <a:schemeClr val="lt1"/>
+          </a:fontRef>
+        </p:style>
+        <p:txBody>
+          <a:bodyPr rtlCol="0" anchor="ctr"/>
+          <a:lstStyle/>
+          <a:p>
+            <a:pPr algn="ctr"/>
+          </a:p>
+        </p:txBody>
+      </p:sp>
+      <p:sp>
+        <p:nvSpPr>
+          <p:cNvPr id="30" name="Oval 29"/>
+          <p:cNvSpPr/>
+          <p:nvPr/>
+        </p:nvSpPr>
+        <p:spPr>
+          <a:xfrm>
+            <a:off x="8138160" y="1463040"/>
+            <a:ext cx="548640" cy="548640"/>
           </a:xfrm>
           <a:prstGeom prst="ellipse">
             <a:avLst/>
@@ -8006,14 +8504,14 @@
       </p:sp>
       <p:sp>
         <p:nvSpPr>
-          <p:cNvPr id="21" name="TextBox 20"/>
+          <p:cNvPr id="31" name="TextBox 30"/>
           <p:cNvSpPr txBox="1"/>
           <p:nvPr/>
         </p:nvSpPr>
         <p:spPr>
           <a:xfrm>
-            <a:off x="640080" y="3511296"/>
-            <a:ext cx="438912" cy="438912"/>
+            <a:off x="8138160" y="1463040"/>
+            <a:ext cx="548640" cy="548640"/>
           </a:xfrm>
           <a:prstGeom prst="rect">
             <a:avLst/>
@@ -8021,7 +8519,7 @@
           <a:noFill/>
         </p:spPr>
         <p:txBody>
-          <a:bodyPr wrap="square" lIns="45720" tIns="27432" rIns="45720" bIns="27432" anchor="ctr">
+          <a:bodyPr wrap="square" anchor="ctr" lIns="45720" rIns="45720" tIns="27432" bIns="27432">
             <a:spAutoFit/>
           </a:bodyPr>
           <a:lstStyle/>
@@ -8032,33 +8530,27 @@
               </a:spcAft>
             </a:pPr>
             <a:r>
-              <a:rPr sz="1400" b="1" i="0">
+              <a:rPr sz="1600" b="1" i="0">
                 <a:solidFill>
                   <a:srgbClr val="111010"/>
                 </a:solidFill>
-                <a:latin typeface="Cascadia Code SemiBold" panose="020B0609020000020004"/>
+                <a:latin typeface="Cascadia Code SemiBold"/>
               </a:rPr>
               <a:t>4</a:t>
             </a:r>
-            <a:endParaRPr sz="1400" b="1" i="0">
-              <a:solidFill>
-                <a:srgbClr val="111010"/>
-              </a:solidFill>
-              <a:latin typeface="Cascadia Code SemiBold" panose="020B0609020000020004"/>
-            </a:endParaRPr>
-          </a:p>
-        </p:txBody>
-      </p:sp>
-      <p:sp>
-        <p:nvSpPr>
-          <p:cNvPr id="22" name="TextBox 21"/>
+          </a:p>
+        </p:txBody>
+      </p:sp>
+      <p:sp>
+        <p:nvSpPr>
+          <p:cNvPr id="32" name="TextBox 31"/>
           <p:cNvSpPr txBox="1"/>
           <p:nvPr/>
         </p:nvSpPr>
         <p:spPr>
           <a:xfrm>
-            <a:off x="1234440" y="3529584"/>
-            <a:ext cx="6583680" cy="457200"/>
+            <a:off x="7498079" y="2103120"/>
+            <a:ext cx="1828800" cy="731520"/>
           </a:xfrm>
           <a:prstGeom prst="rect">
             <a:avLst/>
@@ -8066,53 +8558,201 @@
           <a:noFill/>
         </p:spPr>
         <p:txBody>
-          <a:bodyPr wrap="square" lIns="45720" tIns="27432" rIns="45720" bIns="27432" anchor="t">
+          <a:bodyPr wrap="square" anchor="t" lIns="45720" rIns="45720" tIns="27432" bIns="27432">
             <a:spAutoFit/>
           </a:bodyPr>
           <a:lstStyle/>
           <a:p>
-            <a:pPr algn="l">
+            <a:pPr algn="ctr">
               <a:spcAft>
                 <a:spcPts val="600"/>
               </a:spcAft>
             </a:pPr>
             <a:r>
-              <a:rPr sz="1500" b="1" i="0">
+              <a:rPr sz="1400" b="1" i="0">
                 <a:solidFill>
                   <a:srgbClr val="111010"/>
                 </a:solidFill>
-                <a:latin typeface="Tahoma" panose="020B0604030504040204"/>
+                <a:latin typeface="Cascadia Code SemiBold"/>
               </a:rPr>
-              <a:t>Опечатки: </a:t>
-            </a:r>
-            <a:r>
-              <a:rPr sz="1500" b="0" i="0">
+              <a:t>7 гипотез</a:t>
+            </a:r>
+          </a:p>
+        </p:txBody>
+      </p:sp>
+      <p:sp>
+        <p:nvSpPr>
+          <p:cNvPr id="33" name="TextBox 32"/>
+          <p:cNvSpPr txBox="1"/>
+          <p:nvPr/>
+        </p:nvSpPr>
+        <p:spPr>
+          <a:xfrm>
+            <a:off x="7498079" y="2880360"/>
+            <a:ext cx="1828800" cy="1280160"/>
+          </a:xfrm>
+          <a:prstGeom prst="rect">
+            <a:avLst/>
+          </a:prstGeom>
+          <a:noFill/>
+        </p:spPr>
+        <p:txBody>
+          <a:bodyPr wrap="square" anchor="t" lIns="45720" rIns="45720" tIns="27432" bIns="27432">
+            <a:spAutoFit/>
+          </a:bodyPr>
+          <a:lstStyle/>
+          <a:p>
+            <a:pPr algn="ctr">
+              <a:spcAft>
+                <a:spcPts val="600"/>
+              </a:spcAft>
+            </a:pPr>
+            <a:r>
+              <a:rPr sz="1200" b="0" i="0">
                 <a:solidFill>
                   <a:srgbClr val="111010"/>
                 </a:solidFill>
-                <a:latin typeface="Tahoma" panose="020B0604030504040204"/>
+                <a:latin typeface="Tahoma"/>
               </a:rPr>
-              <a:t>все коды сверены с анкетой — ошибок нет</a:t>
-            </a:r>
-            <a:endParaRPr sz="1500" b="0" i="0">
-              <a:solidFill>
-                <a:srgbClr val="111010"/>
-              </a:solidFill>
-              <a:latin typeface="Tahoma" panose="020B0604030504040204"/>
-            </a:endParaRPr>
-          </a:p>
-        </p:txBody>
-      </p:sp>
-      <p:sp>
-        <p:nvSpPr>
-          <p:cNvPr id="23" name="Oval 22"/>
+              <a:t>Манн–Уитни, χ² +</a:t>
+            </a:r>
+          </a:p>
+          <a:p>
+            <a:pPr algn="ctr">
+              <a:spcAft>
+                <a:spcPts val="600"/>
+              </a:spcAft>
+            </a:pPr>
+            <a:r>
+              <a:rPr sz="1200" b="0" i="0">
+                <a:solidFill>
+                  <a:srgbClr val="111010"/>
+                </a:solidFill>
+                <a:latin typeface="Tahoma"/>
+              </a:rPr>
+              <a:t>V Крамера, Уилкоксон,</a:t>
+            </a:r>
+          </a:p>
+          <a:p>
+            <a:pPr algn="ctr">
+              <a:spcAft>
+                <a:spcPts val="600"/>
+              </a:spcAft>
+            </a:pPr>
+            <a:r>
+              <a:rPr sz="1200" b="0" i="0">
+                <a:solidFill>
+                  <a:srgbClr val="111010"/>
+                </a:solidFill>
+                <a:latin typeface="Tahoma"/>
+              </a:rPr>
+              <a:t>Бонферрони</a:t>
+            </a:r>
+          </a:p>
+        </p:txBody>
+      </p:sp>
+      <p:sp>
+        <p:nvSpPr>
+          <p:cNvPr id="34" name="Right Arrow 33"/>
           <p:cNvSpPr/>
           <p:nvPr/>
         </p:nvSpPr>
         <p:spPr>
           <a:xfrm>
-            <a:off x="640080" y="4133088"/>
-            <a:ext cx="438912" cy="438912"/>
+            <a:off x="9436608" y="2788920"/>
+            <a:ext cx="237744" cy="320040"/>
+          </a:xfrm>
+          <a:prstGeom prst="rightArrow">
+            <a:avLst/>
+          </a:prstGeom>
+          <a:solidFill>
+            <a:srgbClr val="C55A11"/>
+          </a:solidFill>
+          <a:ln>
+            <a:noFill/>
+          </a:ln>
+          <a:effectLst/>
+        </p:spPr>
+        <p:style>
+          <a:lnRef idx="1">
+            <a:schemeClr val="accent1"/>
+          </a:lnRef>
+          <a:fillRef idx="3">
+            <a:schemeClr val="accent1"/>
+          </a:fillRef>
+          <a:effectRef idx="2">
+            <a:schemeClr val="accent1"/>
+          </a:effectRef>
+          <a:fontRef idx="minor">
+            <a:schemeClr val="lt1"/>
+          </a:fontRef>
+        </p:style>
+        <p:txBody>
+          <a:bodyPr rtlCol="0" anchor="ctr"/>
+          <a:lstStyle/>
+          <a:p>
+            <a:pPr algn="ctr"/>
+          </a:p>
+        </p:txBody>
+      </p:sp>
+      <p:sp>
+        <p:nvSpPr>
+          <p:cNvPr id="35" name="Rounded Rectangle 34"/>
+          <p:cNvSpPr/>
+          <p:nvPr/>
+        </p:nvSpPr>
+        <p:spPr>
+          <a:xfrm>
+            <a:off x="9692640" y="1691640"/>
+            <a:ext cx="2011680" cy="2514600"/>
+          </a:xfrm>
+          <a:prstGeom prst="roundRect">
+            <a:avLst>
+              <a:gd name="adj" fmla="val 10000"/>
+            </a:avLst>
+          </a:prstGeom>
+          <a:solidFill>
+            <a:srgbClr val="FFF4D7"/>
+          </a:solidFill>
+          <a:ln w="15875">
+            <a:solidFill>
+              <a:srgbClr val="FFD966"/>
+            </a:solidFill>
+          </a:ln>
+          <a:effectLst/>
+        </p:spPr>
+        <p:style>
+          <a:lnRef idx="1">
+            <a:schemeClr val="accent1"/>
+          </a:lnRef>
+          <a:fillRef idx="3">
+            <a:schemeClr val="accent1"/>
+          </a:fillRef>
+          <a:effectRef idx="2">
+            <a:schemeClr val="accent1"/>
+          </a:effectRef>
+          <a:fontRef idx="minor">
+            <a:schemeClr val="lt1"/>
+          </a:fontRef>
+        </p:style>
+        <p:txBody>
+          <a:bodyPr rtlCol="0" anchor="ctr"/>
+          <a:lstStyle/>
+          <a:p>
+            <a:pPr algn="ctr"/>
+          </a:p>
+        </p:txBody>
+      </p:sp>
+      <p:sp>
+        <p:nvSpPr>
+          <p:cNvPr id="36" name="Oval 35"/>
+          <p:cNvSpPr/>
+          <p:nvPr/>
+        </p:nvSpPr>
+        <p:spPr>
+          <a:xfrm>
+            <a:off x="10424160" y="1463040"/>
+            <a:ext cx="548640" cy="548640"/>
           </a:xfrm>
           <a:prstGeom prst="ellipse">
             <a:avLst/>
@@ -8149,14 +8789,14 @@
       </p:sp>
       <p:sp>
         <p:nvSpPr>
-          <p:cNvPr id="24" name="TextBox 23"/>
+          <p:cNvPr id="37" name="TextBox 36"/>
           <p:cNvSpPr txBox="1"/>
           <p:nvPr/>
         </p:nvSpPr>
         <p:spPr>
           <a:xfrm>
-            <a:off x="640080" y="4133088"/>
-            <a:ext cx="438912" cy="438912"/>
+            <a:off x="10424160" y="1463040"/>
+            <a:ext cx="548640" cy="548640"/>
           </a:xfrm>
           <a:prstGeom prst="rect">
             <a:avLst/>
@@ -8164,7 +8804,7 @@
           <a:noFill/>
         </p:spPr>
         <p:txBody>
-          <a:bodyPr wrap="square" lIns="45720" tIns="27432" rIns="45720" bIns="27432" anchor="ctr">
+          <a:bodyPr wrap="square" anchor="ctr" lIns="45720" rIns="45720" tIns="27432" bIns="27432">
             <a:spAutoFit/>
           </a:bodyPr>
           <a:lstStyle/>
@@ -8175,33 +8815,27 @@
               </a:spcAft>
             </a:pPr>
             <a:r>
-              <a:rPr sz="1400" b="1" i="0">
+              <a:rPr sz="1600" b="1" i="0">
                 <a:solidFill>
                   <a:srgbClr val="111010"/>
                 </a:solidFill>
-                <a:latin typeface="Cascadia Code SemiBold" panose="020B0609020000020004"/>
+                <a:latin typeface="Cascadia Code SemiBold"/>
               </a:rPr>
               <a:t>5</a:t>
             </a:r>
-            <a:endParaRPr sz="1400" b="1" i="0">
-              <a:solidFill>
-                <a:srgbClr val="111010"/>
-              </a:solidFill>
-              <a:latin typeface="Cascadia Code SemiBold" panose="020B0609020000020004"/>
-            </a:endParaRPr>
-          </a:p>
-        </p:txBody>
-      </p:sp>
-      <p:sp>
-        <p:nvSpPr>
-          <p:cNvPr id="25" name="TextBox 24"/>
+          </a:p>
+        </p:txBody>
+      </p:sp>
+      <p:sp>
+        <p:nvSpPr>
+          <p:cNvPr id="38" name="TextBox 37"/>
           <p:cNvSpPr txBox="1"/>
           <p:nvPr/>
         </p:nvSpPr>
         <p:spPr>
           <a:xfrm>
-            <a:off x="1234440" y="4151376"/>
-            <a:ext cx="6583680" cy="457200"/>
+            <a:off x="9784080" y="2103120"/>
+            <a:ext cx="1828800" cy="731520"/>
           </a:xfrm>
           <a:prstGeom prst="rect">
             <a:avLst/>
@@ -8209,7 +8843,117 @@
           <a:noFill/>
         </p:spPr>
         <p:txBody>
-          <a:bodyPr wrap="square" lIns="45720" tIns="27432" rIns="45720" bIns="27432" anchor="t">
+          <a:bodyPr wrap="square" anchor="t" lIns="45720" rIns="45720" tIns="27432" bIns="27432">
+            <a:spAutoFit/>
+          </a:bodyPr>
+          <a:lstStyle/>
+          <a:p>
+            <a:pPr algn="ctr">
+              <a:spcAft>
+                <a:spcPts val="600"/>
+              </a:spcAft>
+            </a:pPr>
+            <a:r>
+              <a:rPr sz="1400" b="1" i="0">
+                <a:solidFill>
+                  <a:srgbClr val="111010"/>
+                </a:solidFill>
+                <a:latin typeface="Cascadia Code SemiBold"/>
+              </a:rPr>
+              <a:t>Регрессия</a:t>
+            </a:r>
+          </a:p>
+        </p:txBody>
+      </p:sp>
+      <p:sp>
+        <p:nvSpPr>
+          <p:cNvPr id="39" name="TextBox 38"/>
+          <p:cNvSpPr txBox="1"/>
+          <p:nvPr/>
+        </p:nvSpPr>
+        <p:spPr>
+          <a:xfrm>
+            <a:off x="9784080" y="2880360"/>
+            <a:ext cx="1828800" cy="1280160"/>
+          </a:xfrm>
+          <a:prstGeom prst="rect">
+            <a:avLst/>
+          </a:prstGeom>
+          <a:noFill/>
+        </p:spPr>
+        <p:txBody>
+          <a:bodyPr wrap="square" anchor="t" lIns="45720" rIns="45720" tIns="27432" bIns="27432">
+            <a:spAutoFit/>
+          </a:bodyPr>
+          <a:lstStyle/>
+          <a:p>
+            <a:pPr algn="ctr">
+              <a:spcAft>
+                <a:spcPts val="600"/>
+              </a:spcAft>
+            </a:pPr>
+            <a:r>
+              <a:rPr sz="1200" b="0" i="0">
+                <a:solidFill>
+                  <a:srgbClr val="111010"/>
+                </a:solidFill>
+                <a:latin typeface="Tahoma"/>
+              </a:rPr>
+              <a:t>логистическая (OR),</a:t>
+            </a:r>
+          </a:p>
+          <a:p>
+            <a:pPr algn="ctr">
+              <a:spcAft>
+                <a:spcPts val="600"/>
+              </a:spcAft>
+            </a:pPr>
+            <a:r>
+              <a:rPr sz="1200" b="0" i="0">
+                <a:solidFill>
+                  <a:srgbClr val="111010"/>
+                </a:solidFill>
+                <a:latin typeface="Tahoma"/>
+              </a:rPr>
+              <a:t>контроль пола,</a:t>
+            </a:r>
+          </a:p>
+          <a:p>
+            <a:pPr algn="ctr">
+              <a:spcAft>
+                <a:spcPts val="600"/>
+              </a:spcAft>
+            </a:pPr>
+            <a:r>
+              <a:rPr sz="1200" b="0" i="0">
+                <a:solidFill>
+                  <a:srgbClr val="111010"/>
+                </a:solidFill>
+                <a:latin typeface="Tahoma"/>
+              </a:rPr>
+              <a:t>направления, финансов</a:t>
+            </a:r>
+          </a:p>
+        </p:txBody>
+      </p:sp>
+      <p:sp>
+        <p:nvSpPr>
+          <p:cNvPr id="40" name="TextBox 39"/>
+          <p:cNvSpPr txBox="1"/>
+          <p:nvPr/>
+        </p:nvSpPr>
+        <p:spPr>
+          <a:xfrm>
+            <a:off x="548640" y="4480560"/>
+            <a:ext cx="5486400" cy="411480"/>
+          </a:xfrm>
+          <a:prstGeom prst="rect">
+            <a:avLst/>
+          </a:prstGeom>
+          <a:noFill/>
+        </p:spPr>
+        <p:txBody>
+          <a:bodyPr wrap="square" anchor="t" lIns="45720" rIns="45720" tIns="27432" bIns="27432">
             <a:spAutoFit/>
           </a:bodyPr>
           <a:lstStyle/>
@@ -8220,86 +8964,27 @@
               </a:spcAft>
             </a:pPr>
             <a:r>
-              <a:rPr sz="1500" b="1" i="0">
+              <a:rPr sz="1600" b="1" i="0">
                 <a:solidFill>
                   <a:srgbClr val="111010"/>
                 </a:solidFill>
-                <a:latin typeface="Tahoma" panose="020B0604030504040204"/>
+                <a:latin typeface="Cascadia Code SemiBold"/>
               </a:rPr>
-              <a:t>Служебные коды: </a:t>
-            </a:r>
-            <a:r>
-              <a:rPr sz="1500" b="0" i="0">
-                <a:solidFill>
-                  <a:srgbClr val="111010"/>
-                </a:solidFill>
-                <a:latin typeface="Tahoma" panose="020B0604030504040204"/>
-              </a:rPr>
-              <a:t>«затрудняюсь», «другое» → пропуск</a:t>
-            </a:r>
-            <a:endParaRPr sz="1500" b="0" i="0">
-              <a:solidFill>
-                <a:srgbClr val="111010"/>
-              </a:solidFill>
-              <a:latin typeface="Tahoma" panose="020B0604030504040204"/>
-            </a:endParaRPr>
-          </a:p>
-        </p:txBody>
-      </p:sp>
-      <p:sp>
-        <p:nvSpPr>
-          <p:cNvPr id="26" name="Oval 25"/>
-          <p:cNvSpPr/>
-          <p:nvPr/>
-        </p:nvSpPr>
-        <p:spPr>
-          <a:xfrm>
-            <a:off x="640080" y="4754880"/>
-            <a:ext cx="438912" cy="438912"/>
-          </a:xfrm>
-          <a:prstGeom prst="ellipse">
-            <a:avLst/>
-          </a:prstGeom>
-          <a:solidFill>
-            <a:srgbClr val="FFD966"/>
-          </a:solidFill>
-          <a:ln>
-            <a:noFill/>
-          </a:ln>
-          <a:effectLst/>
-        </p:spPr>
-        <p:style>
-          <a:lnRef idx="1">
-            <a:schemeClr val="accent1"/>
-          </a:lnRef>
-          <a:fillRef idx="3">
-            <a:schemeClr val="accent1"/>
-          </a:fillRef>
-          <a:effectRef idx="2">
-            <a:schemeClr val="accent1"/>
-          </a:effectRef>
-          <a:fontRef idx="minor">
-            <a:schemeClr val="lt1"/>
-          </a:fontRef>
-        </p:style>
-        <p:txBody>
-          <a:bodyPr rtlCol="0" anchor="ctr"/>
-          <a:lstStyle/>
-          <a:p>
-            <a:pPr algn="ctr"/>
-          </a:p>
-        </p:txBody>
-      </p:sp>
-      <p:sp>
-        <p:nvSpPr>
-          <p:cNvPr id="27" name="TextBox 26"/>
+              <a:t>Почему такие методы</a:t>
+            </a:r>
+          </a:p>
+        </p:txBody>
+      </p:sp>
+      <p:sp>
+        <p:nvSpPr>
+          <p:cNvPr id="41" name="TextBox 40"/>
           <p:cNvSpPr txBox="1"/>
           <p:nvPr/>
         </p:nvSpPr>
         <p:spPr>
           <a:xfrm>
-            <a:off x="640080" y="4754880"/>
-            <a:ext cx="438912" cy="438912"/>
+            <a:off x="548640" y="4892040"/>
+            <a:ext cx="11155680" cy="457200"/>
           </a:xfrm>
           <a:prstGeom prst="rect">
             <a:avLst/>
@@ -8307,52 +8992,7 @@
           <a:noFill/>
         </p:spPr>
         <p:txBody>
-          <a:bodyPr wrap="square" lIns="45720" tIns="27432" rIns="45720" bIns="27432" anchor="ctr">
-            <a:spAutoFit/>
-          </a:bodyPr>
-          <a:lstStyle/>
-          <a:p>
-            <a:pPr algn="ctr">
-              <a:spcAft>
-                <a:spcPts val="600"/>
-              </a:spcAft>
-            </a:pPr>
-            <a:r>
-              <a:rPr sz="1400" b="1" i="0">
-                <a:solidFill>
-                  <a:srgbClr val="111010"/>
-                </a:solidFill>
-                <a:latin typeface="Cascadia Code SemiBold" panose="020B0609020000020004"/>
-              </a:rPr>
-              <a:t>6</a:t>
-            </a:r>
-            <a:endParaRPr sz="1400" b="1" i="0">
-              <a:solidFill>
-                <a:srgbClr val="111010"/>
-              </a:solidFill>
-              <a:latin typeface="Cascadia Code SemiBold" panose="020B0609020000020004"/>
-            </a:endParaRPr>
-          </a:p>
-        </p:txBody>
-      </p:sp>
-      <p:sp>
-        <p:nvSpPr>
-          <p:cNvPr id="28" name="TextBox 27"/>
-          <p:cNvSpPr txBox="1"/>
-          <p:nvPr/>
-        </p:nvSpPr>
-        <p:spPr>
-          <a:xfrm>
-            <a:off x="1234440" y="4773168"/>
-            <a:ext cx="6583680" cy="457200"/>
-          </a:xfrm>
-          <a:prstGeom prst="rect">
-            <a:avLst/>
-          </a:prstGeom>
-          <a:noFill/>
-        </p:spPr>
-        <p:txBody>
-          <a:bodyPr wrap="square" lIns="45720" tIns="27432" rIns="45720" bIns="27432" anchor="t">
+          <a:bodyPr wrap="square" anchor="t" lIns="45720" rIns="45720" tIns="27432" bIns="27432">
             <a:spAutoFit/>
           </a:bodyPr>
           <a:lstStyle/>
@@ -8363,86 +9003,36 @@
               </a:spcAft>
             </a:pPr>
             <a:r>
-              <a:rPr sz="1500" b="1" i="0">
+              <a:rPr sz="1400" b="1" i="0">
                 <a:solidFill>
                   <a:srgbClr val="111010"/>
                 </a:solidFill>
-                <a:latin typeface="Tahoma" panose="020B0604030504040204"/>
+                <a:latin typeface="Tahoma"/>
               </a:rPr>
-              <a:t>Выбросы в часах: </a:t>
-            </a:r>
-            <a:r>
-              <a:rPr sz="1500" b="0" i="0">
+              <a:t>Распределения не нормальные </a:t>
+            </a:r>
+            <a:r>
+              <a:rPr sz="1400" b="0" i="0">
                 <a:solidFill>
                   <a:srgbClr val="111010"/>
                 </a:solidFill>
-                <a:latin typeface="Tahoma" panose="020B0604030504040204"/>
+                <a:latin typeface="Tahoma"/>
               </a:rPr>
-              <a:t>модуль, &gt; 168 ч и &gt; Q3 + 3·IQR → пропуск</a:t>
-            </a:r>
-            <a:endParaRPr sz="1500" b="0" i="0">
-              <a:solidFill>
-                <a:srgbClr val="111010"/>
-              </a:solidFill>
-              <a:latin typeface="Tahoma" panose="020B0604030504040204"/>
-            </a:endParaRPr>
-          </a:p>
-        </p:txBody>
-      </p:sp>
-      <p:sp>
-        <p:nvSpPr>
-          <p:cNvPr id="29" name="Oval 28"/>
-          <p:cNvSpPr/>
-          <p:nvPr/>
-        </p:nvSpPr>
-        <p:spPr>
-          <a:xfrm>
-            <a:off x="640080" y="5376672"/>
-            <a:ext cx="438912" cy="438912"/>
-          </a:xfrm>
-          <a:prstGeom prst="ellipse">
-            <a:avLst/>
-          </a:prstGeom>
-          <a:solidFill>
-            <a:srgbClr val="FFD966"/>
-          </a:solidFill>
-          <a:ln>
-            <a:noFill/>
-          </a:ln>
-          <a:effectLst/>
-        </p:spPr>
-        <p:style>
-          <a:lnRef idx="1">
-            <a:schemeClr val="accent1"/>
-          </a:lnRef>
-          <a:fillRef idx="3">
-            <a:schemeClr val="accent1"/>
-          </a:fillRef>
-          <a:effectRef idx="2">
-            <a:schemeClr val="accent1"/>
-          </a:effectRef>
-          <a:fontRef idx="minor">
-            <a:schemeClr val="lt1"/>
-          </a:fontRef>
-        </p:style>
-        <p:txBody>
-          <a:bodyPr rtlCol="0" anchor="ctr"/>
-          <a:lstStyle/>
-          <a:p>
-            <a:pPr algn="ctr"/>
-          </a:p>
-        </p:txBody>
-      </p:sp>
-      <p:sp>
-        <p:nvSpPr>
-          <p:cNvPr id="30" name="TextBox 29"/>
+              <a:t>и шкалы порядковые → Спирмен и Манн–Уитни вместо Пирсона и t-теста</a:t>
+            </a:r>
+          </a:p>
+        </p:txBody>
+      </p:sp>
+      <p:sp>
+        <p:nvSpPr>
+          <p:cNvPr id="42" name="TextBox 41"/>
           <p:cNvSpPr txBox="1"/>
           <p:nvPr/>
         </p:nvSpPr>
         <p:spPr>
           <a:xfrm>
-            <a:off x="640080" y="5376672"/>
-            <a:ext cx="438912" cy="438912"/>
+            <a:off x="548640" y="5349240"/>
+            <a:ext cx="11155680" cy="457200"/>
           </a:xfrm>
           <a:prstGeom prst="rect">
             <a:avLst/>
@@ -8450,52 +9040,7 @@
           <a:noFill/>
         </p:spPr>
         <p:txBody>
-          <a:bodyPr wrap="square" lIns="45720" tIns="27432" rIns="45720" bIns="27432" anchor="ctr">
-            <a:spAutoFit/>
-          </a:bodyPr>
-          <a:lstStyle/>
-          <a:p>
-            <a:pPr algn="ctr">
-              <a:spcAft>
-                <a:spcPts val="600"/>
-              </a:spcAft>
-            </a:pPr>
-            <a:r>
-              <a:rPr sz="1400" b="1" i="0">
-                <a:solidFill>
-                  <a:srgbClr val="111010"/>
-                </a:solidFill>
-                <a:latin typeface="Cascadia Code SemiBold" panose="020B0609020000020004"/>
-              </a:rPr>
-              <a:t>7</a:t>
-            </a:r>
-            <a:endParaRPr sz="1400" b="1" i="0">
-              <a:solidFill>
-                <a:srgbClr val="111010"/>
-              </a:solidFill>
-              <a:latin typeface="Cascadia Code SemiBold" panose="020B0609020000020004"/>
-            </a:endParaRPr>
-          </a:p>
-        </p:txBody>
-      </p:sp>
-      <p:sp>
-        <p:nvSpPr>
-          <p:cNvPr id="31" name="TextBox 30"/>
-          <p:cNvSpPr txBox="1"/>
-          <p:nvPr/>
-        </p:nvSpPr>
-        <p:spPr>
-          <a:xfrm>
-            <a:off x="1234440" y="5394959"/>
-            <a:ext cx="6583680" cy="457200"/>
-          </a:xfrm>
-          <a:prstGeom prst="rect">
-            <a:avLst/>
-          </a:prstGeom>
-          <a:noFill/>
-        </p:spPr>
-        <p:txBody>
-          <a:bodyPr wrap="square" lIns="45720" tIns="27432" rIns="45720" bIns="27432" anchor="t">
+          <a:bodyPr wrap="square" anchor="t" lIns="45720" rIns="45720" tIns="27432" bIns="27432">
             <a:spAutoFit/>
           </a:bodyPr>
           <a:lstStyle/>
@@ -8506,120 +9051,71 @@
               </a:spcAft>
             </a:pPr>
             <a:r>
-              <a:rPr sz="1500" b="1" i="0">
+              <a:rPr sz="1400" b="1" i="0">
                 <a:solidFill>
                   <a:srgbClr val="111010"/>
                 </a:solidFill>
-                <a:latin typeface="Tahoma" panose="020B0604030504040204"/>
+                <a:latin typeface="Tahoma"/>
               </a:rPr>
-              <a:t>Пропуски: </a:t>
-            </a:r>
-            <a:r>
-              <a:rPr sz="1500" b="0" i="0">
+              <a:t>Результаты «да/нет» </a:t>
+            </a:r>
+            <a:r>
+              <a:rPr sz="1400" b="0" i="0">
                 <a:solidFill>
                   <a:srgbClr val="111010"/>
                 </a:solidFill>
-                <a:latin typeface="Tahoma" panose="020B0604030504040204"/>
+                <a:latin typeface="Tahoma"/>
               </a:rPr>
-              <a:t>не заполнял: они структурные; 0 ч у неработающих</a:t>
-            </a:r>
-            <a:endParaRPr sz="1500" b="0" i="0">
-              <a:solidFill>
-                <a:srgbClr val="111010"/>
-              </a:solidFill>
-              <a:latin typeface="Tahoma" panose="020B0604030504040204"/>
-            </a:endParaRPr>
-          </a:p>
-        </p:txBody>
-      </p:sp>
-      <p:pic>
-        <p:nvPicPr>
-          <p:cNvPr id="32" name="Мем" descr="s3_25.png"/>
-          <p:cNvPicPr>
-            <a:picLocks noChangeAspect="1"/>
-          </p:cNvPicPr>
-          <p:nvPr/>
-        </p:nvPicPr>
-        <p:blipFill>
-          <a:blip r:embed="rId1"/>
-          <a:stretch>
-            <a:fillRect/>
-          </a:stretch>
-        </p:blipFill>
-        <p:spPr>
-          <a:xfrm>
-            <a:off x="8685325" y="1645920"/>
-            <a:ext cx="2654709" cy="2743200"/>
+              <a:t>(хорошие оценки, мысли об отчислении) → логистическая регрессия</a:t>
+            </a:r>
+          </a:p>
+        </p:txBody>
+      </p:sp>
+      <p:sp>
+        <p:nvSpPr>
+          <p:cNvPr id="43" name="TextBox 42"/>
+          <p:cNvSpPr txBox="1"/>
+          <p:nvPr/>
+        </p:nvSpPr>
+        <p:spPr>
+          <a:xfrm>
+            <a:off x="548640" y="5806440"/>
+            <a:ext cx="11155680" cy="457200"/>
           </a:xfrm>
           <a:prstGeom prst="rect">
             <a:avLst/>
           </a:prstGeom>
-        </p:spPr>
-      </p:pic>
-      <p:sp>
-        <p:nvSpPr>
-          <p:cNvPr id="33" name="TextBox 32"/>
-          <p:cNvSpPr txBox="1"/>
-          <p:nvPr/>
-        </p:nvSpPr>
-        <p:spPr>
-          <a:xfrm>
-            <a:off x="8138160" y="4754880"/>
-            <a:ext cx="3749039" cy="1188720"/>
-          </a:xfrm>
-          <a:prstGeom prst="rect">
-            <a:avLst/>
-          </a:prstGeom>
           <a:noFill/>
         </p:spPr>
         <p:txBody>
-          <a:bodyPr wrap="square" lIns="45720" tIns="27432" rIns="45720" bIns="27432" anchor="t">
+          <a:bodyPr wrap="square" anchor="t" lIns="45720" rIns="45720" tIns="27432" bIns="27432">
             <a:spAutoFit/>
           </a:bodyPr>
           <a:lstStyle/>
           <a:p>
-            <a:pPr algn="ctr">
+            <a:pPr algn="l">
               <a:spcAft>
                 <a:spcPts val="600"/>
               </a:spcAft>
             </a:pPr>
             <a:r>
-              <a:rPr sz="2200" b="1" i="0">
+              <a:rPr sz="1400" b="1" i="0">
                 <a:solidFill>
                   <a:srgbClr val="111010"/>
                 </a:solidFill>
-                <a:latin typeface="Cascadia Code SemiBold" panose="020B0609020000020004"/>
+                <a:latin typeface="Tahoma"/>
               </a:rPr>
-              <a:t>5 566 студентов</a:t>
-            </a:r>
-            <a:endParaRPr sz="2200" b="1" i="0">
-              <a:solidFill>
-                <a:srgbClr val="111010"/>
-              </a:solidFill>
-              <a:latin typeface="Cascadia Code SemiBold" panose="020B0609020000020004"/>
-            </a:endParaRPr>
-          </a:p>
-          <a:p>
-            <a:pPr algn="ctr">
-              <a:spcAft>
-                <a:spcPts val="600"/>
-              </a:spcAft>
-            </a:pPr>
-            <a:r>
-              <a:rPr sz="2200" b="1" i="0">
+              <a:t>Один студент — две волны </a:t>
+            </a:r>
+            <a:r>
+              <a:rPr sz="1400" b="0" i="0">
                 <a:solidFill>
                   <a:srgbClr val="111010"/>
                 </a:solidFill>
-                <a:latin typeface="Cascadia Code SemiBold" panose="020B0609020000020004"/>
+                <a:latin typeface="Tahoma"/>
               </a:rPr>
-              <a:t>в обработанной таблице</a:t>
-            </a:r>
-            <a:endParaRPr sz="2200" b="1" i="0">
-              <a:solidFill>
-                <a:srgbClr val="111010"/>
-              </a:solidFill>
-              <a:latin typeface="Cascadia Code SemiBold" panose="020B0609020000020004"/>
-            </a:endParaRPr>
+              <a:t>→ тесты по волнам отдельно, ошибки регрессии кластеризованы по студенту</a:t>
+            </a:r>
           </a:p>
         </p:txBody>
       </p:sp>
@@ -8632,7 +9128,7 @@
 </file>
 
 <file path=ppt/slides/slide5.xml><?xml version="1.0" encoding="utf-8"?>
-<p:sld xmlns:a="http://schemas.openxmlformats.org/drawingml/2006/main" xmlns:r="http://schemas.openxmlformats.org/officeDocument/2006/relationships" xmlns:p="http://schemas.openxmlformats.org/presentationml/2006/main">
+<p:sld xmlns:a="http://schemas.openxmlformats.org/drawingml/2006/main" xmlns:p="http://schemas.openxmlformats.org/presentationml/2006/main" xmlns:r="http://schemas.openxmlformats.org/officeDocument/2006/relationships">
   <p:cSld>
     <p:spTree>
       <p:nvGrpSpPr>
@@ -8656,7 +9152,7 @@
             <a:avLst/>
           </a:prstGeom>
           <a:solidFill>
-            <a:srgbClr val="FFD966"/>
+            <a:srgbClr val="FFF4D7"/>
           </a:solidFill>
           <a:ln>
             <a:noFill/>
@@ -8678,25 +9174,19 @@
           </a:fontRef>
         </p:style>
         <p:txBody>
-          <a:bodyPr lIns="45720" rIns="45720" rtlCol="0" anchor="ctr"/>
+          <a:bodyPr rtlCol="0" anchor="ctr" lIns="45720" rIns="45720"/>
           <a:lstStyle/>
           <a:p>
             <a:pPr algn="ctr"/>
             <a:r>
-              <a:rPr sz="1200" b="1">
+              <a:rPr sz="1200" b="0">
                 <a:solidFill>
                   <a:srgbClr val="111010"/>
                 </a:solidFill>
-                <a:latin typeface="Cascadia Code SemiBold" panose="020B0609020000020004"/>
+                <a:latin typeface="Cascadia Code SemiBold"/>
               </a:rPr>
-              <a:t>ДАННЫЕ</a:t>
-            </a:r>
-            <a:endParaRPr sz="1200" b="1">
-              <a:solidFill>
-                <a:srgbClr val="111010"/>
-              </a:solidFill>
-              <a:latin typeface="Cascadia Code SemiBold" panose="020B0609020000020004"/>
-            </a:endParaRPr>
+              <a:t>ВОПРОС</a:t>
+            </a:r>
           </a:p>
         </p:txBody>
       </p:sp>
@@ -8737,7 +9227,7 @@
           </a:fontRef>
         </p:style>
         <p:txBody>
-          <a:bodyPr lIns="45720" rIns="45720" rtlCol="0" anchor="ctr"/>
+          <a:bodyPr rtlCol="0" anchor="ctr" lIns="45720" rIns="45720"/>
           <a:lstStyle/>
           <a:p>
             <a:pPr algn="ctr"/>
@@ -8746,16 +9236,10 @@
                 <a:solidFill>
                   <a:srgbClr val="111010"/>
                 </a:solidFill>
-                <a:latin typeface="Cascadia Code SemiBold" panose="020B0609020000020004"/>
+                <a:latin typeface="Cascadia Code SemiBold"/>
               </a:rPr>
-              <a:t>МЕТОДЫ</a:t>
-            </a:r>
-            <a:endParaRPr sz="1200" b="0">
-              <a:solidFill>
-                <a:srgbClr val="111010"/>
-              </a:solidFill>
-              <a:latin typeface="Cascadia Code SemiBold" panose="020B0609020000020004"/>
-            </a:endParaRPr>
+              <a:t>ДАННЫЕ</a:t>
+            </a:r>
           </a:p>
         </p:txBody>
       </p:sp>
@@ -8796,7 +9280,7 @@
           </a:fontRef>
         </p:style>
         <p:txBody>
-          <a:bodyPr lIns="45720" rIns="45720" rtlCol="0" anchor="ctr"/>
+          <a:bodyPr rtlCol="0" anchor="ctr" lIns="45720" rIns="45720"/>
           <a:lstStyle/>
           <a:p>
             <a:pPr algn="ctr"/>
@@ -8805,28 +9289,75 @@
                 <a:solidFill>
                   <a:srgbClr val="111010"/>
                 </a:solidFill>
-                <a:latin typeface="Cascadia Code SemiBold" panose="020B0609020000020004"/>
+                <a:latin typeface="Cascadia Code SemiBold"/>
+              </a:rPr>
+              <a:t>МЕТОДЫ</a:t>
+            </a:r>
+          </a:p>
+        </p:txBody>
+      </p:sp>
+      <p:sp>
+        <p:nvSpPr>
+          <p:cNvPr id="5" name="Chevron 4"/>
+          <p:cNvSpPr/>
+          <p:nvPr/>
+        </p:nvSpPr>
+        <p:spPr>
+          <a:xfrm>
+            <a:off x="7132320" y="164592"/>
+            <a:ext cx="2514600" cy="384048"/>
+          </a:xfrm>
+          <a:prstGeom prst="chevron">
+            <a:avLst/>
+          </a:prstGeom>
+          <a:solidFill>
+            <a:srgbClr val="FFD966"/>
+          </a:solidFill>
+          <a:ln>
+            <a:noFill/>
+          </a:ln>
+          <a:effectLst/>
+        </p:spPr>
+        <p:style>
+          <a:lnRef idx="1">
+            <a:schemeClr val="accent1"/>
+          </a:lnRef>
+          <a:fillRef idx="3">
+            <a:schemeClr val="accent1"/>
+          </a:fillRef>
+          <a:effectRef idx="2">
+            <a:schemeClr val="accent1"/>
+          </a:effectRef>
+          <a:fontRef idx="minor">
+            <a:schemeClr val="lt1"/>
+          </a:fontRef>
+        </p:style>
+        <p:txBody>
+          <a:bodyPr rtlCol="0" anchor="ctr" lIns="45720" rIns="45720"/>
+          <a:lstStyle/>
+          <a:p>
+            <a:pPr algn="ctr"/>
+            <a:r>
+              <a:rPr sz="1200" b="1">
+                <a:solidFill>
+                  <a:srgbClr val="111010"/>
+                </a:solidFill>
+                <a:latin typeface="Cascadia Code SemiBold"/>
               </a:rPr>
               <a:t>РЕЗУЛЬТАТЫ</a:t>
             </a:r>
-            <a:endParaRPr sz="1200" b="0">
-              <a:solidFill>
-                <a:srgbClr val="111010"/>
-              </a:solidFill>
-              <a:latin typeface="Cascadia Code SemiBold" panose="020B0609020000020004"/>
-            </a:endParaRPr>
-          </a:p>
-        </p:txBody>
-      </p:sp>
-      <p:sp>
-        <p:nvSpPr>
-          <p:cNvPr id="5" name="Chevron 4"/>
+          </a:p>
+        </p:txBody>
+      </p:sp>
+      <p:sp>
+        <p:nvSpPr>
+          <p:cNvPr id="6" name="Chevron 5"/>
           <p:cNvSpPr/>
           <p:nvPr/>
         </p:nvSpPr>
         <p:spPr>
           <a:xfrm>
-            <a:off x="7132320" y="164592"/>
+            <a:off x="9464040" y="164592"/>
             <a:ext cx="2514600" cy="384048"/>
           </a:xfrm>
           <a:prstGeom prst="chevron">
@@ -8855,7 +9386,7 @@
           </a:fontRef>
         </p:style>
         <p:txBody>
-          <a:bodyPr lIns="45720" rIns="45720" rtlCol="0" anchor="ctr"/>
+          <a:bodyPr rtlCol="0" anchor="ctr" lIns="45720" rIns="45720"/>
           <a:lstStyle/>
           <a:p>
             <a:pPr algn="ctr"/>
@@ -8864,31 +9395,464 @@
                 <a:solidFill>
                   <a:srgbClr val="111010"/>
                 </a:solidFill>
-                <a:latin typeface="Cascadia Code SemiBold" panose="020B0609020000020004"/>
+                <a:latin typeface="Cascadia Code SemiBold"/>
               </a:rPr>
-              <a:t>ОБСУЖДЕНИЕ</a:t>
-            </a:r>
-            <a:endParaRPr sz="1200" b="0">
-              <a:solidFill>
-                <a:srgbClr val="111010"/>
-              </a:solidFill>
-              <a:latin typeface="Cascadia Code SemiBold" panose="020B0609020000020004"/>
-            </a:endParaRPr>
-          </a:p>
-        </p:txBody>
-      </p:sp>
-      <p:sp>
-        <p:nvSpPr>
-          <p:cNvPr id="6" name="Chevron 5"/>
+              <a:t>ВЫВОДЫ</a:t>
+            </a:r>
+          </a:p>
+        </p:txBody>
+      </p:sp>
+      <p:sp>
+        <p:nvSpPr>
+          <p:cNvPr id="7" name="Rectangle 6"/>
           <p:cNvSpPr/>
           <p:nvPr/>
         </p:nvSpPr>
         <p:spPr>
           <a:xfrm>
-            <a:off x="9464040" y="164592"/>
+            <a:off x="0" y="6565392"/>
+            <a:ext cx="1783080" cy="91440"/>
+          </a:xfrm>
+          <a:prstGeom prst="rect">
+            <a:avLst/>
+          </a:prstGeom>
+          <a:solidFill>
+            <a:srgbClr val="111010"/>
+          </a:solidFill>
+          <a:ln>
+            <a:noFill/>
+          </a:ln>
+          <a:effectLst/>
+        </p:spPr>
+        <p:style>
+          <a:lnRef idx="1">
+            <a:schemeClr val="accent1"/>
+          </a:lnRef>
+          <a:fillRef idx="3">
+            <a:schemeClr val="accent1"/>
+          </a:fillRef>
+          <a:effectRef idx="2">
+            <a:schemeClr val="accent1"/>
+          </a:effectRef>
+          <a:fontRef idx="minor">
+            <a:schemeClr val="lt1"/>
+          </a:fontRef>
+        </p:style>
+        <p:txBody>
+          <a:bodyPr rtlCol="0" anchor="ctr"/>
+          <a:lstStyle/>
+          <a:p>
+            <a:pPr algn="ctr"/>
+          </a:p>
+        </p:txBody>
+      </p:sp>
+      <p:sp>
+        <p:nvSpPr>
+          <p:cNvPr id="8" name="Rectangle 7"/>
+          <p:cNvSpPr/>
+          <p:nvPr/>
+        </p:nvSpPr>
+        <p:spPr>
+          <a:xfrm>
+            <a:off x="0" y="6656832"/>
+            <a:ext cx="2743200" cy="128016"/>
+          </a:xfrm>
+          <a:prstGeom prst="rect">
+            <a:avLst/>
+          </a:prstGeom>
+          <a:solidFill>
+            <a:srgbClr val="FFD966"/>
+          </a:solidFill>
+          <a:ln>
+            <a:noFill/>
+          </a:ln>
+          <a:effectLst/>
+        </p:spPr>
+        <p:style>
+          <a:lnRef idx="1">
+            <a:schemeClr val="accent1"/>
+          </a:lnRef>
+          <a:fillRef idx="3">
+            <a:schemeClr val="accent1"/>
+          </a:fillRef>
+          <a:effectRef idx="2">
+            <a:schemeClr val="accent1"/>
+          </a:effectRef>
+          <a:fontRef idx="minor">
+            <a:schemeClr val="lt1"/>
+          </a:fontRef>
+        </p:style>
+        <p:txBody>
+          <a:bodyPr rtlCol="0" anchor="ctr"/>
+          <a:lstStyle/>
+          <a:p>
+            <a:pPr algn="ctr"/>
+          </a:p>
+        </p:txBody>
+      </p:sp>
+      <p:sp>
+        <p:nvSpPr>
+          <p:cNvPr id="9" name="TextBox 8"/>
+          <p:cNvSpPr txBox="1"/>
+          <p:nvPr/>
+        </p:nvSpPr>
+        <p:spPr>
+          <a:xfrm>
+            <a:off x="11247120" y="6355080"/>
+            <a:ext cx="731520" cy="365760"/>
+          </a:xfrm>
+          <a:prstGeom prst="rect">
+            <a:avLst/>
+          </a:prstGeom>
+          <a:noFill/>
+        </p:spPr>
+        <p:txBody>
+          <a:bodyPr wrap="square" anchor="t" lIns="45720" rIns="45720" tIns="27432" bIns="27432">
+            <a:spAutoFit/>
+          </a:bodyPr>
+          <a:lstStyle/>
+          <a:p>
+            <a:pPr algn="r">
+              <a:spcAft>
+                <a:spcPts val="600"/>
+              </a:spcAft>
+            </a:pPr>
+            <a:r>
+              <a:rPr sz="1200" b="0" i="0">
+                <a:solidFill>
+                  <a:srgbClr val="848484"/>
+                </a:solidFill>
+                <a:latin typeface="Tahoma"/>
+              </a:rPr>
+              <a:t>5</a:t>
+            </a:r>
+          </a:p>
+        </p:txBody>
+      </p:sp>
+      <p:sp>
+        <p:nvSpPr>
+          <p:cNvPr id="10" name="TextBox 9"/>
+          <p:cNvSpPr txBox="1"/>
+          <p:nvPr/>
+        </p:nvSpPr>
+        <p:spPr>
+          <a:xfrm>
+            <a:off x="457200" y="731520"/>
+            <a:ext cx="11247120" cy="731520"/>
+          </a:xfrm>
+          <a:prstGeom prst="rect">
+            <a:avLst/>
+          </a:prstGeom>
+          <a:noFill/>
+        </p:spPr>
+        <p:txBody>
+          <a:bodyPr wrap="square" anchor="t" lIns="45720" rIns="45720" tIns="27432" bIns="27432">
+            <a:spAutoFit/>
+          </a:bodyPr>
+          <a:lstStyle/>
+          <a:p>
+            <a:pPr algn="l">
+              <a:spcAft>
+                <a:spcPts val="600"/>
+              </a:spcAft>
+            </a:pPr>
+            <a:r>
+              <a:rPr sz="2800" b="0" i="0">
+                <a:solidFill>
+                  <a:srgbClr val="111010"/>
+                </a:solidFill>
+                <a:latin typeface="Arial Black"/>
+              </a:rPr>
+              <a:t>Работает почти половина — в основном ради денег</a:t>
+            </a:r>
+          </a:p>
+        </p:txBody>
+      </p:sp>
+      <p:graphicFrame>
+        <p:nvGraphicFramePr>
+          <p:cNvPr id="11" name="Chart 10"/>
+          <p:cNvGraphicFramePr>
+            <a:graphicFrameLocks noGrp="1"/>
+          </p:cNvGraphicFramePr>
+          <p:nvPr/>
+        </p:nvGraphicFramePr>
+        <p:xfrm>
+          <a:off x="457200" y="1600200"/>
+          <a:ext cx="6949440" cy="4663440"/>
+        </p:xfrm>
+        <a:graphic>
+          <a:graphicData uri="http://schemas.openxmlformats.org/drawingml/2006/chart">
+            <c:chart xmlns:c="http://schemas.openxmlformats.org/drawingml/2006/chart" r:id="rId3"/>
+          </a:graphicData>
+        </a:graphic>
+      </p:graphicFrame>
+      <p:sp>
+        <p:nvSpPr>
+          <p:cNvPr id="12" name="TextBox 11"/>
+          <p:cNvSpPr txBox="1"/>
+          <p:nvPr/>
+        </p:nvSpPr>
+        <p:spPr>
+          <a:xfrm>
+            <a:off x="7955279" y="1645920"/>
+            <a:ext cx="3931920" cy="914400"/>
+          </a:xfrm>
+          <a:prstGeom prst="rect">
+            <a:avLst/>
+          </a:prstGeom>
+          <a:noFill/>
+        </p:spPr>
+        <p:txBody>
+          <a:bodyPr wrap="square" anchor="t" lIns="45720" rIns="45720" tIns="27432" bIns="27432">
+            <a:spAutoFit/>
+          </a:bodyPr>
+          <a:lstStyle/>
+          <a:p>
+            <a:pPr algn="l">
+              <a:spcAft>
+                <a:spcPts val="600"/>
+              </a:spcAft>
+            </a:pPr>
+            <a:r>
+              <a:rPr sz="4400" b="1" i="0">
+                <a:solidFill>
+                  <a:srgbClr val="C55A11"/>
+                </a:solidFill>
+                <a:latin typeface="Cascadia Code SemiBold"/>
+              </a:rPr>
+              <a:t>×2</a:t>
+            </a:r>
+          </a:p>
+        </p:txBody>
+      </p:sp>
+      <p:sp>
+        <p:nvSpPr>
+          <p:cNvPr id="13" name="TextBox 12"/>
+          <p:cNvSpPr txBox="1"/>
+          <p:nvPr/>
+        </p:nvSpPr>
+        <p:spPr>
+          <a:xfrm>
+            <a:off x="7955279" y="2560320"/>
+            <a:ext cx="3931920" cy="731520"/>
+          </a:xfrm>
+          <a:prstGeom prst="rect">
+            <a:avLst/>
+          </a:prstGeom>
+          <a:noFill/>
+        </p:spPr>
+        <p:txBody>
+          <a:bodyPr wrap="square" anchor="t" lIns="45720" rIns="45720" tIns="27432" bIns="27432">
+            <a:spAutoFit/>
+          </a:bodyPr>
+          <a:lstStyle/>
+          <a:p>
+            <a:pPr algn="l">
+              <a:spcAft>
+                <a:spcPts val="600"/>
+              </a:spcAft>
+            </a:pPr>
+            <a:r>
+              <a:rPr sz="1400" b="0" i="0">
+                <a:solidFill>
+                  <a:srgbClr val="111010"/>
+                </a:solidFill>
+                <a:latin typeface="Tahoma"/>
+              </a:rPr>
+              <a:t>работа на полный день
+к 4 курсу: 4% → 9%</a:t>
+            </a:r>
+          </a:p>
+        </p:txBody>
+      </p:sp>
+      <p:sp>
+        <p:nvSpPr>
+          <p:cNvPr id="14" name="TextBox 13"/>
+          <p:cNvSpPr txBox="1"/>
+          <p:nvPr/>
+        </p:nvSpPr>
+        <p:spPr>
+          <a:xfrm>
+            <a:off x="7955279" y="3154680"/>
+            <a:ext cx="3931920" cy="914400"/>
+          </a:xfrm>
+          <a:prstGeom prst="rect">
+            <a:avLst/>
+          </a:prstGeom>
+          <a:noFill/>
+        </p:spPr>
+        <p:txBody>
+          <a:bodyPr wrap="square" anchor="t" lIns="45720" rIns="45720" tIns="27432" bIns="27432">
+            <a:spAutoFit/>
+          </a:bodyPr>
+          <a:lstStyle/>
+          <a:p>
+            <a:pPr algn="l">
+              <a:spcAft>
+                <a:spcPts val="600"/>
+              </a:spcAft>
+            </a:pPr>
+            <a:r>
+              <a:rPr sz="4400" b="1" i="0">
+                <a:solidFill>
+                  <a:srgbClr val="111010"/>
+                </a:solidFill>
+                <a:latin typeface="Cascadia Code SemiBold"/>
+              </a:rPr>
+              <a:t>~70%</a:t>
+            </a:r>
+          </a:p>
+        </p:txBody>
+      </p:sp>
+      <p:sp>
+        <p:nvSpPr>
+          <p:cNvPr id="15" name="TextBox 14"/>
+          <p:cNvSpPr txBox="1"/>
+          <p:nvPr/>
+        </p:nvSpPr>
+        <p:spPr>
+          <a:xfrm>
+            <a:off x="7955279" y="4069080"/>
+            <a:ext cx="3931920" cy="731520"/>
+          </a:xfrm>
+          <a:prstGeom prst="rect">
+            <a:avLst/>
+          </a:prstGeom>
+          <a:noFill/>
+        </p:spPr>
+        <p:txBody>
+          <a:bodyPr wrap="square" anchor="t" lIns="45720" rIns="45720" tIns="27432" bIns="27432">
+            <a:spAutoFit/>
+          </a:bodyPr>
+          <a:lstStyle/>
+          <a:p>
+            <a:pPr algn="l">
+              <a:spcAft>
+                <a:spcPts val="600"/>
+              </a:spcAft>
+            </a:pPr>
+            <a:r>
+              <a:rPr sz="1400" b="0" i="0">
+                <a:solidFill>
+                  <a:srgbClr val="111010"/>
+                </a:solidFill>
+                <a:latin typeface="Tahoma"/>
+              </a:rPr>
+              <a:t>работают ради денег:
+содержать себя, доп. доход</a:t>
+            </a:r>
+          </a:p>
+        </p:txBody>
+      </p:sp>
+      <p:sp>
+        <p:nvSpPr>
+          <p:cNvPr id="16" name="TextBox 15"/>
+          <p:cNvSpPr txBox="1"/>
+          <p:nvPr/>
+        </p:nvSpPr>
+        <p:spPr>
+          <a:xfrm>
+            <a:off x="7955279" y="4663440"/>
+            <a:ext cx="3931920" cy="914400"/>
+          </a:xfrm>
+          <a:prstGeom prst="rect">
+            <a:avLst/>
+          </a:prstGeom>
+          <a:noFill/>
+        </p:spPr>
+        <p:txBody>
+          <a:bodyPr wrap="square" anchor="t" lIns="45720" rIns="45720" tIns="27432" bIns="27432">
+            <a:spAutoFit/>
+          </a:bodyPr>
+          <a:lstStyle/>
+          <a:p>
+            <a:pPr algn="l">
+              <a:spcAft>
+                <a:spcPts val="600"/>
+              </a:spcAft>
+            </a:pPr>
+            <a:r>
+              <a:rPr sz="4400" b="1" i="0">
+                <a:solidFill>
+                  <a:srgbClr val="111010"/>
+                </a:solidFill>
+                <a:latin typeface="Cascadia Code SemiBold"/>
+              </a:rPr>
+              <a:t>51%</a:t>
+            </a:r>
+          </a:p>
+        </p:txBody>
+      </p:sp>
+      <p:sp>
+        <p:nvSpPr>
+          <p:cNvPr id="17" name="TextBox 16"/>
+          <p:cNvSpPr txBox="1"/>
+          <p:nvPr/>
+        </p:nvSpPr>
+        <p:spPr>
+          <a:xfrm>
+            <a:off x="7955279" y="5577840"/>
+            <a:ext cx="3931920" cy="731520"/>
+          </a:xfrm>
+          <a:prstGeom prst="rect">
+            <a:avLst/>
+          </a:prstGeom>
+          <a:noFill/>
+        </p:spPr>
+        <p:txBody>
+          <a:bodyPr wrap="square" anchor="t" lIns="45720" rIns="45720" tIns="27432" bIns="27432">
+            <a:spAutoFit/>
+          </a:bodyPr>
+          <a:lstStyle/>
+          <a:p>
+            <a:pPr algn="l">
+              <a:spcAft>
+                <a:spcPts val="600"/>
+              </a:spcAft>
+            </a:pPr>
+            <a:r>
+              <a:rPr sz="1400" b="0" i="0">
+                <a:solidFill>
+                  <a:srgbClr val="111010"/>
+                </a:solidFill>
+                <a:latin typeface="Tahoma"/>
+              </a:rPr>
+              <a:t>работают по специальности
+(4 курс)</a:t>
+            </a:r>
+          </a:p>
+        </p:txBody>
+      </p:sp>
+    </p:spTree>
+  </p:cSld>
+  <p:clrMapOvr>
+    <a:masterClrMapping/>
+  </p:clrMapOvr>
+</p:sld>
+</file>
+
+<file path=ppt/slides/slide6.xml><?xml version="1.0" encoding="utf-8"?>
+<p:sld xmlns:a="http://schemas.openxmlformats.org/drawingml/2006/main" xmlns:p="http://schemas.openxmlformats.org/presentationml/2006/main" xmlns:r="http://schemas.openxmlformats.org/officeDocument/2006/relationships">
+  <p:cSld>
+    <p:spTree>
+      <p:nvGrpSpPr>
+        <p:cNvPr id="1" name=""/>
+        <p:cNvGrpSpPr/>
+        <p:nvPr/>
+      </p:nvGrpSpPr>
+      <p:grpSpPr/>
+      <p:sp>
+        <p:nvSpPr>
+          <p:cNvPr id="2" name="Pentagon 1"/>
+          <p:cNvSpPr/>
+          <p:nvPr/>
+        </p:nvSpPr>
+        <p:spPr>
+          <a:xfrm>
+            <a:off x="137160" y="164592"/>
             <a:ext cx="2514600" cy="384048"/>
           </a:xfrm>
-          <a:prstGeom prst="chevron">
+          <a:prstGeom prst="homePlate">
             <a:avLst/>
           </a:prstGeom>
           <a:solidFill>
@@ -8914,7 +9878,7 @@
           </a:fontRef>
         </p:style>
         <p:txBody>
-          <a:bodyPr lIns="45720" rIns="45720" rtlCol="0" anchor="ctr"/>
+          <a:bodyPr rtlCol="0" anchor="ctr" lIns="45720" rIns="45720"/>
           <a:lstStyle/>
           <a:p>
             <a:pPr algn="ctr"/>
@@ -8923,16 +9887,222 @@
                 <a:solidFill>
                   <a:srgbClr val="111010"/>
                 </a:solidFill>
-                <a:latin typeface="Cascadia Code SemiBold" panose="020B0609020000020004"/>
+                <a:latin typeface="Cascadia Code SemiBold"/>
               </a:rPr>
-              <a:t>ПОДВАЛ</a:t>
-            </a:r>
-            <a:endParaRPr sz="1200" b="0">
-              <a:solidFill>
-                <a:srgbClr val="111010"/>
-              </a:solidFill>
-              <a:latin typeface="Cascadia Code SemiBold" panose="020B0609020000020004"/>
-            </a:endParaRPr>
+              <a:t>ВОПРОС</a:t>
+            </a:r>
+          </a:p>
+        </p:txBody>
+      </p:sp>
+      <p:sp>
+        <p:nvSpPr>
+          <p:cNvPr id="3" name="Chevron 2"/>
+          <p:cNvSpPr/>
+          <p:nvPr/>
+        </p:nvSpPr>
+        <p:spPr>
+          <a:xfrm>
+            <a:off x="2468879" y="164592"/>
+            <a:ext cx="2514600" cy="384048"/>
+          </a:xfrm>
+          <a:prstGeom prst="chevron">
+            <a:avLst/>
+          </a:prstGeom>
+          <a:solidFill>
+            <a:srgbClr val="FFF4D7"/>
+          </a:solidFill>
+          <a:ln>
+            <a:noFill/>
+          </a:ln>
+          <a:effectLst/>
+        </p:spPr>
+        <p:style>
+          <a:lnRef idx="1">
+            <a:schemeClr val="accent1"/>
+          </a:lnRef>
+          <a:fillRef idx="3">
+            <a:schemeClr val="accent1"/>
+          </a:fillRef>
+          <a:effectRef idx="2">
+            <a:schemeClr val="accent1"/>
+          </a:effectRef>
+          <a:fontRef idx="minor">
+            <a:schemeClr val="lt1"/>
+          </a:fontRef>
+        </p:style>
+        <p:txBody>
+          <a:bodyPr rtlCol="0" anchor="ctr" lIns="45720" rIns="45720"/>
+          <a:lstStyle/>
+          <a:p>
+            <a:pPr algn="ctr"/>
+            <a:r>
+              <a:rPr sz="1200" b="0">
+                <a:solidFill>
+                  <a:srgbClr val="111010"/>
+                </a:solidFill>
+                <a:latin typeface="Cascadia Code SemiBold"/>
+              </a:rPr>
+              <a:t>ДАННЫЕ</a:t>
+            </a:r>
+          </a:p>
+        </p:txBody>
+      </p:sp>
+      <p:sp>
+        <p:nvSpPr>
+          <p:cNvPr id="4" name="Chevron 3"/>
+          <p:cNvSpPr/>
+          <p:nvPr/>
+        </p:nvSpPr>
+        <p:spPr>
+          <a:xfrm>
+            <a:off x="4800600" y="164592"/>
+            <a:ext cx="2514600" cy="384048"/>
+          </a:xfrm>
+          <a:prstGeom prst="chevron">
+            <a:avLst/>
+          </a:prstGeom>
+          <a:solidFill>
+            <a:srgbClr val="FFF4D7"/>
+          </a:solidFill>
+          <a:ln>
+            <a:noFill/>
+          </a:ln>
+          <a:effectLst/>
+        </p:spPr>
+        <p:style>
+          <a:lnRef idx="1">
+            <a:schemeClr val="accent1"/>
+          </a:lnRef>
+          <a:fillRef idx="3">
+            <a:schemeClr val="accent1"/>
+          </a:fillRef>
+          <a:effectRef idx="2">
+            <a:schemeClr val="accent1"/>
+          </a:effectRef>
+          <a:fontRef idx="minor">
+            <a:schemeClr val="lt1"/>
+          </a:fontRef>
+        </p:style>
+        <p:txBody>
+          <a:bodyPr rtlCol="0" anchor="ctr" lIns="45720" rIns="45720"/>
+          <a:lstStyle/>
+          <a:p>
+            <a:pPr algn="ctr"/>
+            <a:r>
+              <a:rPr sz="1200" b="0">
+                <a:solidFill>
+                  <a:srgbClr val="111010"/>
+                </a:solidFill>
+                <a:latin typeface="Cascadia Code SemiBold"/>
+              </a:rPr>
+              <a:t>МЕТОДЫ</a:t>
+            </a:r>
+          </a:p>
+        </p:txBody>
+      </p:sp>
+      <p:sp>
+        <p:nvSpPr>
+          <p:cNvPr id="5" name="Chevron 4"/>
+          <p:cNvSpPr/>
+          <p:nvPr/>
+        </p:nvSpPr>
+        <p:spPr>
+          <a:xfrm>
+            <a:off x="7132320" y="164592"/>
+            <a:ext cx="2514600" cy="384048"/>
+          </a:xfrm>
+          <a:prstGeom prst="chevron">
+            <a:avLst/>
+          </a:prstGeom>
+          <a:solidFill>
+            <a:srgbClr val="FFD966"/>
+          </a:solidFill>
+          <a:ln>
+            <a:noFill/>
+          </a:ln>
+          <a:effectLst/>
+        </p:spPr>
+        <p:style>
+          <a:lnRef idx="1">
+            <a:schemeClr val="accent1"/>
+          </a:lnRef>
+          <a:fillRef idx="3">
+            <a:schemeClr val="accent1"/>
+          </a:fillRef>
+          <a:effectRef idx="2">
+            <a:schemeClr val="accent1"/>
+          </a:effectRef>
+          <a:fontRef idx="minor">
+            <a:schemeClr val="lt1"/>
+          </a:fontRef>
+        </p:style>
+        <p:txBody>
+          <a:bodyPr rtlCol="0" anchor="ctr" lIns="45720" rIns="45720"/>
+          <a:lstStyle/>
+          <a:p>
+            <a:pPr algn="ctr"/>
+            <a:r>
+              <a:rPr sz="1200" b="1">
+                <a:solidFill>
+                  <a:srgbClr val="111010"/>
+                </a:solidFill>
+                <a:latin typeface="Cascadia Code SemiBold"/>
+              </a:rPr>
+              <a:t>РЕЗУЛЬТАТЫ</a:t>
+            </a:r>
+          </a:p>
+        </p:txBody>
+      </p:sp>
+      <p:sp>
+        <p:nvSpPr>
+          <p:cNvPr id="6" name="Chevron 5"/>
+          <p:cNvSpPr/>
+          <p:nvPr/>
+        </p:nvSpPr>
+        <p:spPr>
+          <a:xfrm>
+            <a:off x="9464040" y="164592"/>
+            <a:ext cx="2514600" cy="384048"/>
+          </a:xfrm>
+          <a:prstGeom prst="chevron">
+            <a:avLst/>
+          </a:prstGeom>
+          <a:solidFill>
+            <a:srgbClr val="FFF4D7"/>
+          </a:solidFill>
+          <a:ln>
+            <a:noFill/>
+          </a:ln>
+          <a:effectLst/>
+        </p:spPr>
+        <p:style>
+          <a:lnRef idx="1">
+            <a:schemeClr val="accent1"/>
+          </a:lnRef>
+          <a:fillRef idx="3">
+            <a:schemeClr val="accent1"/>
+          </a:fillRef>
+          <a:effectRef idx="2">
+            <a:schemeClr val="accent1"/>
+          </a:effectRef>
+          <a:fontRef idx="minor">
+            <a:schemeClr val="lt1"/>
+          </a:fontRef>
+        </p:style>
+        <p:txBody>
+          <a:bodyPr rtlCol="0" anchor="ctr" lIns="45720" rIns="45720"/>
+          <a:lstStyle/>
+          <a:p>
+            <a:pPr algn="ctr"/>
+            <a:r>
+              <a:rPr sz="1200" b="0">
+                <a:solidFill>
+                  <a:srgbClr val="111010"/>
+                </a:solidFill>
+                <a:latin typeface="Cascadia Code SemiBold"/>
+              </a:rPr>
+              <a:t>ВЫВОДЫ</a:t>
+            </a:r>
           </a:p>
         </p:txBody>
       </p:sp>
@@ -9041,7 +10211,7 @@
           <a:noFill/>
         </p:spPr>
         <p:txBody>
-          <a:bodyPr wrap="square" lIns="45720" tIns="27432" rIns="45720" bIns="27432" anchor="t">
+          <a:bodyPr wrap="square" anchor="t" lIns="45720" rIns="45720" tIns="27432" bIns="27432">
             <a:spAutoFit/>
           </a:bodyPr>
           <a:lstStyle/>
@@ -9056,16 +10226,10 @@
                 <a:solidFill>
                   <a:srgbClr val="848484"/>
                 </a:solidFill>
-                <a:latin typeface="Tahoma" panose="020B0604030504040204"/>
+                <a:latin typeface="Tahoma"/>
               </a:rPr>
-              <a:t>5</a:t>
-            </a:r>
-            <a:endParaRPr sz="1200" b="0" i="0">
-              <a:solidFill>
-                <a:srgbClr val="848484"/>
-              </a:solidFill>
-              <a:latin typeface="Tahoma" panose="020B0604030504040204"/>
-            </a:endParaRPr>
+              <a:t>6</a:t>
+            </a:r>
           </a:p>
         </p:txBody>
       </p:sp>
@@ -9086,7 +10250,7 @@
           <a:noFill/>
         </p:spPr>
         <p:txBody>
-          <a:bodyPr wrap="square" lIns="45720" tIns="27432" rIns="45720" bIns="27432" anchor="t">
+          <a:bodyPr wrap="square" anchor="t" lIns="45720" rIns="45720" tIns="27432" bIns="27432">
             <a:spAutoFit/>
           </a:bodyPr>
           <a:lstStyle/>
@@ -9101,95 +10265,23 @@
                 <a:solidFill>
                   <a:srgbClr val="111010"/>
                 </a:solidFill>
-                <a:latin typeface="Arial Black" panose="020B0A04020102020204"/>
+                <a:latin typeface="Arial Black"/>
               </a:rPr>
-              <a:t>Находка: 599 «прокликанных» анкет</a:t>
-            </a:r>
-            <a:endParaRPr sz="2800" b="0" i="0">
-              <a:solidFill>
-                <a:srgbClr val="111010"/>
-              </a:solidFill>
-              <a:latin typeface="Arial Black" panose="020B0A04020102020204"/>
-            </a:endParaRPr>
-          </a:p>
-        </p:txBody>
-      </p:sp>
-      <p:graphicFrame>
-        <p:nvGraphicFramePr>
-          <p:cNvPr id="11" name="Chart 10"/>
-          <p:cNvGraphicFramePr>
-            <a:graphicFrameLocks noGrp="1"/>
-          </p:cNvGraphicFramePr>
-          <p:nvPr/>
-        </p:nvGraphicFramePr>
-        <p:xfrm>
-          <a:off x="457200" y="1600200"/>
-          <a:ext cx="7498079" cy="4663440"/>
-        </p:xfrm>
-        <a:graphic>
-          <a:graphicData uri="http://schemas.openxmlformats.org/drawingml/2006/chart">
-            <c:chart xmlns:c="http://schemas.openxmlformats.org/drawingml/2006/chart" xmlns:r="http://schemas.openxmlformats.org/officeDocument/2006/relationships" r:id="rId1"/>
-          </a:graphicData>
-        </a:graphic>
-      </p:graphicFrame>
-      <p:sp>
-        <p:nvSpPr>
-          <p:cNvPr id="12" name="Rounded Rectangle 11"/>
-          <p:cNvSpPr/>
-          <p:nvPr/>
-        </p:nvSpPr>
-        <p:spPr>
-          <a:xfrm>
-            <a:off x="8229600" y="1737360"/>
-            <a:ext cx="3474720" cy="2103120"/>
-          </a:xfrm>
-          <a:prstGeom prst="roundRect">
-            <a:avLst>
-              <a:gd name="adj" fmla="val 12000"/>
-            </a:avLst>
-          </a:prstGeom>
-          <a:solidFill>
-            <a:srgbClr val="FFF4D7"/>
-          </a:solidFill>
-          <a:ln w="19050">
-            <a:solidFill>
-              <a:srgbClr val="FFD966"/>
-            </a:solidFill>
-          </a:ln>
-          <a:effectLst/>
-        </p:spPr>
-        <p:style>
-          <a:lnRef idx="1">
-            <a:schemeClr val="accent1"/>
-          </a:lnRef>
-          <a:fillRef idx="3">
-            <a:schemeClr val="accent1"/>
-          </a:fillRef>
-          <a:effectRef idx="2">
-            <a:schemeClr val="accent1"/>
-          </a:effectRef>
-          <a:fontRef idx="minor">
-            <a:schemeClr val="lt1"/>
-          </a:fontRef>
-        </p:style>
-        <p:txBody>
-          <a:bodyPr rtlCol="0" anchor="ctr"/>
-          <a:lstStyle/>
-          <a:p>
-            <a:pPr algn="ctr"/>
-          </a:p>
-        </p:txBody>
-      </p:sp>
-      <p:sp>
-        <p:nvSpPr>
-          <p:cNvPr id="13" name="TextBox 12"/>
+              <a:t>Сама работа учёбе не вредит</a:t>
+            </a:r>
+          </a:p>
+        </p:txBody>
+      </p:sp>
+      <p:sp>
+        <p:nvSpPr>
+          <p:cNvPr id="11" name="TextBox 10"/>
           <p:cNvSpPr txBox="1"/>
           <p:nvPr/>
         </p:nvSpPr>
         <p:spPr>
           <a:xfrm>
-            <a:off x="8412480" y="1874519"/>
-            <a:ext cx="3108960" cy="457200"/>
+            <a:off x="548640" y="1508760"/>
+            <a:ext cx="5669280" cy="365760"/>
           </a:xfrm>
           <a:prstGeom prst="rect">
             <a:avLst/>
@@ -9197,7 +10289,7 @@
           <a:noFill/>
         </p:spPr>
         <p:txBody>
-          <a:bodyPr wrap="square" lIns="45720" tIns="27432" rIns="45720" bIns="27432" anchor="t">
+          <a:bodyPr wrap="square" anchor="t" lIns="45720" rIns="45720" tIns="27432" bIns="27432">
             <a:spAutoFit/>
           </a:bodyPr>
           <a:lstStyle/>
@@ -9208,33 +10300,45 @@
               </a:spcAft>
             </a:pPr>
             <a:r>
-              <a:rPr sz="1600" b="1" i="0">
-                <a:solidFill>
-                  <a:srgbClr val="111010"/>
-                </a:solidFill>
-                <a:latin typeface="Cascadia Code SemiBold" panose="020B0609020000020004"/>
+              <a:rPr sz="1200" b="0" i="0">
+                <a:solidFill>
+                  <a:srgbClr val="848484"/>
+                </a:solidFill>
+                <a:latin typeface="Tahoma"/>
               </a:rPr>
-              <a:t>Что увидел</a:t>
-            </a:r>
-            <a:endParaRPr sz="1600" b="1" i="0">
-              <a:solidFill>
-                <a:srgbClr val="111010"/>
-              </a:solidFill>
-              <a:latin typeface="Cascadia Code SemiBold" panose="020B0609020000020004"/>
-            </a:endParaRPr>
-          </a:p>
-        </p:txBody>
-      </p:sp>
-      <p:sp>
-        <p:nvSpPr>
-          <p:cNvPr id="14" name="TextBox 13"/>
+              <a:t>Доля с хорошими оценками («4 и 5» или «только 5»)</a:t>
+            </a:r>
+          </a:p>
+        </p:txBody>
+      </p:sp>
+      <p:graphicFrame>
+        <p:nvGraphicFramePr>
+          <p:cNvPr id="12" name="Chart 11"/>
+          <p:cNvGraphicFramePr>
+            <a:graphicFrameLocks noGrp="1"/>
+          </p:cNvGraphicFramePr>
+          <p:nvPr/>
+        </p:nvGraphicFramePr>
+        <p:xfrm>
+          <a:off x="457200" y="1874519"/>
+          <a:ext cx="5852160" cy="4023360"/>
+        </p:xfrm>
+        <a:graphic>
+          <a:graphicData uri="http://schemas.openxmlformats.org/drawingml/2006/chart">
+            <c:chart xmlns:c="http://schemas.openxmlformats.org/drawingml/2006/chart" r:id="rId3"/>
+          </a:graphicData>
+        </a:graphic>
+      </p:graphicFrame>
+      <p:sp>
+        <p:nvSpPr>
+          <p:cNvPr id="13" name="TextBox 12"/>
           <p:cNvSpPr txBox="1"/>
           <p:nvPr/>
         </p:nvSpPr>
         <p:spPr>
           <a:xfrm>
-            <a:off x="8412480" y="2331720"/>
-            <a:ext cx="3108960" cy="1417319"/>
+            <a:off x="548640" y="5897880"/>
+            <a:ext cx="5669280" cy="365760"/>
           </a:xfrm>
           <a:prstGeom prst="rect">
             <a:avLst/>
@@ -9242,7 +10346,7 @@
           <a:noFill/>
         </p:spPr>
         <p:txBody>
-          <a:bodyPr wrap="square" lIns="45720" tIns="27432" rIns="45720" bIns="27432" anchor="t">
+          <a:bodyPr wrap="square" anchor="t" lIns="45720" rIns="45720" tIns="27432" bIns="27432">
             <a:spAutoFit/>
           </a:bodyPr>
           <a:lstStyle/>
@@ -9253,81 +10357,27 @@
               </a:spcAft>
             </a:pPr>
             <a:r>
-              <a:rPr sz="1400" b="0" i="0">
-                <a:solidFill>
-                  <a:srgbClr val="111010"/>
-                </a:solidFill>
-                <a:latin typeface="Tahoma" panose="020B0604030504040204"/>
+              <a:rPr sz="1200" b="0" i="0">
+                <a:solidFill>
+                  <a:srgbClr val="848484"/>
+                </a:solidFill>
+                <a:latin typeface="Tahoma"/>
               </a:rPr>
-              <a:t>Анкеты 4-й волны, брошенные на середине, заполнены почти одинаково</a:t>
-            </a:r>
-            <a:endParaRPr sz="1400" b="0" i="0">
-              <a:solidFill>
-                <a:srgbClr val="111010"/>
-              </a:solidFill>
-              <a:latin typeface="Tahoma" panose="020B0604030504040204"/>
-            </a:endParaRPr>
-          </a:p>
-        </p:txBody>
-      </p:sp>
-      <p:sp>
-        <p:nvSpPr>
-          <p:cNvPr id="15" name="Rounded Rectangle 14"/>
-          <p:cNvSpPr/>
-          <p:nvPr/>
-        </p:nvSpPr>
-        <p:spPr>
-          <a:xfrm>
-            <a:off x="8229600" y="4069080"/>
-            <a:ext cx="3474720" cy="2103120"/>
-          </a:xfrm>
-          <a:prstGeom prst="roundRect">
-            <a:avLst>
-              <a:gd name="adj" fmla="val 12000"/>
-            </a:avLst>
-          </a:prstGeom>
-          <a:solidFill>
-            <a:srgbClr val="FFE699"/>
-          </a:solidFill>
-          <a:ln w="19050">
-            <a:solidFill>
-              <a:srgbClr val="FFD966"/>
-            </a:solidFill>
-          </a:ln>
-          <a:effectLst/>
-        </p:spPr>
-        <p:style>
-          <a:lnRef idx="1">
-            <a:schemeClr val="accent1"/>
-          </a:lnRef>
-          <a:fillRef idx="3">
-            <a:schemeClr val="accent1"/>
-          </a:fillRef>
-          <a:effectRef idx="2">
-            <a:schemeClr val="accent1"/>
-          </a:effectRef>
-          <a:fontRef idx="minor">
-            <a:schemeClr val="lt1"/>
-          </a:fontRef>
-        </p:style>
-        <p:txBody>
-          <a:bodyPr rtlCol="0" anchor="ctr"/>
-          <a:lstStyle/>
-          <a:p>
-            <a:pPr algn="ctr"/>
-          </a:p>
-        </p:txBody>
-      </p:sp>
-      <p:sp>
-        <p:nvSpPr>
-          <p:cNvPr id="16" name="TextBox 15"/>
+              <a:t>Различия незначимы: p = 0.57 (3 курс), 0.15 (4 курс)</a:t>
+            </a:r>
+          </a:p>
+        </p:txBody>
+      </p:sp>
+      <p:sp>
+        <p:nvSpPr>
+          <p:cNvPr id="14" name="TextBox 13"/>
           <p:cNvSpPr txBox="1"/>
           <p:nvPr/>
         </p:nvSpPr>
         <p:spPr>
           <a:xfrm>
-            <a:off x="8412480" y="4206240"/>
-            <a:ext cx="3108960" cy="457200"/>
+            <a:off x="6583680" y="1508760"/>
+            <a:ext cx="5303520" cy="365760"/>
           </a:xfrm>
           <a:prstGeom prst="rect">
             <a:avLst/>
@@ -9335,7 +10385,7 @@
           <a:noFill/>
         </p:spPr>
         <p:txBody>
-          <a:bodyPr wrap="square" lIns="45720" tIns="27432" rIns="45720" bIns="27432" anchor="t">
+          <a:bodyPr wrap="square" anchor="t" lIns="45720" rIns="45720" tIns="27432" bIns="27432">
             <a:spAutoFit/>
           </a:bodyPr>
           <a:lstStyle/>
@@ -9346,33 +10396,45 @@
               </a:spcAft>
             </a:pPr>
             <a:r>
-              <a:rPr sz="1600" b="1" i="0">
-                <a:solidFill>
-                  <a:srgbClr val="111010"/>
-                </a:solidFill>
-                <a:latin typeface="Cascadia Code SemiBold" panose="020B0609020000020004"/>
+              <a:rPr sz="1200" b="0" i="0">
+                <a:solidFill>
+                  <a:srgbClr val="848484"/>
+                </a:solidFill>
+                <a:latin typeface="Tahoma"/>
               </a:rPr>
-              <a:t>Что сделал</a:t>
-            </a:r>
-            <a:endParaRPr sz="1600" b="1" i="0">
-              <a:solidFill>
-                <a:srgbClr val="111010"/>
-              </a:solidFill>
-              <a:latin typeface="Cascadia Code SemiBold" panose="020B0609020000020004"/>
-            </a:endParaRPr>
-          </a:p>
-        </p:txBody>
-      </p:sp>
-      <p:sp>
-        <p:nvSpPr>
-          <p:cNvPr id="17" name="TextBox 16"/>
+              <a:t>Изменение доли хороших оценок с 3 на 4 курс, п.п.</a:t>
+            </a:r>
+          </a:p>
+        </p:txBody>
+      </p:sp>
+      <p:graphicFrame>
+        <p:nvGraphicFramePr>
+          <p:cNvPr id="15" name="Chart 14"/>
+          <p:cNvGraphicFramePr>
+            <a:graphicFrameLocks noGrp="1"/>
+          </p:cNvGraphicFramePr>
+          <p:nvPr/>
+        </p:nvGraphicFramePr>
+        <p:xfrm>
+          <a:off x="6492240" y="1874519"/>
+          <a:ext cx="5394960" cy="3291840"/>
+        </p:xfrm>
+        <a:graphic>
+          <a:graphicData uri="http://schemas.openxmlformats.org/drawingml/2006/chart">
+            <c:chart xmlns:c="http://schemas.openxmlformats.org/drawingml/2006/chart" r:id="rId4"/>
+          </a:graphicData>
+        </a:graphic>
+      </p:graphicFrame>
+      <p:sp>
+        <p:nvSpPr>
+          <p:cNvPr id="16" name="TextBox 15"/>
           <p:cNvSpPr txBox="1"/>
           <p:nvPr/>
         </p:nvSpPr>
         <p:spPr>
           <a:xfrm>
-            <a:off x="8412480" y="4663440"/>
-            <a:ext cx="3108960" cy="1417319"/>
+            <a:off x="6583680" y="5303520"/>
+            <a:ext cx="5303520" cy="914400"/>
           </a:xfrm>
           <a:prstGeom prst="rect">
             <a:avLst/>
@@ -9380,7 +10442,7 @@
           <a:noFill/>
         </p:spPr>
         <p:txBody>
-          <a:bodyPr wrap="square" lIns="45720" tIns="27432" rIns="45720" bIns="27432" anchor="t">
+          <a:bodyPr wrap="square" anchor="t" lIns="45720" rIns="45720" tIns="27432" bIns="27432">
             <a:spAutoFit/>
           </a:bodyPr>
           <a:lstStyle/>
@@ -9391,20 +10453,23 @@
               </a:spcAft>
             </a:pPr>
             <a:r>
+              <a:rPr sz="1400" b="1" i="0">
+                <a:solidFill>
+                  <a:srgbClr val="C55A11"/>
+                </a:solidFill>
+                <a:latin typeface="Tahoma"/>
+              </a:rPr>
+              <a:t>Начал работать </a:t>
+            </a:r>
+            <a:r>
               <a:rPr sz="1400" b="0" i="0">
                 <a:solidFill>
                   <a:srgbClr val="111010"/>
                 </a:solidFill>
-                <a:latin typeface="Tahoma" panose="020B0604030504040204"/>
+                <a:latin typeface="Tahoma"/>
               </a:rPr>
-              <a:t>Ответы первого блока этих анкет → пропуски. Строки не удалял</a:t>
-            </a:r>
-            <a:endParaRPr sz="1400" b="0" i="0">
-              <a:solidFill>
-                <a:srgbClr val="111010"/>
-              </a:solidFill>
-              <a:latin typeface="Tahoma" panose="020B0604030504040204"/>
-            </a:endParaRPr>
+              <a:t>— оценки выросли так же, как у неработающих (p = 0.80). Сон тоже не сократился</a:t>
+            </a:r>
           </a:p>
         </p:txBody>
       </p:sp>
@@ -9732,11 +10797,7 @@
       </a:style>
     </a:lnDef>
   </a:objectDefaults>
-  <a:extLst>
-    <a:ext uri="{05A4C25C-085E-4340-85A3-A5531E510DB2}">
-      <thm15:themeFamily xmlns:thm15="http://schemas.microsoft.com/office/thememl/2012/main" name="Office Theme" id="{62F939B6-93AF-4DB8-9C6B-D6C7DFDC589F}" vid="{4A3C46E8-61CC-4603-A589-7422A47A8E4A}"/>
-    </a:ext>
-  </a:extLst>
+  <a:extraClrSchemeLst/>
 </a:theme>
 </file>
 
@@ -10056,10 +11117,6 @@
       </a:style>
     </a:lnDef>
   </a:objectDefaults>
-  <a:extLst>
-    <a:ext uri="{05A4C25C-085E-4340-85A3-A5531E510DB2}">
-      <thm15:themeFamily xmlns:thm15="http://schemas.microsoft.com/office/thememl/2012/main" name="Office Theme" id="{62F939B6-93AF-4DB8-9C6B-D6C7DFDC589F}" vid="{4A3C46E8-61CC-4603-A589-7422A47A8E4A}"/>
-    </a:ext>
-  </a:extLst>
+  <a:extraClrSchemeLst/>
 </a:theme>
 </file>
--- a/docs/Учёба_и_работа_презентация.pptx
+++ b/docs/Учёба_и_работа_презентация.pptx
@@ -11,6 +11,10 @@
     <p:sldId id="259" r:id="rId11"/>
     <p:sldId id="260" r:id="rId12"/>
     <p:sldId id="261" r:id="rId13"/>
+    <p:sldId id="262" r:id="rId14"/>
+    <p:sldId id="263" r:id="rId15"/>
+    <p:sldId id="264" r:id="rId16"/>
+    <p:sldId id="265" r:id="rId17"/>
   </p:sldIdLst>
   <p:sldSz cx="12191695" cy="6858000" type="screen4x3"/>
   <p:notesSz cx="6858000" cy="9144000"/>
@@ -331,7 +335,7 @@
     <a:p>
       <a:pPr>
         <a:defRPr sz="1100">
-          <a:latin typeface="Tahoma"/>
+          <a:latin typeface="Trebuchet MS"/>
         </a:defRPr>
       </a:pPr>
       <a:endParaRPr lang="en-US"/>
@@ -582,7 +586,7 @@
     <a:p>
       <a:pPr>
         <a:defRPr sz="1100">
-          <a:latin typeface="Tahoma"/>
+          <a:latin typeface="Trebuchet MS"/>
         </a:defRPr>
       </a:pPr>
       <a:endParaRPr lang="en-US"/>
@@ -839,7 +843,7 @@
     <a:p>
       <a:pPr>
         <a:defRPr sz="1100">
-          <a:latin typeface="Tahoma"/>
+          <a:latin typeface="Trebuchet MS"/>
         </a:defRPr>
       </a:pPr>
       <a:endParaRPr lang="en-US"/>
@@ -885,13 +889,21 @@
             </a:ln>
           </c:spPr>
           <c:invertIfNegative val="0"/>
+          <c:dPt>
+            <c:idx val="1"/>
+            <c:spPr>
+              <a:solidFill>
+                <a:srgbClr val="C55A11"/>
+              </a:solidFill>
+            </c:spPr>
+          </c:dPt>
           <c:cat>
             <c:strRef>
               <c:f>Sheet1!$A$2:$A$5</c:f>
               <c:strCache>
                 <c:ptCount val="4"/>
                 <c:pt idx="0">
-                  <c:v>Не работал → не работает</c:v>
+                  <c:v>Не работал</c:v>
                 </c:pt>
                 <c:pt idx="1">
                   <c:v>Начал работать</c:v>
@@ -900,7 +912,7 @@
                   <c:v>Перестал работать</c:v>
                 </c:pt>
                 <c:pt idx="3">
-                  <c:v>Работал → работает</c:v>
+                  <c:v>Работал оба года</c:v>
                 </c:pt>
               </c:strCache>
             </c:strRef>
@@ -1009,7 +1021,749 @@
     <a:p>
       <a:pPr>
         <a:defRPr sz="1100">
-          <a:latin typeface="Tahoma"/>
+          <a:latin typeface="Trebuchet MS"/>
+        </a:defRPr>
+      </a:pPr>
+      <a:endParaRPr lang="en-US"/>
+    </a:p>
+  </c:txPr>
+  <c:externalData r:id="rId1">
+    <c:autoUpdate val="0"/>
+  </c:externalData>
+</c:chartSpace>
+</file>
+
+<file path=ppt/charts/chart5.xml><?xml version="1.0" encoding="utf-8"?>
+<c:chartSpace xmlns:c="http://schemas.openxmlformats.org/drawingml/2006/chart" xmlns:a="http://schemas.openxmlformats.org/drawingml/2006/main" xmlns:r="http://schemas.openxmlformats.org/officeDocument/2006/relationships">
+  <c:date1904 val="0"/>
+  <c:chart>
+    <c:autoTitleDeleted val="0"/>
+    <c:plotArea>
+      <c:lineChart>
+        <c:grouping val="standard"/>
+        <c:varyColors val="0"/>
+        <c:ser>
+          <c:idx val="0"/>
+          <c:order val="0"/>
+          <c:tx>
+            <c:strRef>
+              <c:f>Sheet1!$B$1</c:f>
+              <c:strCache>
+                <c:ptCount val="1"/>
+                <c:pt idx="0">
+                  <c:v>3 курс</c:v>
+                </c:pt>
+              </c:strCache>
+            </c:strRef>
+          </c:tx>
+          <c:spPr>
+            <a:ln w="38100">
+              <a:solidFill>
+                <a:srgbClr val="C55A11"/>
+              </a:solidFill>
+            </a:ln>
+          </c:spPr>
+          <c:marker>
+            <c:symbol val="circle"/>
+            <c:size val="9"/>
+            <c:spPr>
+              <a:solidFill>
+                <a:srgbClr val="C55A11"/>
+              </a:solidFill>
+              <a:ln>
+                <a:solidFill>
+                  <a:srgbClr val="C55A11"/>
+                </a:solidFill>
+              </a:ln>
+            </c:spPr>
+          </c:marker>
+          <c:dLbls>
+            <c:numFmt formatCode="0&quot;%&quot;" sourceLinked="0"/>
+            <c:txPr>
+              <a:bodyPr/>
+              <a:lstStyle/>
+              <a:p>
+                <a:pPr>
+                  <a:defRPr sz="1100"/>
+                </a:pPr>
+              </a:p>
+            </c:txPr>
+            <c:dLblPos val="t"/>
+            <c:showLegendKey val="0"/>
+            <c:showVal val="1"/>
+            <c:showCatName val="0"/>
+            <c:showSerName val="0"/>
+            <c:showPercent val="0"/>
+            <c:showBubbleSize val="0"/>
+            <c:showLeaderLines val="1"/>
+          </c:dLbls>
+          <c:cat>
+            <c:strRef>
+              <c:f>Sheet1!$A$2:$A$6</c:f>
+              <c:strCache>
+                <c:ptCount val="5"/>
+                <c:pt idx="0">
+                  <c:v>0 ч</c:v>
+                </c:pt>
+                <c:pt idx="1">
+                  <c:v>1–10</c:v>
+                </c:pt>
+                <c:pt idx="2">
+                  <c:v>11–20</c:v>
+                </c:pt>
+                <c:pt idx="3">
+                  <c:v>21–30</c:v>
+                </c:pt>
+                <c:pt idx="4">
+                  <c:v>31+</c:v>
+                </c:pt>
+              </c:strCache>
+            </c:strRef>
+          </c:cat>
+          <c:val>
+            <c:numRef>
+              <c:f>Sheet1!$B$2:$B$6</c:f>
+              <c:numCache>
+                <c:formatCode>General</c:formatCode>
+                <c:ptCount val="5"/>
+                <c:pt idx="0">
+                  <c:v>20.0</c:v>
+                </c:pt>
+                <c:pt idx="1">
+                  <c:v>23.7</c:v>
+                </c:pt>
+                <c:pt idx="2">
+                  <c:v>20.9</c:v>
+                </c:pt>
+                <c:pt idx="3">
+                  <c:v>29.7</c:v>
+                </c:pt>
+                <c:pt idx="4">
+                  <c:v>38.2</c:v>
+                </c:pt>
+              </c:numCache>
+            </c:numRef>
+          </c:val>
+          <c:smooth val="0"/>
+        </c:ser>
+        <c:ser>
+          <c:idx val="1"/>
+          <c:order val="1"/>
+          <c:tx>
+            <c:strRef>
+              <c:f>Sheet1!$C$1</c:f>
+              <c:strCache>
+                <c:ptCount val="1"/>
+                <c:pt idx="0">
+                  <c:v>4 курс</c:v>
+                </c:pt>
+              </c:strCache>
+            </c:strRef>
+          </c:tx>
+          <c:spPr>
+            <a:ln w="38100">
+              <a:solidFill>
+                <a:srgbClr val="FFD966"/>
+              </a:solidFill>
+            </a:ln>
+          </c:spPr>
+          <c:marker>
+            <c:symbol val="circle"/>
+            <c:size val="9"/>
+            <c:spPr>
+              <a:solidFill>
+                <a:srgbClr val="FFD966"/>
+              </a:solidFill>
+              <a:ln>
+                <a:solidFill>
+                  <a:srgbClr val="FFD966"/>
+                </a:solidFill>
+              </a:ln>
+            </c:spPr>
+          </c:marker>
+          <c:dLbls>
+            <c:numFmt formatCode="0&quot;%&quot;" sourceLinked="0"/>
+            <c:txPr>
+              <a:bodyPr/>
+              <a:lstStyle/>
+              <a:p>
+                <a:pPr>
+                  <a:defRPr sz="1100"/>
+                </a:pPr>
+              </a:p>
+            </c:txPr>
+            <c:dLblPos val="b"/>
+            <c:showLegendKey val="0"/>
+            <c:showVal val="1"/>
+            <c:showCatName val="0"/>
+            <c:showSerName val="0"/>
+            <c:showPercent val="0"/>
+            <c:showBubbleSize val="0"/>
+            <c:showLeaderLines val="1"/>
+          </c:dLbls>
+          <c:cat>
+            <c:strRef>
+              <c:f>Sheet1!$A$2:$A$6</c:f>
+              <c:strCache>
+                <c:ptCount val="5"/>
+                <c:pt idx="0">
+                  <c:v>0 ч</c:v>
+                </c:pt>
+                <c:pt idx="1">
+                  <c:v>1–10</c:v>
+                </c:pt>
+                <c:pt idx="2">
+                  <c:v>11–20</c:v>
+                </c:pt>
+                <c:pt idx="3">
+                  <c:v>21–30</c:v>
+                </c:pt>
+                <c:pt idx="4">
+                  <c:v>31+</c:v>
+                </c:pt>
+              </c:strCache>
+            </c:strRef>
+          </c:cat>
+          <c:val>
+            <c:numRef>
+              <c:f>Sheet1!$C$2:$C$6</c:f>
+              <c:numCache>
+                <c:formatCode>General</c:formatCode>
+                <c:ptCount val="5"/>
+                <c:pt idx="0">
+                  <c:v>16.9</c:v>
+                </c:pt>
+                <c:pt idx="1">
+                  <c:v>15.0</c:v>
+                </c:pt>
+                <c:pt idx="2">
+                  <c:v>15.2</c:v>
+                </c:pt>
+                <c:pt idx="3">
+                  <c:v>19.4</c:v>
+                </c:pt>
+                <c:pt idx="4">
+                  <c:v>18.6</c:v>
+                </c:pt>
+              </c:numCache>
+            </c:numRef>
+          </c:val>
+          <c:smooth val="0"/>
+        </c:ser>
+        <c:dLbls>
+          <c:numFmt formatCode="0&quot;%&quot;" sourceLinked="0"/>
+          <c:txPr>
+            <a:bodyPr/>
+            <a:lstStyle/>
+            <a:p>
+              <a:pPr>
+                <a:defRPr sz="1100"/>
+              </a:pPr>
+            </a:p>
+          </c:txPr>
+          <c:showLegendKey val="0"/>
+          <c:showVal val="1"/>
+          <c:showCatName val="0"/>
+          <c:showSerName val="0"/>
+          <c:showPercent val="0"/>
+          <c:showBubbleSize val="0"/>
+          <c:showLeaderLines val="1"/>
+        </c:dLbls>
+        <c:marker val="1"/>
+        <c:smooth val="0"/>
+        <c:axId val="2118791784"/>
+        <c:axId val="2140495176"/>
+      </c:lineChart>
+      <c:catAx>
+        <c:axId val="2118791784"/>
+        <c:scaling>
+          <c:orientation val="minMax"/>
+        </c:scaling>
+        <c:delete val="0"/>
+        <c:axPos val="b"/>
+        <c:majorTickMark val="out"/>
+        <c:minorTickMark val="none"/>
+        <c:tickLblPos val="nextTo"/>
+        <c:spPr>
+          <a:ln>
+            <a:solidFill>
+              <a:srgbClr val="D8D8D8"/>
+            </a:solidFill>
+          </a:ln>
+        </c:spPr>
+        <c:txPr>
+          <a:bodyPr/>
+          <a:lstStyle/>
+          <a:p>
+            <a:pPr>
+              <a:defRPr sz="1100"/>
+            </a:pPr>
+          </a:p>
+        </c:txPr>
+        <c:crossAx val="2140495176"/>
+        <c:crosses val="autoZero"/>
+        <c:auto val="1"/>
+        <c:lblAlgn val="ctr"/>
+        <c:lblOffset val="100"/>
+        <c:noMultiLvlLbl val="0"/>
+      </c:catAx>
+      <c:valAx>
+        <c:axId val="2140495176"/>
+        <c:scaling>
+          <c:max val="45.0"/>
+          <c:min val="0.0"/>
+        </c:scaling>
+        <c:delete val="0"/>
+        <c:axPos val="l"/>
+        <c:numFmt formatCode="0" sourceLinked="0"/>
+        <c:majorTickMark val="none"/>
+        <c:minorTickMark val="none"/>
+        <c:tickLblPos val="none"/>
+        <c:spPr>
+          <a:ln>
+            <a:noFill/>
+          </a:ln>
+        </c:spPr>
+        <c:crossAx val="2118791784"/>
+        <c:crosses val="autoZero"/>
+      </c:valAx>
+    </c:plotArea>
+    <c:legend>
+      <c:legendPos val="t"/>
+      <c:layout/>
+      <c:overlay val="0"/>
+      <c:txPr>
+        <a:bodyPr/>
+        <a:lstStyle/>
+        <a:p>
+          <a:pPr>
+            <a:defRPr sz="1100"/>
+          </a:pPr>
+        </a:p>
+      </c:txPr>
+    </c:legend>
+    <c:plotVisOnly val="1"/>
+    <c:dispBlanksAs val="gap"/>
+    <c:showDLblsOverMax val="0"/>
+  </c:chart>
+  <c:txPr>
+    <a:bodyPr/>
+    <a:lstStyle/>
+    <a:p>
+      <a:pPr>
+        <a:defRPr sz="1100">
+          <a:latin typeface="Trebuchet MS"/>
+        </a:defRPr>
+      </a:pPr>
+      <a:endParaRPr lang="en-US"/>
+    </a:p>
+  </c:txPr>
+  <c:externalData r:id="rId1">
+    <c:autoUpdate val="0"/>
+  </c:externalData>
+</c:chartSpace>
+</file>
+
+<file path=ppt/charts/chart6.xml><?xml version="1.0" encoding="utf-8"?>
+<c:chartSpace xmlns:c="http://schemas.openxmlformats.org/drawingml/2006/chart" xmlns:a="http://schemas.openxmlformats.org/drawingml/2006/main" xmlns:r="http://schemas.openxmlformats.org/officeDocument/2006/relationships">
+  <c:date1904 val="0"/>
+  <c:chart>
+    <c:autoTitleDeleted val="0"/>
+    <c:plotArea>
+      <c:barChart>
+        <c:barDir val="bar"/>
+        <c:grouping val="clustered"/>
+        <c:ser>
+          <c:idx val="0"/>
+          <c:order val="0"/>
+          <c:tx>
+            <c:strRef>
+              <c:f>Sheet1!$B$1</c:f>
+              <c:strCache>
+                <c:ptCount val="1"/>
+                <c:pt idx="0">
+                  <c:v>Рост шансов</c:v>
+                </c:pt>
+              </c:strCache>
+            </c:strRef>
+          </c:tx>
+          <c:spPr>
+            <a:solidFill>
+              <a:srgbClr val="C55A11"/>
+            </a:solidFill>
+            <a:ln>
+              <a:solidFill>
+                <a:srgbClr val="C55A11"/>
+              </a:solidFill>
+            </a:ln>
+          </c:spPr>
+          <c:cat>
+            <c:strRef>
+              <c:f>Sheet1!$A$2:$A$4</c:f>
+              <c:strCache>
+                <c:ptCount val="3"/>
+                <c:pt idx="0">
+                  <c:v>Неполный день</c:v>
+                </c:pt>
+                <c:pt idx="1">
+                  <c:v>Приработки</c:v>
+                </c:pt>
+                <c:pt idx="2">
+                  <c:v>Полный день</c:v>
+                </c:pt>
+              </c:strCache>
+            </c:strRef>
+          </c:cat>
+          <c:val>
+            <c:numRef>
+              <c:f>Sheet1!$B$2:$B$4</c:f>
+              <c:numCache>
+                <c:formatCode>General</c:formatCode>
+                <c:ptCount val="3"/>
+                <c:pt idx="0">
+                  <c:v>18</c:v>
+                </c:pt>
+                <c:pt idx="1">
+                  <c:v>35</c:v>
+                </c:pt>
+                <c:pt idx="2">
+                  <c:v>74</c:v>
+                </c:pt>
+              </c:numCache>
+            </c:numRef>
+          </c:val>
+        </c:ser>
+        <c:dLbls>
+          <c:numFmt formatCode="&quot;+&quot;0&quot;%&quot;" sourceLinked="0"/>
+          <c:txPr>
+            <a:bodyPr/>
+            <a:lstStyle/>
+            <a:p>
+              <a:pPr>
+                <a:defRPr sz="1100"/>
+              </a:pPr>
+            </a:p>
+          </c:txPr>
+          <c:showLegendKey val="0"/>
+          <c:showVal val="1"/>
+          <c:showCatName val="0"/>
+          <c:showSerName val="0"/>
+          <c:showPercent val="0"/>
+          <c:showBubbleSize val="0"/>
+          <c:showLeaderLines val="1"/>
+        </c:dLbls>
+        <c:gapWidth val="60"/>
+        <c:axId val="-2068027336"/>
+        <c:axId val="-2113994440"/>
+      </c:barChart>
+      <c:catAx>
+        <c:axId val="-2068027336"/>
+        <c:scaling>
+          <c:orientation val="maxMin"/>
+        </c:scaling>
+        <c:delete val="0"/>
+        <c:axPos val="l"/>
+        <c:majorTickMark val="out"/>
+        <c:minorTickMark val="none"/>
+        <c:tickLblPos val="nextTo"/>
+        <c:spPr>
+          <a:ln>
+            <a:solidFill>
+              <a:srgbClr val="D8D8D8"/>
+            </a:solidFill>
+          </a:ln>
+        </c:spPr>
+        <c:txPr>
+          <a:bodyPr/>
+          <a:lstStyle/>
+          <a:p>
+            <a:pPr>
+              <a:defRPr sz="1100"/>
+            </a:pPr>
+          </a:p>
+        </c:txPr>
+        <c:crossAx val="-2113994440"/>
+        <c:crosses val="autoZero"/>
+        <c:auto val="1"/>
+        <c:lblAlgn val="ctr"/>
+        <c:lblOffset val="100"/>
+        <c:noMultiLvlLbl val="0"/>
+      </c:catAx>
+      <c:valAx>
+        <c:axId val="-2113994440"/>
+        <c:scaling>
+          <c:max val="95.0"/>
+          <c:min val="0.0"/>
+        </c:scaling>
+        <c:delete val="0"/>
+        <c:axPos val="b"/>
+        <c:numFmt formatCode="0" sourceLinked="0"/>
+        <c:majorTickMark val="none"/>
+        <c:minorTickMark val="none"/>
+        <c:tickLblPos val="none"/>
+        <c:spPr>
+          <a:ln>
+            <a:noFill/>
+          </a:ln>
+        </c:spPr>
+        <c:crossAx val="-2068027336"/>
+        <c:crosses val="autoZero"/>
+      </c:valAx>
+    </c:plotArea>
+    <c:dispBlanksAs val="gap"/>
+  </c:chart>
+  <c:txPr>
+    <a:bodyPr/>
+    <a:lstStyle/>
+    <a:p>
+      <a:pPr>
+        <a:defRPr sz="1100">
+          <a:latin typeface="Trebuchet MS"/>
+        </a:defRPr>
+      </a:pPr>
+      <a:endParaRPr lang="en-US"/>
+    </a:p>
+  </c:txPr>
+  <c:externalData r:id="rId1">
+    <c:autoUpdate val="0"/>
+  </c:externalData>
+</c:chartSpace>
+</file>
+
+<file path=ppt/charts/chart7.xml><?xml version="1.0" encoding="utf-8"?>
+<c:chartSpace xmlns:c="http://schemas.openxmlformats.org/drawingml/2006/chart" xmlns:a="http://schemas.openxmlformats.org/drawingml/2006/main" xmlns:r="http://schemas.openxmlformats.org/officeDocument/2006/relationships">
+  <c:date1904 val="0"/>
+  <c:chart>
+    <c:autoTitleDeleted val="0"/>
+    <c:plotArea>
+      <c:barChart>
+        <c:barDir val="col"/>
+        <c:grouping val="clustered"/>
+        <c:ser>
+          <c:idx val="0"/>
+          <c:order val="0"/>
+          <c:tx>
+            <c:strRef>
+              <c:f>Sheet1!$B$1</c:f>
+              <c:strCache>
+                <c:ptCount val="1"/>
+                <c:pt idx="0">
+                  <c:v>По специальности</c:v>
+                </c:pt>
+              </c:strCache>
+            </c:strRef>
+          </c:tx>
+          <c:spPr>
+            <a:solidFill>
+              <a:srgbClr val="C55A11"/>
+            </a:solidFill>
+            <a:ln>
+              <a:solidFill>
+                <a:srgbClr val="C55A11"/>
+              </a:solidFill>
+            </a:ln>
+          </c:spPr>
+          <c:cat>
+            <c:strRef>
+              <c:f>Sheet1!$A$2:$A$4</c:f>
+              <c:strCache>
+                <c:ptCount val="3"/>
+                <c:pt idx="0">
+                  <c:v>Работа помогает
+учиться</c:v>
+                </c:pt>
+                <c:pt idx="1">
+                  <c:v>Хорошие
+оценки</c:v>
+                </c:pt>
+                <c:pt idx="2">
+                  <c:v>Страдает
+успеваемость</c:v>
+                </c:pt>
+              </c:strCache>
+            </c:strRef>
+          </c:cat>
+          <c:val>
+            <c:numRef>
+              <c:f>Sheet1!$B$2:$B$4</c:f>
+              <c:numCache>
+                <c:formatCode>General</c:formatCode>
+                <c:ptCount val="3"/>
+                <c:pt idx="0">
+                  <c:v>76.6</c:v>
+                </c:pt>
+                <c:pt idx="1">
+                  <c:v>62.9</c:v>
+                </c:pt>
+                <c:pt idx="2">
+                  <c:v>27.5</c:v>
+                </c:pt>
+              </c:numCache>
+            </c:numRef>
+          </c:val>
+        </c:ser>
+        <c:ser>
+          <c:idx val="1"/>
+          <c:order val="1"/>
+          <c:tx>
+            <c:strRef>
+              <c:f>Sheet1!$C$1</c:f>
+              <c:strCache>
+                <c:ptCount val="1"/>
+                <c:pt idx="0">
+                  <c:v>Не по специальности</c:v>
+                </c:pt>
+              </c:strCache>
+            </c:strRef>
+          </c:tx>
+          <c:spPr>
+            <a:solidFill>
+              <a:srgbClr val="FFD966"/>
+            </a:solidFill>
+            <a:ln>
+              <a:solidFill>
+                <a:srgbClr val="FFD966"/>
+              </a:solidFill>
+            </a:ln>
+          </c:spPr>
+          <c:cat>
+            <c:strRef>
+              <c:f>Sheet1!$A$2:$A$4</c:f>
+              <c:strCache>
+                <c:ptCount val="3"/>
+                <c:pt idx="0">
+                  <c:v>Работа помогает
+учиться</c:v>
+                </c:pt>
+                <c:pt idx="1">
+                  <c:v>Хорошие
+оценки</c:v>
+                </c:pt>
+                <c:pt idx="2">
+                  <c:v>Страдает
+успеваемость</c:v>
+                </c:pt>
+              </c:strCache>
+            </c:strRef>
+          </c:cat>
+          <c:val>
+            <c:numRef>
+              <c:f>Sheet1!$C$2:$C$4</c:f>
+              <c:numCache>
+                <c:formatCode>General</c:formatCode>
+                <c:ptCount val="3"/>
+                <c:pt idx="0">
+                  <c:v>35.9</c:v>
+                </c:pt>
+                <c:pt idx="1">
+                  <c:v>51.0</c:v>
+                </c:pt>
+                <c:pt idx="2">
+                  <c:v>27.4</c:v>
+                </c:pt>
+              </c:numCache>
+            </c:numRef>
+          </c:val>
+        </c:ser>
+        <c:dLbls>
+          <c:numFmt formatCode="0&quot;%&quot;" sourceLinked="0"/>
+          <c:txPr>
+            <a:bodyPr/>
+            <a:lstStyle/>
+            <a:p>
+              <a:pPr>
+                <a:defRPr sz="1100"/>
+              </a:pPr>
+            </a:p>
+          </c:txPr>
+          <c:showLegendKey val="0"/>
+          <c:showVal val="1"/>
+          <c:showCatName val="0"/>
+          <c:showSerName val="0"/>
+          <c:showPercent val="0"/>
+          <c:showBubbleSize val="0"/>
+          <c:showLeaderLines val="1"/>
+        </c:dLbls>
+        <c:gapWidth val="60"/>
+        <c:axId val="-2068027336"/>
+        <c:axId val="-2113994440"/>
+      </c:barChart>
+      <c:catAx>
+        <c:axId val="-2068027336"/>
+        <c:scaling>
+          <c:orientation val="minMax"/>
+        </c:scaling>
+        <c:delete val="0"/>
+        <c:axPos val="b"/>
+        <c:majorTickMark val="out"/>
+        <c:minorTickMark val="none"/>
+        <c:tickLblPos val="nextTo"/>
+        <c:spPr>
+          <a:ln>
+            <a:solidFill>
+              <a:srgbClr val="D8D8D8"/>
+            </a:solidFill>
+          </a:ln>
+        </c:spPr>
+        <c:txPr>
+          <a:bodyPr/>
+          <a:lstStyle/>
+          <a:p>
+            <a:pPr>
+              <a:defRPr sz="1100"/>
+            </a:pPr>
+          </a:p>
+        </c:txPr>
+        <c:crossAx val="-2113994440"/>
+        <c:crosses val="autoZero"/>
+        <c:auto val="1"/>
+        <c:lblAlgn val="ctr"/>
+        <c:lblOffset val="100"/>
+        <c:noMultiLvlLbl val="0"/>
+      </c:catAx>
+      <c:valAx>
+        <c:axId val="-2113994440"/>
+        <c:scaling>
+          <c:max val="95.0"/>
+          <c:min val="0.0"/>
+        </c:scaling>
+        <c:delete val="0"/>
+        <c:axPos val="l"/>
+        <c:numFmt formatCode="0" sourceLinked="0"/>
+        <c:majorTickMark val="none"/>
+        <c:minorTickMark val="none"/>
+        <c:tickLblPos val="none"/>
+        <c:spPr>
+          <a:ln>
+            <a:noFill/>
+          </a:ln>
+        </c:spPr>
+        <c:crossAx val="-2068027336"/>
+        <c:crosses val="autoZero"/>
+      </c:valAx>
+    </c:plotArea>
+    <c:legend>
+      <c:legendPos val="t"/>
+      <c:overlay val="0"/>
+      <c:txPr>
+        <a:bodyPr/>
+        <a:lstStyle/>
+        <a:p>
+          <a:pPr>
+            <a:defRPr sz="1100"/>
+          </a:pPr>
+        </a:p>
+      </c:txPr>
+    </c:legend>
+    <c:dispBlanksAs val="gap"/>
+  </c:chart>
+  <c:txPr>
+    <a:bodyPr/>
+    <a:lstStyle/>
+    <a:p>
+      <a:pPr>
+        <a:defRPr sz="1100">
+          <a:latin typeface="Trebuchet MS"/>
         </a:defRPr>
       </a:pPr>
       <a:endParaRPr lang="en-US"/>
@@ -1416,7 +2170,77 @@
           <a:lstStyle/>
           <a:p>
             <a:r>
-              <a:t>Мой проект — про студентов, которые совмещают учёбу и работу. По данным лонгитюда ВШЭ я выяснял, когда работа помогает учиться, а когда мешает.</a:t>
+              <a:t>Мой проект — про студентов, которые совмещают учёбу и работу: когда работа помогает учиться, а когда мешает.</a:t>
+            </a:r>
+          </a:p>
+        </p:txBody>
+      </p:sp>
+      <p:sp>
+        <p:nvSpPr>
+          <p:cNvPr id="4" name="Slide Number Placeholder 3"/>
+          <p:cNvSpPr>
+            <a:spLocks noGrp="1"/>
+          </p:cNvSpPr>
+          <p:nvPr>
+            <p:ph type="sldNum" idx="5" sz="quarter"/>
+          </p:nvPr>
+        </p:nvSpPr>
+        <p:spPr/>
+      </p:sp>
+    </p:spTree>
+  </p:cSld>
+  <p:clrMapOvr>
+    <a:masterClrMapping/>
+  </p:clrMapOvr>
+</p:notes>
+</file>
+
+<file path=ppt/notesSlides/notesSlide10.xml><?xml version="1.0" encoding="utf-8"?>
+<p:notes xmlns:a="http://schemas.openxmlformats.org/drawingml/2006/main" xmlns:p="http://schemas.openxmlformats.org/presentationml/2006/main" xmlns:r="http://schemas.openxmlformats.org/officeDocument/2006/relationships">
+  <p:cSld>
+    <p:spTree>
+      <p:nvGrpSpPr>
+        <p:cNvPr id="1" name=""/>
+        <p:cNvGrpSpPr/>
+        <p:nvPr/>
+      </p:nvGrpSpPr>
+      <p:grpSpPr>
+        <a:xfrm>
+          <a:off x="0" y="0"/>
+          <a:ext cx="0" cy="0"/>
+          <a:chOff x="0" y="0"/>
+          <a:chExt cx="0" cy="0"/>
+        </a:xfrm>
+      </p:grpSpPr>
+      <p:sp>
+        <p:nvSpPr>
+          <p:cNvPr id="2" name="Slide Image Placeholder 1"/>
+          <p:cNvSpPr>
+            <a:spLocks noGrp="1"/>
+          </p:cNvSpPr>
+          <p:nvPr>
+            <p:ph type="sldImg" idx="2"/>
+          </p:nvPr>
+        </p:nvSpPr>
+        <p:spPr/>
+      </p:sp>
+      <p:sp>
+        <p:nvSpPr>
+          <p:cNvPr id="3" name="Notes Placeholder 2"/>
+          <p:cNvSpPr>
+            <a:spLocks noGrp="1"/>
+          </p:cNvSpPr>
+          <p:nvPr>
+            <p:ph type="body" idx="3" sz="quarter"/>
+          </p:nvPr>
+        </p:nvSpPr>
+        <p:spPr/>
+        <p:txBody>
+          <a:bodyPr/>
+          <a:lstStyle/>
+          <a:p>
+            <a:r>
+              <a:t>Из 7 гипотез 5 подтвердились полностью или частично. Ограничения: данные опросные — связь не равна причинности; выборка из селективных вузов; отчислившиеся выпадают из данных, поэтому вред работы может быть недооценён.</a:t>
             </a:r>
           </a:p>
         </p:txBody>
@@ -1486,7 +2310,7 @@
           <a:lstStyle/>
           <a:p>
             <a:r>
-              <a:t>Почти половина студентов работает, и для четверти–трети задумывавшихся об отчислении это одна из причин. Поэтому важно понять не «хорошо или плохо работать», а при каких условиях работа помогает, а при каких мешает.</a:t>
+              <a:t>Почти половина студентов работает. Работа даёт опыт и деньги, но отнимает время у учёбы и сна. Среди тех, кто задумывался об отчислении, 25–30% называют причиной трудности совмещения учёбы и работы. Поэтому вопрос не «хорошо или плохо работать», а при каких условиях работа помогает, а при каких мешает.</a:t>
             </a:r>
           </a:p>
         </p:txBody>
@@ -1556,7 +2380,7 @@
           <a:lstStyle/>
           <a:p>
             <a:r>
-              <a:t>Данные — лонгитюд ВШЭ: одни и те же студенты на 3 и 4 курсе. При проверке я нашёл 599 анкет 4-й волны, заполненных шаблонно и брошенных на середине, и очистил их — иначе выводы были бы ложными.</a:t>
+              <a:t>Лонгитюд ИО НИУ ВШЭ «Модели образовательного поведения студентов в их связи с показателями успешности»: 9 селективных вузов, одни и те же студенты на 3 и 4 курсе. При проверке я нашёл 599 анкет 4-й волны, брошенных на середине и заполненных шаблонно, и очистил их ответы — иначе выводы были бы ложными.</a:t>
             </a:r>
           </a:p>
         </p:txBody>
@@ -1626,7 +2450,7 @@
           <a:lstStyle/>
           <a:p>
             <a:r>
-              <a:t>Данные в основном порядковые и не нормальные, поэтому я использую непараметрические тесты. Результаты «да/нет» оцениваю логистической регрессией с контролем характеристик студента.</a:t>
+              <a:t>Распределения не нормальные (тест Шапиро–Уилка), шкалы порядковые — поэтому Спирмен и Манн–Уитни вместо Пирсона и t-теста. Доли сравниваю хи-квадратом с V Крамера, изменения у одних и тех же студентов — критерием Уилкоксона. Результаты «да/нет» оцениваю логистической регрессией с контролем пола, направления, формы обучения и финансов семьи; ошибки кластеризованы по студенту.</a:t>
             </a:r>
           </a:p>
         </p:txBody>
@@ -1696,7 +2520,7 @@
           <a:lstStyle/>
           <a:p>
             <a:r>
-              <a:t>Работают 44% на 3 курсе и 48% на 4-м. Чаще неполный день и приработки, полный день к 4 курсу встречается вдвое чаще. Около 70% работают ради денег, и только у половины работа связана со специальностью.</a:t>
+              <a:t>Работают 44% на 3 курсе и 48% на 4-м, в основном неполный день и приработки. Полный день к 4 курсу встречается вдвое чаще. Около 70% работают ради денег, работа совпадает со специальностью примерно у половины.</a:t>
             </a:r>
           </a:p>
         </p:txBody>
@@ -1766,7 +2590,217 @@
           <a:lstStyle/>
           <a:p>
             <a:r>
-              <a:t>Оценки работающих и неработающих не различаются (Манн–Уитни: p = 0.57 и 0.15). В лонгитюде у тех, кто начал работать, оценки выросли так же, как у неработающих (p = 0.80).</a:t>
+              <a:t>Оценки работающих и неработающих не различаются (Манн–Уитни: p = 0.57 на 3 курсе и 0.15 на 4 курсе). В лонгитюде у тех, кто начал работать, доля хороших оценок выросла так же, как у неработающих (p = 0.80).</a:t>
+            </a:r>
+          </a:p>
+        </p:txBody>
+      </p:sp>
+      <p:sp>
+        <p:nvSpPr>
+          <p:cNvPr id="4" name="Slide Number Placeholder 3"/>
+          <p:cNvSpPr>
+            <a:spLocks noGrp="1"/>
+          </p:cNvSpPr>
+          <p:nvPr>
+            <p:ph type="sldNum" idx="5" sz="quarter"/>
+          </p:nvPr>
+        </p:nvSpPr>
+        <p:spPr/>
+      </p:sp>
+    </p:spTree>
+  </p:cSld>
+  <p:clrMapOvr>
+    <a:masterClrMapping/>
+  </p:clrMapOvr>
+</p:notes>
+</file>
+
+<file path=ppt/notesSlides/notesSlide7.xml><?xml version="1.0" encoding="utf-8"?>
+<p:notes xmlns:a="http://schemas.openxmlformats.org/drawingml/2006/main" xmlns:p="http://schemas.openxmlformats.org/presentationml/2006/main" xmlns:r="http://schemas.openxmlformats.org/officeDocument/2006/relationships">
+  <p:cSld>
+    <p:spTree>
+      <p:nvGrpSpPr>
+        <p:cNvPr id="1" name=""/>
+        <p:cNvGrpSpPr/>
+        <p:nvPr/>
+      </p:nvGrpSpPr>
+      <p:grpSpPr>
+        <a:xfrm>
+          <a:off x="0" y="0"/>
+          <a:ext cx="0" cy="0"/>
+          <a:chOff x="0" y="0"/>
+          <a:chExt cx="0" cy="0"/>
+        </a:xfrm>
+      </p:grpSpPr>
+      <p:sp>
+        <p:nvSpPr>
+          <p:cNvPr id="2" name="Slide Image Placeholder 1"/>
+          <p:cNvSpPr>
+            <a:spLocks noGrp="1"/>
+          </p:cNvSpPr>
+          <p:nvPr>
+            <p:ph type="sldImg" idx="2"/>
+          </p:nvPr>
+        </p:nvSpPr>
+        <p:spPr/>
+      </p:sp>
+      <p:sp>
+        <p:nvSpPr>
+          <p:cNvPr id="3" name="Notes Placeholder 2"/>
+          <p:cNvSpPr>
+            <a:spLocks noGrp="1"/>
+          </p:cNvSpPr>
+          <p:nvPr>
+            <p:ph type="body" idx="3" sz="quarter"/>
+          </p:nvPr>
+        </p:nvSpPr>
+        <p:spPr/>
+        <p:txBody>
+          <a:bodyPr/>
+          <a:lstStyle/>
+          <a:p>
+            <a:r>
+              <a:t>При 30+ часах работы в неделю на 3 курсе меньше 7 часов спят 38% студентов против 20% у неработающих; регрессия: минус 28 минут сна (p = 0.008). При полной занятости шансы думать об отчислении выше на 74% (p = 0.004), неполный день значимо не связан (p = 0.16). 61% работающих полный день, думавших об отчислении, называют причиной совмещение учёбы и работы.</a:t>
+            </a:r>
+          </a:p>
+        </p:txBody>
+      </p:sp>
+      <p:sp>
+        <p:nvSpPr>
+          <p:cNvPr id="4" name="Slide Number Placeholder 3"/>
+          <p:cNvSpPr>
+            <a:spLocks noGrp="1"/>
+          </p:cNvSpPr>
+          <p:nvPr>
+            <p:ph type="sldNum" idx="5" sz="quarter"/>
+          </p:nvPr>
+        </p:nvSpPr>
+        <p:spPr/>
+      </p:sp>
+    </p:spTree>
+  </p:cSld>
+  <p:clrMapOvr>
+    <a:masterClrMapping/>
+  </p:clrMapOvr>
+</p:notes>
+</file>
+
+<file path=ppt/notesSlides/notesSlide8.xml><?xml version="1.0" encoding="utf-8"?>
+<p:notes xmlns:a="http://schemas.openxmlformats.org/drawingml/2006/main" xmlns:p="http://schemas.openxmlformats.org/presentationml/2006/main" xmlns:r="http://schemas.openxmlformats.org/officeDocument/2006/relationships">
+  <p:cSld>
+    <p:spTree>
+      <p:nvGrpSpPr>
+        <p:cNvPr id="1" name=""/>
+        <p:cNvGrpSpPr/>
+        <p:nvPr/>
+      </p:nvGrpSpPr>
+      <p:grpSpPr>
+        <a:xfrm>
+          <a:off x="0" y="0"/>
+          <a:ext cx="0" cy="0"/>
+          <a:chOff x="0" y="0"/>
+          <a:chExt cx="0" cy="0"/>
+        </a:xfrm>
+      </p:grpSpPr>
+      <p:sp>
+        <p:nvSpPr>
+          <p:cNvPr id="2" name="Slide Image Placeholder 1"/>
+          <p:cNvSpPr>
+            <a:spLocks noGrp="1"/>
+          </p:cNvSpPr>
+          <p:nvPr>
+            <p:ph type="sldImg" idx="2"/>
+          </p:nvPr>
+        </p:nvSpPr>
+        <p:spPr/>
+      </p:sp>
+      <p:sp>
+        <p:nvSpPr>
+          <p:cNvPr id="3" name="Notes Placeholder 2"/>
+          <p:cNvSpPr>
+            <a:spLocks noGrp="1"/>
+          </p:cNvSpPr>
+          <p:nvPr>
+            <p:ph type="body" idx="3" sz="quarter"/>
+          </p:nvPr>
+        </p:nvSpPr>
+        <p:spPr/>
+        <p:txBody>
+          <a:bodyPr/>
+          <a:lstStyle/>
+          <a:p>
+            <a:r>
+              <a:t>Работающие по специальности в 2 раза чаще говорят, что работа помогает учиться (77% против 36%), и чаще получают хорошие оценки (63% против 51%). В регрессии с учётом часов, мотива, пола и направления: OR = 6.2 и 1.6. Жалобы на трудности совмещения одинаковы. Работающим ради денег труднее совмещать (37% против 25%).</a:t>
+            </a:r>
+          </a:p>
+        </p:txBody>
+      </p:sp>
+      <p:sp>
+        <p:nvSpPr>
+          <p:cNvPr id="4" name="Slide Number Placeholder 3"/>
+          <p:cNvSpPr>
+            <a:spLocks noGrp="1"/>
+          </p:cNvSpPr>
+          <p:nvPr>
+            <p:ph type="sldNum" idx="5" sz="quarter"/>
+          </p:nvPr>
+        </p:nvSpPr>
+        <p:spPr/>
+      </p:sp>
+    </p:spTree>
+  </p:cSld>
+  <p:clrMapOvr>
+    <a:masterClrMapping/>
+  </p:clrMapOvr>
+</p:notes>
+</file>
+
+<file path=ppt/notesSlides/notesSlide9.xml><?xml version="1.0" encoding="utf-8"?>
+<p:notes xmlns:a="http://schemas.openxmlformats.org/drawingml/2006/main" xmlns:p="http://schemas.openxmlformats.org/presentationml/2006/main" xmlns:r="http://schemas.openxmlformats.org/officeDocument/2006/relationships">
+  <p:cSld>
+    <p:spTree>
+      <p:nvGrpSpPr>
+        <p:cNvPr id="1" name=""/>
+        <p:cNvGrpSpPr/>
+        <p:nvPr/>
+      </p:nvGrpSpPr>
+      <p:grpSpPr>
+        <a:xfrm>
+          <a:off x="0" y="0"/>
+          <a:ext cx="0" cy="0"/>
+          <a:chOff x="0" y="0"/>
+          <a:chExt cx="0" cy="0"/>
+        </a:xfrm>
+      </p:grpSpPr>
+      <p:sp>
+        <p:nvSpPr>
+          <p:cNvPr id="2" name="Slide Image Placeholder 1"/>
+          <p:cNvSpPr>
+            <a:spLocks noGrp="1"/>
+          </p:cNvSpPr>
+          <p:nvPr>
+            <p:ph type="sldImg" idx="2"/>
+          </p:nvPr>
+        </p:nvSpPr>
+        <p:spPr/>
+      </p:sp>
+      <p:sp>
+        <p:nvSpPr>
+          <p:cNvPr id="3" name="Notes Placeholder 2"/>
+          <p:cNvSpPr>
+            <a:spLocks noGrp="1"/>
+          </p:cNvSpPr>
+          <p:nvPr>
+            <p:ph type="body" idx="3" sz="quarter"/>
+          </p:nvPr>
+        </p:nvSpPr>
+        <p:spPr/>
+        <p:txBody>
+          <a:bodyPr/>
+          <a:lstStyle/>
+          <a:p>
+            <a:r>
+              <a:t>Главное: сама работа учёбе не вредит; трудности — при перегрузке; польза — от работы по специальности. Рекомендации: помогать находить профильную работу (стажировки, карьерные центры, зачёт как практики), гибкие планы для работающих полный день, учитывать полную занятость как фактор риска отчисления.</a:t>
             </a:r>
           </a:p>
         </p:txBody>
@@ -4848,7 +5882,7 @@
                 <a:solidFill>
                   <a:srgbClr val="111010"/>
                 </a:solidFill>
-                <a:latin typeface="Cascadia Code SemiBold"/>
+                <a:latin typeface="Trebuchet MS"/>
               </a:rPr>
               <a:t>ИВО</a:t>
             </a:r>
@@ -4864,7 +5898,7 @@
                 <a:solidFill>
                   <a:srgbClr val="111010"/>
                 </a:solidFill>
-                <a:latin typeface="Cascadia Code SemiBold"/>
+                <a:latin typeface="Trebuchet MS"/>
               </a:rPr>
               <a:t>2026</a:t>
             </a:r>
@@ -4903,8 +5937,8 @@
         </p:nvSpPr>
         <p:spPr>
           <a:xfrm>
-            <a:off x="548640" y="1737360"/>
-            <a:ext cx="7863840" cy="2194560"/>
+            <a:off x="548640" y="1828800"/>
+            <a:ext cx="7863840" cy="2011680"/>
           </a:xfrm>
           <a:prstGeom prst="rect">
             <a:avLst/>
@@ -4923,11 +5957,11 @@
               </a:spcAft>
             </a:pPr>
             <a:r>
-              <a:rPr sz="4600" b="1" i="0">
+              <a:rPr sz="4800" b="1" i="0">
                 <a:solidFill>
                   <a:srgbClr val="111010"/>
                 </a:solidFill>
-                <a:latin typeface="Cascadia Code SemiBold"/>
+                <a:latin typeface="Trebuchet MS"/>
               </a:rPr>
               <a:t>Учёба + работа:</a:t>
             </a:r>
@@ -4939,11 +5973,11 @@
               </a:spcAft>
             </a:pPr>
             <a:r>
-              <a:rPr sz="4600" b="1" i="0">
+              <a:rPr sz="4800" b="1" i="0">
                 <a:solidFill>
                   <a:srgbClr val="111010"/>
                 </a:solidFill>
-                <a:latin typeface="Cascadia Code SemiBold"/>
+                <a:latin typeface="Trebuchet MS"/>
               </a:rPr>
               <a:t>польза или помеха?</a:t>
             </a:r>
@@ -4958,8 +5992,8 @@
         </p:nvSpPr>
         <p:spPr>
           <a:xfrm>
-            <a:off x="594360" y="3886200"/>
-            <a:ext cx="7498079" cy="914400"/>
+            <a:off x="594360" y="4023360"/>
+            <a:ext cx="5486400" cy="457200"/>
           </a:xfrm>
           <a:prstGeom prst="rect">
             <a:avLst/>
@@ -4978,13 +6012,13 @@
               </a:spcAft>
             </a:pPr>
             <a:r>
-              <a:rPr sz="1800" b="0" i="0">
+              <a:rPr sz="2200" b="1" i="0">
                 <a:solidFill>
                   <a:srgbClr val="111010"/>
                 </a:solidFill>
-                <a:latin typeface="Tahoma"/>
+                <a:latin typeface="Trebuchet MS"/>
               </a:rPr>
-              <a:t>Как совмещение учёбы и работы связано с успеваемостью, образовательным опытом и здоровьем студентов</a:t>
+              <a:t>Пётр Тортев</a:t>
             </a:r>
           </a:p>
         </p:txBody>
@@ -4997,8 +6031,8 @@
         </p:nvSpPr>
         <p:spPr>
           <a:xfrm>
-            <a:off x="594360" y="4892040"/>
-            <a:ext cx="5486400" cy="457200"/>
+            <a:off x="594360" y="4526280"/>
+            <a:ext cx="5486400" cy="365760"/>
           </a:xfrm>
           <a:prstGeom prst="rect">
             <a:avLst/>
@@ -5017,50 +6051,11 @@
               </a:spcAft>
             </a:pPr>
             <a:r>
-              <a:rPr sz="2000" b="1" i="0">
-                <a:solidFill>
-                  <a:srgbClr val="111010"/>
-                </a:solidFill>
-                <a:latin typeface="Cascadia Code SemiBold"/>
-              </a:rPr>
-              <a:t>Пётр Тортев</a:t>
-            </a:r>
-          </a:p>
-        </p:txBody>
-      </p:sp>
-      <p:sp>
-        <p:nvSpPr>
-          <p:cNvPr id="8" name="TextBox 7"/>
-          <p:cNvSpPr txBox="1"/>
-          <p:nvPr/>
-        </p:nvSpPr>
-        <p:spPr>
-          <a:xfrm>
-            <a:off x="594360" y="5349240"/>
-            <a:ext cx="5486400" cy="365760"/>
-          </a:xfrm>
-          <a:prstGeom prst="rect">
-            <a:avLst/>
-          </a:prstGeom>
-          <a:noFill/>
-        </p:spPr>
-        <p:txBody>
-          <a:bodyPr wrap="square" anchor="t" lIns="45720" rIns="45720" tIns="27432" bIns="27432">
-            <a:spAutoFit/>
-          </a:bodyPr>
-          <a:lstStyle/>
-          <a:p>
-            <a:pPr algn="l">
-              <a:spcAft>
-                <a:spcPts val="600"/>
-              </a:spcAft>
-            </a:pPr>
-            <a:r>
-              <a:rPr sz="1400" b="0" i="0">
+              <a:rPr sz="1600" b="0" i="0">
                 <a:solidFill>
                   <a:srgbClr val="848484"/>
                 </a:solidFill>
-                <a:latin typeface="Tahoma"/>
+                <a:latin typeface="Trebuchet MS"/>
               </a:rPr>
               <a:t>Номинация «Анализ данных»</a:t>
             </a:r>
@@ -5069,7 +6064,7 @@
       </p:sp>
       <p:pic>
         <p:nvPicPr>
-          <p:cNvPr id="9" name="Мем" descr="s1_16.jpg"/>
+          <p:cNvPr id="8" name="Мем" descr="s1_16.jpg"/>
           <p:cNvPicPr>
             <a:picLocks noChangeAspect="1"/>
           </p:cNvPicPr>
@@ -5093,7 +6088,7 @@
       </p:pic>
       <p:sp>
         <p:nvSpPr>
-          <p:cNvPr id="10" name="Rectangle 9"/>
+          <p:cNvPr id="9" name="Rectangle 8"/>
           <p:cNvSpPr/>
           <p:nvPr/>
         </p:nvSpPr>
@@ -5137,7 +6132,7 @@
       </p:sp>
       <p:sp>
         <p:nvSpPr>
-          <p:cNvPr id="11" name="TextBox 10"/>
+          <p:cNvPr id="10" name="TextBox 9"/>
           <p:cNvSpPr txBox="1"/>
           <p:nvPr/>
         </p:nvSpPr>
@@ -5167,9 +6162,1163 @@
                 <a:solidFill>
                   <a:srgbClr val="111010"/>
                 </a:solidFill>
-                <a:latin typeface="Tahoma"/>
+                <a:latin typeface="Trebuchet MS"/>
               </a:rPr>
               <a:t>ХАКАТОН ИССЛЕДОВАТЕЛЕЙ ВЫСШЕГО ОБРАЗОВАНИЯ – 2026 · НИУ ВШЭ</a:t>
+            </a:r>
+          </a:p>
+        </p:txBody>
+      </p:sp>
+    </p:spTree>
+  </p:cSld>
+  <p:clrMapOvr>
+    <a:masterClrMapping/>
+  </p:clrMapOvr>
+</p:sld>
+</file>
+
+<file path=ppt/slides/slide10.xml><?xml version="1.0" encoding="utf-8"?>
+<p:sld xmlns:a="http://schemas.openxmlformats.org/drawingml/2006/main" xmlns:p="http://schemas.openxmlformats.org/presentationml/2006/main" xmlns:r="http://schemas.openxmlformats.org/officeDocument/2006/relationships">
+  <p:cSld>
+    <p:spTree>
+      <p:nvGrpSpPr>
+        <p:cNvPr id="1" name=""/>
+        <p:cNvGrpSpPr/>
+        <p:nvPr/>
+      </p:nvGrpSpPr>
+      <p:grpSpPr/>
+      <p:sp>
+        <p:nvSpPr>
+          <p:cNvPr id="2" name="Pentagon 1"/>
+          <p:cNvSpPr/>
+          <p:nvPr/>
+        </p:nvSpPr>
+        <p:spPr>
+          <a:xfrm>
+            <a:off x="137160" y="164592"/>
+            <a:ext cx="2514600" cy="384048"/>
+          </a:xfrm>
+          <a:prstGeom prst="homePlate">
+            <a:avLst/>
+          </a:prstGeom>
+          <a:solidFill>
+            <a:srgbClr val="FFF4D7"/>
+          </a:solidFill>
+          <a:ln>
+            <a:noFill/>
+          </a:ln>
+          <a:effectLst/>
+        </p:spPr>
+        <p:style>
+          <a:lnRef idx="1">
+            <a:schemeClr val="accent1"/>
+          </a:lnRef>
+          <a:fillRef idx="3">
+            <a:schemeClr val="accent1"/>
+          </a:fillRef>
+          <a:effectRef idx="2">
+            <a:schemeClr val="accent1"/>
+          </a:effectRef>
+          <a:fontRef idx="minor">
+            <a:schemeClr val="lt1"/>
+          </a:fontRef>
+        </p:style>
+        <p:txBody>
+          <a:bodyPr rtlCol="0" anchor="ctr" lIns="45720" rIns="45720"/>
+          <a:lstStyle/>
+          <a:p>
+            <a:pPr algn="ctr"/>
+            <a:r>
+              <a:rPr sz="1200" b="0">
+                <a:solidFill>
+                  <a:srgbClr val="111010"/>
+                </a:solidFill>
+                <a:latin typeface="Courier New"/>
+              </a:rPr>
+              <a:t>ВОПРОС</a:t>
+            </a:r>
+          </a:p>
+        </p:txBody>
+      </p:sp>
+      <p:sp>
+        <p:nvSpPr>
+          <p:cNvPr id="3" name="Chevron 2"/>
+          <p:cNvSpPr/>
+          <p:nvPr/>
+        </p:nvSpPr>
+        <p:spPr>
+          <a:xfrm>
+            <a:off x="2468879" y="164592"/>
+            <a:ext cx="2514600" cy="384048"/>
+          </a:xfrm>
+          <a:prstGeom prst="chevron">
+            <a:avLst/>
+          </a:prstGeom>
+          <a:solidFill>
+            <a:srgbClr val="FFF4D7"/>
+          </a:solidFill>
+          <a:ln>
+            <a:noFill/>
+          </a:ln>
+          <a:effectLst/>
+        </p:spPr>
+        <p:style>
+          <a:lnRef idx="1">
+            <a:schemeClr val="accent1"/>
+          </a:lnRef>
+          <a:fillRef idx="3">
+            <a:schemeClr val="accent1"/>
+          </a:fillRef>
+          <a:effectRef idx="2">
+            <a:schemeClr val="accent1"/>
+          </a:effectRef>
+          <a:fontRef idx="minor">
+            <a:schemeClr val="lt1"/>
+          </a:fontRef>
+        </p:style>
+        <p:txBody>
+          <a:bodyPr rtlCol="0" anchor="ctr" lIns="45720" rIns="45720"/>
+          <a:lstStyle/>
+          <a:p>
+            <a:pPr algn="ctr"/>
+            <a:r>
+              <a:rPr sz="1200" b="0">
+                <a:solidFill>
+                  <a:srgbClr val="111010"/>
+                </a:solidFill>
+                <a:latin typeface="Courier New"/>
+              </a:rPr>
+              <a:t>ДАННЫЕ</a:t>
+            </a:r>
+          </a:p>
+        </p:txBody>
+      </p:sp>
+      <p:sp>
+        <p:nvSpPr>
+          <p:cNvPr id="4" name="Chevron 3"/>
+          <p:cNvSpPr/>
+          <p:nvPr/>
+        </p:nvSpPr>
+        <p:spPr>
+          <a:xfrm>
+            <a:off x="4800600" y="164592"/>
+            <a:ext cx="2514600" cy="384048"/>
+          </a:xfrm>
+          <a:prstGeom prst="chevron">
+            <a:avLst/>
+          </a:prstGeom>
+          <a:solidFill>
+            <a:srgbClr val="FFF4D7"/>
+          </a:solidFill>
+          <a:ln>
+            <a:noFill/>
+          </a:ln>
+          <a:effectLst/>
+        </p:spPr>
+        <p:style>
+          <a:lnRef idx="1">
+            <a:schemeClr val="accent1"/>
+          </a:lnRef>
+          <a:fillRef idx="3">
+            <a:schemeClr val="accent1"/>
+          </a:fillRef>
+          <a:effectRef idx="2">
+            <a:schemeClr val="accent1"/>
+          </a:effectRef>
+          <a:fontRef idx="minor">
+            <a:schemeClr val="lt1"/>
+          </a:fontRef>
+        </p:style>
+        <p:txBody>
+          <a:bodyPr rtlCol="0" anchor="ctr" lIns="45720" rIns="45720"/>
+          <a:lstStyle/>
+          <a:p>
+            <a:pPr algn="ctr"/>
+            <a:r>
+              <a:rPr sz="1200" b="0">
+                <a:solidFill>
+                  <a:srgbClr val="111010"/>
+                </a:solidFill>
+                <a:latin typeface="Courier New"/>
+              </a:rPr>
+              <a:t>МЕТОДЫ</a:t>
+            </a:r>
+          </a:p>
+        </p:txBody>
+      </p:sp>
+      <p:sp>
+        <p:nvSpPr>
+          <p:cNvPr id="5" name="Chevron 4"/>
+          <p:cNvSpPr/>
+          <p:nvPr/>
+        </p:nvSpPr>
+        <p:spPr>
+          <a:xfrm>
+            <a:off x="7132320" y="164592"/>
+            <a:ext cx="2514600" cy="384048"/>
+          </a:xfrm>
+          <a:prstGeom prst="chevron">
+            <a:avLst/>
+          </a:prstGeom>
+          <a:solidFill>
+            <a:srgbClr val="FFF4D7"/>
+          </a:solidFill>
+          <a:ln>
+            <a:noFill/>
+          </a:ln>
+          <a:effectLst/>
+        </p:spPr>
+        <p:style>
+          <a:lnRef idx="1">
+            <a:schemeClr val="accent1"/>
+          </a:lnRef>
+          <a:fillRef idx="3">
+            <a:schemeClr val="accent1"/>
+          </a:fillRef>
+          <a:effectRef idx="2">
+            <a:schemeClr val="accent1"/>
+          </a:effectRef>
+          <a:fontRef idx="minor">
+            <a:schemeClr val="lt1"/>
+          </a:fontRef>
+        </p:style>
+        <p:txBody>
+          <a:bodyPr rtlCol="0" anchor="ctr" lIns="45720" rIns="45720"/>
+          <a:lstStyle/>
+          <a:p>
+            <a:pPr algn="ctr"/>
+            <a:r>
+              <a:rPr sz="1200" b="0">
+                <a:solidFill>
+                  <a:srgbClr val="111010"/>
+                </a:solidFill>
+                <a:latin typeface="Courier New"/>
+              </a:rPr>
+              <a:t>РЕЗУЛЬТАТЫ</a:t>
+            </a:r>
+          </a:p>
+        </p:txBody>
+      </p:sp>
+      <p:sp>
+        <p:nvSpPr>
+          <p:cNvPr id="6" name="Chevron 5"/>
+          <p:cNvSpPr/>
+          <p:nvPr/>
+        </p:nvSpPr>
+        <p:spPr>
+          <a:xfrm>
+            <a:off x="9464040" y="164592"/>
+            <a:ext cx="2514600" cy="384048"/>
+          </a:xfrm>
+          <a:prstGeom prst="chevron">
+            <a:avLst/>
+          </a:prstGeom>
+          <a:solidFill>
+            <a:srgbClr val="FFD966"/>
+          </a:solidFill>
+          <a:ln>
+            <a:noFill/>
+          </a:ln>
+          <a:effectLst/>
+        </p:spPr>
+        <p:style>
+          <a:lnRef idx="1">
+            <a:schemeClr val="accent1"/>
+          </a:lnRef>
+          <a:fillRef idx="3">
+            <a:schemeClr val="accent1"/>
+          </a:fillRef>
+          <a:effectRef idx="2">
+            <a:schemeClr val="accent1"/>
+          </a:effectRef>
+          <a:fontRef idx="minor">
+            <a:schemeClr val="lt1"/>
+          </a:fontRef>
+        </p:style>
+        <p:txBody>
+          <a:bodyPr rtlCol="0" anchor="ctr" lIns="45720" rIns="45720"/>
+          <a:lstStyle/>
+          <a:p>
+            <a:pPr algn="ctr"/>
+            <a:r>
+              <a:rPr sz="1200" b="1">
+                <a:solidFill>
+                  <a:srgbClr val="111010"/>
+                </a:solidFill>
+                <a:latin typeface="Courier New"/>
+              </a:rPr>
+              <a:t>ВЫВОДЫ</a:t>
+            </a:r>
+          </a:p>
+        </p:txBody>
+      </p:sp>
+      <p:sp>
+        <p:nvSpPr>
+          <p:cNvPr id="7" name="Rectangle 6"/>
+          <p:cNvSpPr/>
+          <p:nvPr/>
+        </p:nvSpPr>
+        <p:spPr>
+          <a:xfrm>
+            <a:off x="0" y="6565392"/>
+            <a:ext cx="1783080" cy="91440"/>
+          </a:xfrm>
+          <a:prstGeom prst="rect">
+            <a:avLst/>
+          </a:prstGeom>
+          <a:solidFill>
+            <a:srgbClr val="111010"/>
+          </a:solidFill>
+          <a:ln>
+            <a:noFill/>
+          </a:ln>
+          <a:effectLst/>
+        </p:spPr>
+        <p:style>
+          <a:lnRef idx="1">
+            <a:schemeClr val="accent1"/>
+          </a:lnRef>
+          <a:fillRef idx="3">
+            <a:schemeClr val="accent1"/>
+          </a:fillRef>
+          <a:effectRef idx="2">
+            <a:schemeClr val="accent1"/>
+          </a:effectRef>
+          <a:fontRef idx="minor">
+            <a:schemeClr val="lt1"/>
+          </a:fontRef>
+        </p:style>
+        <p:txBody>
+          <a:bodyPr rtlCol="0" anchor="ctr"/>
+          <a:lstStyle/>
+          <a:p>
+            <a:pPr algn="ctr"/>
+          </a:p>
+        </p:txBody>
+      </p:sp>
+      <p:sp>
+        <p:nvSpPr>
+          <p:cNvPr id="8" name="Rectangle 7"/>
+          <p:cNvSpPr/>
+          <p:nvPr/>
+        </p:nvSpPr>
+        <p:spPr>
+          <a:xfrm>
+            <a:off x="0" y="6656832"/>
+            <a:ext cx="2743200" cy="128016"/>
+          </a:xfrm>
+          <a:prstGeom prst="rect">
+            <a:avLst/>
+          </a:prstGeom>
+          <a:solidFill>
+            <a:srgbClr val="FFD966"/>
+          </a:solidFill>
+          <a:ln>
+            <a:noFill/>
+          </a:ln>
+          <a:effectLst/>
+        </p:spPr>
+        <p:style>
+          <a:lnRef idx="1">
+            <a:schemeClr val="accent1"/>
+          </a:lnRef>
+          <a:fillRef idx="3">
+            <a:schemeClr val="accent1"/>
+          </a:fillRef>
+          <a:effectRef idx="2">
+            <a:schemeClr val="accent1"/>
+          </a:effectRef>
+          <a:fontRef idx="minor">
+            <a:schemeClr val="lt1"/>
+          </a:fontRef>
+        </p:style>
+        <p:txBody>
+          <a:bodyPr rtlCol="0" anchor="ctr"/>
+          <a:lstStyle/>
+          <a:p>
+            <a:pPr algn="ctr"/>
+          </a:p>
+        </p:txBody>
+      </p:sp>
+      <p:sp>
+        <p:nvSpPr>
+          <p:cNvPr id="9" name="TextBox 8"/>
+          <p:cNvSpPr txBox="1"/>
+          <p:nvPr/>
+        </p:nvSpPr>
+        <p:spPr>
+          <a:xfrm>
+            <a:off x="11247120" y="6355080"/>
+            <a:ext cx="731520" cy="365760"/>
+          </a:xfrm>
+          <a:prstGeom prst="rect">
+            <a:avLst/>
+          </a:prstGeom>
+          <a:noFill/>
+        </p:spPr>
+        <p:txBody>
+          <a:bodyPr wrap="square" anchor="t" lIns="45720" rIns="45720" tIns="27432" bIns="27432">
+            <a:spAutoFit/>
+          </a:bodyPr>
+          <a:lstStyle/>
+          <a:p>
+            <a:pPr algn="r">
+              <a:spcAft>
+                <a:spcPts val="600"/>
+              </a:spcAft>
+            </a:pPr>
+            <a:r>
+              <a:rPr sz="1200" b="0" i="0">
+                <a:solidFill>
+                  <a:srgbClr val="848484"/>
+                </a:solidFill>
+                <a:latin typeface="Trebuchet MS"/>
+              </a:rPr>
+              <a:t>10</a:t>
+            </a:r>
+          </a:p>
+        </p:txBody>
+      </p:sp>
+      <p:sp>
+        <p:nvSpPr>
+          <p:cNvPr id="10" name="TextBox 9"/>
+          <p:cNvSpPr txBox="1"/>
+          <p:nvPr/>
+        </p:nvSpPr>
+        <p:spPr>
+          <a:xfrm>
+            <a:off x="457200" y="731520"/>
+            <a:ext cx="11247120" cy="731520"/>
+          </a:xfrm>
+          <a:prstGeom prst="rect">
+            <a:avLst/>
+          </a:prstGeom>
+          <a:noFill/>
+        </p:spPr>
+        <p:txBody>
+          <a:bodyPr wrap="square" anchor="t" lIns="45720" rIns="45720" tIns="27432" bIns="27432">
+            <a:spAutoFit/>
+          </a:bodyPr>
+          <a:lstStyle/>
+          <a:p>
+            <a:pPr algn="l">
+              <a:spcAft>
+                <a:spcPts val="600"/>
+              </a:spcAft>
+            </a:pPr>
+            <a:r>
+              <a:rPr sz="3000" b="1" i="0">
+                <a:solidFill>
+                  <a:srgbClr val="111010"/>
+                </a:solidFill>
+                <a:latin typeface="Trebuchet MS"/>
+              </a:rPr>
+              <a:t>Итоги и ограничения</a:t>
+            </a:r>
+          </a:p>
+        </p:txBody>
+      </p:sp>
+      <p:graphicFrame>
+        <p:nvGraphicFramePr>
+          <p:cNvPr id="11" name="Table 10"/>
+          <p:cNvGraphicFramePr>
+            <a:graphicFrameLocks noGrp="1"/>
+          </p:cNvGraphicFramePr>
+          <p:nvPr/>
+        </p:nvGraphicFramePr>
+        <p:xfrm>
+          <a:off x="548640" y="1645920"/>
+          <a:ext cx="7223760" cy="3072384"/>
+        </p:xfrm>
+        <a:graphic>
+          <a:graphicData uri="http://schemas.openxmlformats.org/drawingml/2006/table">
+            <a:tbl>
+              <a:tblPr firstRow="1" bandRow="1">
+                <a:tableStyleId>{5C22544A-7EE6-4342-B048-85BDC9FD1C3A}</a:tableStyleId>
+              </a:tblPr>
+              <a:tblGrid>
+                <a:gridCol w="548640"/>
+                <a:gridCol w="5394960"/>
+                <a:gridCol w="1280160"/>
+              </a:tblGrid>
+              <a:tr h="384048">
+                <a:tc>
+                  <a:txBody>
+                    <a:bodyPr/>
+                    <a:lstStyle/>
+                    <a:p>
+                      <a:pPr algn="l"/>
+                      <a:r>
+                        <a:rPr sz="1400" b="1">
+                          <a:solidFill>
+                            <a:srgbClr val="111010"/>
+                          </a:solidFill>
+                          <a:latin typeface="Trebuchet MS"/>
+                        </a:rPr>
+                        <a:t/>
+                      </a:r>
+                    </a:p>
+                  </a:txBody>
+                  <a:tcPr marL="73152" marR="73152" anchor="ctr">
+                    <a:solidFill>
+                      <a:srgbClr val="FFD966"/>
+                    </a:solidFill>
+                  </a:tcPr>
+                </a:tc>
+                <a:tc>
+                  <a:txBody>
+                    <a:bodyPr/>
+                    <a:lstStyle/>
+                    <a:p>
+                      <a:pPr algn="l"/>
+                      <a:r>
+                        <a:rPr sz="1400" b="1">
+                          <a:solidFill>
+                            <a:srgbClr val="111010"/>
+                          </a:solidFill>
+                          <a:latin typeface="Trebuchet MS"/>
+                        </a:rPr>
+                        <a:t>Гипотеза</a:t>
+                      </a:r>
+                    </a:p>
+                  </a:txBody>
+                  <a:tcPr marL="73152" marR="73152" anchor="ctr">
+                    <a:solidFill>
+                      <a:srgbClr val="FFD966"/>
+                    </a:solidFill>
+                  </a:tcPr>
+                </a:tc>
+                <a:tc>
+                  <a:txBody>
+                    <a:bodyPr/>
+                    <a:lstStyle/>
+                    <a:p>
+                      <a:pPr algn="ctr"/>
+                      <a:r>
+                        <a:rPr sz="1400" b="1">
+                          <a:solidFill>
+                            <a:srgbClr val="111010"/>
+                          </a:solidFill>
+                          <a:latin typeface="Trebuchet MS"/>
+                        </a:rPr>
+                        <a:t>Итог</a:t>
+                      </a:r>
+                    </a:p>
+                  </a:txBody>
+                  <a:tcPr marL="73152" marR="73152" anchor="ctr">
+                    <a:solidFill>
+                      <a:srgbClr val="FFD966"/>
+                    </a:solidFill>
+                  </a:tcPr>
+                </a:tc>
+              </a:tr>
+              <a:tr h="384048">
+                <a:tc>
+                  <a:txBody>
+                    <a:bodyPr/>
+                    <a:lstStyle/>
+                    <a:p>
+                      <a:pPr algn="l"/>
+                      <a:r>
+                        <a:rPr sz="1400" b="0">
+                          <a:solidFill>
+                            <a:srgbClr val="111010"/>
+                          </a:solidFill>
+                          <a:latin typeface="Trebuchet MS"/>
+                        </a:rPr>
+                        <a:t>H1</a:t>
+                      </a:r>
+                    </a:p>
+                  </a:txBody>
+                  <a:tcPr marL="73152" marR="73152" anchor="ctr">
+                    <a:solidFill>
+                      <a:srgbClr val="FFF4D7"/>
+                    </a:solidFill>
+                  </a:tcPr>
+                </a:tc>
+                <a:tc>
+                  <a:txBody>
+                    <a:bodyPr/>
+                    <a:lstStyle/>
+                    <a:p>
+                      <a:pPr algn="l"/>
+                      <a:r>
+                        <a:rPr sz="1400" b="0">
+                          <a:solidFill>
+                            <a:srgbClr val="111010"/>
+                          </a:solidFill>
+                          <a:latin typeface="Trebuchet MS"/>
+                        </a:rPr>
+                        <a:t>Оценки работающих и неработающих различаются</a:t>
+                      </a:r>
+                    </a:p>
+                  </a:txBody>
+                  <a:tcPr marL="73152" marR="73152" anchor="ctr">
+                    <a:solidFill>
+                      <a:srgbClr val="FFF4D7"/>
+                    </a:solidFill>
+                  </a:tcPr>
+                </a:tc>
+                <a:tc>
+                  <a:txBody>
+                    <a:bodyPr/>
+                    <a:lstStyle/>
+                    <a:p>
+                      <a:pPr algn="ctr"/>
+                      <a:r>
+                        <a:rPr sz="1400" b="0">
+                          <a:solidFill>
+                            <a:srgbClr val="C0392B"/>
+                          </a:solidFill>
+                          <a:latin typeface="Trebuchet MS"/>
+                        </a:rPr>
+                        <a:t>✘</a:t>
+                      </a:r>
+                    </a:p>
+                  </a:txBody>
+                  <a:tcPr marL="73152" marR="73152" anchor="ctr">
+                    <a:solidFill>
+                      <a:srgbClr val="FFF4D7"/>
+                    </a:solidFill>
+                  </a:tcPr>
+                </a:tc>
+              </a:tr>
+              <a:tr h="384048">
+                <a:tc>
+                  <a:txBody>
+                    <a:bodyPr/>
+                    <a:lstStyle/>
+                    <a:p>
+                      <a:pPr algn="l"/>
+                      <a:r>
+                        <a:rPr sz="1400" b="0">
+                          <a:solidFill>
+                            <a:srgbClr val="111010"/>
+                          </a:solidFill>
+                          <a:latin typeface="Trebuchet MS"/>
+                        </a:rPr>
+                        <a:t>H2</a:t>
+                      </a:r>
+                    </a:p>
+                  </a:txBody>
+                  <a:tcPr marL="73152" marR="73152" anchor="ctr">
+                    <a:solidFill>
+                      <a:srgbClr val="FFFFFF"/>
+                    </a:solidFill>
+                  </a:tcPr>
+                </a:tc>
+                <a:tc>
+                  <a:txBody>
+                    <a:bodyPr/>
+                    <a:lstStyle/>
+                    <a:p>
+                      <a:pPr algn="l"/>
+                      <a:r>
+                        <a:rPr sz="1400" b="0">
+                          <a:solidFill>
+                            <a:srgbClr val="111010"/>
+                          </a:solidFill>
+                          <a:latin typeface="Trebuchet MS"/>
+                        </a:rPr>
+                        <a:t>Работающие чаще думают об отчислении</a:t>
+                      </a:r>
+                    </a:p>
+                  </a:txBody>
+                  <a:tcPr marL="73152" marR="73152" anchor="ctr">
+                    <a:solidFill>
+                      <a:srgbClr val="FFFFFF"/>
+                    </a:solidFill>
+                  </a:tcPr>
+                </a:tc>
+                <a:tc>
+                  <a:txBody>
+                    <a:bodyPr/>
+                    <a:lstStyle/>
+                    <a:p>
+                      <a:pPr algn="ctr"/>
+                      <a:r>
+                        <a:rPr sz="1400" b="0">
+                          <a:solidFill>
+                            <a:srgbClr val="2E7D32"/>
+                          </a:solidFill>
+                          <a:latin typeface="Trebuchet MS"/>
+                        </a:rPr>
+                        <a:t>✔ 3 курс</a:t>
+                      </a:r>
+                    </a:p>
+                  </a:txBody>
+                  <a:tcPr marL="73152" marR="73152" anchor="ctr">
+                    <a:solidFill>
+                      <a:srgbClr val="FFFFFF"/>
+                    </a:solidFill>
+                  </a:tcPr>
+                </a:tc>
+              </a:tr>
+              <a:tr h="384048">
+                <a:tc>
+                  <a:txBody>
+                    <a:bodyPr/>
+                    <a:lstStyle/>
+                    <a:p>
+                      <a:pPr algn="l"/>
+                      <a:r>
+                        <a:rPr sz="1400" b="0">
+                          <a:solidFill>
+                            <a:srgbClr val="111010"/>
+                          </a:solidFill>
+                          <a:latin typeface="Trebuchet MS"/>
+                        </a:rPr>
+                        <a:t>H3</a:t>
+                      </a:r>
+                    </a:p>
+                  </a:txBody>
+                  <a:tcPr marL="73152" marR="73152" anchor="ctr">
+                    <a:solidFill>
+                      <a:srgbClr val="FFF4D7"/>
+                    </a:solidFill>
+                  </a:tcPr>
+                </a:tc>
+                <a:tc>
+                  <a:txBody>
+                    <a:bodyPr/>
+                    <a:lstStyle/>
+                    <a:p>
+                      <a:pPr algn="l"/>
+                      <a:r>
+                        <a:rPr sz="1400" b="0">
+                          <a:solidFill>
+                            <a:srgbClr val="111010"/>
+                          </a:solidFill>
+                          <a:latin typeface="Trebuchet MS"/>
+                        </a:rPr>
+                        <a:t>Работа сокращает сон</a:t>
+                      </a:r>
+                    </a:p>
+                  </a:txBody>
+                  <a:tcPr marL="73152" marR="73152" anchor="ctr">
+                    <a:solidFill>
+                      <a:srgbClr val="FFF4D7"/>
+                    </a:solidFill>
+                  </a:tcPr>
+                </a:tc>
+                <a:tc>
+                  <a:txBody>
+                    <a:bodyPr/>
+                    <a:lstStyle/>
+                    <a:p>
+                      <a:pPr algn="ctr"/>
+                      <a:r>
+                        <a:rPr sz="1400" b="0">
+                          <a:solidFill>
+                            <a:srgbClr val="2E7D32"/>
+                          </a:solidFill>
+                          <a:latin typeface="Trebuchet MS"/>
+                        </a:rPr>
+                        <a:t>✔ 30+ ч</a:t>
+                      </a:r>
+                    </a:p>
+                  </a:txBody>
+                  <a:tcPr marL="73152" marR="73152" anchor="ctr">
+                    <a:solidFill>
+                      <a:srgbClr val="FFF4D7"/>
+                    </a:solidFill>
+                  </a:tcPr>
+                </a:tc>
+              </a:tr>
+              <a:tr h="384048">
+                <a:tc>
+                  <a:txBody>
+                    <a:bodyPr/>
+                    <a:lstStyle/>
+                    <a:p>
+                      <a:pPr algn="l"/>
+                      <a:r>
+                        <a:rPr sz="1400" b="0">
+                          <a:solidFill>
+                            <a:srgbClr val="111010"/>
+                          </a:solidFill>
+                          <a:latin typeface="Trebuchet MS"/>
+                        </a:rPr>
+                        <a:t>H4</a:t>
+                      </a:r>
+                    </a:p>
+                  </a:txBody>
+                  <a:tcPr marL="73152" marR="73152" anchor="ctr">
+                    <a:solidFill>
+                      <a:srgbClr val="FFFFFF"/>
+                    </a:solidFill>
+                  </a:tcPr>
+                </a:tc>
+                <a:tc>
+                  <a:txBody>
+                    <a:bodyPr/>
+                    <a:lstStyle/>
+                    <a:p>
+                      <a:pPr algn="l"/>
+                      <a:r>
+                        <a:rPr sz="1400" b="0">
+                          <a:solidFill>
+                            <a:srgbClr val="111010"/>
+                          </a:solidFill>
+                          <a:latin typeface="Trebuchet MS"/>
+                        </a:rPr>
+                        <a:t>По специальности — лучше учёба</a:t>
+                      </a:r>
+                    </a:p>
+                  </a:txBody>
+                  <a:tcPr marL="73152" marR="73152" anchor="ctr">
+                    <a:solidFill>
+                      <a:srgbClr val="FFFFFF"/>
+                    </a:solidFill>
+                  </a:tcPr>
+                </a:tc>
+                <a:tc>
+                  <a:txBody>
+                    <a:bodyPr/>
+                    <a:lstStyle/>
+                    <a:p>
+                      <a:pPr algn="ctr"/>
+                      <a:r>
+                        <a:rPr sz="1400" b="0">
+                          <a:solidFill>
+                            <a:srgbClr val="2E7D32"/>
+                          </a:solidFill>
+                          <a:latin typeface="Trebuchet MS"/>
+                        </a:rPr>
+                        <a:t>✔</a:t>
+                      </a:r>
+                    </a:p>
+                  </a:txBody>
+                  <a:tcPr marL="73152" marR="73152" anchor="ctr">
+                    <a:solidFill>
+                      <a:srgbClr val="FFFFFF"/>
+                    </a:solidFill>
+                  </a:tcPr>
+                </a:tc>
+              </a:tr>
+              <a:tr h="384048">
+                <a:tc>
+                  <a:txBody>
+                    <a:bodyPr/>
+                    <a:lstStyle/>
+                    <a:p>
+                      <a:pPr algn="l"/>
+                      <a:r>
+                        <a:rPr sz="1400" b="0">
+                          <a:solidFill>
+                            <a:srgbClr val="111010"/>
+                          </a:solidFill>
+                          <a:latin typeface="Trebuchet MS"/>
+                        </a:rPr>
+                        <a:t>H5</a:t>
+                      </a:r>
+                    </a:p>
+                  </a:txBody>
+                  <a:tcPr marL="73152" marR="73152" anchor="ctr">
+                    <a:solidFill>
+                      <a:srgbClr val="FFF4D7"/>
+                    </a:solidFill>
+                  </a:tcPr>
+                </a:tc>
+                <a:tc>
+                  <a:txBody>
+                    <a:bodyPr/>
+                    <a:lstStyle/>
+                    <a:p>
+                      <a:pPr algn="l"/>
+                      <a:r>
+                        <a:rPr sz="1400" b="0">
+                          <a:solidFill>
+                            <a:srgbClr val="111010"/>
+                          </a:solidFill>
+                          <a:latin typeface="Trebuchet MS"/>
+                        </a:rPr>
+                        <a:t>Ради денег — больше трудностей</a:t>
+                      </a:r>
+                    </a:p>
+                  </a:txBody>
+                  <a:tcPr marL="73152" marR="73152" anchor="ctr">
+                    <a:solidFill>
+                      <a:srgbClr val="FFF4D7"/>
+                    </a:solidFill>
+                  </a:tcPr>
+                </a:tc>
+                <a:tc>
+                  <a:txBody>
+                    <a:bodyPr/>
+                    <a:lstStyle/>
+                    <a:p>
+                      <a:pPr algn="ctr"/>
+                      <a:r>
+                        <a:rPr sz="1400" b="0">
+                          <a:solidFill>
+                            <a:srgbClr val="2E7D32"/>
+                          </a:solidFill>
+                          <a:latin typeface="Trebuchet MS"/>
+                        </a:rPr>
+                        <a:t>✔</a:t>
+                      </a:r>
+                    </a:p>
+                  </a:txBody>
+                  <a:tcPr marL="73152" marR="73152" anchor="ctr">
+                    <a:solidFill>
+                      <a:srgbClr val="FFF4D7"/>
+                    </a:solidFill>
+                  </a:tcPr>
+                </a:tc>
+              </a:tr>
+              <a:tr h="384048">
+                <a:tc>
+                  <a:txBody>
+                    <a:bodyPr/>
+                    <a:lstStyle/>
+                    <a:p>
+                      <a:pPr algn="l"/>
+                      <a:r>
+                        <a:rPr sz="1400" b="0">
+                          <a:solidFill>
+                            <a:srgbClr val="111010"/>
+                          </a:solidFill>
+                          <a:latin typeface="Trebuchet MS"/>
+                        </a:rPr>
+                        <a:t>H6</a:t>
+                      </a:r>
+                    </a:p>
+                  </a:txBody>
+                  <a:tcPr marL="73152" marR="73152" anchor="ctr">
+                    <a:solidFill>
+                      <a:srgbClr val="FFFFFF"/>
+                    </a:solidFill>
+                  </a:tcPr>
+                </a:tc>
+                <a:tc>
+                  <a:txBody>
+                    <a:bodyPr/>
+                    <a:lstStyle/>
+                    <a:p>
+                      <a:pPr algn="l"/>
+                      <a:r>
+                        <a:rPr sz="1400" b="0">
+                          <a:solidFill>
+                            <a:srgbClr val="111010"/>
+                          </a:solidFill>
+                          <a:latin typeface="Trebuchet MS"/>
+                        </a:rPr>
+                        <a:t>Начало работы ухудшает оценки и сон</a:t>
+                      </a:r>
+                    </a:p>
+                  </a:txBody>
+                  <a:tcPr marL="73152" marR="73152" anchor="ctr">
+                    <a:solidFill>
+                      <a:srgbClr val="FFFFFF"/>
+                    </a:solidFill>
+                  </a:tcPr>
+                </a:tc>
+                <a:tc>
+                  <a:txBody>
+                    <a:bodyPr/>
+                    <a:lstStyle/>
+                    <a:p>
+                      <a:pPr algn="ctr"/>
+                      <a:r>
+                        <a:rPr sz="1400" b="0">
+                          <a:solidFill>
+                            <a:srgbClr val="C0392B"/>
+                          </a:solidFill>
+                          <a:latin typeface="Trebuchet MS"/>
+                        </a:rPr>
+                        <a:t>✘</a:t>
+                      </a:r>
+                    </a:p>
+                  </a:txBody>
+                  <a:tcPr marL="73152" marR="73152" anchor="ctr">
+                    <a:solidFill>
+                      <a:srgbClr val="FFFFFF"/>
+                    </a:solidFill>
+                  </a:tcPr>
+                </a:tc>
+              </a:tr>
+              <a:tr h="384048">
+                <a:tc>
+                  <a:txBody>
+                    <a:bodyPr/>
+                    <a:lstStyle/>
+                    <a:p>
+                      <a:pPr algn="l"/>
+                      <a:r>
+                        <a:rPr sz="1400" b="0">
+                          <a:solidFill>
+                            <a:srgbClr val="111010"/>
+                          </a:solidFill>
+                          <a:latin typeface="Trebuchet MS"/>
+                        </a:rPr>
+                        <a:t>H7</a:t>
+                      </a:r>
+                    </a:p>
+                  </a:txBody>
+                  <a:tcPr marL="73152" marR="73152" anchor="ctr">
+                    <a:solidFill>
+                      <a:srgbClr val="FFF4D7"/>
+                    </a:solidFill>
+                  </a:tcPr>
+                </a:tc>
+                <a:tc>
+                  <a:txBody>
+                    <a:bodyPr/>
+                    <a:lstStyle/>
+                    <a:p>
+                      <a:pPr algn="l"/>
+                      <a:r>
+                        <a:rPr sz="1400" b="0">
+                          <a:solidFill>
+                            <a:srgbClr val="111010"/>
+                          </a:solidFill>
+                          <a:latin typeface="Trebuchet MS"/>
+                        </a:rPr>
+                        <a:t>Полный день → работа — причина мыслей об отчислении</a:t>
+                      </a:r>
+                    </a:p>
+                  </a:txBody>
+                  <a:tcPr marL="73152" marR="73152" anchor="ctr">
+                    <a:solidFill>
+                      <a:srgbClr val="FFF4D7"/>
+                    </a:solidFill>
+                  </a:tcPr>
+                </a:tc>
+                <a:tc>
+                  <a:txBody>
+                    <a:bodyPr/>
+                    <a:lstStyle/>
+                    <a:p>
+                      <a:pPr algn="ctr"/>
+                      <a:r>
+                        <a:rPr sz="1400" b="0">
+                          <a:solidFill>
+                            <a:srgbClr val="2E7D32"/>
+                          </a:solidFill>
+                          <a:latin typeface="Trebuchet MS"/>
+                        </a:rPr>
+                        <a:t>✔</a:t>
+                      </a:r>
+                    </a:p>
+                  </a:txBody>
+                  <a:tcPr marL="73152" marR="73152" anchor="ctr">
+                    <a:solidFill>
+                      <a:srgbClr val="FFF4D7"/>
+                    </a:solidFill>
+                  </a:tcPr>
+                </a:tc>
+              </a:tr>
+            </a:tbl>
+          </a:graphicData>
+        </a:graphic>
+      </p:graphicFrame>
+      <p:sp>
+        <p:nvSpPr>
+          <p:cNvPr id="12" name="TextBox 11"/>
+          <p:cNvSpPr txBox="1"/>
+          <p:nvPr/>
+        </p:nvSpPr>
+        <p:spPr>
+          <a:xfrm>
+            <a:off x="8138160" y="1645920"/>
+            <a:ext cx="3657600" cy="457200"/>
+          </a:xfrm>
+          <a:prstGeom prst="rect">
+            <a:avLst/>
+          </a:prstGeom>
+          <a:noFill/>
+        </p:spPr>
+        <p:txBody>
+          <a:bodyPr wrap="square" anchor="t" lIns="45720" rIns="45720" tIns="27432" bIns="27432">
+            <a:spAutoFit/>
+          </a:bodyPr>
+          <a:lstStyle/>
+          <a:p>
+            <a:pPr algn="l">
+              <a:spcAft>
+                <a:spcPts val="600"/>
+              </a:spcAft>
+            </a:pPr>
+            <a:r>
+              <a:rPr sz="2000" b="1" i="0">
+                <a:solidFill>
+                  <a:srgbClr val="111010"/>
+                </a:solidFill>
+                <a:latin typeface="Trebuchet MS"/>
+              </a:rPr>
+              <a:t>Ограничения</a:t>
+            </a:r>
+          </a:p>
+        </p:txBody>
+      </p:sp>
+      <p:sp>
+        <p:nvSpPr>
+          <p:cNvPr id="13" name="TextBox 12"/>
+          <p:cNvSpPr txBox="1"/>
+          <p:nvPr/>
+        </p:nvSpPr>
+        <p:spPr>
+          <a:xfrm>
+            <a:off x="8138160" y="2194560"/>
+            <a:ext cx="3657600" cy="2743200"/>
+          </a:xfrm>
+          <a:prstGeom prst="rect">
+            <a:avLst/>
+          </a:prstGeom>
+          <a:noFill/>
+        </p:spPr>
+        <p:txBody>
+          <a:bodyPr wrap="square" anchor="t" lIns="45720" rIns="45720" tIns="27432" bIns="27432">
+            <a:spAutoFit/>
+          </a:bodyPr>
+          <a:lstStyle/>
+          <a:p>
+            <a:pPr algn="l">
+              <a:spcAft>
+                <a:spcPts val="600"/>
+              </a:spcAft>
+            </a:pPr>
+            <a:r>
+              <a:rPr sz="1700" b="0" i="0">
+                <a:solidFill>
+                  <a:srgbClr val="111010"/>
+                </a:solidFill>
+                <a:latin typeface="Trebuchet MS"/>
+              </a:rPr>
+              <a:t>• связь ≠ причина</a:t>
+            </a:r>
+          </a:p>
+          <a:p>
+            <a:pPr algn="l">
+              <a:spcAft>
+                <a:spcPts val="600"/>
+              </a:spcAft>
+            </a:pPr>
+            <a:r>
+              <a:rPr sz="1700" b="0" i="0">
+                <a:solidFill>
+                  <a:srgbClr val="111010"/>
+                </a:solidFill>
+                <a:latin typeface="Trebuchet MS"/>
+              </a:rPr>
+              <a:t>• только селективные вузы</a:t>
+            </a:r>
+          </a:p>
+          <a:p>
+            <a:pPr algn="l">
+              <a:spcAft>
+                <a:spcPts val="600"/>
+              </a:spcAft>
+            </a:pPr>
+            <a:r>
+              <a:rPr sz="1700" b="0" i="0">
+                <a:solidFill>
+                  <a:srgbClr val="111010"/>
+                </a:solidFill>
+                <a:latin typeface="Trebuchet MS"/>
+              </a:rPr>
+              <a:t>• отчислившиеся выпадают из данных</a:t>
             </a:r>
           </a:p>
         </p:txBody>
@@ -5238,7 +7387,7 @@
                 <a:solidFill>
                   <a:srgbClr val="111010"/>
                 </a:solidFill>
-                <a:latin typeface="Cascadia Code SemiBold"/>
+                <a:latin typeface="Courier New"/>
               </a:rPr>
               <a:t>ВОПРОС</a:t>
             </a:r>
@@ -5291,7 +7440,7 @@
                 <a:solidFill>
                   <a:srgbClr val="111010"/>
                 </a:solidFill>
-                <a:latin typeface="Cascadia Code SemiBold"/>
+                <a:latin typeface="Courier New"/>
               </a:rPr>
               <a:t>ДАННЫЕ</a:t>
             </a:r>
@@ -5344,7 +7493,7 @@
                 <a:solidFill>
                   <a:srgbClr val="111010"/>
                 </a:solidFill>
-                <a:latin typeface="Cascadia Code SemiBold"/>
+                <a:latin typeface="Courier New"/>
               </a:rPr>
               <a:t>МЕТОДЫ</a:t>
             </a:r>
@@ -5397,7 +7546,7 @@
                 <a:solidFill>
                   <a:srgbClr val="111010"/>
                 </a:solidFill>
-                <a:latin typeface="Cascadia Code SemiBold"/>
+                <a:latin typeface="Courier New"/>
               </a:rPr>
               <a:t>РЕЗУЛЬТАТЫ</a:t>
             </a:r>
@@ -5450,7 +7599,7 @@
                 <a:solidFill>
                   <a:srgbClr val="111010"/>
                 </a:solidFill>
-                <a:latin typeface="Cascadia Code SemiBold"/>
+                <a:latin typeface="Courier New"/>
               </a:rPr>
               <a:t>ВЫВОДЫ</a:t>
             </a:r>
@@ -5577,7 +7726,7 @@
                 <a:solidFill>
                   <a:srgbClr val="848484"/>
                 </a:solidFill>
-                <a:latin typeface="Tahoma"/>
+                <a:latin typeface="Trebuchet MS"/>
               </a:rPr>
               <a:t>2</a:t>
             </a:r>
@@ -5612,11 +7761,11 @@
               </a:spcAft>
             </a:pPr>
             <a:r>
-              <a:rPr sz="2800" b="0" i="0">
+              <a:rPr sz="3000" b="1" i="0">
                 <a:solidFill>
                   <a:srgbClr val="111010"/>
                 </a:solidFill>
-                <a:latin typeface="Arial Black"/>
+                <a:latin typeface="Trebuchet MS"/>
               </a:rPr>
               <a:t>Исследовательский вопрос</a:t>
             </a:r>
@@ -5631,8 +7780,8 @@
         </p:nvSpPr>
         <p:spPr>
           <a:xfrm>
-            <a:off x="548640" y="1600200"/>
-            <a:ext cx="11064240" cy="1325880"/>
+            <a:off x="548640" y="1737360"/>
+            <a:ext cx="11064240" cy="1554480"/>
           </a:xfrm>
           <a:prstGeom prst="roundRect">
             <a:avLst>
@@ -5679,8 +7828,8 @@
         </p:nvSpPr>
         <p:spPr>
           <a:xfrm>
-            <a:off x="914400" y="1691640"/>
-            <a:ext cx="10332720" cy="1143000"/>
+            <a:off x="914400" y="1828800"/>
+            <a:ext cx="10332720" cy="1371600"/>
           </a:xfrm>
           <a:prstGeom prst="rect">
             <a:avLst/>
@@ -5699,13 +7848,13 @@
               </a:spcAft>
             </a:pPr>
             <a:r>
-              <a:rPr sz="2100" b="0" i="0">
+              <a:rPr sz="2400" b="1" i="0">
                 <a:solidFill>
                   <a:srgbClr val="111010"/>
                 </a:solidFill>
-                <a:latin typeface="Cascadia Code SemiBold"/>
+                <a:latin typeface="Trebuchet MS"/>
               </a:rPr>
-              <a:t>В каких аспектах совмещение учёбы и работы приносит студентам пользу, а в каких — создаёт дополнительные трудности?</a:t>
+              <a:t>В каких аспектах совмещение учёбы и работы приносит студентам пользу, а в каких — создаёт трудности?</a:t>
             </a:r>
           </a:p>
         </p:txBody>
@@ -5718,8 +7867,8 @@
         </p:nvSpPr>
         <p:spPr>
           <a:xfrm>
-            <a:off x="548640" y="3108960"/>
-            <a:ext cx="5486400" cy="411480"/>
+            <a:off x="731520" y="3931920"/>
+            <a:ext cx="5029200" cy="868680"/>
           </a:xfrm>
           <a:prstGeom prst="rect">
             <a:avLst/>
@@ -5738,75 +7887,27 @@
               </a:spcAft>
             </a:pPr>
             <a:r>
-              <a:rPr sz="1800" b="1" i="0">
-                <a:solidFill>
-                  <a:srgbClr val="111010"/>
-                </a:solidFill>
-                <a:latin typeface="Cascadia Code SemiBold"/>
+              <a:rPr sz="5400" b="1" i="0">
+                <a:solidFill>
+                  <a:srgbClr val="C55A11"/>
+                </a:solidFill>
+                <a:latin typeface="Trebuchet MS"/>
               </a:rPr>
-              <a:t>Почему это важно</a:t>
-            </a:r>
-          </a:p>
-        </p:txBody>
-      </p:sp>
-      <p:sp>
-        <p:nvSpPr>
-          <p:cNvPr id="14" name="Rounded Rectangle 13"/>
-          <p:cNvSpPr/>
-          <p:nvPr/>
-        </p:nvSpPr>
-        <p:spPr>
-          <a:xfrm>
-            <a:off x="548640" y="3611880"/>
-            <a:ext cx="3520440" cy="2514600"/>
-          </a:xfrm>
-          <a:prstGeom prst="roundRect">
-            <a:avLst>
-              <a:gd name="adj" fmla="val 10000"/>
-            </a:avLst>
-          </a:prstGeom>
-          <a:solidFill>
-            <a:srgbClr val="FFF4D7"/>
-          </a:solidFill>
-          <a:ln w="15875">
-            <a:solidFill>
-              <a:srgbClr val="FFD966"/>
-            </a:solidFill>
-          </a:ln>
-          <a:effectLst/>
-        </p:spPr>
-        <p:style>
-          <a:lnRef idx="1">
-            <a:schemeClr val="accent1"/>
-          </a:lnRef>
-          <a:fillRef idx="3">
-            <a:schemeClr val="accent1"/>
-          </a:fillRef>
-          <a:effectRef idx="2">
-            <a:schemeClr val="accent1"/>
-          </a:effectRef>
-          <a:fontRef idx="minor">
-            <a:schemeClr val="lt1"/>
-          </a:fontRef>
-        </p:style>
-        <p:txBody>
-          <a:bodyPr rtlCol="0" anchor="ctr"/>
-          <a:lstStyle/>
-          <a:p>
-            <a:pPr algn="ctr"/>
-          </a:p>
-        </p:txBody>
-      </p:sp>
-      <p:sp>
-        <p:nvSpPr>
-          <p:cNvPr id="15" name="TextBox 14"/>
+              <a:t>44–48%</a:t>
+            </a:r>
+          </a:p>
+        </p:txBody>
+      </p:sp>
+      <p:sp>
+        <p:nvSpPr>
+          <p:cNvPr id="14" name="TextBox 13"/>
           <p:cNvSpPr txBox="1"/>
           <p:nvPr/>
         </p:nvSpPr>
         <p:spPr>
           <a:xfrm>
-            <a:off x="777240" y="3749039"/>
-            <a:ext cx="3108960" cy="822960"/>
+            <a:off x="731520" y="4800600"/>
+            <a:ext cx="5029200" cy="731520"/>
           </a:xfrm>
           <a:prstGeom prst="rect">
             <a:avLst/>
@@ -5825,27 +7926,27 @@
               </a:spcAft>
             </a:pPr>
             <a:r>
-              <a:rPr sz="3600" b="1" i="0">
-                <a:solidFill>
-                  <a:srgbClr val="C55A11"/>
-                </a:solidFill>
-                <a:latin typeface="Cascadia Code SemiBold"/>
+              <a:rPr sz="1600" b="0" i="0">
+                <a:solidFill>
+                  <a:srgbClr val="111010"/>
+                </a:solidFill>
+                <a:latin typeface="Trebuchet MS"/>
               </a:rPr>
-              <a:t>44–48%</a:t>
-            </a:r>
-          </a:p>
-        </p:txBody>
-      </p:sp>
-      <p:sp>
-        <p:nvSpPr>
-          <p:cNvPr id="16" name="TextBox 15"/>
+              <a:t>студентов работают во время учёбы</a:t>
+            </a:r>
+          </a:p>
+        </p:txBody>
+      </p:sp>
+      <p:sp>
+        <p:nvSpPr>
+          <p:cNvPr id="15" name="TextBox 14"/>
           <p:cNvSpPr txBox="1"/>
           <p:nvPr/>
         </p:nvSpPr>
         <p:spPr>
           <a:xfrm>
-            <a:off x="777240" y="4617720"/>
-            <a:ext cx="3108960" cy="1463040"/>
+            <a:off x="6309360" y="3931920"/>
+            <a:ext cx="5303520" cy="868680"/>
           </a:xfrm>
           <a:prstGeom prst="rect">
             <a:avLst/>
@@ -5864,75 +7965,27 @@
               </a:spcAft>
             </a:pPr>
             <a:r>
-              <a:rPr sz="1400" b="0" i="0">
-                <a:solidFill>
-                  <a:srgbClr val="111010"/>
-                </a:solidFill>
-                <a:latin typeface="Tahoma"/>
+              <a:rPr sz="5400" b="1" i="0">
+                <a:solidFill>
+                  <a:srgbClr val="C55A11"/>
+                </a:solidFill>
+                <a:latin typeface="Trebuchet MS"/>
               </a:rPr>
-              <a:t>студентов работают во время учёбы — это массовое явление</a:t>
-            </a:r>
-          </a:p>
-        </p:txBody>
-      </p:sp>
-      <p:sp>
-        <p:nvSpPr>
-          <p:cNvPr id="17" name="Rounded Rectangle 16"/>
-          <p:cNvSpPr/>
-          <p:nvPr/>
-        </p:nvSpPr>
-        <p:spPr>
-          <a:xfrm>
-            <a:off x="4297679" y="3611880"/>
-            <a:ext cx="3520440" cy="2514600"/>
-          </a:xfrm>
-          <a:prstGeom prst="roundRect">
-            <a:avLst>
-              <a:gd name="adj" fmla="val 10000"/>
-            </a:avLst>
-          </a:prstGeom>
-          <a:solidFill>
-            <a:srgbClr val="FFF4D7"/>
-          </a:solidFill>
-          <a:ln w="15875">
-            <a:solidFill>
-              <a:srgbClr val="FFD966"/>
-            </a:solidFill>
-          </a:ln>
-          <a:effectLst/>
-        </p:spPr>
-        <p:style>
-          <a:lnRef idx="1">
-            <a:schemeClr val="accent1"/>
-          </a:lnRef>
-          <a:fillRef idx="3">
-            <a:schemeClr val="accent1"/>
-          </a:fillRef>
-          <a:effectRef idx="2">
-            <a:schemeClr val="accent1"/>
-          </a:effectRef>
-          <a:fontRef idx="minor">
-            <a:schemeClr val="lt1"/>
-          </a:fontRef>
-        </p:style>
-        <p:txBody>
-          <a:bodyPr rtlCol="0" anchor="ctr"/>
-          <a:lstStyle/>
-          <a:p>
-            <a:pPr algn="ctr"/>
-          </a:p>
-        </p:txBody>
-      </p:sp>
-      <p:sp>
-        <p:nvSpPr>
-          <p:cNvPr id="18" name="TextBox 17"/>
+              <a:t>25–30%</a:t>
+            </a:r>
+          </a:p>
+        </p:txBody>
+      </p:sp>
+      <p:sp>
+        <p:nvSpPr>
+          <p:cNvPr id="16" name="TextBox 15"/>
           <p:cNvSpPr txBox="1"/>
           <p:nvPr/>
         </p:nvSpPr>
         <p:spPr>
           <a:xfrm>
-            <a:off x="4526279" y="3749039"/>
-            <a:ext cx="3108960" cy="822960"/>
+            <a:off x="6309360" y="4800600"/>
+            <a:ext cx="5303520" cy="731520"/>
           </a:xfrm>
           <a:prstGeom prst="rect">
             <a:avLst/>
@@ -5951,178 +8004,14 @@
               </a:spcAft>
             </a:pPr>
             <a:r>
-              <a:rPr sz="3600" b="1" i="0">
-                <a:solidFill>
-                  <a:srgbClr val="C55A11"/>
-                </a:solidFill>
-                <a:latin typeface="Cascadia Code SemiBold"/>
+              <a:rPr sz="1600" b="0" i="0">
+                <a:solidFill>
+                  <a:srgbClr val="111010"/>
+                </a:solidFill>
+                <a:latin typeface="Trebuchet MS"/>
               </a:rPr>
-              <a:t>25–30%</a:t>
-            </a:r>
-          </a:p>
-        </p:txBody>
-      </p:sp>
-      <p:sp>
-        <p:nvSpPr>
-          <p:cNvPr id="19" name="TextBox 18"/>
-          <p:cNvSpPr txBox="1"/>
-          <p:nvPr/>
-        </p:nvSpPr>
-        <p:spPr>
-          <a:xfrm>
-            <a:off x="4526279" y="4617720"/>
-            <a:ext cx="3108960" cy="1463040"/>
-          </a:xfrm>
-          <a:prstGeom prst="rect">
-            <a:avLst/>
-          </a:prstGeom>
-          <a:noFill/>
-        </p:spPr>
-        <p:txBody>
-          <a:bodyPr wrap="square" anchor="t" lIns="45720" rIns="45720" tIns="27432" bIns="27432">
-            <a:spAutoFit/>
-          </a:bodyPr>
-          <a:lstStyle/>
-          <a:p>
-            <a:pPr algn="l">
-              <a:spcAft>
-                <a:spcPts val="600"/>
-              </a:spcAft>
-            </a:pPr>
-            <a:r>
-              <a:rPr sz="1400" b="0" i="0">
-                <a:solidFill>
-                  <a:srgbClr val="111010"/>
-                </a:solidFill>
-                <a:latin typeface="Tahoma"/>
-              </a:rPr>
-              <a:t>задумывавшихся об отчислении называют причиной трудности совмещения учёбы и работы</a:t>
-            </a:r>
-          </a:p>
-        </p:txBody>
-      </p:sp>
-      <p:sp>
-        <p:nvSpPr>
-          <p:cNvPr id="20" name="Rounded Rectangle 19"/>
-          <p:cNvSpPr/>
-          <p:nvPr/>
-        </p:nvSpPr>
-        <p:spPr>
-          <a:xfrm>
-            <a:off x="8046719" y="3611880"/>
-            <a:ext cx="3520440" cy="2514600"/>
-          </a:xfrm>
-          <a:prstGeom prst="roundRect">
-            <a:avLst>
-              <a:gd name="adj" fmla="val 10000"/>
-            </a:avLst>
-          </a:prstGeom>
-          <a:solidFill>
-            <a:srgbClr val="FFF4D7"/>
-          </a:solidFill>
-          <a:ln w="15875">
-            <a:solidFill>
-              <a:srgbClr val="FFD966"/>
-            </a:solidFill>
-          </a:ln>
-          <a:effectLst/>
-        </p:spPr>
-        <p:style>
-          <a:lnRef idx="1">
-            <a:schemeClr val="accent1"/>
-          </a:lnRef>
-          <a:fillRef idx="3">
-            <a:schemeClr val="accent1"/>
-          </a:fillRef>
-          <a:effectRef idx="2">
-            <a:schemeClr val="accent1"/>
-          </a:effectRef>
-          <a:fontRef idx="minor">
-            <a:schemeClr val="lt1"/>
-          </a:fontRef>
-        </p:style>
-        <p:txBody>
-          <a:bodyPr rtlCol="0" anchor="ctr"/>
-          <a:lstStyle/>
-          <a:p>
-            <a:pPr algn="ctr"/>
-          </a:p>
-        </p:txBody>
-      </p:sp>
-      <p:sp>
-        <p:nvSpPr>
-          <p:cNvPr id="21" name="TextBox 20"/>
-          <p:cNvSpPr txBox="1"/>
-          <p:nvPr/>
-        </p:nvSpPr>
-        <p:spPr>
-          <a:xfrm>
-            <a:off x="8275319" y="3749039"/>
-            <a:ext cx="3108960" cy="822960"/>
-          </a:xfrm>
-          <a:prstGeom prst="rect">
-            <a:avLst/>
-          </a:prstGeom>
-          <a:noFill/>
-        </p:spPr>
-        <p:txBody>
-          <a:bodyPr wrap="square" anchor="t" lIns="45720" rIns="45720" tIns="27432" bIns="27432">
-            <a:spAutoFit/>
-          </a:bodyPr>
-          <a:lstStyle/>
-          <a:p>
-            <a:pPr algn="l">
-              <a:spcAft>
-                <a:spcPts val="600"/>
-              </a:spcAft>
-            </a:pPr>
-            <a:r>
-              <a:rPr sz="3600" b="1" i="0">
-                <a:solidFill>
-                  <a:srgbClr val="111010"/>
-                </a:solidFill>
-                <a:latin typeface="Cascadia Code SemiBold"/>
-              </a:rPr>
-              <a:t>?</a:t>
-            </a:r>
-          </a:p>
-        </p:txBody>
-      </p:sp>
-      <p:sp>
-        <p:nvSpPr>
-          <p:cNvPr id="22" name="TextBox 21"/>
-          <p:cNvSpPr txBox="1"/>
-          <p:nvPr/>
-        </p:nvSpPr>
-        <p:spPr>
-          <a:xfrm>
-            <a:off x="8275319" y="4617720"/>
-            <a:ext cx="3108960" cy="1463040"/>
-          </a:xfrm>
-          <a:prstGeom prst="rect">
-            <a:avLst/>
-          </a:prstGeom>
-          <a:noFill/>
-        </p:spPr>
-        <p:txBody>
-          <a:bodyPr wrap="square" anchor="t" lIns="45720" rIns="45720" tIns="27432" bIns="27432">
-            <a:spAutoFit/>
-          </a:bodyPr>
-          <a:lstStyle/>
-          <a:p>
-            <a:pPr algn="l">
-              <a:spcAft>
-                <a:spcPts val="600"/>
-              </a:spcAft>
-            </a:pPr>
-            <a:r>
-              <a:rPr sz="1400" b="0" i="0">
-                <a:solidFill>
-                  <a:srgbClr val="111010"/>
-                </a:solidFill>
-                <a:latin typeface="Tahoma"/>
-              </a:rPr>
-              <a:t>работа даёт опыт и деньги, но отнимает время у учёбы и сна — итоговый эффект неочевиден</a:t>
+              <a:t>задумывавшихся об отчислении называют
+причиной совмещение учёбы и работы</a:t>
             </a:r>
           </a:p>
         </p:txBody>
@@ -6191,7 +8080,7 @@
                 <a:solidFill>
                   <a:srgbClr val="111010"/>
                 </a:solidFill>
-                <a:latin typeface="Cascadia Code SemiBold"/>
+                <a:latin typeface="Courier New"/>
               </a:rPr>
               <a:t>ВОПРОС</a:t>
             </a:r>
@@ -6244,7 +8133,7 @@
                 <a:solidFill>
                   <a:srgbClr val="111010"/>
                 </a:solidFill>
-                <a:latin typeface="Cascadia Code SemiBold"/>
+                <a:latin typeface="Courier New"/>
               </a:rPr>
               <a:t>ДАННЫЕ</a:t>
             </a:r>
@@ -6297,7 +8186,7 @@
                 <a:solidFill>
                   <a:srgbClr val="111010"/>
                 </a:solidFill>
-                <a:latin typeface="Cascadia Code SemiBold"/>
+                <a:latin typeface="Courier New"/>
               </a:rPr>
               <a:t>МЕТОДЫ</a:t>
             </a:r>
@@ -6350,7 +8239,7 @@
                 <a:solidFill>
                   <a:srgbClr val="111010"/>
                 </a:solidFill>
-                <a:latin typeface="Cascadia Code SemiBold"/>
+                <a:latin typeface="Courier New"/>
               </a:rPr>
               <a:t>РЕЗУЛЬТАТЫ</a:t>
             </a:r>
@@ -6403,7 +8292,7 @@
                 <a:solidFill>
                   <a:srgbClr val="111010"/>
                 </a:solidFill>
-                <a:latin typeface="Cascadia Code SemiBold"/>
+                <a:latin typeface="Courier New"/>
               </a:rPr>
               <a:t>ВЫВОДЫ</a:t>
             </a:r>
@@ -6530,7 +8419,7 @@
                 <a:solidFill>
                   <a:srgbClr val="848484"/>
                 </a:solidFill>
-                <a:latin typeface="Tahoma"/>
+                <a:latin typeface="Trebuchet MS"/>
               </a:rPr>
               <a:t>3</a:t>
             </a:r>
@@ -6565,11 +8454,11 @@
               </a:spcAft>
             </a:pPr>
             <a:r>
-              <a:rPr sz="2800" b="0" i="0">
+              <a:rPr sz="3000" b="1" i="0">
                 <a:solidFill>
                   <a:srgbClr val="111010"/>
                 </a:solidFill>
-                <a:latin typeface="Arial Black"/>
+                <a:latin typeface="Trebuchet MS"/>
               </a:rPr>
               <a:t>Источник данных</a:t>
             </a:r>
@@ -6578,62 +8467,14 @@
       </p:sp>
       <p:sp>
         <p:nvSpPr>
-          <p:cNvPr id="11" name="Rounded Rectangle 10"/>
-          <p:cNvSpPr/>
-          <p:nvPr/>
-        </p:nvSpPr>
-        <p:spPr>
-          <a:xfrm>
-            <a:off x="548640" y="1600200"/>
-            <a:ext cx="5486400" cy="2148840"/>
-          </a:xfrm>
-          <a:prstGeom prst="roundRect">
-            <a:avLst>
-              <a:gd name="adj" fmla="val 12000"/>
-            </a:avLst>
-          </a:prstGeom>
-          <a:solidFill>
-            <a:srgbClr val="FFF4D7"/>
-          </a:solidFill>
-          <a:ln w="19050">
-            <a:solidFill>
-              <a:srgbClr val="FFD966"/>
-            </a:solidFill>
-          </a:ln>
-          <a:effectLst/>
-        </p:spPr>
-        <p:style>
-          <a:lnRef idx="1">
-            <a:schemeClr val="accent1"/>
-          </a:lnRef>
-          <a:fillRef idx="3">
-            <a:schemeClr val="accent1"/>
-          </a:fillRef>
-          <a:effectRef idx="2">
-            <a:schemeClr val="accent1"/>
-          </a:effectRef>
-          <a:fontRef idx="minor">
-            <a:schemeClr val="lt1"/>
-          </a:fontRef>
-        </p:style>
-        <p:txBody>
-          <a:bodyPr rtlCol="0" anchor="ctr"/>
-          <a:lstStyle/>
-          <a:p>
-            <a:pPr algn="ctr"/>
-          </a:p>
-        </p:txBody>
-      </p:sp>
-      <p:sp>
-        <p:nvSpPr>
-          <p:cNvPr id="12" name="TextBox 11"/>
+          <p:cNvPr id="11" name="TextBox 10"/>
           <p:cNvSpPr txBox="1"/>
           <p:nvPr/>
         </p:nvSpPr>
         <p:spPr>
           <a:xfrm>
-            <a:off x="731520" y="1737360"/>
-            <a:ext cx="5120640" cy="457200"/>
+            <a:off x="548640" y="1645920"/>
+            <a:ext cx="5669280" cy="1097280"/>
           </a:xfrm>
           <a:prstGeom prst="rect">
             <a:avLst/>
@@ -6652,38 +8493,15 @@
               </a:spcAft>
             </a:pPr>
             <a:r>
-              <a:rPr sz="1600" b="1" i="0">
+              <a:rPr sz="2000" b="0" i="0">
                 <a:solidFill>
                   <a:srgbClr val="111010"/>
                 </a:solidFill>
-                <a:latin typeface="Cascadia Code SemiBold"/>
+                <a:latin typeface="Trebuchet MS"/>
               </a:rPr>
               <a:t>Лонгитюд ИО НИУ ВШЭ</a:t>
             </a:r>
           </a:p>
-        </p:txBody>
-      </p:sp>
-      <p:sp>
-        <p:nvSpPr>
-          <p:cNvPr id="13" name="TextBox 12"/>
-          <p:cNvSpPr txBox="1"/>
-          <p:nvPr/>
-        </p:nvSpPr>
-        <p:spPr>
-          <a:xfrm>
-            <a:off x="731520" y="2194560"/>
-            <a:ext cx="5120640" cy="1463040"/>
-          </a:xfrm>
-          <a:prstGeom prst="rect">
-            <a:avLst/>
-          </a:prstGeom>
-          <a:noFill/>
-        </p:spPr>
-        <p:txBody>
-          <a:bodyPr wrap="square" anchor="t" lIns="45720" rIns="45720" tIns="27432" bIns="27432">
-            <a:spAutoFit/>
-          </a:bodyPr>
-          <a:lstStyle/>
           <a:p>
             <a:pPr algn="l">
               <a:spcAft>
@@ -6691,15 +8509,38 @@
               </a:spcAft>
             </a:pPr>
             <a:r>
-              <a:rPr sz="1300" b="0" i="0">
+              <a:rPr sz="2000" b="0" i="0">
                 <a:solidFill>
                   <a:srgbClr val="111010"/>
                 </a:solidFill>
-                <a:latin typeface="Tahoma"/>
+                <a:latin typeface="Trebuchet MS"/>
               </a:rPr>
-              <a:t>«Модели образовательного поведения студентов в их связи с показателями успешности»</a:t>
-            </a:r>
-          </a:p>
+              <a:t>9 селективных вузов · 3 и 4 курс</a:t>
+            </a:r>
+          </a:p>
+        </p:txBody>
+      </p:sp>
+      <p:sp>
+        <p:nvSpPr>
+          <p:cNvPr id="12" name="TextBox 11"/>
+          <p:cNvSpPr txBox="1"/>
+          <p:nvPr/>
+        </p:nvSpPr>
+        <p:spPr>
+          <a:xfrm>
+            <a:off x="548640" y="2971800"/>
+            <a:ext cx="2743200" cy="868680"/>
+          </a:xfrm>
+          <a:prstGeom prst="rect">
+            <a:avLst/>
+          </a:prstGeom>
+          <a:noFill/>
+        </p:spPr>
+        <p:txBody>
+          <a:bodyPr wrap="square" anchor="t" lIns="45720" rIns="45720" tIns="27432" bIns="27432">
+            <a:spAutoFit/>
+          </a:bodyPr>
+          <a:lstStyle/>
           <a:p>
             <a:pPr algn="l">
               <a:spcAft>
@@ -6707,27 +8548,27 @@
               </a:spcAft>
             </a:pPr>
             <a:r>
-              <a:rPr sz="1300" b="0" i="0">
+              <a:rPr sz="4000" b="1" i="0">
                 <a:solidFill>
                   <a:srgbClr val="111010"/>
                 </a:solidFill>
-                <a:latin typeface="Tahoma"/>
+                <a:latin typeface="Trebuchet MS"/>
               </a:rPr>
-              <a:t>9 селективных вузов · многоступенчатая выборка: направления → группы → сплошной опрос</a:t>
-            </a:r>
-          </a:p>
-        </p:txBody>
-      </p:sp>
-      <p:sp>
-        <p:nvSpPr>
-          <p:cNvPr id="14" name="TextBox 13"/>
+              <a:t>1 236</a:t>
+            </a:r>
+          </a:p>
+        </p:txBody>
+      </p:sp>
+      <p:sp>
+        <p:nvSpPr>
+          <p:cNvPr id="13" name="TextBox 12"/>
           <p:cNvSpPr txBox="1"/>
           <p:nvPr/>
         </p:nvSpPr>
         <p:spPr>
           <a:xfrm>
-            <a:off x="548640" y="3931920"/>
-            <a:ext cx="1828800" cy="914400"/>
+            <a:off x="548640" y="3840480"/>
+            <a:ext cx="2743200" cy="731520"/>
           </a:xfrm>
           <a:prstGeom prst="rect">
             <a:avLst/>
@@ -6746,27 +8587,28 @@
               </a:spcAft>
             </a:pPr>
             <a:r>
-              <a:rPr sz="3400" b="1" i="0">
+              <a:rPr sz="1600" b="0" i="0">
                 <a:solidFill>
                   <a:srgbClr val="111010"/>
                 </a:solidFill>
-                <a:latin typeface="Cascadia Code SemiBold"/>
+                <a:latin typeface="Trebuchet MS"/>
               </a:rPr>
-              <a:t>1 236</a:t>
-            </a:r>
-          </a:p>
-        </p:txBody>
-      </p:sp>
-      <p:sp>
-        <p:nvSpPr>
-          <p:cNvPr id="15" name="TextBox 14"/>
+              <a:t>студентов
+на 3 курсе</a:t>
+            </a:r>
+          </a:p>
+        </p:txBody>
+      </p:sp>
+      <p:sp>
+        <p:nvSpPr>
+          <p:cNvPr id="14" name="TextBox 13"/>
           <p:cNvSpPr txBox="1"/>
           <p:nvPr/>
         </p:nvSpPr>
         <p:spPr>
           <a:xfrm>
-            <a:off x="548640" y="4846320"/>
-            <a:ext cx="1828800" cy="731520"/>
+            <a:off x="3291840" y="2971800"/>
+            <a:ext cx="2743200" cy="868680"/>
           </a:xfrm>
           <a:prstGeom prst="rect">
             <a:avLst/>
@@ -6785,28 +8627,27 @@
               </a:spcAft>
             </a:pPr>
             <a:r>
-              <a:rPr sz="1400" b="0" i="0">
+              <a:rPr sz="4000" b="1" i="0">
                 <a:solidFill>
                   <a:srgbClr val="111010"/>
                 </a:solidFill>
-                <a:latin typeface="Tahoma"/>
+                <a:latin typeface="Trebuchet MS"/>
               </a:rPr>
-              <a:t>студентов
-3 курс (2024/25)</a:t>
-            </a:r>
-          </a:p>
-        </p:txBody>
-      </p:sp>
-      <p:sp>
-        <p:nvSpPr>
-          <p:cNvPr id="16" name="TextBox 15"/>
+              <a:t>914</a:t>
+            </a:r>
+          </a:p>
+        </p:txBody>
+      </p:sp>
+      <p:sp>
+        <p:nvSpPr>
+          <p:cNvPr id="15" name="TextBox 14"/>
           <p:cNvSpPr txBox="1"/>
           <p:nvPr/>
         </p:nvSpPr>
         <p:spPr>
           <a:xfrm>
-            <a:off x="2377440" y="3931920"/>
-            <a:ext cx="1828800" cy="914400"/>
+            <a:off x="3291840" y="3840480"/>
+            <a:ext cx="2743200" cy="731520"/>
           </a:xfrm>
           <a:prstGeom prst="rect">
             <a:avLst/>
@@ -6825,27 +8666,28 @@
               </a:spcAft>
             </a:pPr>
             <a:r>
-              <a:rPr sz="3400" b="1" i="0">
+              <a:rPr sz="1600" b="0" i="0">
                 <a:solidFill>
                   <a:srgbClr val="111010"/>
                 </a:solidFill>
-                <a:latin typeface="Cascadia Code SemiBold"/>
+                <a:latin typeface="Trebuchet MS"/>
               </a:rPr>
-              <a:t>914</a:t>
-            </a:r>
-          </a:p>
-        </p:txBody>
-      </p:sp>
-      <p:sp>
-        <p:nvSpPr>
-          <p:cNvPr id="17" name="TextBox 16"/>
+              <a:t>полных анкет
+на 4 курсе</a:t>
+            </a:r>
+          </a:p>
+        </p:txBody>
+      </p:sp>
+      <p:sp>
+        <p:nvSpPr>
+          <p:cNvPr id="16" name="TextBox 15"/>
           <p:cNvSpPr txBox="1"/>
           <p:nvPr/>
         </p:nvSpPr>
         <p:spPr>
           <a:xfrm>
-            <a:off x="2377440" y="4846320"/>
-            <a:ext cx="1828800" cy="731520"/>
+            <a:off x="548640" y="4617720"/>
+            <a:ext cx="5486400" cy="868680"/>
           </a:xfrm>
           <a:prstGeom prst="rect">
             <a:avLst/>
@@ -6864,28 +8706,27 @@
               </a:spcAft>
             </a:pPr>
             <a:r>
-              <a:rPr sz="1400" b="0" i="0">
+              <a:rPr sz="4000" b="1" i="0">
                 <a:solidFill>
                   <a:srgbClr val="111010"/>
                 </a:solidFill>
-                <a:latin typeface="Tahoma"/>
+                <a:latin typeface="Trebuchet MS"/>
               </a:rPr>
-              <a:t>полных анкет
-4 курс (2025/26)</a:t>
-            </a:r>
-          </a:p>
-        </p:txBody>
-      </p:sp>
-      <p:sp>
-        <p:nvSpPr>
-          <p:cNvPr id="18" name="TextBox 17"/>
+              <a:t>724</a:t>
+            </a:r>
+          </a:p>
+        </p:txBody>
+      </p:sp>
+      <p:sp>
+        <p:nvSpPr>
+          <p:cNvPr id="17" name="TextBox 16"/>
           <p:cNvSpPr txBox="1"/>
           <p:nvPr/>
         </p:nvSpPr>
         <p:spPr>
           <a:xfrm>
-            <a:off x="4206240" y="3931920"/>
-            <a:ext cx="2011680" cy="914400"/>
+            <a:off x="548640" y="5486400"/>
+            <a:ext cx="5486400" cy="731520"/>
           </a:xfrm>
           <a:prstGeom prst="rect">
             <a:avLst/>
@@ -6904,27 +8745,27 @@
               </a:spcAft>
             </a:pPr>
             <a:r>
-              <a:rPr sz="3400" b="1" i="0">
+              <a:rPr sz="1600" b="0" i="0">
                 <a:solidFill>
                   <a:srgbClr val="111010"/>
                 </a:solidFill>
-                <a:latin typeface="Cascadia Code SemiBold"/>
+                <a:latin typeface="Trebuchet MS"/>
               </a:rPr>
-              <a:t>724</a:t>
-            </a:r>
-          </a:p>
-        </p:txBody>
-      </p:sp>
-      <p:sp>
-        <p:nvSpPr>
-          <p:cNvPr id="19" name="TextBox 18"/>
+              <a:t>студента в обеих волнах</a:t>
+            </a:r>
+          </a:p>
+        </p:txBody>
+      </p:sp>
+      <p:sp>
+        <p:nvSpPr>
+          <p:cNvPr id="18" name="TextBox 17"/>
           <p:cNvSpPr txBox="1"/>
           <p:nvPr/>
         </p:nvSpPr>
         <p:spPr>
           <a:xfrm>
-            <a:off x="4206240" y="4846320"/>
-            <a:ext cx="2011680" cy="731520"/>
+            <a:off x="6492240" y="1600200"/>
+            <a:ext cx="5303520" cy="365760"/>
           </a:xfrm>
           <a:prstGeom prst="rect">
             <a:avLst/>
@@ -6943,99 +8784,20 @@
               </a:spcAft>
             </a:pPr>
             <a:r>
-              <a:rPr sz="1400" b="0" i="0">
-                <a:solidFill>
-                  <a:srgbClr val="111010"/>
-                </a:solidFill>
-                <a:latin typeface="Tahoma"/>
+              <a:rPr sz="1300" b="0" i="0">
+                <a:solidFill>
+                  <a:srgbClr val="848484"/>
+                </a:solidFill>
+                <a:latin typeface="Trebuchet MS"/>
               </a:rPr>
-              <a:t>в обеих волнах
-(сравнение с собой)</a:t>
-            </a:r>
-          </a:p>
-        </p:txBody>
-      </p:sp>
-      <p:sp>
-        <p:nvSpPr>
-          <p:cNvPr id="20" name="TextBox 19"/>
-          <p:cNvSpPr txBox="1"/>
-          <p:nvPr/>
-        </p:nvSpPr>
-        <p:spPr>
-          <a:xfrm>
-            <a:off x="548640" y="5623560"/>
-            <a:ext cx="5577840" cy="640080"/>
-          </a:xfrm>
-          <a:prstGeom prst="rect">
-            <a:avLst/>
-          </a:prstGeom>
-          <a:noFill/>
-        </p:spPr>
-        <p:txBody>
-          <a:bodyPr wrap="square" anchor="t" lIns="45720" rIns="45720" tIns="27432" bIns="27432">
-            <a:spAutoFit/>
-          </a:bodyPr>
-          <a:lstStyle/>
-          <a:p>
-            <a:pPr algn="l">
-              <a:spcAft>
-                <a:spcPts val="600"/>
-              </a:spcAft>
-            </a:pPr>
-            <a:r>
-              <a:rPr sz="1200" b="0" i="0">
-                <a:solidFill>
-                  <a:srgbClr val="848484"/>
-                </a:solidFill>
-                <a:latin typeface="Tahoma"/>
-              </a:rPr>
-              <a:t>Переменные: занятость (тип, часы, сфера, мотив), учёба (оценки, удовлетворённость, мысли об отчислении), здоровье (сон, спорт, курение, алкоголь)</a:t>
-            </a:r>
-          </a:p>
-        </p:txBody>
-      </p:sp>
-      <p:sp>
-        <p:nvSpPr>
-          <p:cNvPr id="21" name="TextBox 20"/>
-          <p:cNvSpPr txBox="1"/>
-          <p:nvPr/>
-        </p:nvSpPr>
-        <p:spPr>
-          <a:xfrm>
-            <a:off x="6492240" y="1554480"/>
-            <a:ext cx="5303520" cy="411480"/>
-          </a:xfrm>
-          <a:prstGeom prst="rect">
-            <a:avLst/>
-          </a:prstGeom>
-          <a:noFill/>
-        </p:spPr>
-        <p:txBody>
-          <a:bodyPr wrap="square" anchor="t" lIns="45720" rIns="45720" tIns="27432" bIns="27432">
-            <a:spAutoFit/>
-          </a:bodyPr>
-          <a:lstStyle/>
-          <a:p>
-            <a:pPr algn="l">
-              <a:spcAft>
-                <a:spcPts val="600"/>
-              </a:spcAft>
-            </a:pPr>
-            <a:r>
-              <a:rPr sz="1600" b="1" i="0">
-                <a:solidFill>
-                  <a:srgbClr val="111010"/>
-                </a:solidFill>
-                <a:latin typeface="Cascadia Code SemiBold"/>
-              </a:rPr>
-              <a:t>Качество: 599 «прокликанных» анкет</a:t>
+              <a:t>Нашёл и очистил 599 «прокликанных» анкет</a:t>
             </a:r>
           </a:p>
         </p:txBody>
       </p:sp>
       <p:graphicFrame>
         <p:nvGraphicFramePr>
-          <p:cNvPr id="22" name="Chart 21"/>
+          <p:cNvPr id="19" name="Chart 18"/>
           <p:cNvGraphicFramePr>
             <a:graphicFrameLocks noGrp="1"/>
           </p:cNvGraphicFramePr>
@@ -7043,7 +8805,7 @@
         </p:nvGraphicFramePr>
         <p:xfrm>
           <a:off x="6400800" y="1965960"/>
-          <a:ext cx="5394960" cy="3566160"/>
+          <a:ext cx="5394960" cy="4206240"/>
         </p:xfrm>
         <a:graphic>
           <a:graphicData uri="http://schemas.openxmlformats.org/drawingml/2006/chart">
@@ -7051,45 +8813,6 @@
           </a:graphicData>
         </a:graphic>
       </p:graphicFrame>
-      <p:sp>
-        <p:nvSpPr>
-          <p:cNvPr id="23" name="TextBox 22"/>
-          <p:cNvSpPr txBox="1"/>
-          <p:nvPr/>
-        </p:nvSpPr>
-        <p:spPr>
-          <a:xfrm>
-            <a:off x="6492240" y="5577840"/>
-            <a:ext cx="5303520" cy="685800"/>
-          </a:xfrm>
-          <a:prstGeom prst="rect">
-            <a:avLst/>
-          </a:prstGeom>
-          <a:noFill/>
-        </p:spPr>
-        <p:txBody>
-          <a:bodyPr wrap="square" anchor="t" lIns="45720" rIns="45720" tIns="27432" bIns="27432">
-            <a:spAutoFit/>
-          </a:bodyPr>
-          <a:lstStyle/>
-          <a:p>
-            <a:pPr algn="l">
-              <a:spcAft>
-                <a:spcPts val="600"/>
-              </a:spcAft>
-            </a:pPr>
-            <a:r>
-              <a:rPr sz="1200" b="0" i="0">
-                <a:solidFill>
-                  <a:srgbClr val="848484"/>
-                </a:solidFill>
-                <a:latin typeface="Tahoma"/>
-              </a:rPr>
-              <a:t>Ответы этих анкет заменены на пропуски, строки сохранены. Пустые строки удалены, выбросы в часах работы исправлены</a:t>
-            </a:r>
-          </a:p>
-        </p:txBody>
-      </p:sp>
     </p:spTree>
   </p:cSld>
   <p:clrMapOvr>
@@ -7154,7 +8877,7 @@
                 <a:solidFill>
                   <a:srgbClr val="111010"/>
                 </a:solidFill>
-                <a:latin typeface="Cascadia Code SemiBold"/>
+                <a:latin typeface="Courier New"/>
               </a:rPr>
               <a:t>ВОПРОС</a:t>
             </a:r>
@@ -7207,7 +8930,7 @@
                 <a:solidFill>
                   <a:srgbClr val="111010"/>
                 </a:solidFill>
-                <a:latin typeface="Cascadia Code SemiBold"/>
+                <a:latin typeface="Courier New"/>
               </a:rPr>
               <a:t>ДАННЫЕ</a:t>
             </a:r>
@@ -7260,7 +8983,7 @@
                 <a:solidFill>
                   <a:srgbClr val="111010"/>
                 </a:solidFill>
-                <a:latin typeface="Cascadia Code SemiBold"/>
+                <a:latin typeface="Courier New"/>
               </a:rPr>
               <a:t>МЕТОДЫ</a:t>
             </a:r>
@@ -7313,7 +9036,7 @@
                 <a:solidFill>
                   <a:srgbClr val="111010"/>
                 </a:solidFill>
-                <a:latin typeface="Cascadia Code SemiBold"/>
+                <a:latin typeface="Courier New"/>
               </a:rPr>
               <a:t>РЕЗУЛЬТАТЫ</a:t>
             </a:r>
@@ -7366,7 +9089,7 @@
                 <a:solidFill>
                   <a:srgbClr val="111010"/>
                 </a:solidFill>
-                <a:latin typeface="Cascadia Code SemiBold"/>
+                <a:latin typeface="Courier New"/>
               </a:rPr>
               <a:t>ВЫВОДЫ</a:t>
             </a:r>
@@ -7493,7 +9216,7 @@
                 <a:solidFill>
                   <a:srgbClr val="848484"/>
                 </a:solidFill>
-                <a:latin typeface="Tahoma"/>
+                <a:latin typeface="Trebuchet MS"/>
               </a:rPr>
               <a:t>4</a:t>
             </a:r>
@@ -7528,11 +9251,11 @@
               </a:spcAft>
             </a:pPr>
             <a:r>
-              <a:rPr sz="2800" b="0" i="0">
+              <a:rPr sz="3000" b="1" i="0">
                 <a:solidFill>
                   <a:srgbClr val="111010"/>
                 </a:solidFill>
-                <a:latin typeface="Arial Black"/>
+                <a:latin typeface="Trebuchet MS"/>
               </a:rPr>
               <a:t>Методы анализа</a:t>
             </a:r>
@@ -7541,62 +9264,14 @@
       </p:sp>
       <p:sp>
         <p:nvSpPr>
-          <p:cNvPr id="11" name="Rounded Rectangle 10"/>
+          <p:cNvPr id="11" name="Oval 10"/>
           <p:cNvSpPr/>
           <p:nvPr/>
         </p:nvSpPr>
         <p:spPr>
           <a:xfrm>
-            <a:off x="548640" y="1691640"/>
-            <a:ext cx="2011680" cy="2514600"/>
-          </a:xfrm>
-          <a:prstGeom prst="roundRect">
-            <a:avLst>
-              <a:gd name="adj" fmla="val 10000"/>
-            </a:avLst>
-          </a:prstGeom>
-          <a:solidFill>
-            <a:srgbClr val="FFF4D7"/>
-          </a:solidFill>
-          <a:ln w="15875">
-            <a:solidFill>
-              <a:srgbClr val="FFD966"/>
-            </a:solidFill>
-          </a:ln>
-          <a:effectLst/>
-        </p:spPr>
-        <p:style>
-          <a:lnRef idx="1">
-            <a:schemeClr val="accent1"/>
-          </a:lnRef>
-          <a:fillRef idx="3">
-            <a:schemeClr val="accent1"/>
-          </a:fillRef>
-          <a:effectRef idx="2">
-            <a:schemeClr val="accent1"/>
-          </a:effectRef>
-          <a:fontRef idx="minor">
-            <a:schemeClr val="lt1"/>
-          </a:fontRef>
-        </p:style>
-        <p:txBody>
-          <a:bodyPr rtlCol="0" anchor="ctr"/>
-          <a:lstStyle/>
-          <a:p>
-            <a:pPr algn="ctr"/>
-          </a:p>
-        </p:txBody>
-      </p:sp>
-      <p:sp>
-        <p:nvSpPr>
-          <p:cNvPr id="12" name="Oval 11"/>
-          <p:cNvSpPr/>
-          <p:nvPr/>
-        </p:nvSpPr>
-        <p:spPr>
-          <a:xfrm>
-            <a:off x="1280160" y="1463040"/>
-            <a:ext cx="548640" cy="548640"/>
+            <a:off x="1051560" y="2011680"/>
+            <a:ext cx="1005840" cy="1005840"/>
           </a:xfrm>
           <a:prstGeom prst="ellipse">
             <a:avLst/>
@@ -7633,14 +9308,14 @@
       </p:sp>
       <p:sp>
         <p:nvSpPr>
-          <p:cNvPr id="13" name="TextBox 12"/>
+          <p:cNvPr id="12" name="TextBox 11"/>
           <p:cNvSpPr txBox="1"/>
           <p:nvPr/>
         </p:nvSpPr>
         <p:spPr>
           <a:xfrm>
-            <a:off x="1280160" y="1463040"/>
-            <a:ext cx="548640" cy="548640"/>
+            <a:off x="1051560" y="2011680"/>
+            <a:ext cx="1005840" cy="1005840"/>
           </a:xfrm>
           <a:prstGeom prst="rect">
             <a:avLst/>
@@ -7659,11 +9334,11 @@
               </a:spcAft>
             </a:pPr>
             <a:r>
-              <a:rPr sz="1600" b="1" i="0">
+              <a:rPr sz="2800" b="1" i="0">
                 <a:solidFill>
                   <a:srgbClr val="111010"/>
                 </a:solidFill>
-                <a:latin typeface="Cascadia Code SemiBold"/>
+                <a:latin typeface="Trebuchet MS"/>
               </a:rPr>
               <a:t>1</a:t>
             </a:r>
@@ -7672,14 +9347,14 @@
       </p:sp>
       <p:sp>
         <p:nvSpPr>
-          <p:cNvPr id="14" name="TextBox 13"/>
+          <p:cNvPr id="13" name="TextBox 12"/>
           <p:cNvSpPr txBox="1"/>
           <p:nvPr/>
         </p:nvSpPr>
         <p:spPr>
           <a:xfrm>
-            <a:off x="640080" y="2103120"/>
-            <a:ext cx="1828800" cy="731520"/>
+            <a:off x="457200" y="3246120"/>
+            <a:ext cx="2194560" cy="457200"/>
           </a:xfrm>
           <a:prstGeom prst="rect">
             <a:avLst/>
@@ -7698,11 +9373,11 @@
               </a:spcAft>
             </a:pPr>
             <a:r>
-              <a:rPr sz="1400" b="1" i="0">
+              <a:rPr sz="1900" b="1" i="0">
                 <a:solidFill>
                   <a:srgbClr val="111010"/>
                 </a:solidFill>
-                <a:latin typeface="Cascadia Code SemiBold"/>
+                <a:latin typeface="Trebuchet MS"/>
               </a:rPr>
               <a:t>Предобработка</a:t>
             </a:r>
@@ -7711,14 +9386,14 @@
       </p:sp>
       <p:sp>
         <p:nvSpPr>
-          <p:cNvPr id="15" name="TextBox 14"/>
+          <p:cNvPr id="14" name="TextBox 13"/>
           <p:cNvSpPr txBox="1"/>
           <p:nvPr/>
         </p:nvSpPr>
         <p:spPr>
           <a:xfrm>
-            <a:off x="640080" y="2880360"/>
-            <a:ext cx="1828800" cy="1280160"/>
+            <a:off x="457200" y="3749039"/>
+            <a:ext cx="2194560" cy="914400"/>
           </a:xfrm>
           <a:prstGeom prst="rect">
             <a:avLst/>
@@ -7737,13 +9412,13 @@
               </a:spcAft>
             </a:pPr>
             <a:r>
-              <a:rPr sz="1200" b="0" i="0">
+              <a:rPr sz="1500" b="0" i="0">
                 <a:solidFill>
                   <a:srgbClr val="111010"/>
                 </a:solidFill>
-                <a:latin typeface="Tahoma"/>
+                <a:latin typeface="Trebuchet MS"/>
               </a:rPr>
-              <a:t>типы, выбросы</a:t>
+              <a:t>выбросы, коды,</a:t>
             </a:r>
           </a:p>
           <a:p>
@@ -7753,43 +9428,27 @@
               </a:spcAft>
             </a:pPr>
             <a:r>
-              <a:rPr sz="1200" b="0" i="0">
+              <a:rPr sz="1500" b="0" i="0">
                 <a:solidFill>
                   <a:srgbClr val="111010"/>
                 </a:solidFill>
-                <a:latin typeface="Tahoma"/>
+                <a:latin typeface="Trebuchet MS"/>
               </a:rPr>
-              <a:t>(3·IQR), служебные</a:t>
-            </a:r>
-          </a:p>
-          <a:p>
-            <a:pPr algn="ctr">
-              <a:spcAft>
-                <a:spcPts val="600"/>
-              </a:spcAft>
-            </a:pPr>
-            <a:r>
-              <a:rPr sz="1200" b="0" i="0">
-                <a:solidFill>
-                  <a:srgbClr val="111010"/>
-                </a:solidFill>
-                <a:latin typeface="Tahoma"/>
-              </a:rPr>
-              <a:t>коды, очистка анкет</a:t>
-            </a:r>
-          </a:p>
-        </p:txBody>
-      </p:sp>
-      <p:sp>
-        <p:nvSpPr>
-          <p:cNvPr id="16" name="Right Arrow 15"/>
+              <a:t>очистка анкет</a:t>
+            </a:r>
+          </a:p>
+        </p:txBody>
+      </p:sp>
+      <p:sp>
+        <p:nvSpPr>
+          <p:cNvPr id="15" name="Right Arrow 14"/>
           <p:cNvSpPr/>
           <p:nvPr/>
         </p:nvSpPr>
         <p:spPr>
           <a:xfrm>
-            <a:off x="2578608" y="2788920"/>
-            <a:ext cx="237744" cy="320040"/>
+            <a:off x="2286000" y="2331720"/>
+            <a:ext cx="457200" cy="365760"/>
           </a:xfrm>
           <a:prstGeom prst="rightArrow">
             <a:avLst/>
@@ -7826,62 +9485,14 @@
       </p:sp>
       <p:sp>
         <p:nvSpPr>
-          <p:cNvPr id="17" name="Rounded Rectangle 16"/>
+          <p:cNvPr id="16" name="Oval 15"/>
           <p:cNvSpPr/>
           <p:nvPr/>
         </p:nvSpPr>
         <p:spPr>
           <a:xfrm>
-            <a:off x="2834640" y="1691640"/>
-            <a:ext cx="2011680" cy="2514600"/>
-          </a:xfrm>
-          <a:prstGeom prst="roundRect">
-            <a:avLst>
-              <a:gd name="adj" fmla="val 10000"/>
-            </a:avLst>
-          </a:prstGeom>
-          <a:solidFill>
-            <a:srgbClr val="FFE699"/>
-          </a:solidFill>
-          <a:ln w="15875">
-            <a:solidFill>
-              <a:srgbClr val="FFD966"/>
-            </a:solidFill>
-          </a:ln>
-          <a:effectLst/>
-        </p:spPr>
-        <p:style>
-          <a:lnRef idx="1">
-            <a:schemeClr val="accent1"/>
-          </a:lnRef>
-          <a:fillRef idx="3">
-            <a:schemeClr val="accent1"/>
-          </a:fillRef>
-          <a:effectRef idx="2">
-            <a:schemeClr val="accent1"/>
-          </a:effectRef>
-          <a:fontRef idx="minor">
-            <a:schemeClr val="lt1"/>
-          </a:fontRef>
-        </p:style>
-        <p:txBody>
-          <a:bodyPr rtlCol="0" anchor="ctr"/>
-          <a:lstStyle/>
-          <a:p>
-            <a:pPr algn="ctr"/>
-          </a:p>
-        </p:txBody>
-      </p:sp>
-      <p:sp>
-        <p:nvSpPr>
-          <p:cNvPr id="18" name="Oval 17"/>
-          <p:cNvSpPr/>
-          <p:nvPr/>
-        </p:nvSpPr>
-        <p:spPr>
-          <a:xfrm>
-            <a:off x="3566160" y="1463040"/>
-            <a:ext cx="548640" cy="548640"/>
+            <a:off x="3337560" y="2011680"/>
+            <a:ext cx="1005840" cy="1005840"/>
           </a:xfrm>
           <a:prstGeom prst="ellipse">
             <a:avLst/>
@@ -7918,14 +9529,14 @@
       </p:sp>
       <p:sp>
         <p:nvSpPr>
-          <p:cNvPr id="19" name="TextBox 18"/>
+          <p:cNvPr id="17" name="TextBox 16"/>
           <p:cNvSpPr txBox="1"/>
           <p:nvPr/>
         </p:nvSpPr>
         <p:spPr>
           <a:xfrm>
-            <a:off x="3566160" y="1463040"/>
-            <a:ext cx="548640" cy="548640"/>
+            <a:off x="3337560" y="2011680"/>
+            <a:ext cx="1005840" cy="1005840"/>
           </a:xfrm>
           <a:prstGeom prst="rect">
             <a:avLst/>
@@ -7944,11 +9555,11 @@
               </a:spcAft>
             </a:pPr>
             <a:r>
-              <a:rPr sz="1600" b="1" i="0">
+              <a:rPr sz="2800" b="1" i="0">
                 <a:solidFill>
                   <a:srgbClr val="111010"/>
                 </a:solidFill>
-                <a:latin typeface="Cascadia Code SemiBold"/>
+                <a:latin typeface="Trebuchet MS"/>
               </a:rPr>
               <a:t>2</a:t>
             </a:r>
@@ -7957,14 +9568,14 @@
       </p:sp>
       <p:sp>
         <p:nvSpPr>
-          <p:cNvPr id="20" name="TextBox 19"/>
+          <p:cNvPr id="18" name="TextBox 17"/>
           <p:cNvSpPr txBox="1"/>
           <p:nvPr/>
         </p:nvSpPr>
         <p:spPr>
           <a:xfrm>
-            <a:off x="2926080" y="2103120"/>
-            <a:ext cx="1828800" cy="731520"/>
+            <a:off x="2743200" y="3246120"/>
+            <a:ext cx="2194560" cy="457200"/>
           </a:xfrm>
           <a:prstGeom prst="rect">
             <a:avLst/>
@@ -7983,15 +9594,38 @@
               </a:spcAft>
             </a:pPr>
             <a:r>
-              <a:rPr sz="1400" b="1" i="0">
+              <a:rPr sz="1900" b="1" i="0">
                 <a:solidFill>
                   <a:srgbClr val="111010"/>
                 </a:solidFill>
-                <a:latin typeface="Cascadia Code SemiBold"/>
+                <a:latin typeface="Trebuchet MS"/>
               </a:rPr>
-              <a:t>Описательный</a:t>
-            </a:r>
-          </a:p>
+              <a:t>Описание</a:t>
+            </a:r>
+          </a:p>
+        </p:txBody>
+      </p:sp>
+      <p:sp>
+        <p:nvSpPr>
+          <p:cNvPr id="19" name="TextBox 18"/>
+          <p:cNvSpPr txBox="1"/>
+          <p:nvPr/>
+        </p:nvSpPr>
+        <p:spPr>
+          <a:xfrm>
+            <a:off x="2743200" y="3749039"/>
+            <a:ext cx="2194560" cy="914400"/>
+          </a:xfrm>
+          <a:prstGeom prst="rect">
+            <a:avLst/>
+          </a:prstGeom>
+          <a:noFill/>
+        </p:spPr>
+        <p:txBody>
+          <a:bodyPr wrap="square" anchor="t" lIns="45720" rIns="45720" tIns="27432" bIns="27432">
+            <a:spAutoFit/>
+          </a:bodyPr>
+          <a:lstStyle/>
           <a:p>
             <a:pPr algn="ctr">
               <a:spcAft>
@@ -7999,38 +9633,15 @@
               </a:spcAft>
             </a:pPr>
             <a:r>
-              <a:rPr sz="1400" b="1" i="0">
+              <a:rPr sz="1500" b="0" i="0">
                 <a:solidFill>
                   <a:srgbClr val="111010"/>
                 </a:solidFill>
-                <a:latin typeface="Cascadia Code SemiBold"/>
+                <a:latin typeface="Trebuchet MS"/>
               </a:rPr>
-              <a:t>анализ</a:t>
-            </a:r>
-          </a:p>
-        </p:txBody>
-      </p:sp>
-      <p:sp>
-        <p:nvSpPr>
-          <p:cNvPr id="21" name="TextBox 20"/>
-          <p:cNvSpPr txBox="1"/>
-          <p:nvPr/>
-        </p:nvSpPr>
-        <p:spPr>
-          <a:xfrm>
-            <a:off x="2926080" y="2880360"/>
-            <a:ext cx="1828800" cy="1280160"/>
-          </a:xfrm>
-          <a:prstGeom prst="rect">
-            <a:avLst/>
-          </a:prstGeom>
-          <a:noFill/>
-        </p:spPr>
-        <p:txBody>
-          <a:bodyPr wrap="square" anchor="t" lIns="45720" rIns="45720" tIns="27432" bIns="27432">
-            <a:spAutoFit/>
-          </a:bodyPr>
-          <a:lstStyle/>
+              <a:t>доли по волнам</a:t>
+            </a:r>
+          </a:p>
           <a:p>
             <a:pPr algn="ctr">
               <a:spcAft>
@@ -8038,59 +9649,27 @@
               </a:spcAft>
             </a:pPr>
             <a:r>
-              <a:rPr sz="1200" b="0" i="0">
+              <a:rPr sz="1500" b="0" i="0">
                 <a:solidFill>
                   <a:srgbClr val="111010"/>
                 </a:solidFill>
-                <a:latin typeface="Tahoma"/>
-              </a:rPr>
-              <a:t>доли по волнам</a:t>
-            </a:r>
-          </a:p>
-          <a:p>
-            <a:pPr algn="ctr">
-              <a:spcAft>
-                <a:spcPts val="600"/>
-              </a:spcAft>
-            </a:pPr>
-            <a:r>
-              <a:rPr sz="1200" b="0" i="0">
-                <a:solidFill>
-                  <a:srgbClr val="111010"/>
-                </a:solidFill>
-                <a:latin typeface="Tahoma"/>
+                <a:latin typeface="Trebuchet MS"/>
               </a:rPr>
               <a:t>и группам</a:t>
             </a:r>
           </a:p>
-          <a:p>
-            <a:pPr algn="ctr">
-              <a:spcAft>
-                <a:spcPts val="600"/>
-              </a:spcAft>
-            </a:pPr>
-            <a:r>
-              <a:rPr sz="1200" b="0" i="0">
-                <a:solidFill>
-                  <a:srgbClr val="111010"/>
-                </a:solidFill>
-                <a:latin typeface="Tahoma"/>
-              </a:rPr>
-              <a:t>занятости</a:t>
-            </a:r>
-          </a:p>
-        </p:txBody>
-      </p:sp>
-      <p:sp>
-        <p:nvSpPr>
-          <p:cNvPr id="22" name="Right Arrow 21"/>
+        </p:txBody>
+      </p:sp>
+      <p:sp>
+        <p:nvSpPr>
+          <p:cNvPr id="20" name="Right Arrow 19"/>
           <p:cNvSpPr/>
           <p:nvPr/>
         </p:nvSpPr>
         <p:spPr>
           <a:xfrm>
-            <a:off x="4864608" y="2788920"/>
-            <a:ext cx="237744" cy="320040"/>
+            <a:off x="4572000" y="2331720"/>
+            <a:ext cx="457200" cy="365760"/>
           </a:xfrm>
           <a:prstGeom prst="rightArrow">
             <a:avLst/>
@@ -8127,62 +9706,14 @@
       </p:sp>
       <p:sp>
         <p:nvSpPr>
-          <p:cNvPr id="23" name="Rounded Rectangle 22"/>
+          <p:cNvPr id="21" name="Oval 20"/>
           <p:cNvSpPr/>
           <p:nvPr/>
         </p:nvSpPr>
         <p:spPr>
           <a:xfrm>
-            <a:off x="5120640" y="1691640"/>
-            <a:ext cx="2011680" cy="2514600"/>
-          </a:xfrm>
-          <a:prstGeom prst="roundRect">
-            <a:avLst>
-              <a:gd name="adj" fmla="val 10000"/>
-            </a:avLst>
-          </a:prstGeom>
-          <a:solidFill>
-            <a:srgbClr val="FFF4D7"/>
-          </a:solidFill>
-          <a:ln w="15875">
-            <a:solidFill>
-              <a:srgbClr val="FFD966"/>
-            </a:solidFill>
-          </a:ln>
-          <a:effectLst/>
-        </p:spPr>
-        <p:style>
-          <a:lnRef idx="1">
-            <a:schemeClr val="accent1"/>
-          </a:lnRef>
-          <a:fillRef idx="3">
-            <a:schemeClr val="accent1"/>
-          </a:fillRef>
-          <a:effectRef idx="2">
-            <a:schemeClr val="accent1"/>
-          </a:effectRef>
-          <a:fontRef idx="minor">
-            <a:schemeClr val="lt1"/>
-          </a:fontRef>
-        </p:style>
-        <p:txBody>
-          <a:bodyPr rtlCol="0" anchor="ctr"/>
-          <a:lstStyle/>
-          <a:p>
-            <a:pPr algn="ctr"/>
-          </a:p>
-        </p:txBody>
-      </p:sp>
-      <p:sp>
-        <p:nvSpPr>
-          <p:cNvPr id="24" name="Oval 23"/>
-          <p:cNvSpPr/>
-          <p:nvPr/>
-        </p:nvSpPr>
-        <p:spPr>
-          <a:xfrm>
-            <a:off x="5852159" y="1463040"/>
-            <a:ext cx="548640" cy="548640"/>
+            <a:off x="5623559" y="2011680"/>
+            <a:ext cx="1005840" cy="1005840"/>
           </a:xfrm>
           <a:prstGeom prst="ellipse">
             <a:avLst/>
@@ -8219,14 +9750,14 @@
       </p:sp>
       <p:sp>
         <p:nvSpPr>
-          <p:cNvPr id="25" name="TextBox 24"/>
+          <p:cNvPr id="22" name="TextBox 21"/>
           <p:cNvSpPr txBox="1"/>
           <p:nvPr/>
         </p:nvSpPr>
         <p:spPr>
           <a:xfrm>
-            <a:off x="5852159" y="1463040"/>
-            <a:ext cx="548640" cy="548640"/>
+            <a:off x="5623559" y="2011680"/>
+            <a:ext cx="1005840" cy="1005840"/>
           </a:xfrm>
           <a:prstGeom prst="rect">
             <a:avLst/>
@@ -8245,11 +9776,11 @@
               </a:spcAft>
             </a:pPr>
             <a:r>
-              <a:rPr sz="1600" b="1" i="0">
+              <a:rPr sz="2800" b="1" i="0">
                 <a:solidFill>
                   <a:srgbClr val="111010"/>
                 </a:solidFill>
-                <a:latin typeface="Cascadia Code SemiBold"/>
+                <a:latin typeface="Trebuchet MS"/>
               </a:rPr>
               <a:t>3</a:t>
             </a:r>
@@ -8258,14 +9789,14 @@
       </p:sp>
       <p:sp>
         <p:nvSpPr>
-          <p:cNvPr id="26" name="TextBox 25"/>
+          <p:cNvPr id="23" name="TextBox 22"/>
           <p:cNvSpPr txBox="1"/>
           <p:nvPr/>
         </p:nvSpPr>
         <p:spPr>
           <a:xfrm>
-            <a:off x="5212079" y="2103120"/>
-            <a:ext cx="1828800" cy="731520"/>
+            <a:off x="5029200" y="3246120"/>
+            <a:ext cx="2194560" cy="457200"/>
           </a:xfrm>
           <a:prstGeom prst="rect">
             <a:avLst/>
@@ -8284,11 +9815,11 @@
               </a:spcAft>
             </a:pPr>
             <a:r>
-              <a:rPr sz="1400" b="1" i="0">
+              <a:rPr sz="1900" b="1" i="0">
                 <a:solidFill>
                   <a:srgbClr val="111010"/>
                 </a:solidFill>
-                <a:latin typeface="Cascadia Code SemiBold"/>
+                <a:latin typeface="Trebuchet MS"/>
               </a:rPr>
               <a:t>Корреляции</a:t>
             </a:r>
@@ -8297,14 +9828,14 @@
       </p:sp>
       <p:sp>
         <p:nvSpPr>
-          <p:cNvPr id="27" name="TextBox 26"/>
+          <p:cNvPr id="24" name="TextBox 23"/>
           <p:cNvSpPr txBox="1"/>
           <p:nvPr/>
         </p:nvSpPr>
         <p:spPr>
           <a:xfrm>
-            <a:off x="5212079" y="2880360"/>
-            <a:ext cx="1828800" cy="1280160"/>
+            <a:off x="5029200" y="3749039"/>
+            <a:ext cx="2194560" cy="914400"/>
           </a:xfrm>
           <a:prstGeom prst="rect">
             <a:avLst/>
@@ -8323,59 +9854,27 @@
               </a:spcAft>
             </a:pPr>
             <a:r>
-              <a:rPr sz="1200" b="0" i="0">
+              <a:rPr sz="1500" b="0" i="0">
                 <a:solidFill>
                   <a:srgbClr val="111010"/>
                 </a:solidFill>
-                <a:latin typeface="Tahoma"/>
+                <a:latin typeface="Trebuchet MS"/>
               </a:rPr>
-              <a:t>Спирмен; нормальность</a:t>
-            </a:r>
-          </a:p>
-          <a:p>
-            <a:pPr algn="ctr">
-              <a:spcAft>
-                <a:spcPts val="600"/>
-              </a:spcAft>
-            </a:pPr>
-            <a:r>
-              <a:rPr sz="1200" b="0" i="0">
-                <a:solidFill>
-                  <a:srgbClr val="111010"/>
-                </a:solidFill>
-                <a:latin typeface="Tahoma"/>
-              </a:rPr>
-              <a:t>по Шапиро–Уилку</a:t>
-            </a:r>
-          </a:p>
-          <a:p>
-            <a:pPr algn="ctr">
-              <a:spcAft>
-                <a:spcPts val="600"/>
-              </a:spcAft>
-            </a:pPr>
-            <a:r>
-              <a:rPr sz="1200" b="0" i="0">
-                <a:solidFill>
-                  <a:srgbClr val="111010"/>
-                </a:solidFill>
-                <a:latin typeface="Tahoma"/>
-              </a:rPr>
-              <a:t>отвергнута</a:t>
-            </a:r>
-          </a:p>
-        </p:txBody>
-      </p:sp>
-      <p:sp>
-        <p:nvSpPr>
-          <p:cNvPr id="28" name="Right Arrow 27"/>
+              <a:t>Спирмен</a:t>
+            </a:r>
+          </a:p>
+        </p:txBody>
+      </p:sp>
+      <p:sp>
+        <p:nvSpPr>
+          <p:cNvPr id="25" name="Right Arrow 24"/>
           <p:cNvSpPr/>
           <p:nvPr/>
         </p:nvSpPr>
         <p:spPr>
           <a:xfrm>
-            <a:off x="7150608" y="2788920"/>
-            <a:ext cx="237744" cy="320040"/>
+            <a:off x="6858000" y="2331720"/>
+            <a:ext cx="457200" cy="365760"/>
           </a:xfrm>
           <a:prstGeom prst="rightArrow">
             <a:avLst/>
@@ -8412,62 +9911,14 @@
       </p:sp>
       <p:sp>
         <p:nvSpPr>
-          <p:cNvPr id="29" name="Rounded Rectangle 28"/>
+          <p:cNvPr id="26" name="Oval 25"/>
           <p:cNvSpPr/>
           <p:nvPr/>
         </p:nvSpPr>
         <p:spPr>
           <a:xfrm>
-            <a:off x="7406640" y="1691640"/>
-            <a:ext cx="2011680" cy="2514600"/>
-          </a:xfrm>
-          <a:prstGeom prst="roundRect">
-            <a:avLst>
-              <a:gd name="adj" fmla="val 10000"/>
-            </a:avLst>
-          </a:prstGeom>
-          <a:solidFill>
-            <a:srgbClr val="FFE699"/>
-          </a:solidFill>
-          <a:ln w="15875">
-            <a:solidFill>
-              <a:srgbClr val="FFD966"/>
-            </a:solidFill>
-          </a:ln>
-          <a:effectLst/>
-        </p:spPr>
-        <p:style>
-          <a:lnRef idx="1">
-            <a:schemeClr val="accent1"/>
-          </a:lnRef>
-          <a:fillRef idx="3">
-            <a:schemeClr val="accent1"/>
-          </a:fillRef>
-          <a:effectRef idx="2">
-            <a:schemeClr val="accent1"/>
-          </a:effectRef>
-          <a:fontRef idx="minor">
-            <a:schemeClr val="lt1"/>
-          </a:fontRef>
-        </p:style>
-        <p:txBody>
-          <a:bodyPr rtlCol="0" anchor="ctr"/>
-          <a:lstStyle/>
-          <a:p>
-            <a:pPr algn="ctr"/>
-          </a:p>
-        </p:txBody>
-      </p:sp>
-      <p:sp>
-        <p:nvSpPr>
-          <p:cNvPr id="30" name="Oval 29"/>
-          <p:cNvSpPr/>
-          <p:nvPr/>
-        </p:nvSpPr>
-        <p:spPr>
-          <a:xfrm>
-            <a:off x="8138160" y="1463040"/>
-            <a:ext cx="548640" cy="548640"/>
+            <a:off x="7909560" y="2011680"/>
+            <a:ext cx="1005840" cy="1005840"/>
           </a:xfrm>
           <a:prstGeom prst="ellipse">
             <a:avLst/>
@@ -8504,14 +9955,14 @@
       </p:sp>
       <p:sp>
         <p:nvSpPr>
-          <p:cNvPr id="31" name="TextBox 30"/>
+          <p:cNvPr id="27" name="TextBox 26"/>
           <p:cNvSpPr txBox="1"/>
           <p:nvPr/>
         </p:nvSpPr>
         <p:spPr>
           <a:xfrm>
-            <a:off x="8138160" y="1463040"/>
-            <a:ext cx="548640" cy="548640"/>
+            <a:off x="7909560" y="2011680"/>
+            <a:ext cx="1005840" cy="1005840"/>
           </a:xfrm>
           <a:prstGeom prst="rect">
             <a:avLst/>
@@ -8530,11 +9981,11 @@
               </a:spcAft>
             </a:pPr>
             <a:r>
-              <a:rPr sz="1600" b="1" i="0">
+              <a:rPr sz="2800" b="1" i="0">
                 <a:solidFill>
                   <a:srgbClr val="111010"/>
                 </a:solidFill>
-                <a:latin typeface="Cascadia Code SemiBold"/>
+                <a:latin typeface="Trebuchet MS"/>
               </a:rPr>
               <a:t>4</a:t>
             </a:r>
@@ -8543,14 +9994,14 @@
       </p:sp>
       <p:sp>
         <p:nvSpPr>
-          <p:cNvPr id="32" name="TextBox 31"/>
+          <p:cNvPr id="28" name="TextBox 27"/>
           <p:cNvSpPr txBox="1"/>
           <p:nvPr/>
         </p:nvSpPr>
         <p:spPr>
           <a:xfrm>
-            <a:off x="7498079" y="2103120"/>
-            <a:ext cx="1828800" cy="731520"/>
+            <a:off x="7315200" y="3246120"/>
+            <a:ext cx="2194560" cy="457200"/>
           </a:xfrm>
           <a:prstGeom prst="rect">
             <a:avLst/>
@@ -8569,27 +10020,27 @@
               </a:spcAft>
             </a:pPr>
             <a:r>
-              <a:rPr sz="1400" b="1" i="0">
+              <a:rPr sz="1900" b="1" i="0">
                 <a:solidFill>
                   <a:srgbClr val="111010"/>
                 </a:solidFill>
-                <a:latin typeface="Cascadia Code SemiBold"/>
+                <a:latin typeface="Trebuchet MS"/>
               </a:rPr>
-              <a:t>7 гипотез</a:t>
-            </a:r>
-          </a:p>
-        </p:txBody>
-      </p:sp>
-      <p:sp>
-        <p:nvSpPr>
-          <p:cNvPr id="33" name="TextBox 32"/>
+              <a:t>Гипотезы</a:t>
+            </a:r>
+          </a:p>
+        </p:txBody>
+      </p:sp>
+      <p:sp>
+        <p:nvSpPr>
+          <p:cNvPr id="29" name="TextBox 28"/>
           <p:cNvSpPr txBox="1"/>
           <p:nvPr/>
         </p:nvSpPr>
         <p:spPr>
           <a:xfrm>
-            <a:off x="7498079" y="2880360"/>
-            <a:ext cx="1828800" cy="1280160"/>
+            <a:off x="7315200" y="3749039"/>
+            <a:ext cx="2194560" cy="914400"/>
           </a:xfrm>
           <a:prstGeom prst="rect">
             <a:avLst/>
@@ -8608,13 +10059,13 @@
               </a:spcAft>
             </a:pPr>
             <a:r>
-              <a:rPr sz="1200" b="0" i="0">
+              <a:rPr sz="1500" b="0" i="0">
                 <a:solidFill>
                   <a:srgbClr val="111010"/>
                 </a:solidFill>
-                <a:latin typeface="Tahoma"/>
+                <a:latin typeface="Trebuchet MS"/>
               </a:rPr>
-              <a:t>Манн–Уитни, χ² +</a:t>
+              <a:t>Манн–Уитни, χ²,</a:t>
             </a:r>
           </a:p>
           <a:p>
@@ -8624,43 +10075,27 @@
               </a:spcAft>
             </a:pPr>
             <a:r>
-              <a:rPr sz="1200" b="0" i="0">
+              <a:rPr sz="1500" b="0" i="0">
                 <a:solidFill>
                   <a:srgbClr val="111010"/>
                 </a:solidFill>
-                <a:latin typeface="Tahoma"/>
+                <a:latin typeface="Trebuchet MS"/>
               </a:rPr>
-              <a:t>V Крамера, Уилкоксон,</a:t>
-            </a:r>
-          </a:p>
-          <a:p>
-            <a:pPr algn="ctr">
-              <a:spcAft>
-                <a:spcPts val="600"/>
-              </a:spcAft>
-            </a:pPr>
-            <a:r>
-              <a:rPr sz="1200" b="0" i="0">
-                <a:solidFill>
-                  <a:srgbClr val="111010"/>
-                </a:solidFill>
-                <a:latin typeface="Tahoma"/>
-              </a:rPr>
-              <a:t>Бонферрони</a:t>
-            </a:r>
-          </a:p>
-        </p:txBody>
-      </p:sp>
-      <p:sp>
-        <p:nvSpPr>
-          <p:cNvPr id="34" name="Right Arrow 33"/>
+              <a:t>Уилкоксон</a:t>
+            </a:r>
+          </a:p>
+        </p:txBody>
+      </p:sp>
+      <p:sp>
+        <p:nvSpPr>
+          <p:cNvPr id="30" name="Right Arrow 29"/>
           <p:cNvSpPr/>
           <p:nvPr/>
         </p:nvSpPr>
         <p:spPr>
           <a:xfrm>
-            <a:off x="9436608" y="2788920"/>
-            <a:ext cx="237744" cy="320040"/>
+            <a:off x="9144000" y="2331720"/>
+            <a:ext cx="457200" cy="365760"/>
           </a:xfrm>
           <a:prstGeom prst="rightArrow">
             <a:avLst/>
@@ -8697,62 +10132,14 @@
       </p:sp>
       <p:sp>
         <p:nvSpPr>
-          <p:cNvPr id="35" name="Rounded Rectangle 34"/>
+          <p:cNvPr id="31" name="Oval 30"/>
           <p:cNvSpPr/>
           <p:nvPr/>
         </p:nvSpPr>
         <p:spPr>
           <a:xfrm>
-            <a:off x="9692640" y="1691640"/>
-            <a:ext cx="2011680" cy="2514600"/>
-          </a:xfrm>
-          <a:prstGeom prst="roundRect">
-            <a:avLst>
-              <a:gd name="adj" fmla="val 10000"/>
-            </a:avLst>
-          </a:prstGeom>
-          <a:solidFill>
-            <a:srgbClr val="FFF4D7"/>
-          </a:solidFill>
-          <a:ln w="15875">
-            <a:solidFill>
-              <a:srgbClr val="FFD966"/>
-            </a:solidFill>
-          </a:ln>
-          <a:effectLst/>
-        </p:spPr>
-        <p:style>
-          <a:lnRef idx="1">
-            <a:schemeClr val="accent1"/>
-          </a:lnRef>
-          <a:fillRef idx="3">
-            <a:schemeClr val="accent1"/>
-          </a:fillRef>
-          <a:effectRef idx="2">
-            <a:schemeClr val="accent1"/>
-          </a:effectRef>
-          <a:fontRef idx="minor">
-            <a:schemeClr val="lt1"/>
-          </a:fontRef>
-        </p:style>
-        <p:txBody>
-          <a:bodyPr rtlCol="0" anchor="ctr"/>
-          <a:lstStyle/>
-          <a:p>
-            <a:pPr algn="ctr"/>
-          </a:p>
-        </p:txBody>
-      </p:sp>
-      <p:sp>
-        <p:nvSpPr>
-          <p:cNvPr id="36" name="Oval 35"/>
-          <p:cNvSpPr/>
-          <p:nvPr/>
-        </p:nvSpPr>
-        <p:spPr>
-          <a:xfrm>
-            <a:off x="10424160" y="1463040"/>
-            <a:ext cx="548640" cy="548640"/>
+            <a:off x="10195560" y="2011680"/>
+            <a:ext cx="1005840" cy="1005840"/>
           </a:xfrm>
           <a:prstGeom prst="ellipse">
             <a:avLst/>
@@ -8789,14 +10176,14 @@
       </p:sp>
       <p:sp>
         <p:nvSpPr>
-          <p:cNvPr id="37" name="TextBox 36"/>
+          <p:cNvPr id="32" name="TextBox 31"/>
           <p:cNvSpPr txBox="1"/>
           <p:nvPr/>
         </p:nvSpPr>
         <p:spPr>
           <a:xfrm>
-            <a:off x="10424160" y="1463040"/>
-            <a:ext cx="548640" cy="548640"/>
+            <a:off x="10195560" y="2011680"/>
+            <a:ext cx="1005840" cy="1005840"/>
           </a:xfrm>
           <a:prstGeom prst="rect">
             <a:avLst/>
@@ -8815,11 +10202,11 @@
               </a:spcAft>
             </a:pPr>
             <a:r>
-              <a:rPr sz="1600" b="1" i="0">
+              <a:rPr sz="2800" b="1" i="0">
                 <a:solidFill>
                   <a:srgbClr val="111010"/>
                 </a:solidFill>
-                <a:latin typeface="Cascadia Code SemiBold"/>
+                <a:latin typeface="Trebuchet MS"/>
               </a:rPr>
               <a:t>5</a:t>
             </a:r>
@@ -8828,14 +10215,14 @@
       </p:sp>
       <p:sp>
         <p:nvSpPr>
-          <p:cNvPr id="38" name="TextBox 37"/>
+          <p:cNvPr id="33" name="TextBox 32"/>
           <p:cNvSpPr txBox="1"/>
           <p:nvPr/>
         </p:nvSpPr>
         <p:spPr>
           <a:xfrm>
-            <a:off x="9784080" y="2103120"/>
-            <a:ext cx="1828800" cy="731520"/>
+            <a:off x="9601200" y="3246120"/>
+            <a:ext cx="2194560" cy="457200"/>
           </a:xfrm>
           <a:prstGeom prst="rect">
             <a:avLst/>
@@ -8854,11 +10241,11 @@
               </a:spcAft>
             </a:pPr>
             <a:r>
-              <a:rPr sz="1400" b="1" i="0">
+              <a:rPr sz="1900" b="1" i="0">
                 <a:solidFill>
                   <a:srgbClr val="111010"/>
                 </a:solidFill>
-                <a:latin typeface="Cascadia Code SemiBold"/>
+                <a:latin typeface="Trebuchet MS"/>
               </a:rPr>
               <a:t>Регрессия</a:t>
             </a:r>
@@ -8867,14 +10254,14 @@
       </p:sp>
       <p:sp>
         <p:nvSpPr>
-          <p:cNvPr id="39" name="TextBox 38"/>
+          <p:cNvPr id="34" name="TextBox 33"/>
           <p:cNvSpPr txBox="1"/>
           <p:nvPr/>
         </p:nvSpPr>
         <p:spPr>
           <a:xfrm>
-            <a:off x="9784080" y="2880360"/>
-            <a:ext cx="1828800" cy="1280160"/>
+            <a:off x="9601200" y="3749039"/>
+            <a:ext cx="2194560" cy="914400"/>
           </a:xfrm>
           <a:prstGeom prst="rect">
             <a:avLst/>
@@ -8893,13 +10280,13 @@
               </a:spcAft>
             </a:pPr>
             <a:r>
-              <a:rPr sz="1200" b="0" i="0">
+              <a:rPr sz="1500" b="0" i="0">
                 <a:solidFill>
                   <a:srgbClr val="111010"/>
                 </a:solidFill>
-                <a:latin typeface="Tahoma"/>
+                <a:latin typeface="Trebuchet MS"/>
               </a:rPr>
-              <a:t>логистическая (OR),</a:t>
+              <a:t>логистическая,</a:t>
             </a:r>
           </a:p>
           <a:p>
@@ -8909,15 +10296,38 @@
               </a:spcAft>
             </a:pPr>
             <a:r>
-              <a:rPr sz="1200" b="0" i="0">
+              <a:rPr sz="1500" b="0" i="0">
                 <a:solidFill>
                   <a:srgbClr val="111010"/>
                 </a:solidFill>
-                <a:latin typeface="Tahoma"/>
+                <a:latin typeface="Trebuchet MS"/>
               </a:rPr>
-              <a:t>контроль пола,</a:t>
-            </a:r>
-          </a:p>
+              <a:t>шансы (OR)</a:t>
+            </a:r>
+          </a:p>
+        </p:txBody>
+      </p:sp>
+      <p:sp>
+        <p:nvSpPr>
+          <p:cNvPr id="35" name="TextBox 34"/>
+          <p:cNvSpPr txBox="1"/>
+          <p:nvPr/>
+        </p:nvSpPr>
+        <p:spPr>
+          <a:xfrm>
+            <a:off x="548640" y="5212080"/>
+            <a:ext cx="11064240" cy="548640"/>
+          </a:xfrm>
+          <a:prstGeom prst="rect">
+            <a:avLst/>
+          </a:prstGeom>
+          <a:noFill/>
+        </p:spPr>
+        <p:txBody>
+          <a:bodyPr wrap="square" anchor="t" lIns="45720" rIns="45720" tIns="27432" bIns="27432">
+            <a:spAutoFit/>
+          </a:bodyPr>
+          <a:lstStyle/>
           <a:p>
             <a:pPr algn="ctr">
               <a:spcAft>
@@ -8925,196 +10335,13 @@
               </a:spcAft>
             </a:pPr>
             <a:r>
-              <a:rPr sz="1200" b="0" i="0">
-                <a:solidFill>
-                  <a:srgbClr val="111010"/>
-                </a:solidFill>
-                <a:latin typeface="Tahoma"/>
+              <a:rPr sz="1700" b="0" i="0">
+                <a:solidFill>
+                  <a:srgbClr val="848484"/>
+                </a:solidFill>
+                <a:latin typeface="Trebuchet MS"/>
               </a:rPr>
-              <a:t>направления, финансов</a:t>
-            </a:r>
-          </a:p>
-        </p:txBody>
-      </p:sp>
-      <p:sp>
-        <p:nvSpPr>
-          <p:cNvPr id="40" name="TextBox 39"/>
-          <p:cNvSpPr txBox="1"/>
-          <p:nvPr/>
-        </p:nvSpPr>
-        <p:spPr>
-          <a:xfrm>
-            <a:off x="548640" y="4480560"/>
-            <a:ext cx="5486400" cy="411480"/>
-          </a:xfrm>
-          <a:prstGeom prst="rect">
-            <a:avLst/>
-          </a:prstGeom>
-          <a:noFill/>
-        </p:spPr>
-        <p:txBody>
-          <a:bodyPr wrap="square" anchor="t" lIns="45720" rIns="45720" tIns="27432" bIns="27432">
-            <a:spAutoFit/>
-          </a:bodyPr>
-          <a:lstStyle/>
-          <a:p>
-            <a:pPr algn="l">
-              <a:spcAft>
-                <a:spcPts val="600"/>
-              </a:spcAft>
-            </a:pPr>
-            <a:r>
-              <a:rPr sz="1600" b="1" i="0">
-                <a:solidFill>
-                  <a:srgbClr val="111010"/>
-                </a:solidFill>
-                <a:latin typeface="Cascadia Code SemiBold"/>
-              </a:rPr>
-              <a:t>Почему такие методы</a:t>
-            </a:r>
-          </a:p>
-        </p:txBody>
-      </p:sp>
-      <p:sp>
-        <p:nvSpPr>
-          <p:cNvPr id="41" name="TextBox 40"/>
-          <p:cNvSpPr txBox="1"/>
-          <p:nvPr/>
-        </p:nvSpPr>
-        <p:spPr>
-          <a:xfrm>
-            <a:off x="548640" y="4892040"/>
-            <a:ext cx="11155680" cy="457200"/>
-          </a:xfrm>
-          <a:prstGeom prst="rect">
-            <a:avLst/>
-          </a:prstGeom>
-          <a:noFill/>
-        </p:spPr>
-        <p:txBody>
-          <a:bodyPr wrap="square" anchor="t" lIns="45720" rIns="45720" tIns="27432" bIns="27432">
-            <a:spAutoFit/>
-          </a:bodyPr>
-          <a:lstStyle/>
-          <a:p>
-            <a:pPr algn="l">
-              <a:spcAft>
-                <a:spcPts val="600"/>
-              </a:spcAft>
-            </a:pPr>
-            <a:r>
-              <a:rPr sz="1400" b="1" i="0">
-                <a:solidFill>
-                  <a:srgbClr val="111010"/>
-                </a:solidFill>
-                <a:latin typeface="Tahoma"/>
-              </a:rPr>
-              <a:t>Распределения не нормальные </a:t>
-            </a:r>
-            <a:r>
-              <a:rPr sz="1400" b="0" i="0">
-                <a:solidFill>
-                  <a:srgbClr val="111010"/>
-                </a:solidFill>
-                <a:latin typeface="Tahoma"/>
-              </a:rPr>
-              <a:t>и шкалы порядковые → Спирмен и Манн–Уитни вместо Пирсона и t-теста</a:t>
-            </a:r>
-          </a:p>
-        </p:txBody>
-      </p:sp>
-      <p:sp>
-        <p:nvSpPr>
-          <p:cNvPr id="42" name="TextBox 41"/>
-          <p:cNvSpPr txBox="1"/>
-          <p:nvPr/>
-        </p:nvSpPr>
-        <p:spPr>
-          <a:xfrm>
-            <a:off x="548640" y="5349240"/>
-            <a:ext cx="11155680" cy="457200"/>
-          </a:xfrm>
-          <a:prstGeom prst="rect">
-            <a:avLst/>
-          </a:prstGeom>
-          <a:noFill/>
-        </p:spPr>
-        <p:txBody>
-          <a:bodyPr wrap="square" anchor="t" lIns="45720" rIns="45720" tIns="27432" bIns="27432">
-            <a:spAutoFit/>
-          </a:bodyPr>
-          <a:lstStyle/>
-          <a:p>
-            <a:pPr algn="l">
-              <a:spcAft>
-                <a:spcPts val="600"/>
-              </a:spcAft>
-            </a:pPr>
-            <a:r>
-              <a:rPr sz="1400" b="1" i="0">
-                <a:solidFill>
-                  <a:srgbClr val="111010"/>
-                </a:solidFill>
-                <a:latin typeface="Tahoma"/>
-              </a:rPr>
-              <a:t>Результаты «да/нет» </a:t>
-            </a:r>
-            <a:r>
-              <a:rPr sz="1400" b="0" i="0">
-                <a:solidFill>
-                  <a:srgbClr val="111010"/>
-                </a:solidFill>
-                <a:latin typeface="Tahoma"/>
-              </a:rPr>
-              <a:t>(хорошие оценки, мысли об отчислении) → логистическая регрессия</a:t>
-            </a:r>
-          </a:p>
-        </p:txBody>
-      </p:sp>
-      <p:sp>
-        <p:nvSpPr>
-          <p:cNvPr id="43" name="TextBox 42"/>
-          <p:cNvSpPr txBox="1"/>
-          <p:nvPr/>
-        </p:nvSpPr>
-        <p:spPr>
-          <a:xfrm>
-            <a:off x="548640" y="5806440"/>
-            <a:ext cx="11155680" cy="457200"/>
-          </a:xfrm>
-          <a:prstGeom prst="rect">
-            <a:avLst/>
-          </a:prstGeom>
-          <a:noFill/>
-        </p:spPr>
-        <p:txBody>
-          <a:bodyPr wrap="square" anchor="t" lIns="45720" rIns="45720" tIns="27432" bIns="27432">
-            <a:spAutoFit/>
-          </a:bodyPr>
-          <a:lstStyle/>
-          <a:p>
-            <a:pPr algn="l">
-              <a:spcAft>
-                <a:spcPts val="600"/>
-              </a:spcAft>
-            </a:pPr>
-            <a:r>
-              <a:rPr sz="1400" b="1" i="0">
-                <a:solidFill>
-                  <a:srgbClr val="111010"/>
-                </a:solidFill>
-                <a:latin typeface="Tahoma"/>
-              </a:rPr>
-              <a:t>Один студент — две волны </a:t>
-            </a:r>
-            <a:r>
-              <a:rPr sz="1400" b="0" i="0">
-                <a:solidFill>
-                  <a:srgbClr val="111010"/>
-                </a:solidFill>
-                <a:latin typeface="Tahoma"/>
-              </a:rPr>
-              <a:t>→ тесты по волнам отдельно, ошибки регрессии кластеризованы по студенту</a:t>
+              <a:t>Данные порядковые и не нормальные → непараметрические методы</a:t>
             </a:r>
           </a:p>
         </p:txBody>
@@ -9183,7 +10410,7 @@
                 <a:solidFill>
                   <a:srgbClr val="111010"/>
                 </a:solidFill>
-                <a:latin typeface="Cascadia Code SemiBold"/>
+                <a:latin typeface="Courier New"/>
               </a:rPr>
               <a:t>ВОПРОС</a:t>
             </a:r>
@@ -9236,7 +10463,7 @@
                 <a:solidFill>
                   <a:srgbClr val="111010"/>
                 </a:solidFill>
-                <a:latin typeface="Cascadia Code SemiBold"/>
+                <a:latin typeface="Courier New"/>
               </a:rPr>
               <a:t>ДАННЫЕ</a:t>
             </a:r>
@@ -9289,7 +10516,7 @@
                 <a:solidFill>
                   <a:srgbClr val="111010"/>
                 </a:solidFill>
-                <a:latin typeface="Cascadia Code SemiBold"/>
+                <a:latin typeface="Courier New"/>
               </a:rPr>
               <a:t>МЕТОДЫ</a:t>
             </a:r>
@@ -9342,7 +10569,7 @@
                 <a:solidFill>
                   <a:srgbClr val="111010"/>
                 </a:solidFill>
-                <a:latin typeface="Cascadia Code SemiBold"/>
+                <a:latin typeface="Courier New"/>
               </a:rPr>
               <a:t>РЕЗУЛЬТАТЫ</a:t>
             </a:r>
@@ -9395,7 +10622,7 @@
                 <a:solidFill>
                   <a:srgbClr val="111010"/>
                 </a:solidFill>
-                <a:latin typeface="Cascadia Code SemiBold"/>
+                <a:latin typeface="Courier New"/>
               </a:rPr>
               <a:t>ВЫВОДЫ</a:t>
             </a:r>
@@ -9522,7 +10749,7 @@
                 <a:solidFill>
                   <a:srgbClr val="848484"/>
                 </a:solidFill>
-                <a:latin typeface="Tahoma"/>
+                <a:latin typeface="Trebuchet MS"/>
               </a:rPr>
               <a:t>5</a:t>
             </a:r>
@@ -9557,28 +10784,67 @@
               </a:spcAft>
             </a:pPr>
             <a:r>
-              <a:rPr sz="2800" b="0" i="0">
+              <a:rPr sz="3000" b="1" i="0">
                 <a:solidFill>
                   <a:srgbClr val="111010"/>
                 </a:solidFill>
-                <a:latin typeface="Arial Black"/>
+                <a:latin typeface="Trebuchet MS"/>
               </a:rPr>
-              <a:t>Работает почти половина — в основном ради денег</a:t>
+              <a:t>Работает почти половина студентов</a:t>
+            </a:r>
+          </a:p>
+        </p:txBody>
+      </p:sp>
+      <p:sp>
+        <p:nvSpPr>
+          <p:cNvPr id="11" name="TextBox 10"/>
+          <p:cNvSpPr txBox="1"/>
+          <p:nvPr/>
+        </p:nvSpPr>
+        <p:spPr>
+          <a:xfrm>
+            <a:off x="548640" y="1508760"/>
+            <a:ext cx="6858000" cy="365760"/>
+          </a:xfrm>
+          <a:prstGeom prst="rect">
+            <a:avLst/>
+          </a:prstGeom>
+          <a:noFill/>
+        </p:spPr>
+        <p:txBody>
+          <a:bodyPr wrap="square" anchor="t" lIns="45720" rIns="45720" tIns="27432" bIns="27432">
+            <a:spAutoFit/>
+          </a:bodyPr>
+          <a:lstStyle/>
+          <a:p>
+            <a:pPr algn="l">
+              <a:spcAft>
+                <a:spcPts val="600"/>
+              </a:spcAft>
+            </a:pPr>
+            <a:r>
+              <a:rPr sz="1300" b="0" i="0">
+                <a:solidFill>
+                  <a:srgbClr val="848484"/>
+                </a:solidFill>
+                <a:latin typeface="Trebuchet MS"/>
+              </a:rPr>
+              <a:t>Есть ли оплачиваемая работа, % студентов</a:t>
             </a:r>
           </a:p>
         </p:txBody>
       </p:sp>
       <p:graphicFrame>
         <p:nvGraphicFramePr>
-          <p:cNvPr id="11" name="Chart 10"/>
+          <p:cNvPr id="12" name="Chart 11"/>
           <p:cNvGraphicFramePr>
             <a:graphicFrameLocks noGrp="1"/>
           </p:cNvGraphicFramePr>
           <p:nvPr/>
         </p:nvGraphicFramePr>
         <p:xfrm>
-          <a:off x="457200" y="1600200"/>
-          <a:ext cx="6949440" cy="4663440"/>
+          <a:off x="457200" y="1874519"/>
+          <a:ext cx="7132320" cy="4389120"/>
         </p:xfrm>
         <a:graphic>
           <a:graphicData uri="http://schemas.openxmlformats.org/drawingml/2006/chart">
@@ -9588,14 +10854,14 @@
       </p:graphicFrame>
       <p:sp>
         <p:nvSpPr>
-          <p:cNvPr id="12" name="TextBox 11"/>
+          <p:cNvPr id="13" name="TextBox 12"/>
           <p:cNvSpPr txBox="1"/>
           <p:nvPr/>
         </p:nvSpPr>
         <p:spPr>
           <a:xfrm>
-            <a:off x="7955279" y="1645920"/>
-            <a:ext cx="3931920" cy="914400"/>
+            <a:off x="8138160" y="2011680"/>
+            <a:ext cx="3657600" cy="868680"/>
           </a:xfrm>
           <a:prstGeom prst="rect">
             <a:avLst/>
@@ -9614,11 +10880,11 @@
               </a:spcAft>
             </a:pPr>
             <a:r>
-              <a:rPr sz="4400" b="1" i="0">
+              <a:rPr sz="5400" b="1" i="0">
                 <a:solidFill>
                   <a:srgbClr val="C55A11"/>
                 </a:solidFill>
-                <a:latin typeface="Cascadia Code SemiBold"/>
+                <a:latin typeface="Trebuchet MS"/>
               </a:rPr>
               <a:t>×2</a:t>
             </a:r>
@@ -9627,14 +10893,14 @@
       </p:sp>
       <p:sp>
         <p:nvSpPr>
-          <p:cNvPr id="13" name="TextBox 12"/>
+          <p:cNvPr id="14" name="TextBox 13"/>
           <p:cNvSpPr txBox="1"/>
           <p:nvPr/>
         </p:nvSpPr>
         <p:spPr>
           <a:xfrm>
-            <a:off x="7955279" y="2560320"/>
-            <a:ext cx="3931920" cy="731520"/>
+            <a:off x="8138160" y="2880360"/>
+            <a:ext cx="3657600" cy="731520"/>
           </a:xfrm>
           <a:prstGeom prst="rect">
             <a:avLst/>
@@ -9653,28 +10919,28 @@
               </a:spcAft>
             </a:pPr>
             <a:r>
-              <a:rPr sz="1400" b="0" i="0">
+              <a:rPr sz="1600" b="0" i="0">
                 <a:solidFill>
                   <a:srgbClr val="111010"/>
                 </a:solidFill>
-                <a:latin typeface="Tahoma"/>
+                <a:latin typeface="Trebuchet MS"/>
               </a:rPr>
-              <a:t>работа на полный день
-к 4 курсу: 4% → 9%</a:t>
-            </a:r>
-          </a:p>
-        </p:txBody>
-      </p:sp>
-      <p:sp>
-        <p:nvSpPr>
-          <p:cNvPr id="14" name="TextBox 13"/>
+              <a:t>полный день к 4 курсу
+(4% → 9%)</a:t>
+            </a:r>
+          </a:p>
+        </p:txBody>
+      </p:sp>
+      <p:sp>
+        <p:nvSpPr>
+          <p:cNvPr id="15" name="TextBox 14"/>
           <p:cNvSpPr txBox="1"/>
           <p:nvPr/>
         </p:nvSpPr>
         <p:spPr>
           <a:xfrm>
-            <a:off x="7955279" y="3154680"/>
-            <a:ext cx="3931920" cy="914400"/>
+            <a:off x="8138160" y="4023360"/>
+            <a:ext cx="3657600" cy="868680"/>
           </a:xfrm>
           <a:prstGeom prst="rect">
             <a:avLst/>
@@ -9693,11 +10959,11 @@
               </a:spcAft>
             </a:pPr>
             <a:r>
-              <a:rPr sz="4400" b="1" i="0">
+              <a:rPr sz="5400" b="1" i="0">
                 <a:solidFill>
                   <a:srgbClr val="111010"/>
                 </a:solidFill>
-                <a:latin typeface="Cascadia Code SemiBold"/>
+                <a:latin typeface="Trebuchet MS"/>
               </a:rPr>
               <a:t>~70%</a:t>
             </a:r>
@@ -9706,14 +10972,14 @@
       </p:sp>
       <p:sp>
         <p:nvSpPr>
-          <p:cNvPr id="15" name="TextBox 14"/>
+          <p:cNvPr id="16" name="TextBox 15"/>
           <p:cNvSpPr txBox="1"/>
           <p:nvPr/>
         </p:nvSpPr>
         <p:spPr>
           <a:xfrm>
-            <a:off x="7955279" y="4069080"/>
-            <a:ext cx="3931920" cy="731520"/>
+            <a:off x="8138160" y="4892040"/>
+            <a:ext cx="3657600" cy="731520"/>
           </a:xfrm>
           <a:prstGeom prst="rect">
             <a:avLst/>
@@ -9732,93 +10998,13 @@
               </a:spcAft>
             </a:pPr>
             <a:r>
-              <a:rPr sz="1400" b="0" i="0">
+              <a:rPr sz="1600" b="0" i="0">
                 <a:solidFill>
                   <a:srgbClr val="111010"/>
                 </a:solidFill>
-                <a:latin typeface="Tahoma"/>
+                <a:latin typeface="Trebuchet MS"/>
               </a:rPr>
-              <a:t>работают ради денег:
-содержать себя, доп. доход</a:t>
-            </a:r>
-          </a:p>
-        </p:txBody>
-      </p:sp>
-      <p:sp>
-        <p:nvSpPr>
-          <p:cNvPr id="16" name="TextBox 15"/>
-          <p:cNvSpPr txBox="1"/>
-          <p:nvPr/>
-        </p:nvSpPr>
-        <p:spPr>
-          <a:xfrm>
-            <a:off x="7955279" y="4663440"/>
-            <a:ext cx="3931920" cy="914400"/>
-          </a:xfrm>
-          <a:prstGeom prst="rect">
-            <a:avLst/>
-          </a:prstGeom>
-          <a:noFill/>
-        </p:spPr>
-        <p:txBody>
-          <a:bodyPr wrap="square" anchor="t" lIns="45720" rIns="45720" tIns="27432" bIns="27432">
-            <a:spAutoFit/>
-          </a:bodyPr>
-          <a:lstStyle/>
-          <a:p>
-            <a:pPr algn="l">
-              <a:spcAft>
-                <a:spcPts val="600"/>
-              </a:spcAft>
-            </a:pPr>
-            <a:r>
-              <a:rPr sz="4400" b="1" i="0">
-                <a:solidFill>
-                  <a:srgbClr val="111010"/>
-                </a:solidFill>
-                <a:latin typeface="Cascadia Code SemiBold"/>
-              </a:rPr>
-              <a:t>51%</a:t>
-            </a:r>
-          </a:p>
-        </p:txBody>
-      </p:sp>
-      <p:sp>
-        <p:nvSpPr>
-          <p:cNvPr id="17" name="TextBox 16"/>
-          <p:cNvSpPr txBox="1"/>
-          <p:nvPr/>
-        </p:nvSpPr>
-        <p:spPr>
-          <a:xfrm>
-            <a:off x="7955279" y="5577840"/>
-            <a:ext cx="3931920" cy="731520"/>
-          </a:xfrm>
-          <a:prstGeom prst="rect">
-            <a:avLst/>
-          </a:prstGeom>
-          <a:noFill/>
-        </p:spPr>
-        <p:txBody>
-          <a:bodyPr wrap="square" anchor="t" lIns="45720" rIns="45720" tIns="27432" bIns="27432">
-            <a:spAutoFit/>
-          </a:bodyPr>
-          <a:lstStyle/>
-          <a:p>
-            <a:pPr algn="l">
-              <a:spcAft>
-                <a:spcPts val="600"/>
-              </a:spcAft>
-            </a:pPr>
-            <a:r>
-              <a:rPr sz="1400" b="0" i="0">
-                <a:solidFill>
-                  <a:srgbClr val="111010"/>
-                </a:solidFill>
-                <a:latin typeface="Tahoma"/>
-              </a:rPr>
-              <a:t>работают по специальности
-(4 курс)</a:t>
+              <a:t>работают ради денег</a:t>
             </a:r>
           </a:p>
         </p:txBody>
@@ -9887,7 +11073,7 @@
                 <a:solidFill>
                   <a:srgbClr val="111010"/>
                 </a:solidFill>
-                <a:latin typeface="Cascadia Code SemiBold"/>
+                <a:latin typeface="Courier New"/>
               </a:rPr>
               <a:t>ВОПРОС</a:t>
             </a:r>
@@ -9940,7 +11126,7 @@
                 <a:solidFill>
                   <a:srgbClr val="111010"/>
                 </a:solidFill>
-                <a:latin typeface="Cascadia Code SemiBold"/>
+                <a:latin typeface="Courier New"/>
               </a:rPr>
               <a:t>ДАННЫЕ</a:t>
             </a:r>
@@ -9993,7 +11179,7 @@
                 <a:solidFill>
                   <a:srgbClr val="111010"/>
                 </a:solidFill>
-                <a:latin typeface="Cascadia Code SemiBold"/>
+                <a:latin typeface="Courier New"/>
               </a:rPr>
               <a:t>МЕТОДЫ</a:t>
             </a:r>
@@ -10046,7 +11232,7 @@
                 <a:solidFill>
                   <a:srgbClr val="111010"/>
                 </a:solidFill>
-                <a:latin typeface="Cascadia Code SemiBold"/>
+                <a:latin typeface="Courier New"/>
               </a:rPr>
               <a:t>РЕЗУЛЬТАТЫ</a:t>
             </a:r>
@@ -10099,7 +11285,7 @@
                 <a:solidFill>
                   <a:srgbClr val="111010"/>
                 </a:solidFill>
-                <a:latin typeface="Cascadia Code SemiBold"/>
+                <a:latin typeface="Courier New"/>
               </a:rPr>
               <a:t>ВЫВОДЫ</a:t>
             </a:r>
@@ -10226,7 +11412,7 @@
                 <a:solidFill>
                   <a:srgbClr val="848484"/>
                 </a:solidFill>
-                <a:latin typeface="Tahoma"/>
+                <a:latin typeface="Trebuchet MS"/>
               </a:rPr>
               <a:t>6</a:t>
             </a:r>
@@ -10261,11 +11447,11 @@
               </a:spcAft>
             </a:pPr>
             <a:r>
-              <a:rPr sz="2800" b="0" i="0">
+              <a:rPr sz="3000" b="1" i="0">
                 <a:solidFill>
                   <a:srgbClr val="111010"/>
                 </a:solidFill>
-                <a:latin typeface="Arial Black"/>
+                <a:latin typeface="Trebuchet MS"/>
               </a:rPr>
               <a:t>Сама работа учёбе не вредит</a:t>
             </a:r>
@@ -10300,13 +11486,13 @@
               </a:spcAft>
             </a:pPr>
             <a:r>
-              <a:rPr sz="1200" b="0" i="0">
+              <a:rPr sz="1300" b="0" i="0">
                 <a:solidFill>
                   <a:srgbClr val="848484"/>
                 </a:solidFill>
-                <a:latin typeface="Tahoma"/>
+                <a:latin typeface="Trebuchet MS"/>
               </a:rPr>
-              <a:t>Доля с хорошими оценками («4 и 5» или «только 5»)</a:t>
+              <a:t>Хорошие оценки («4 и 5» или «только 5»), %</a:t>
             </a:r>
           </a:p>
         </p:txBody>
@@ -10321,7 +11507,7 @@
         </p:nvGraphicFramePr>
         <p:xfrm>
           <a:off x="457200" y="1874519"/>
-          <a:ext cx="5852160" cy="4023360"/>
+          <a:ext cx="5852160" cy="4389120"/>
         </p:xfrm>
         <a:graphic>
           <a:graphicData uri="http://schemas.openxmlformats.org/drawingml/2006/chart">
@@ -10337,8 +11523,8 @@
         </p:nvSpPr>
         <p:spPr>
           <a:xfrm>
-            <a:off x="548640" y="5897880"/>
-            <a:ext cx="5669280" cy="365760"/>
+            <a:off x="6583680" y="1508760"/>
+            <a:ext cx="5303520" cy="365760"/>
           </a:xfrm>
           <a:prstGeom prst="rect">
             <a:avLst/>
@@ -10357,59 +11543,20 @@
               </a:spcAft>
             </a:pPr>
             <a:r>
-              <a:rPr sz="1200" b="0" i="0">
+              <a:rPr sz="1300" b="0" i="0">
                 <a:solidFill>
                   <a:srgbClr val="848484"/>
                 </a:solidFill>
-                <a:latin typeface="Tahoma"/>
+                <a:latin typeface="Trebuchet MS"/>
               </a:rPr>
-              <a:t>Различия незначимы: p = 0.57 (3 курс), 0.15 (4 курс)</a:t>
-            </a:r>
-          </a:p>
-        </p:txBody>
-      </p:sp>
-      <p:sp>
-        <p:nvSpPr>
-          <p:cNvPr id="14" name="TextBox 13"/>
-          <p:cNvSpPr txBox="1"/>
-          <p:nvPr/>
-        </p:nvSpPr>
-        <p:spPr>
-          <a:xfrm>
-            <a:off x="6583680" y="1508760"/>
-            <a:ext cx="5303520" cy="365760"/>
-          </a:xfrm>
-          <a:prstGeom prst="rect">
-            <a:avLst/>
-          </a:prstGeom>
-          <a:noFill/>
-        </p:spPr>
-        <p:txBody>
-          <a:bodyPr wrap="square" anchor="t" lIns="45720" rIns="45720" tIns="27432" bIns="27432">
-            <a:spAutoFit/>
-          </a:bodyPr>
-          <a:lstStyle/>
-          <a:p>
-            <a:pPr algn="l">
-              <a:spcAft>
-                <a:spcPts val="600"/>
-              </a:spcAft>
-            </a:pPr>
-            <a:r>
-              <a:rPr sz="1200" b="0" i="0">
-                <a:solidFill>
-                  <a:srgbClr val="848484"/>
-                </a:solidFill>
-                <a:latin typeface="Tahoma"/>
-              </a:rPr>
-              <a:t>Изменение доли хороших оценок с 3 на 4 курс, п.п.</a:t>
+              <a:t>Изменение хороших оценок с 3 на 4 курс, п.п.</a:t>
             </a:r>
           </a:p>
         </p:txBody>
       </p:sp>
       <p:graphicFrame>
         <p:nvGraphicFramePr>
-          <p:cNvPr id="15" name="Chart 14"/>
+          <p:cNvPr id="14" name="Chart 13"/>
           <p:cNvGraphicFramePr>
             <a:graphicFrameLocks noGrp="1"/>
           </p:cNvGraphicFramePr>
@@ -10417,7 +11564,7 @@
         </p:nvGraphicFramePr>
         <p:xfrm>
           <a:off x="6492240" y="1874519"/>
-          <a:ext cx="5394960" cy="3291840"/>
+          <a:ext cx="5394960" cy="4389120"/>
         </p:xfrm>
         <a:graphic>
           <a:graphicData uri="http://schemas.openxmlformats.org/drawingml/2006/chart">
@@ -10425,16 +11572,426 @@
           </a:graphicData>
         </a:graphic>
       </p:graphicFrame>
-      <p:sp>
-        <p:nvSpPr>
-          <p:cNvPr id="16" name="TextBox 15"/>
+    </p:spTree>
+  </p:cSld>
+  <p:clrMapOvr>
+    <a:masterClrMapping/>
+  </p:clrMapOvr>
+</p:sld>
+</file>
+
+<file path=ppt/slides/slide7.xml><?xml version="1.0" encoding="utf-8"?>
+<p:sld xmlns:a="http://schemas.openxmlformats.org/drawingml/2006/main" xmlns:p="http://schemas.openxmlformats.org/presentationml/2006/main" xmlns:r="http://schemas.openxmlformats.org/officeDocument/2006/relationships">
+  <p:cSld>
+    <p:spTree>
+      <p:nvGrpSpPr>
+        <p:cNvPr id="1" name=""/>
+        <p:cNvGrpSpPr/>
+        <p:nvPr/>
+      </p:nvGrpSpPr>
+      <p:grpSpPr/>
+      <p:sp>
+        <p:nvSpPr>
+          <p:cNvPr id="2" name="Pentagon 1"/>
+          <p:cNvSpPr/>
+          <p:nvPr/>
+        </p:nvSpPr>
+        <p:spPr>
+          <a:xfrm>
+            <a:off x="137160" y="164592"/>
+            <a:ext cx="2514600" cy="384048"/>
+          </a:xfrm>
+          <a:prstGeom prst="homePlate">
+            <a:avLst/>
+          </a:prstGeom>
+          <a:solidFill>
+            <a:srgbClr val="FFF4D7"/>
+          </a:solidFill>
+          <a:ln>
+            <a:noFill/>
+          </a:ln>
+          <a:effectLst/>
+        </p:spPr>
+        <p:style>
+          <a:lnRef idx="1">
+            <a:schemeClr val="accent1"/>
+          </a:lnRef>
+          <a:fillRef idx="3">
+            <a:schemeClr val="accent1"/>
+          </a:fillRef>
+          <a:effectRef idx="2">
+            <a:schemeClr val="accent1"/>
+          </a:effectRef>
+          <a:fontRef idx="minor">
+            <a:schemeClr val="lt1"/>
+          </a:fontRef>
+        </p:style>
+        <p:txBody>
+          <a:bodyPr rtlCol="0" anchor="ctr" lIns="45720" rIns="45720"/>
+          <a:lstStyle/>
+          <a:p>
+            <a:pPr algn="ctr"/>
+            <a:r>
+              <a:rPr sz="1200" b="0">
+                <a:solidFill>
+                  <a:srgbClr val="111010"/>
+                </a:solidFill>
+                <a:latin typeface="Courier New"/>
+              </a:rPr>
+              <a:t>ВОПРОС</a:t>
+            </a:r>
+          </a:p>
+        </p:txBody>
+      </p:sp>
+      <p:sp>
+        <p:nvSpPr>
+          <p:cNvPr id="3" name="Chevron 2"/>
+          <p:cNvSpPr/>
+          <p:nvPr/>
+        </p:nvSpPr>
+        <p:spPr>
+          <a:xfrm>
+            <a:off x="2468879" y="164592"/>
+            <a:ext cx="2514600" cy="384048"/>
+          </a:xfrm>
+          <a:prstGeom prst="chevron">
+            <a:avLst/>
+          </a:prstGeom>
+          <a:solidFill>
+            <a:srgbClr val="FFF4D7"/>
+          </a:solidFill>
+          <a:ln>
+            <a:noFill/>
+          </a:ln>
+          <a:effectLst/>
+        </p:spPr>
+        <p:style>
+          <a:lnRef idx="1">
+            <a:schemeClr val="accent1"/>
+          </a:lnRef>
+          <a:fillRef idx="3">
+            <a:schemeClr val="accent1"/>
+          </a:fillRef>
+          <a:effectRef idx="2">
+            <a:schemeClr val="accent1"/>
+          </a:effectRef>
+          <a:fontRef idx="minor">
+            <a:schemeClr val="lt1"/>
+          </a:fontRef>
+        </p:style>
+        <p:txBody>
+          <a:bodyPr rtlCol="0" anchor="ctr" lIns="45720" rIns="45720"/>
+          <a:lstStyle/>
+          <a:p>
+            <a:pPr algn="ctr"/>
+            <a:r>
+              <a:rPr sz="1200" b="0">
+                <a:solidFill>
+                  <a:srgbClr val="111010"/>
+                </a:solidFill>
+                <a:latin typeface="Courier New"/>
+              </a:rPr>
+              <a:t>ДАННЫЕ</a:t>
+            </a:r>
+          </a:p>
+        </p:txBody>
+      </p:sp>
+      <p:sp>
+        <p:nvSpPr>
+          <p:cNvPr id="4" name="Chevron 3"/>
+          <p:cNvSpPr/>
+          <p:nvPr/>
+        </p:nvSpPr>
+        <p:spPr>
+          <a:xfrm>
+            <a:off x="4800600" y="164592"/>
+            <a:ext cx="2514600" cy="384048"/>
+          </a:xfrm>
+          <a:prstGeom prst="chevron">
+            <a:avLst/>
+          </a:prstGeom>
+          <a:solidFill>
+            <a:srgbClr val="FFF4D7"/>
+          </a:solidFill>
+          <a:ln>
+            <a:noFill/>
+          </a:ln>
+          <a:effectLst/>
+        </p:spPr>
+        <p:style>
+          <a:lnRef idx="1">
+            <a:schemeClr val="accent1"/>
+          </a:lnRef>
+          <a:fillRef idx="3">
+            <a:schemeClr val="accent1"/>
+          </a:fillRef>
+          <a:effectRef idx="2">
+            <a:schemeClr val="accent1"/>
+          </a:effectRef>
+          <a:fontRef idx="minor">
+            <a:schemeClr val="lt1"/>
+          </a:fontRef>
+        </p:style>
+        <p:txBody>
+          <a:bodyPr rtlCol="0" anchor="ctr" lIns="45720" rIns="45720"/>
+          <a:lstStyle/>
+          <a:p>
+            <a:pPr algn="ctr"/>
+            <a:r>
+              <a:rPr sz="1200" b="0">
+                <a:solidFill>
+                  <a:srgbClr val="111010"/>
+                </a:solidFill>
+                <a:latin typeface="Courier New"/>
+              </a:rPr>
+              <a:t>МЕТОДЫ</a:t>
+            </a:r>
+          </a:p>
+        </p:txBody>
+      </p:sp>
+      <p:sp>
+        <p:nvSpPr>
+          <p:cNvPr id="5" name="Chevron 4"/>
+          <p:cNvSpPr/>
+          <p:nvPr/>
+        </p:nvSpPr>
+        <p:spPr>
+          <a:xfrm>
+            <a:off x="7132320" y="164592"/>
+            <a:ext cx="2514600" cy="384048"/>
+          </a:xfrm>
+          <a:prstGeom prst="chevron">
+            <a:avLst/>
+          </a:prstGeom>
+          <a:solidFill>
+            <a:srgbClr val="FFD966"/>
+          </a:solidFill>
+          <a:ln>
+            <a:noFill/>
+          </a:ln>
+          <a:effectLst/>
+        </p:spPr>
+        <p:style>
+          <a:lnRef idx="1">
+            <a:schemeClr val="accent1"/>
+          </a:lnRef>
+          <a:fillRef idx="3">
+            <a:schemeClr val="accent1"/>
+          </a:fillRef>
+          <a:effectRef idx="2">
+            <a:schemeClr val="accent1"/>
+          </a:effectRef>
+          <a:fontRef idx="minor">
+            <a:schemeClr val="lt1"/>
+          </a:fontRef>
+        </p:style>
+        <p:txBody>
+          <a:bodyPr rtlCol="0" anchor="ctr" lIns="45720" rIns="45720"/>
+          <a:lstStyle/>
+          <a:p>
+            <a:pPr algn="ctr"/>
+            <a:r>
+              <a:rPr sz="1200" b="1">
+                <a:solidFill>
+                  <a:srgbClr val="111010"/>
+                </a:solidFill>
+                <a:latin typeface="Courier New"/>
+              </a:rPr>
+              <a:t>РЕЗУЛЬТАТЫ</a:t>
+            </a:r>
+          </a:p>
+        </p:txBody>
+      </p:sp>
+      <p:sp>
+        <p:nvSpPr>
+          <p:cNvPr id="6" name="Chevron 5"/>
+          <p:cNvSpPr/>
+          <p:nvPr/>
+        </p:nvSpPr>
+        <p:spPr>
+          <a:xfrm>
+            <a:off x="9464040" y="164592"/>
+            <a:ext cx="2514600" cy="384048"/>
+          </a:xfrm>
+          <a:prstGeom prst="chevron">
+            <a:avLst/>
+          </a:prstGeom>
+          <a:solidFill>
+            <a:srgbClr val="FFF4D7"/>
+          </a:solidFill>
+          <a:ln>
+            <a:noFill/>
+          </a:ln>
+          <a:effectLst/>
+        </p:spPr>
+        <p:style>
+          <a:lnRef idx="1">
+            <a:schemeClr val="accent1"/>
+          </a:lnRef>
+          <a:fillRef idx="3">
+            <a:schemeClr val="accent1"/>
+          </a:fillRef>
+          <a:effectRef idx="2">
+            <a:schemeClr val="accent1"/>
+          </a:effectRef>
+          <a:fontRef idx="minor">
+            <a:schemeClr val="lt1"/>
+          </a:fontRef>
+        </p:style>
+        <p:txBody>
+          <a:bodyPr rtlCol="0" anchor="ctr" lIns="45720" rIns="45720"/>
+          <a:lstStyle/>
+          <a:p>
+            <a:pPr algn="ctr"/>
+            <a:r>
+              <a:rPr sz="1200" b="0">
+                <a:solidFill>
+                  <a:srgbClr val="111010"/>
+                </a:solidFill>
+                <a:latin typeface="Courier New"/>
+              </a:rPr>
+              <a:t>ВЫВОДЫ</a:t>
+            </a:r>
+          </a:p>
+        </p:txBody>
+      </p:sp>
+      <p:sp>
+        <p:nvSpPr>
+          <p:cNvPr id="7" name="Rectangle 6"/>
+          <p:cNvSpPr/>
+          <p:nvPr/>
+        </p:nvSpPr>
+        <p:spPr>
+          <a:xfrm>
+            <a:off x="0" y="6565392"/>
+            <a:ext cx="1783080" cy="91440"/>
+          </a:xfrm>
+          <a:prstGeom prst="rect">
+            <a:avLst/>
+          </a:prstGeom>
+          <a:solidFill>
+            <a:srgbClr val="111010"/>
+          </a:solidFill>
+          <a:ln>
+            <a:noFill/>
+          </a:ln>
+          <a:effectLst/>
+        </p:spPr>
+        <p:style>
+          <a:lnRef idx="1">
+            <a:schemeClr val="accent1"/>
+          </a:lnRef>
+          <a:fillRef idx="3">
+            <a:schemeClr val="accent1"/>
+          </a:fillRef>
+          <a:effectRef idx="2">
+            <a:schemeClr val="accent1"/>
+          </a:effectRef>
+          <a:fontRef idx="minor">
+            <a:schemeClr val="lt1"/>
+          </a:fontRef>
+        </p:style>
+        <p:txBody>
+          <a:bodyPr rtlCol="0" anchor="ctr"/>
+          <a:lstStyle/>
+          <a:p>
+            <a:pPr algn="ctr"/>
+          </a:p>
+        </p:txBody>
+      </p:sp>
+      <p:sp>
+        <p:nvSpPr>
+          <p:cNvPr id="8" name="Rectangle 7"/>
+          <p:cNvSpPr/>
+          <p:nvPr/>
+        </p:nvSpPr>
+        <p:spPr>
+          <a:xfrm>
+            <a:off x="0" y="6656832"/>
+            <a:ext cx="2743200" cy="128016"/>
+          </a:xfrm>
+          <a:prstGeom prst="rect">
+            <a:avLst/>
+          </a:prstGeom>
+          <a:solidFill>
+            <a:srgbClr val="FFD966"/>
+          </a:solidFill>
+          <a:ln>
+            <a:noFill/>
+          </a:ln>
+          <a:effectLst/>
+        </p:spPr>
+        <p:style>
+          <a:lnRef idx="1">
+            <a:schemeClr val="accent1"/>
+          </a:lnRef>
+          <a:fillRef idx="3">
+            <a:schemeClr val="accent1"/>
+          </a:fillRef>
+          <a:effectRef idx="2">
+            <a:schemeClr val="accent1"/>
+          </a:effectRef>
+          <a:fontRef idx="minor">
+            <a:schemeClr val="lt1"/>
+          </a:fontRef>
+        </p:style>
+        <p:txBody>
+          <a:bodyPr rtlCol="0" anchor="ctr"/>
+          <a:lstStyle/>
+          <a:p>
+            <a:pPr algn="ctr"/>
+          </a:p>
+        </p:txBody>
+      </p:sp>
+      <p:sp>
+        <p:nvSpPr>
+          <p:cNvPr id="9" name="TextBox 8"/>
           <p:cNvSpPr txBox="1"/>
           <p:nvPr/>
         </p:nvSpPr>
         <p:spPr>
           <a:xfrm>
-            <a:off x="6583680" y="5303520"/>
-            <a:ext cx="5303520" cy="914400"/>
+            <a:off x="11247120" y="6355080"/>
+            <a:ext cx="731520" cy="365760"/>
+          </a:xfrm>
+          <a:prstGeom prst="rect">
+            <a:avLst/>
+          </a:prstGeom>
+          <a:noFill/>
+        </p:spPr>
+        <p:txBody>
+          <a:bodyPr wrap="square" anchor="t" lIns="45720" rIns="45720" tIns="27432" bIns="27432">
+            <a:spAutoFit/>
+          </a:bodyPr>
+          <a:lstStyle/>
+          <a:p>
+            <a:pPr algn="r">
+              <a:spcAft>
+                <a:spcPts val="600"/>
+              </a:spcAft>
+            </a:pPr>
+            <a:r>
+              <a:rPr sz="1200" b="0" i="0">
+                <a:solidFill>
+                  <a:srgbClr val="848484"/>
+                </a:solidFill>
+                <a:latin typeface="Trebuchet MS"/>
+              </a:rPr>
+              <a:t>7</a:t>
+            </a:r>
+          </a:p>
+        </p:txBody>
+      </p:sp>
+      <p:sp>
+        <p:nvSpPr>
+          <p:cNvPr id="10" name="TextBox 9"/>
+          <p:cNvSpPr txBox="1"/>
+          <p:nvPr/>
+        </p:nvSpPr>
+        <p:spPr>
+          <a:xfrm>
+            <a:off x="457200" y="731520"/>
+            <a:ext cx="11247120" cy="731520"/>
           </a:xfrm>
           <a:prstGeom prst="rect">
             <a:avLst/>
@@ -10453,22 +12010,1807 @@
               </a:spcAft>
             </a:pPr>
             <a:r>
-              <a:rPr sz="1400" b="1" i="0">
+              <a:rPr sz="3000" b="1" i="0">
+                <a:solidFill>
+                  <a:srgbClr val="111010"/>
+                </a:solidFill>
+                <a:latin typeface="Trebuchet MS"/>
+              </a:rPr>
+              <a:t>Перегрузка: меньше сна и мысли об отчислении</a:t>
+            </a:r>
+          </a:p>
+        </p:txBody>
+      </p:sp>
+      <p:sp>
+        <p:nvSpPr>
+          <p:cNvPr id="11" name="TextBox 10"/>
+          <p:cNvSpPr txBox="1"/>
+          <p:nvPr/>
+        </p:nvSpPr>
+        <p:spPr>
+          <a:xfrm>
+            <a:off x="548640" y="1508760"/>
+            <a:ext cx="5669280" cy="365760"/>
+          </a:xfrm>
+          <a:prstGeom prst="rect">
+            <a:avLst/>
+          </a:prstGeom>
+          <a:noFill/>
+        </p:spPr>
+        <p:txBody>
+          <a:bodyPr wrap="square" anchor="t" lIns="45720" rIns="45720" tIns="27432" bIns="27432">
+            <a:spAutoFit/>
+          </a:bodyPr>
+          <a:lstStyle/>
+          <a:p>
+            <a:pPr algn="l">
+              <a:spcAft>
+                <a:spcPts val="600"/>
+              </a:spcAft>
+            </a:pPr>
+            <a:r>
+              <a:rPr sz="1300" b="0" i="0">
+                <a:solidFill>
+                  <a:srgbClr val="848484"/>
+                </a:solidFill>
+                <a:latin typeface="Trebuchet MS"/>
+              </a:rPr>
+              <a:t>Спят меньше 7 часов в будни, % (по часам работы в неделю)</a:t>
+            </a:r>
+          </a:p>
+        </p:txBody>
+      </p:sp>
+      <p:graphicFrame>
+        <p:nvGraphicFramePr>
+          <p:cNvPr id="12" name="Chart 11"/>
+          <p:cNvGraphicFramePr>
+            <a:graphicFrameLocks noGrp="1"/>
+          </p:cNvGraphicFramePr>
+          <p:nvPr/>
+        </p:nvGraphicFramePr>
+        <p:xfrm>
+          <a:off x="457200" y="1874519"/>
+          <a:ext cx="5852160" cy="4389120"/>
+        </p:xfrm>
+        <a:graphic>
+          <a:graphicData uri="http://schemas.openxmlformats.org/drawingml/2006/chart">
+            <c:chart xmlns:c="http://schemas.openxmlformats.org/drawingml/2006/chart" r:id="rId3"/>
+          </a:graphicData>
+        </a:graphic>
+      </p:graphicFrame>
+      <p:sp>
+        <p:nvSpPr>
+          <p:cNvPr id="13" name="TextBox 12"/>
+          <p:cNvSpPr txBox="1"/>
+          <p:nvPr/>
+        </p:nvSpPr>
+        <p:spPr>
+          <a:xfrm>
+            <a:off x="6583680" y="1508760"/>
+            <a:ext cx="5303520" cy="365760"/>
+          </a:xfrm>
+          <a:prstGeom prst="rect">
+            <a:avLst/>
+          </a:prstGeom>
+          <a:noFill/>
+        </p:spPr>
+        <p:txBody>
+          <a:bodyPr wrap="square" anchor="t" lIns="45720" rIns="45720" tIns="27432" bIns="27432">
+            <a:spAutoFit/>
+          </a:bodyPr>
+          <a:lstStyle/>
+          <a:p>
+            <a:pPr algn="l">
+              <a:spcAft>
+                <a:spcPts val="600"/>
+              </a:spcAft>
+            </a:pPr>
+            <a:r>
+              <a:rPr sz="1300" b="0" i="0">
+                <a:solidFill>
+                  <a:srgbClr val="848484"/>
+                </a:solidFill>
+                <a:latin typeface="Trebuchet MS"/>
+              </a:rPr>
+              <a:t>На сколько выше шансы думать об отчислении</a:t>
+            </a:r>
+          </a:p>
+        </p:txBody>
+      </p:sp>
+      <p:graphicFrame>
+        <p:nvGraphicFramePr>
+          <p:cNvPr id="14" name="Chart 13"/>
+          <p:cNvGraphicFramePr>
+            <a:graphicFrameLocks noGrp="1"/>
+          </p:cNvGraphicFramePr>
+          <p:nvPr/>
+        </p:nvGraphicFramePr>
+        <p:xfrm>
+          <a:off x="6492240" y="1874519"/>
+          <a:ext cx="5394960" cy="3108960"/>
+        </p:xfrm>
+        <a:graphic>
+          <a:graphicData uri="http://schemas.openxmlformats.org/drawingml/2006/chart">
+            <c:chart xmlns:c="http://schemas.openxmlformats.org/drawingml/2006/chart" r:id="rId4"/>
+          </a:graphicData>
+        </a:graphic>
+      </p:graphicFrame>
+      <p:sp>
+        <p:nvSpPr>
+          <p:cNvPr id="15" name="TextBox 14"/>
+          <p:cNvSpPr txBox="1"/>
+          <p:nvPr/>
+        </p:nvSpPr>
+        <p:spPr>
+          <a:xfrm>
+            <a:off x="6583680" y="5029200"/>
+            <a:ext cx="5303520" cy="868680"/>
+          </a:xfrm>
+          <a:prstGeom prst="rect">
+            <a:avLst/>
+          </a:prstGeom>
+          <a:noFill/>
+        </p:spPr>
+        <p:txBody>
+          <a:bodyPr wrap="square" anchor="t" lIns="45720" rIns="45720" tIns="27432" bIns="27432">
+            <a:spAutoFit/>
+          </a:bodyPr>
+          <a:lstStyle/>
+          <a:p>
+            <a:pPr algn="l">
+              <a:spcAft>
+                <a:spcPts val="600"/>
+              </a:spcAft>
+            </a:pPr>
+            <a:r>
+              <a:rPr sz="4000" b="1" i="0">
                 <a:solidFill>
                   <a:srgbClr val="C55A11"/>
                 </a:solidFill>
-                <a:latin typeface="Tahoma"/>
+                <a:latin typeface="Trebuchet MS"/>
               </a:rPr>
-              <a:t>Начал работать </a:t>
-            </a:r>
-            <a:r>
-              <a:rPr sz="1400" b="0" i="0">
+              <a:t>−28 мин</a:t>
+            </a:r>
+          </a:p>
+        </p:txBody>
+      </p:sp>
+      <p:sp>
+        <p:nvSpPr>
+          <p:cNvPr id="16" name="TextBox 15"/>
+          <p:cNvSpPr txBox="1"/>
+          <p:nvPr/>
+        </p:nvSpPr>
+        <p:spPr>
+          <a:xfrm>
+            <a:off x="6583680" y="5897880"/>
+            <a:ext cx="5303520" cy="731520"/>
+          </a:xfrm>
+          <a:prstGeom prst="rect">
+            <a:avLst/>
+          </a:prstGeom>
+          <a:noFill/>
+        </p:spPr>
+        <p:txBody>
+          <a:bodyPr wrap="square" anchor="t" lIns="45720" rIns="45720" tIns="27432" bIns="27432">
+            <a:spAutoFit/>
+          </a:bodyPr>
+          <a:lstStyle/>
+          <a:p>
+            <a:pPr algn="l">
+              <a:spcAft>
+                <a:spcPts val="600"/>
+              </a:spcAft>
+            </a:pPr>
+            <a:r>
+              <a:rPr sz="1600" b="0" i="0">
                 <a:solidFill>
                   <a:srgbClr val="111010"/>
                 </a:solidFill>
-                <a:latin typeface="Tahoma"/>
+                <a:latin typeface="Trebuchet MS"/>
               </a:rPr>
-              <a:t>— оценки выросли так же, как у неработающих (p = 0.80). Сон тоже не сократился</a:t>
+              <a:t>сна в будни при 30+ часах работы</a:t>
+            </a:r>
+          </a:p>
+        </p:txBody>
+      </p:sp>
+    </p:spTree>
+  </p:cSld>
+  <p:clrMapOvr>
+    <a:masterClrMapping/>
+  </p:clrMapOvr>
+</p:sld>
+</file>
+
+<file path=ppt/slides/slide8.xml><?xml version="1.0" encoding="utf-8"?>
+<p:sld xmlns:a="http://schemas.openxmlformats.org/drawingml/2006/main" xmlns:p="http://schemas.openxmlformats.org/presentationml/2006/main" xmlns:r="http://schemas.openxmlformats.org/officeDocument/2006/relationships">
+  <p:cSld>
+    <p:spTree>
+      <p:nvGrpSpPr>
+        <p:cNvPr id="1" name=""/>
+        <p:cNvGrpSpPr/>
+        <p:nvPr/>
+      </p:nvGrpSpPr>
+      <p:grpSpPr/>
+      <p:sp>
+        <p:nvSpPr>
+          <p:cNvPr id="2" name="Pentagon 1"/>
+          <p:cNvSpPr/>
+          <p:nvPr/>
+        </p:nvSpPr>
+        <p:spPr>
+          <a:xfrm>
+            <a:off x="137160" y="164592"/>
+            <a:ext cx="2514600" cy="384048"/>
+          </a:xfrm>
+          <a:prstGeom prst="homePlate">
+            <a:avLst/>
+          </a:prstGeom>
+          <a:solidFill>
+            <a:srgbClr val="FFF4D7"/>
+          </a:solidFill>
+          <a:ln>
+            <a:noFill/>
+          </a:ln>
+          <a:effectLst/>
+        </p:spPr>
+        <p:style>
+          <a:lnRef idx="1">
+            <a:schemeClr val="accent1"/>
+          </a:lnRef>
+          <a:fillRef idx="3">
+            <a:schemeClr val="accent1"/>
+          </a:fillRef>
+          <a:effectRef idx="2">
+            <a:schemeClr val="accent1"/>
+          </a:effectRef>
+          <a:fontRef idx="minor">
+            <a:schemeClr val="lt1"/>
+          </a:fontRef>
+        </p:style>
+        <p:txBody>
+          <a:bodyPr rtlCol="0" anchor="ctr" lIns="45720" rIns="45720"/>
+          <a:lstStyle/>
+          <a:p>
+            <a:pPr algn="ctr"/>
+            <a:r>
+              <a:rPr sz="1200" b="0">
+                <a:solidFill>
+                  <a:srgbClr val="111010"/>
+                </a:solidFill>
+                <a:latin typeface="Courier New"/>
+              </a:rPr>
+              <a:t>ВОПРОС</a:t>
+            </a:r>
+          </a:p>
+        </p:txBody>
+      </p:sp>
+      <p:sp>
+        <p:nvSpPr>
+          <p:cNvPr id="3" name="Chevron 2"/>
+          <p:cNvSpPr/>
+          <p:nvPr/>
+        </p:nvSpPr>
+        <p:spPr>
+          <a:xfrm>
+            <a:off x="2468879" y="164592"/>
+            <a:ext cx="2514600" cy="384048"/>
+          </a:xfrm>
+          <a:prstGeom prst="chevron">
+            <a:avLst/>
+          </a:prstGeom>
+          <a:solidFill>
+            <a:srgbClr val="FFF4D7"/>
+          </a:solidFill>
+          <a:ln>
+            <a:noFill/>
+          </a:ln>
+          <a:effectLst/>
+        </p:spPr>
+        <p:style>
+          <a:lnRef idx="1">
+            <a:schemeClr val="accent1"/>
+          </a:lnRef>
+          <a:fillRef idx="3">
+            <a:schemeClr val="accent1"/>
+          </a:fillRef>
+          <a:effectRef idx="2">
+            <a:schemeClr val="accent1"/>
+          </a:effectRef>
+          <a:fontRef idx="minor">
+            <a:schemeClr val="lt1"/>
+          </a:fontRef>
+        </p:style>
+        <p:txBody>
+          <a:bodyPr rtlCol="0" anchor="ctr" lIns="45720" rIns="45720"/>
+          <a:lstStyle/>
+          <a:p>
+            <a:pPr algn="ctr"/>
+            <a:r>
+              <a:rPr sz="1200" b="0">
+                <a:solidFill>
+                  <a:srgbClr val="111010"/>
+                </a:solidFill>
+                <a:latin typeface="Courier New"/>
+              </a:rPr>
+              <a:t>ДАННЫЕ</a:t>
+            </a:r>
+          </a:p>
+        </p:txBody>
+      </p:sp>
+      <p:sp>
+        <p:nvSpPr>
+          <p:cNvPr id="4" name="Chevron 3"/>
+          <p:cNvSpPr/>
+          <p:nvPr/>
+        </p:nvSpPr>
+        <p:spPr>
+          <a:xfrm>
+            <a:off x="4800600" y="164592"/>
+            <a:ext cx="2514600" cy="384048"/>
+          </a:xfrm>
+          <a:prstGeom prst="chevron">
+            <a:avLst/>
+          </a:prstGeom>
+          <a:solidFill>
+            <a:srgbClr val="FFF4D7"/>
+          </a:solidFill>
+          <a:ln>
+            <a:noFill/>
+          </a:ln>
+          <a:effectLst/>
+        </p:spPr>
+        <p:style>
+          <a:lnRef idx="1">
+            <a:schemeClr val="accent1"/>
+          </a:lnRef>
+          <a:fillRef idx="3">
+            <a:schemeClr val="accent1"/>
+          </a:fillRef>
+          <a:effectRef idx="2">
+            <a:schemeClr val="accent1"/>
+          </a:effectRef>
+          <a:fontRef idx="minor">
+            <a:schemeClr val="lt1"/>
+          </a:fontRef>
+        </p:style>
+        <p:txBody>
+          <a:bodyPr rtlCol="0" anchor="ctr" lIns="45720" rIns="45720"/>
+          <a:lstStyle/>
+          <a:p>
+            <a:pPr algn="ctr"/>
+            <a:r>
+              <a:rPr sz="1200" b="0">
+                <a:solidFill>
+                  <a:srgbClr val="111010"/>
+                </a:solidFill>
+                <a:latin typeface="Courier New"/>
+              </a:rPr>
+              <a:t>МЕТОДЫ</a:t>
+            </a:r>
+          </a:p>
+        </p:txBody>
+      </p:sp>
+      <p:sp>
+        <p:nvSpPr>
+          <p:cNvPr id="5" name="Chevron 4"/>
+          <p:cNvSpPr/>
+          <p:nvPr/>
+        </p:nvSpPr>
+        <p:spPr>
+          <a:xfrm>
+            <a:off x="7132320" y="164592"/>
+            <a:ext cx="2514600" cy="384048"/>
+          </a:xfrm>
+          <a:prstGeom prst="chevron">
+            <a:avLst/>
+          </a:prstGeom>
+          <a:solidFill>
+            <a:srgbClr val="FFD966"/>
+          </a:solidFill>
+          <a:ln>
+            <a:noFill/>
+          </a:ln>
+          <a:effectLst/>
+        </p:spPr>
+        <p:style>
+          <a:lnRef idx="1">
+            <a:schemeClr val="accent1"/>
+          </a:lnRef>
+          <a:fillRef idx="3">
+            <a:schemeClr val="accent1"/>
+          </a:fillRef>
+          <a:effectRef idx="2">
+            <a:schemeClr val="accent1"/>
+          </a:effectRef>
+          <a:fontRef idx="minor">
+            <a:schemeClr val="lt1"/>
+          </a:fontRef>
+        </p:style>
+        <p:txBody>
+          <a:bodyPr rtlCol="0" anchor="ctr" lIns="45720" rIns="45720"/>
+          <a:lstStyle/>
+          <a:p>
+            <a:pPr algn="ctr"/>
+            <a:r>
+              <a:rPr sz="1200" b="1">
+                <a:solidFill>
+                  <a:srgbClr val="111010"/>
+                </a:solidFill>
+                <a:latin typeface="Courier New"/>
+              </a:rPr>
+              <a:t>РЕЗУЛЬТАТЫ</a:t>
+            </a:r>
+          </a:p>
+        </p:txBody>
+      </p:sp>
+      <p:sp>
+        <p:nvSpPr>
+          <p:cNvPr id="6" name="Chevron 5"/>
+          <p:cNvSpPr/>
+          <p:nvPr/>
+        </p:nvSpPr>
+        <p:spPr>
+          <a:xfrm>
+            <a:off x="9464040" y="164592"/>
+            <a:ext cx="2514600" cy="384048"/>
+          </a:xfrm>
+          <a:prstGeom prst="chevron">
+            <a:avLst/>
+          </a:prstGeom>
+          <a:solidFill>
+            <a:srgbClr val="FFF4D7"/>
+          </a:solidFill>
+          <a:ln>
+            <a:noFill/>
+          </a:ln>
+          <a:effectLst/>
+        </p:spPr>
+        <p:style>
+          <a:lnRef idx="1">
+            <a:schemeClr val="accent1"/>
+          </a:lnRef>
+          <a:fillRef idx="3">
+            <a:schemeClr val="accent1"/>
+          </a:fillRef>
+          <a:effectRef idx="2">
+            <a:schemeClr val="accent1"/>
+          </a:effectRef>
+          <a:fontRef idx="minor">
+            <a:schemeClr val="lt1"/>
+          </a:fontRef>
+        </p:style>
+        <p:txBody>
+          <a:bodyPr rtlCol="0" anchor="ctr" lIns="45720" rIns="45720"/>
+          <a:lstStyle/>
+          <a:p>
+            <a:pPr algn="ctr"/>
+            <a:r>
+              <a:rPr sz="1200" b="0">
+                <a:solidFill>
+                  <a:srgbClr val="111010"/>
+                </a:solidFill>
+                <a:latin typeface="Courier New"/>
+              </a:rPr>
+              <a:t>ВЫВОДЫ</a:t>
+            </a:r>
+          </a:p>
+        </p:txBody>
+      </p:sp>
+      <p:sp>
+        <p:nvSpPr>
+          <p:cNvPr id="7" name="Rectangle 6"/>
+          <p:cNvSpPr/>
+          <p:nvPr/>
+        </p:nvSpPr>
+        <p:spPr>
+          <a:xfrm>
+            <a:off x="0" y="6565392"/>
+            <a:ext cx="1783080" cy="91440"/>
+          </a:xfrm>
+          <a:prstGeom prst="rect">
+            <a:avLst/>
+          </a:prstGeom>
+          <a:solidFill>
+            <a:srgbClr val="111010"/>
+          </a:solidFill>
+          <a:ln>
+            <a:noFill/>
+          </a:ln>
+          <a:effectLst/>
+        </p:spPr>
+        <p:style>
+          <a:lnRef idx="1">
+            <a:schemeClr val="accent1"/>
+          </a:lnRef>
+          <a:fillRef idx="3">
+            <a:schemeClr val="accent1"/>
+          </a:fillRef>
+          <a:effectRef idx="2">
+            <a:schemeClr val="accent1"/>
+          </a:effectRef>
+          <a:fontRef idx="minor">
+            <a:schemeClr val="lt1"/>
+          </a:fontRef>
+        </p:style>
+        <p:txBody>
+          <a:bodyPr rtlCol="0" anchor="ctr"/>
+          <a:lstStyle/>
+          <a:p>
+            <a:pPr algn="ctr"/>
+          </a:p>
+        </p:txBody>
+      </p:sp>
+      <p:sp>
+        <p:nvSpPr>
+          <p:cNvPr id="8" name="Rectangle 7"/>
+          <p:cNvSpPr/>
+          <p:nvPr/>
+        </p:nvSpPr>
+        <p:spPr>
+          <a:xfrm>
+            <a:off x="0" y="6656832"/>
+            <a:ext cx="2743200" cy="128016"/>
+          </a:xfrm>
+          <a:prstGeom prst="rect">
+            <a:avLst/>
+          </a:prstGeom>
+          <a:solidFill>
+            <a:srgbClr val="FFD966"/>
+          </a:solidFill>
+          <a:ln>
+            <a:noFill/>
+          </a:ln>
+          <a:effectLst/>
+        </p:spPr>
+        <p:style>
+          <a:lnRef idx="1">
+            <a:schemeClr val="accent1"/>
+          </a:lnRef>
+          <a:fillRef idx="3">
+            <a:schemeClr val="accent1"/>
+          </a:fillRef>
+          <a:effectRef idx="2">
+            <a:schemeClr val="accent1"/>
+          </a:effectRef>
+          <a:fontRef idx="minor">
+            <a:schemeClr val="lt1"/>
+          </a:fontRef>
+        </p:style>
+        <p:txBody>
+          <a:bodyPr rtlCol="0" anchor="ctr"/>
+          <a:lstStyle/>
+          <a:p>
+            <a:pPr algn="ctr"/>
+          </a:p>
+        </p:txBody>
+      </p:sp>
+      <p:sp>
+        <p:nvSpPr>
+          <p:cNvPr id="9" name="TextBox 8"/>
+          <p:cNvSpPr txBox="1"/>
+          <p:nvPr/>
+        </p:nvSpPr>
+        <p:spPr>
+          <a:xfrm>
+            <a:off x="11247120" y="6355080"/>
+            <a:ext cx="731520" cy="365760"/>
+          </a:xfrm>
+          <a:prstGeom prst="rect">
+            <a:avLst/>
+          </a:prstGeom>
+          <a:noFill/>
+        </p:spPr>
+        <p:txBody>
+          <a:bodyPr wrap="square" anchor="t" lIns="45720" rIns="45720" tIns="27432" bIns="27432">
+            <a:spAutoFit/>
+          </a:bodyPr>
+          <a:lstStyle/>
+          <a:p>
+            <a:pPr algn="r">
+              <a:spcAft>
+                <a:spcPts val="600"/>
+              </a:spcAft>
+            </a:pPr>
+            <a:r>
+              <a:rPr sz="1200" b="0" i="0">
+                <a:solidFill>
+                  <a:srgbClr val="848484"/>
+                </a:solidFill>
+                <a:latin typeface="Trebuchet MS"/>
+              </a:rPr>
+              <a:t>8</a:t>
+            </a:r>
+          </a:p>
+        </p:txBody>
+      </p:sp>
+      <p:sp>
+        <p:nvSpPr>
+          <p:cNvPr id="10" name="TextBox 9"/>
+          <p:cNvSpPr txBox="1"/>
+          <p:nvPr/>
+        </p:nvSpPr>
+        <p:spPr>
+          <a:xfrm>
+            <a:off x="457200" y="731520"/>
+            <a:ext cx="11247120" cy="731520"/>
+          </a:xfrm>
+          <a:prstGeom prst="rect">
+            <a:avLst/>
+          </a:prstGeom>
+          <a:noFill/>
+        </p:spPr>
+        <p:txBody>
+          <a:bodyPr wrap="square" anchor="t" lIns="45720" rIns="45720" tIns="27432" bIns="27432">
+            <a:spAutoFit/>
+          </a:bodyPr>
+          <a:lstStyle/>
+          <a:p>
+            <a:pPr algn="l">
+              <a:spcAft>
+                <a:spcPts val="600"/>
+              </a:spcAft>
+            </a:pPr>
+            <a:r>
+              <a:rPr sz="3000" b="1" i="0">
+                <a:solidFill>
+                  <a:srgbClr val="111010"/>
+                </a:solidFill>
+                <a:latin typeface="Trebuchet MS"/>
+              </a:rPr>
+              <a:t>Работа по специальности помогает учиться</a:t>
+            </a:r>
+          </a:p>
+        </p:txBody>
+      </p:sp>
+      <p:sp>
+        <p:nvSpPr>
+          <p:cNvPr id="11" name="TextBox 10"/>
+          <p:cNvSpPr txBox="1"/>
+          <p:nvPr/>
+        </p:nvSpPr>
+        <p:spPr>
+          <a:xfrm>
+            <a:off x="548640" y="1508760"/>
+            <a:ext cx="6949440" cy="365760"/>
+          </a:xfrm>
+          <a:prstGeom prst="rect">
+            <a:avLst/>
+          </a:prstGeom>
+          <a:noFill/>
+        </p:spPr>
+        <p:txBody>
+          <a:bodyPr wrap="square" anchor="t" lIns="45720" rIns="45720" tIns="27432" bIns="27432">
+            <a:spAutoFit/>
+          </a:bodyPr>
+          <a:lstStyle/>
+          <a:p>
+            <a:pPr algn="l">
+              <a:spcAft>
+                <a:spcPts val="600"/>
+              </a:spcAft>
+            </a:pPr>
+            <a:r>
+              <a:rPr sz="1300" b="0" i="0">
+                <a:solidFill>
+                  <a:srgbClr val="848484"/>
+                </a:solidFill>
+                <a:latin typeface="Trebuchet MS"/>
+              </a:rPr>
+              <a:t>Работающие студенты 4 курса, %</a:t>
+            </a:r>
+          </a:p>
+        </p:txBody>
+      </p:sp>
+      <p:graphicFrame>
+        <p:nvGraphicFramePr>
+          <p:cNvPr id="12" name="Chart 11"/>
+          <p:cNvGraphicFramePr>
+            <a:graphicFrameLocks noGrp="1"/>
+          </p:cNvGraphicFramePr>
+          <p:nvPr/>
+        </p:nvGraphicFramePr>
+        <p:xfrm>
+          <a:off x="457200" y="1874519"/>
+          <a:ext cx="7132320" cy="4389120"/>
+        </p:xfrm>
+        <a:graphic>
+          <a:graphicData uri="http://schemas.openxmlformats.org/drawingml/2006/chart">
+            <c:chart xmlns:c="http://schemas.openxmlformats.org/drawingml/2006/chart" r:id="rId3"/>
+          </a:graphicData>
+        </a:graphic>
+      </p:graphicFrame>
+      <p:sp>
+        <p:nvSpPr>
+          <p:cNvPr id="13" name="TextBox 12"/>
+          <p:cNvSpPr txBox="1"/>
+          <p:nvPr/>
+        </p:nvSpPr>
+        <p:spPr>
+          <a:xfrm>
+            <a:off x="8138160" y="2011680"/>
+            <a:ext cx="3657600" cy="868680"/>
+          </a:xfrm>
+          <a:prstGeom prst="rect">
+            <a:avLst/>
+          </a:prstGeom>
+          <a:noFill/>
+        </p:spPr>
+        <p:txBody>
+          <a:bodyPr wrap="square" anchor="t" lIns="45720" rIns="45720" tIns="27432" bIns="27432">
+            <a:spAutoFit/>
+          </a:bodyPr>
+          <a:lstStyle/>
+          <a:p>
+            <a:pPr algn="l">
+              <a:spcAft>
+                <a:spcPts val="600"/>
+              </a:spcAft>
+            </a:pPr>
+            <a:r>
+              <a:rPr sz="5400" b="1" i="0">
+                <a:solidFill>
+                  <a:srgbClr val="C55A11"/>
+                </a:solidFill>
+                <a:latin typeface="Trebuchet MS"/>
+              </a:rPr>
+              <a:t>×6</a:t>
+            </a:r>
+          </a:p>
+        </p:txBody>
+      </p:sp>
+      <p:sp>
+        <p:nvSpPr>
+          <p:cNvPr id="14" name="TextBox 13"/>
+          <p:cNvSpPr txBox="1"/>
+          <p:nvPr/>
+        </p:nvSpPr>
+        <p:spPr>
+          <a:xfrm>
+            <a:off x="8138160" y="2880360"/>
+            <a:ext cx="3657600" cy="731520"/>
+          </a:xfrm>
+          <a:prstGeom prst="rect">
+            <a:avLst/>
+          </a:prstGeom>
+          <a:noFill/>
+        </p:spPr>
+        <p:txBody>
+          <a:bodyPr wrap="square" anchor="t" lIns="45720" rIns="45720" tIns="27432" bIns="27432">
+            <a:spAutoFit/>
+          </a:bodyPr>
+          <a:lstStyle/>
+          <a:p>
+            <a:pPr algn="l">
+              <a:spcAft>
+                <a:spcPts val="600"/>
+              </a:spcAft>
+            </a:pPr>
+            <a:r>
+              <a:rPr sz="1600" b="0" i="0">
+                <a:solidFill>
+                  <a:srgbClr val="111010"/>
+                </a:solidFill>
+                <a:latin typeface="Trebuchet MS"/>
+              </a:rPr>
+              <a:t>шансы, что работа
+помогает учиться</a:t>
+            </a:r>
+          </a:p>
+        </p:txBody>
+      </p:sp>
+      <p:sp>
+        <p:nvSpPr>
+          <p:cNvPr id="15" name="TextBox 14"/>
+          <p:cNvSpPr txBox="1"/>
+          <p:nvPr/>
+        </p:nvSpPr>
+        <p:spPr>
+          <a:xfrm>
+            <a:off x="8138160" y="4023360"/>
+            <a:ext cx="3657600" cy="868680"/>
+          </a:xfrm>
+          <a:prstGeom prst="rect">
+            <a:avLst/>
+          </a:prstGeom>
+          <a:noFill/>
+        </p:spPr>
+        <p:txBody>
+          <a:bodyPr wrap="square" anchor="t" lIns="45720" rIns="45720" tIns="27432" bIns="27432">
+            <a:spAutoFit/>
+          </a:bodyPr>
+          <a:lstStyle/>
+          <a:p>
+            <a:pPr algn="l">
+              <a:spcAft>
+                <a:spcPts val="600"/>
+              </a:spcAft>
+            </a:pPr>
+            <a:r>
+              <a:rPr sz="5400" b="1" i="0">
+                <a:solidFill>
+                  <a:srgbClr val="111010"/>
+                </a:solidFill>
+                <a:latin typeface="Trebuchet MS"/>
+              </a:rPr>
+              <a:t>×1.6</a:t>
+            </a:r>
+          </a:p>
+        </p:txBody>
+      </p:sp>
+      <p:sp>
+        <p:nvSpPr>
+          <p:cNvPr id="16" name="TextBox 15"/>
+          <p:cNvSpPr txBox="1"/>
+          <p:nvPr/>
+        </p:nvSpPr>
+        <p:spPr>
+          <a:xfrm>
+            <a:off x="8138160" y="4892040"/>
+            <a:ext cx="3657600" cy="731520"/>
+          </a:xfrm>
+          <a:prstGeom prst="rect">
+            <a:avLst/>
+          </a:prstGeom>
+          <a:noFill/>
+        </p:spPr>
+        <p:txBody>
+          <a:bodyPr wrap="square" anchor="t" lIns="45720" rIns="45720" tIns="27432" bIns="27432">
+            <a:spAutoFit/>
+          </a:bodyPr>
+          <a:lstStyle/>
+          <a:p>
+            <a:pPr algn="l">
+              <a:spcAft>
+                <a:spcPts val="600"/>
+              </a:spcAft>
+            </a:pPr>
+            <a:r>
+              <a:rPr sz="1600" b="0" i="0">
+                <a:solidFill>
+                  <a:srgbClr val="111010"/>
+                </a:solidFill>
+                <a:latin typeface="Trebuchet MS"/>
+              </a:rPr>
+              <a:t>шансы на хорошие
+оценки</a:t>
+            </a:r>
+          </a:p>
+        </p:txBody>
+      </p:sp>
+    </p:spTree>
+  </p:cSld>
+  <p:clrMapOvr>
+    <a:masterClrMapping/>
+  </p:clrMapOvr>
+</p:sld>
+</file>
+
+<file path=ppt/slides/slide9.xml><?xml version="1.0" encoding="utf-8"?>
+<p:sld xmlns:a="http://schemas.openxmlformats.org/drawingml/2006/main" xmlns:p="http://schemas.openxmlformats.org/presentationml/2006/main" xmlns:r="http://schemas.openxmlformats.org/officeDocument/2006/relationships">
+  <p:cSld>
+    <p:spTree>
+      <p:nvGrpSpPr>
+        <p:cNvPr id="1" name=""/>
+        <p:cNvGrpSpPr/>
+        <p:nvPr/>
+      </p:nvGrpSpPr>
+      <p:grpSpPr/>
+      <p:sp>
+        <p:nvSpPr>
+          <p:cNvPr id="2" name="Pentagon 1"/>
+          <p:cNvSpPr/>
+          <p:nvPr/>
+        </p:nvSpPr>
+        <p:spPr>
+          <a:xfrm>
+            <a:off x="137160" y="164592"/>
+            <a:ext cx="2514600" cy="384048"/>
+          </a:xfrm>
+          <a:prstGeom prst="homePlate">
+            <a:avLst/>
+          </a:prstGeom>
+          <a:solidFill>
+            <a:srgbClr val="FFF4D7"/>
+          </a:solidFill>
+          <a:ln>
+            <a:noFill/>
+          </a:ln>
+          <a:effectLst/>
+        </p:spPr>
+        <p:style>
+          <a:lnRef idx="1">
+            <a:schemeClr val="accent1"/>
+          </a:lnRef>
+          <a:fillRef idx="3">
+            <a:schemeClr val="accent1"/>
+          </a:fillRef>
+          <a:effectRef idx="2">
+            <a:schemeClr val="accent1"/>
+          </a:effectRef>
+          <a:fontRef idx="minor">
+            <a:schemeClr val="lt1"/>
+          </a:fontRef>
+        </p:style>
+        <p:txBody>
+          <a:bodyPr rtlCol="0" anchor="ctr" lIns="45720" rIns="45720"/>
+          <a:lstStyle/>
+          <a:p>
+            <a:pPr algn="ctr"/>
+            <a:r>
+              <a:rPr sz="1200" b="0">
+                <a:solidFill>
+                  <a:srgbClr val="111010"/>
+                </a:solidFill>
+                <a:latin typeface="Courier New"/>
+              </a:rPr>
+              <a:t>ВОПРОС</a:t>
+            </a:r>
+          </a:p>
+        </p:txBody>
+      </p:sp>
+      <p:sp>
+        <p:nvSpPr>
+          <p:cNvPr id="3" name="Chevron 2"/>
+          <p:cNvSpPr/>
+          <p:nvPr/>
+        </p:nvSpPr>
+        <p:spPr>
+          <a:xfrm>
+            <a:off x="2468879" y="164592"/>
+            <a:ext cx="2514600" cy="384048"/>
+          </a:xfrm>
+          <a:prstGeom prst="chevron">
+            <a:avLst/>
+          </a:prstGeom>
+          <a:solidFill>
+            <a:srgbClr val="FFF4D7"/>
+          </a:solidFill>
+          <a:ln>
+            <a:noFill/>
+          </a:ln>
+          <a:effectLst/>
+        </p:spPr>
+        <p:style>
+          <a:lnRef idx="1">
+            <a:schemeClr val="accent1"/>
+          </a:lnRef>
+          <a:fillRef idx="3">
+            <a:schemeClr val="accent1"/>
+          </a:fillRef>
+          <a:effectRef idx="2">
+            <a:schemeClr val="accent1"/>
+          </a:effectRef>
+          <a:fontRef idx="minor">
+            <a:schemeClr val="lt1"/>
+          </a:fontRef>
+        </p:style>
+        <p:txBody>
+          <a:bodyPr rtlCol="0" anchor="ctr" lIns="45720" rIns="45720"/>
+          <a:lstStyle/>
+          <a:p>
+            <a:pPr algn="ctr"/>
+            <a:r>
+              <a:rPr sz="1200" b="0">
+                <a:solidFill>
+                  <a:srgbClr val="111010"/>
+                </a:solidFill>
+                <a:latin typeface="Courier New"/>
+              </a:rPr>
+              <a:t>ДАННЫЕ</a:t>
+            </a:r>
+          </a:p>
+        </p:txBody>
+      </p:sp>
+      <p:sp>
+        <p:nvSpPr>
+          <p:cNvPr id="4" name="Chevron 3"/>
+          <p:cNvSpPr/>
+          <p:nvPr/>
+        </p:nvSpPr>
+        <p:spPr>
+          <a:xfrm>
+            <a:off x="4800600" y="164592"/>
+            <a:ext cx="2514600" cy="384048"/>
+          </a:xfrm>
+          <a:prstGeom prst="chevron">
+            <a:avLst/>
+          </a:prstGeom>
+          <a:solidFill>
+            <a:srgbClr val="FFF4D7"/>
+          </a:solidFill>
+          <a:ln>
+            <a:noFill/>
+          </a:ln>
+          <a:effectLst/>
+        </p:spPr>
+        <p:style>
+          <a:lnRef idx="1">
+            <a:schemeClr val="accent1"/>
+          </a:lnRef>
+          <a:fillRef idx="3">
+            <a:schemeClr val="accent1"/>
+          </a:fillRef>
+          <a:effectRef idx="2">
+            <a:schemeClr val="accent1"/>
+          </a:effectRef>
+          <a:fontRef idx="minor">
+            <a:schemeClr val="lt1"/>
+          </a:fontRef>
+        </p:style>
+        <p:txBody>
+          <a:bodyPr rtlCol="0" anchor="ctr" lIns="45720" rIns="45720"/>
+          <a:lstStyle/>
+          <a:p>
+            <a:pPr algn="ctr"/>
+            <a:r>
+              <a:rPr sz="1200" b="0">
+                <a:solidFill>
+                  <a:srgbClr val="111010"/>
+                </a:solidFill>
+                <a:latin typeface="Courier New"/>
+              </a:rPr>
+              <a:t>МЕТОДЫ</a:t>
+            </a:r>
+          </a:p>
+        </p:txBody>
+      </p:sp>
+      <p:sp>
+        <p:nvSpPr>
+          <p:cNvPr id="5" name="Chevron 4"/>
+          <p:cNvSpPr/>
+          <p:nvPr/>
+        </p:nvSpPr>
+        <p:spPr>
+          <a:xfrm>
+            <a:off x="7132320" y="164592"/>
+            <a:ext cx="2514600" cy="384048"/>
+          </a:xfrm>
+          <a:prstGeom prst="chevron">
+            <a:avLst/>
+          </a:prstGeom>
+          <a:solidFill>
+            <a:srgbClr val="FFF4D7"/>
+          </a:solidFill>
+          <a:ln>
+            <a:noFill/>
+          </a:ln>
+          <a:effectLst/>
+        </p:spPr>
+        <p:style>
+          <a:lnRef idx="1">
+            <a:schemeClr val="accent1"/>
+          </a:lnRef>
+          <a:fillRef idx="3">
+            <a:schemeClr val="accent1"/>
+          </a:fillRef>
+          <a:effectRef idx="2">
+            <a:schemeClr val="accent1"/>
+          </a:effectRef>
+          <a:fontRef idx="minor">
+            <a:schemeClr val="lt1"/>
+          </a:fontRef>
+        </p:style>
+        <p:txBody>
+          <a:bodyPr rtlCol="0" anchor="ctr" lIns="45720" rIns="45720"/>
+          <a:lstStyle/>
+          <a:p>
+            <a:pPr algn="ctr"/>
+            <a:r>
+              <a:rPr sz="1200" b="0">
+                <a:solidFill>
+                  <a:srgbClr val="111010"/>
+                </a:solidFill>
+                <a:latin typeface="Courier New"/>
+              </a:rPr>
+              <a:t>РЕЗУЛЬТАТЫ</a:t>
+            </a:r>
+          </a:p>
+        </p:txBody>
+      </p:sp>
+      <p:sp>
+        <p:nvSpPr>
+          <p:cNvPr id="6" name="Chevron 5"/>
+          <p:cNvSpPr/>
+          <p:nvPr/>
+        </p:nvSpPr>
+        <p:spPr>
+          <a:xfrm>
+            <a:off x="9464040" y="164592"/>
+            <a:ext cx="2514600" cy="384048"/>
+          </a:xfrm>
+          <a:prstGeom prst="chevron">
+            <a:avLst/>
+          </a:prstGeom>
+          <a:solidFill>
+            <a:srgbClr val="FFD966"/>
+          </a:solidFill>
+          <a:ln>
+            <a:noFill/>
+          </a:ln>
+          <a:effectLst/>
+        </p:spPr>
+        <p:style>
+          <a:lnRef idx="1">
+            <a:schemeClr val="accent1"/>
+          </a:lnRef>
+          <a:fillRef idx="3">
+            <a:schemeClr val="accent1"/>
+          </a:fillRef>
+          <a:effectRef idx="2">
+            <a:schemeClr val="accent1"/>
+          </a:effectRef>
+          <a:fontRef idx="minor">
+            <a:schemeClr val="lt1"/>
+          </a:fontRef>
+        </p:style>
+        <p:txBody>
+          <a:bodyPr rtlCol="0" anchor="ctr" lIns="45720" rIns="45720"/>
+          <a:lstStyle/>
+          <a:p>
+            <a:pPr algn="ctr"/>
+            <a:r>
+              <a:rPr sz="1200" b="1">
+                <a:solidFill>
+                  <a:srgbClr val="111010"/>
+                </a:solidFill>
+                <a:latin typeface="Courier New"/>
+              </a:rPr>
+              <a:t>ВЫВОДЫ</a:t>
+            </a:r>
+          </a:p>
+        </p:txBody>
+      </p:sp>
+      <p:sp>
+        <p:nvSpPr>
+          <p:cNvPr id="7" name="Rectangle 6"/>
+          <p:cNvSpPr/>
+          <p:nvPr/>
+        </p:nvSpPr>
+        <p:spPr>
+          <a:xfrm>
+            <a:off x="0" y="6565392"/>
+            <a:ext cx="1783080" cy="91440"/>
+          </a:xfrm>
+          <a:prstGeom prst="rect">
+            <a:avLst/>
+          </a:prstGeom>
+          <a:solidFill>
+            <a:srgbClr val="111010"/>
+          </a:solidFill>
+          <a:ln>
+            <a:noFill/>
+          </a:ln>
+          <a:effectLst/>
+        </p:spPr>
+        <p:style>
+          <a:lnRef idx="1">
+            <a:schemeClr val="accent1"/>
+          </a:lnRef>
+          <a:fillRef idx="3">
+            <a:schemeClr val="accent1"/>
+          </a:fillRef>
+          <a:effectRef idx="2">
+            <a:schemeClr val="accent1"/>
+          </a:effectRef>
+          <a:fontRef idx="minor">
+            <a:schemeClr val="lt1"/>
+          </a:fontRef>
+        </p:style>
+        <p:txBody>
+          <a:bodyPr rtlCol="0" anchor="ctr"/>
+          <a:lstStyle/>
+          <a:p>
+            <a:pPr algn="ctr"/>
+          </a:p>
+        </p:txBody>
+      </p:sp>
+      <p:sp>
+        <p:nvSpPr>
+          <p:cNvPr id="8" name="Rectangle 7"/>
+          <p:cNvSpPr/>
+          <p:nvPr/>
+        </p:nvSpPr>
+        <p:spPr>
+          <a:xfrm>
+            <a:off x="0" y="6656832"/>
+            <a:ext cx="2743200" cy="128016"/>
+          </a:xfrm>
+          <a:prstGeom prst="rect">
+            <a:avLst/>
+          </a:prstGeom>
+          <a:solidFill>
+            <a:srgbClr val="FFD966"/>
+          </a:solidFill>
+          <a:ln>
+            <a:noFill/>
+          </a:ln>
+          <a:effectLst/>
+        </p:spPr>
+        <p:style>
+          <a:lnRef idx="1">
+            <a:schemeClr val="accent1"/>
+          </a:lnRef>
+          <a:fillRef idx="3">
+            <a:schemeClr val="accent1"/>
+          </a:fillRef>
+          <a:effectRef idx="2">
+            <a:schemeClr val="accent1"/>
+          </a:effectRef>
+          <a:fontRef idx="minor">
+            <a:schemeClr val="lt1"/>
+          </a:fontRef>
+        </p:style>
+        <p:txBody>
+          <a:bodyPr rtlCol="0" anchor="ctr"/>
+          <a:lstStyle/>
+          <a:p>
+            <a:pPr algn="ctr"/>
+          </a:p>
+        </p:txBody>
+      </p:sp>
+      <p:sp>
+        <p:nvSpPr>
+          <p:cNvPr id="9" name="TextBox 8"/>
+          <p:cNvSpPr txBox="1"/>
+          <p:nvPr/>
+        </p:nvSpPr>
+        <p:spPr>
+          <a:xfrm>
+            <a:off x="11247120" y="6355080"/>
+            <a:ext cx="731520" cy="365760"/>
+          </a:xfrm>
+          <a:prstGeom prst="rect">
+            <a:avLst/>
+          </a:prstGeom>
+          <a:noFill/>
+        </p:spPr>
+        <p:txBody>
+          <a:bodyPr wrap="square" anchor="t" lIns="45720" rIns="45720" tIns="27432" bIns="27432">
+            <a:spAutoFit/>
+          </a:bodyPr>
+          <a:lstStyle/>
+          <a:p>
+            <a:pPr algn="r">
+              <a:spcAft>
+                <a:spcPts val="600"/>
+              </a:spcAft>
+            </a:pPr>
+            <a:r>
+              <a:rPr sz="1200" b="0" i="0">
+                <a:solidFill>
+                  <a:srgbClr val="848484"/>
+                </a:solidFill>
+                <a:latin typeface="Trebuchet MS"/>
+              </a:rPr>
+              <a:t>9</a:t>
+            </a:r>
+          </a:p>
+        </p:txBody>
+      </p:sp>
+      <p:sp>
+        <p:nvSpPr>
+          <p:cNvPr id="10" name="TextBox 9"/>
+          <p:cNvSpPr txBox="1"/>
+          <p:nvPr/>
+        </p:nvSpPr>
+        <p:spPr>
+          <a:xfrm>
+            <a:off x="457200" y="731520"/>
+            <a:ext cx="11247120" cy="731520"/>
+          </a:xfrm>
+          <a:prstGeom prst="rect">
+            <a:avLst/>
+          </a:prstGeom>
+          <a:noFill/>
+        </p:spPr>
+        <p:txBody>
+          <a:bodyPr wrap="square" anchor="t" lIns="45720" rIns="45720" tIns="27432" bIns="27432">
+            <a:spAutoFit/>
+          </a:bodyPr>
+          <a:lstStyle/>
+          <a:p>
+            <a:pPr algn="l">
+              <a:spcAft>
+                <a:spcPts val="600"/>
+              </a:spcAft>
+            </a:pPr>
+            <a:r>
+              <a:rPr sz="3000" b="1" i="0">
+                <a:solidFill>
+                  <a:srgbClr val="111010"/>
+                </a:solidFill>
+                <a:latin typeface="Trebuchet MS"/>
+              </a:rPr>
+              <a:t>Выводы</a:t>
+            </a:r>
+          </a:p>
+        </p:txBody>
+      </p:sp>
+      <p:sp>
+        <p:nvSpPr>
+          <p:cNvPr id="11" name="Oval 10"/>
+          <p:cNvSpPr/>
+          <p:nvPr/>
+        </p:nvSpPr>
+        <p:spPr>
+          <a:xfrm>
+            <a:off x="548640" y="1828800"/>
+            <a:ext cx="548640" cy="548640"/>
+          </a:xfrm>
+          <a:prstGeom prst="ellipse">
+            <a:avLst/>
+          </a:prstGeom>
+          <a:solidFill>
+            <a:srgbClr val="FFD966"/>
+          </a:solidFill>
+          <a:ln>
+            <a:noFill/>
+          </a:ln>
+          <a:effectLst/>
+        </p:spPr>
+        <p:style>
+          <a:lnRef idx="1">
+            <a:schemeClr val="accent1"/>
+          </a:lnRef>
+          <a:fillRef idx="3">
+            <a:schemeClr val="accent1"/>
+          </a:fillRef>
+          <a:effectRef idx="2">
+            <a:schemeClr val="accent1"/>
+          </a:effectRef>
+          <a:fontRef idx="minor">
+            <a:schemeClr val="lt1"/>
+          </a:fontRef>
+        </p:style>
+        <p:txBody>
+          <a:bodyPr rtlCol="0" anchor="ctr"/>
+          <a:lstStyle/>
+          <a:p>
+            <a:pPr algn="ctr"/>
+          </a:p>
+        </p:txBody>
+      </p:sp>
+      <p:sp>
+        <p:nvSpPr>
+          <p:cNvPr id="12" name="TextBox 11"/>
+          <p:cNvSpPr txBox="1"/>
+          <p:nvPr/>
+        </p:nvSpPr>
+        <p:spPr>
+          <a:xfrm>
+            <a:off x="548640" y="1828800"/>
+            <a:ext cx="548640" cy="548640"/>
+          </a:xfrm>
+          <a:prstGeom prst="rect">
+            <a:avLst/>
+          </a:prstGeom>
+          <a:noFill/>
+        </p:spPr>
+        <p:txBody>
+          <a:bodyPr wrap="square" anchor="ctr" lIns="45720" rIns="45720" tIns="27432" bIns="27432">
+            <a:spAutoFit/>
+          </a:bodyPr>
+          <a:lstStyle/>
+          <a:p>
+            <a:pPr algn="ctr">
+              <a:spcAft>
+                <a:spcPts val="600"/>
+              </a:spcAft>
+            </a:pPr>
+            <a:r>
+              <a:rPr sz="1800" b="1" i="0">
+                <a:solidFill>
+                  <a:srgbClr val="111010"/>
+                </a:solidFill>
+                <a:latin typeface="Trebuchet MS"/>
+              </a:rPr>
+              <a:t>1</a:t>
+            </a:r>
+          </a:p>
+        </p:txBody>
+      </p:sp>
+      <p:sp>
+        <p:nvSpPr>
+          <p:cNvPr id="13" name="TextBox 12"/>
+          <p:cNvSpPr txBox="1"/>
+          <p:nvPr/>
+        </p:nvSpPr>
+        <p:spPr>
+          <a:xfrm>
+            <a:off x="1325880" y="1737360"/>
+            <a:ext cx="10332720" cy="822960"/>
+          </a:xfrm>
+          <a:prstGeom prst="rect">
+            <a:avLst/>
+          </a:prstGeom>
+          <a:noFill/>
+        </p:spPr>
+        <p:txBody>
+          <a:bodyPr wrap="square" anchor="ctr" lIns="45720" rIns="45720" tIns="27432" bIns="27432">
+            <a:spAutoFit/>
+          </a:bodyPr>
+          <a:lstStyle/>
+          <a:p>
+            <a:pPr algn="l">
+              <a:spcAft>
+                <a:spcPts val="600"/>
+              </a:spcAft>
+            </a:pPr>
+            <a:r>
+              <a:rPr sz="2000" b="1" i="0">
+                <a:solidFill>
+                  <a:srgbClr val="111010"/>
+                </a:solidFill>
+                <a:latin typeface="Trebuchet MS"/>
+              </a:rPr>
+              <a:t>Работа не вредит — </a:t>
+            </a:r>
+            <a:r>
+              <a:rPr sz="2000" b="0" i="0">
+                <a:solidFill>
+                  <a:srgbClr val="111010"/>
+                </a:solidFill>
+                <a:latin typeface="Trebuchet MS"/>
+              </a:rPr>
+              <a:t>оценки работающих не хуже, начало работы их не снижает</a:t>
+            </a:r>
+          </a:p>
+        </p:txBody>
+      </p:sp>
+      <p:sp>
+        <p:nvSpPr>
+          <p:cNvPr id="14" name="Oval 13"/>
+          <p:cNvSpPr/>
+          <p:nvPr/>
+        </p:nvSpPr>
+        <p:spPr>
+          <a:xfrm>
+            <a:off x="548640" y="2834640"/>
+            <a:ext cx="548640" cy="548640"/>
+          </a:xfrm>
+          <a:prstGeom prst="ellipse">
+            <a:avLst/>
+          </a:prstGeom>
+          <a:solidFill>
+            <a:srgbClr val="FFD966"/>
+          </a:solidFill>
+          <a:ln>
+            <a:noFill/>
+          </a:ln>
+          <a:effectLst/>
+        </p:spPr>
+        <p:style>
+          <a:lnRef idx="1">
+            <a:schemeClr val="accent1"/>
+          </a:lnRef>
+          <a:fillRef idx="3">
+            <a:schemeClr val="accent1"/>
+          </a:fillRef>
+          <a:effectRef idx="2">
+            <a:schemeClr val="accent1"/>
+          </a:effectRef>
+          <a:fontRef idx="minor">
+            <a:schemeClr val="lt1"/>
+          </a:fontRef>
+        </p:style>
+        <p:txBody>
+          <a:bodyPr rtlCol="0" anchor="ctr"/>
+          <a:lstStyle/>
+          <a:p>
+            <a:pPr algn="ctr"/>
+          </a:p>
+        </p:txBody>
+      </p:sp>
+      <p:sp>
+        <p:nvSpPr>
+          <p:cNvPr id="15" name="TextBox 14"/>
+          <p:cNvSpPr txBox="1"/>
+          <p:nvPr/>
+        </p:nvSpPr>
+        <p:spPr>
+          <a:xfrm>
+            <a:off x="548640" y="2834640"/>
+            <a:ext cx="548640" cy="548640"/>
+          </a:xfrm>
+          <a:prstGeom prst="rect">
+            <a:avLst/>
+          </a:prstGeom>
+          <a:noFill/>
+        </p:spPr>
+        <p:txBody>
+          <a:bodyPr wrap="square" anchor="ctr" lIns="45720" rIns="45720" tIns="27432" bIns="27432">
+            <a:spAutoFit/>
+          </a:bodyPr>
+          <a:lstStyle/>
+          <a:p>
+            <a:pPr algn="ctr">
+              <a:spcAft>
+                <a:spcPts val="600"/>
+              </a:spcAft>
+            </a:pPr>
+            <a:r>
+              <a:rPr sz="1800" b="1" i="0">
+                <a:solidFill>
+                  <a:srgbClr val="111010"/>
+                </a:solidFill>
+                <a:latin typeface="Trebuchet MS"/>
+              </a:rPr>
+              <a:t>2</a:t>
+            </a:r>
+          </a:p>
+        </p:txBody>
+      </p:sp>
+      <p:sp>
+        <p:nvSpPr>
+          <p:cNvPr id="16" name="TextBox 15"/>
+          <p:cNvSpPr txBox="1"/>
+          <p:nvPr/>
+        </p:nvSpPr>
+        <p:spPr>
+          <a:xfrm>
+            <a:off x="1325880" y="2743200"/>
+            <a:ext cx="10332720" cy="822960"/>
+          </a:xfrm>
+          <a:prstGeom prst="rect">
+            <a:avLst/>
+          </a:prstGeom>
+          <a:noFill/>
+        </p:spPr>
+        <p:txBody>
+          <a:bodyPr wrap="square" anchor="ctr" lIns="45720" rIns="45720" tIns="27432" bIns="27432">
+            <a:spAutoFit/>
+          </a:bodyPr>
+          <a:lstStyle/>
+          <a:p>
+            <a:pPr algn="l">
+              <a:spcAft>
+                <a:spcPts val="600"/>
+              </a:spcAft>
+            </a:pPr>
+            <a:r>
+              <a:rPr sz="2000" b="1" i="0">
+                <a:solidFill>
+                  <a:srgbClr val="111010"/>
+                </a:solidFill>
+                <a:latin typeface="Trebuchet MS"/>
+              </a:rPr>
+              <a:t>Вредит перегрузка — </a:t>
+            </a:r>
+            <a:r>
+              <a:rPr sz="2000" b="0" i="0">
+                <a:solidFill>
+                  <a:srgbClr val="111010"/>
+                </a:solidFill>
+                <a:latin typeface="Trebuchet MS"/>
+              </a:rPr>
+              <a:t>30+ часов и полный день: меньше сна, мысли об отчислении</a:t>
+            </a:r>
+          </a:p>
+        </p:txBody>
+      </p:sp>
+      <p:sp>
+        <p:nvSpPr>
+          <p:cNvPr id="17" name="Oval 16"/>
+          <p:cNvSpPr/>
+          <p:nvPr/>
+        </p:nvSpPr>
+        <p:spPr>
+          <a:xfrm>
+            <a:off x="548640" y="3840479"/>
+            <a:ext cx="548640" cy="548640"/>
+          </a:xfrm>
+          <a:prstGeom prst="ellipse">
+            <a:avLst/>
+          </a:prstGeom>
+          <a:solidFill>
+            <a:srgbClr val="FFD966"/>
+          </a:solidFill>
+          <a:ln>
+            <a:noFill/>
+          </a:ln>
+          <a:effectLst/>
+        </p:spPr>
+        <p:style>
+          <a:lnRef idx="1">
+            <a:schemeClr val="accent1"/>
+          </a:lnRef>
+          <a:fillRef idx="3">
+            <a:schemeClr val="accent1"/>
+          </a:fillRef>
+          <a:effectRef idx="2">
+            <a:schemeClr val="accent1"/>
+          </a:effectRef>
+          <a:fontRef idx="minor">
+            <a:schemeClr val="lt1"/>
+          </a:fontRef>
+        </p:style>
+        <p:txBody>
+          <a:bodyPr rtlCol="0" anchor="ctr"/>
+          <a:lstStyle/>
+          <a:p>
+            <a:pPr algn="ctr"/>
+          </a:p>
+        </p:txBody>
+      </p:sp>
+      <p:sp>
+        <p:nvSpPr>
+          <p:cNvPr id="18" name="TextBox 17"/>
+          <p:cNvSpPr txBox="1"/>
+          <p:nvPr/>
+        </p:nvSpPr>
+        <p:spPr>
+          <a:xfrm>
+            <a:off x="548640" y="3840479"/>
+            <a:ext cx="548640" cy="548640"/>
+          </a:xfrm>
+          <a:prstGeom prst="rect">
+            <a:avLst/>
+          </a:prstGeom>
+          <a:noFill/>
+        </p:spPr>
+        <p:txBody>
+          <a:bodyPr wrap="square" anchor="ctr" lIns="45720" rIns="45720" tIns="27432" bIns="27432">
+            <a:spAutoFit/>
+          </a:bodyPr>
+          <a:lstStyle/>
+          <a:p>
+            <a:pPr algn="ctr">
+              <a:spcAft>
+                <a:spcPts val="600"/>
+              </a:spcAft>
+            </a:pPr>
+            <a:r>
+              <a:rPr sz="1800" b="1" i="0">
+                <a:solidFill>
+                  <a:srgbClr val="111010"/>
+                </a:solidFill>
+                <a:latin typeface="Trebuchet MS"/>
+              </a:rPr>
+              <a:t>3</a:t>
+            </a:r>
+          </a:p>
+        </p:txBody>
+      </p:sp>
+      <p:sp>
+        <p:nvSpPr>
+          <p:cNvPr id="19" name="TextBox 18"/>
+          <p:cNvSpPr txBox="1"/>
+          <p:nvPr/>
+        </p:nvSpPr>
+        <p:spPr>
+          <a:xfrm>
+            <a:off x="1325880" y="3749039"/>
+            <a:ext cx="10332720" cy="822960"/>
+          </a:xfrm>
+          <a:prstGeom prst="rect">
+            <a:avLst/>
+          </a:prstGeom>
+          <a:noFill/>
+        </p:spPr>
+        <p:txBody>
+          <a:bodyPr wrap="square" anchor="ctr" lIns="45720" rIns="45720" tIns="27432" bIns="27432">
+            <a:spAutoFit/>
+          </a:bodyPr>
+          <a:lstStyle/>
+          <a:p>
+            <a:pPr algn="l">
+              <a:spcAft>
+                <a:spcPts val="600"/>
+              </a:spcAft>
+            </a:pPr>
+            <a:r>
+              <a:rPr sz="2000" b="1" i="0">
+                <a:solidFill>
+                  <a:srgbClr val="111010"/>
+                </a:solidFill>
+                <a:latin typeface="Trebuchet MS"/>
+              </a:rPr>
+              <a:t>Польза — от профильной работы — </a:t>
+            </a:r>
+            <a:r>
+              <a:rPr sz="2000" b="0" i="0">
+                <a:solidFill>
+                  <a:srgbClr val="111010"/>
+                </a:solidFill>
+                <a:latin typeface="Trebuchet MS"/>
+              </a:rPr>
+              <a:t>по специальности работа помогает учиться</a:t>
+            </a:r>
+          </a:p>
+        </p:txBody>
+      </p:sp>
+      <p:sp>
+        <p:nvSpPr>
+          <p:cNvPr id="20" name="Rounded Rectangle 19"/>
+          <p:cNvSpPr/>
+          <p:nvPr/>
+        </p:nvSpPr>
+        <p:spPr>
+          <a:xfrm>
+            <a:off x="548640" y="4846320"/>
+            <a:ext cx="11064240" cy="1280160"/>
+          </a:xfrm>
+          <a:prstGeom prst="roundRect">
+            <a:avLst>
+              <a:gd name="adj" fmla="val 30000"/>
+            </a:avLst>
+          </a:prstGeom>
+          <a:solidFill>
+            <a:srgbClr val="FFE699"/>
+          </a:solidFill>
+          <a:ln w="19050">
+            <a:solidFill>
+              <a:srgbClr val="FFD966"/>
+            </a:solidFill>
+          </a:ln>
+          <a:effectLst/>
+        </p:spPr>
+        <p:style>
+          <a:lnRef idx="1">
+            <a:schemeClr val="accent1"/>
+          </a:lnRef>
+          <a:fillRef idx="3">
+            <a:schemeClr val="accent1"/>
+          </a:fillRef>
+          <a:effectRef idx="2">
+            <a:schemeClr val="accent1"/>
+          </a:effectRef>
+          <a:fontRef idx="minor">
+            <a:schemeClr val="lt1"/>
+          </a:fontRef>
+        </p:style>
+        <p:txBody>
+          <a:bodyPr rtlCol="0" anchor="ctr"/>
+          <a:lstStyle/>
+          <a:p>
+            <a:pPr algn="ctr"/>
+          </a:p>
+        </p:txBody>
+      </p:sp>
+      <p:sp>
+        <p:nvSpPr>
+          <p:cNvPr id="21" name="TextBox 20"/>
+          <p:cNvSpPr txBox="1"/>
+          <p:nvPr/>
+        </p:nvSpPr>
+        <p:spPr>
+          <a:xfrm>
+            <a:off x="822960" y="4937760"/>
+            <a:ext cx="10515600" cy="1097280"/>
+          </a:xfrm>
+          <a:prstGeom prst="rect">
+            <a:avLst/>
+          </a:prstGeom>
+          <a:noFill/>
+        </p:spPr>
+        <p:txBody>
+          <a:bodyPr wrap="square" anchor="ctr" lIns="45720" rIns="45720" tIns="27432" bIns="27432">
+            <a:spAutoFit/>
+          </a:bodyPr>
+          <a:lstStyle/>
+          <a:p>
+            <a:pPr algn="l">
+              <a:spcAft>
+                <a:spcPts val="600"/>
+              </a:spcAft>
+            </a:pPr>
+            <a:r>
+              <a:rPr sz="1900" b="1" i="0">
+                <a:solidFill>
+                  <a:srgbClr val="111010"/>
+                </a:solidFill>
+                <a:latin typeface="Trebuchet MS"/>
+              </a:rPr>
+              <a:t>Вузам: </a:t>
+            </a:r>
+            <a:r>
+              <a:rPr sz="1900" b="0" i="0">
+                <a:solidFill>
+                  <a:srgbClr val="111010"/>
+                </a:solidFill>
+                <a:latin typeface="Trebuchet MS"/>
+              </a:rPr>
+              <a:t>помогать находить работу по специальности и давать гибкие планы тем, кто работает полный день</a:t>
             </a:r>
           </a:p>
         </p:txBody>
